--- a/GroupMeeting&CourseSlide/Slide/Week4_SNN Training.pptx
+++ b/GroupMeeting&CourseSlide/Slide/Week4_SNN Training.pptx
@@ -1,31 +1,33 @@
 
 <file path=ppt/presentation.xml><?xml version="1.0" encoding="utf-8"?>
-<p:presentation xmlns:a="http://schemas.openxmlformats.org/drawingml/2006/main" xmlns:r="http://schemas.openxmlformats.org/officeDocument/2006/relationships" xmlns:p="http://schemas.openxmlformats.org/presentationml/2006/main" saveSubsetFonts="1">
+<p:presentation xmlns:a="http://schemas.openxmlformats.org/drawingml/2006/main" xmlns:r="http://schemas.openxmlformats.org/officeDocument/2006/relationships" xmlns:p="http://schemas.openxmlformats.org/presentationml/2006/main">
   <p:sldMasterIdLst>
-    <p:sldMasterId id="2147483660" r:id="rId1"/>
+    <p:sldMasterId id="2147483648" r:id="rId1"/>
+    <p:sldMasterId id="2147483660" r:id="rId3"/>
   </p:sldMasterIdLst>
   <p:notesMasterIdLst>
-    <p:notesMasterId r:id="rId20"/>
+    <p:notesMasterId r:id="rId5"/>
   </p:notesMasterIdLst>
   <p:sldIdLst>
-    <p:sldId id="257" r:id="rId2"/>
-    <p:sldId id="258" r:id="rId3"/>
-    <p:sldId id="548" r:id="rId4"/>
-    <p:sldId id="567" r:id="rId5"/>
-    <p:sldId id="568" r:id="rId6"/>
-    <p:sldId id="554" r:id="rId7"/>
-    <p:sldId id="555" r:id="rId8"/>
-    <p:sldId id="569" r:id="rId9"/>
-    <p:sldId id="570" r:id="rId10"/>
-    <p:sldId id="571" r:id="rId11"/>
-    <p:sldId id="572" r:id="rId12"/>
-    <p:sldId id="573" r:id="rId13"/>
-    <p:sldId id="574" r:id="rId14"/>
-    <p:sldId id="576" r:id="rId15"/>
-    <p:sldId id="577" r:id="rId16"/>
-    <p:sldId id="575" r:id="rId17"/>
-    <p:sldId id="565" r:id="rId18"/>
-    <p:sldId id="566" r:id="rId19"/>
+    <p:sldId id="257" r:id="rId4"/>
+    <p:sldId id="258" r:id="rId6"/>
+    <p:sldId id="548" r:id="rId7"/>
+    <p:sldId id="567" r:id="rId8"/>
+    <p:sldId id="568" r:id="rId9"/>
+    <p:sldId id="554" r:id="rId10"/>
+    <p:sldId id="555" r:id="rId11"/>
+    <p:sldId id="569" r:id="rId12"/>
+    <p:sldId id="570" r:id="rId13"/>
+    <p:sldId id="571" r:id="rId14"/>
+    <p:sldId id="572" r:id="rId15"/>
+    <p:sldId id="573" r:id="rId16"/>
+    <p:sldId id="574" r:id="rId17"/>
+    <p:sldId id="576" r:id="rId18"/>
+    <p:sldId id="577" r:id="rId19"/>
+    <p:sldId id="578" r:id="rId20"/>
+    <p:sldId id="575" r:id="rId21"/>
+    <p:sldId id="565" r:id="rId22"/>
+    <p:sldId id="566" r:id="rId23"/>
   </p:sldIdLst>
   <p:sldSz cx="12192000" cy="6858000"/>
   <p:notesSz cx="6858000" cy="9144000"/>
@@ -124,806 +126,7 @@
       </a:defRPr>
     </a:lvl9pPr>
   </p:defaultTextStyle>
-  <p:extLst>
-    <p:ext uri="{EFAFB233-063F-42B5-8137-9DF3F51BA10A}">
-      <p15:sldGuideLst xmlns:p15="http://schemas.microsoft.com/office/powerpoint/2012/main"/>
-    </p:ext>
-  </p:extLst>
 </p:presentation>
-</file>
-
-<file path=ppt/changesInfos/changesInfo1.xml><?xml version="1.0" encoding="utf-8"?>
-<pc:chgInfo xmlns:a="http://schemas.openxmlformats.org/drawingml/2006/main" xmlns:r="http://schemas.openxmlformats.org/officeDocument/2006/relationships" xmlns:ac="http://schemas.microsoft.com/office/drawing/2013/main/command" xmlns:pc="http://schemas.microsoft.com/office/powerpoint/2013/main/command">
-  <pc:docChgLst>
-    <pc:chgData name="Wang, Aili" userId="5a9127d9-68dd-458b-beb6-6d3b6c430786" providerId="ADAL" clId="{197794DE-43EB-4DAF-BC57-5DF3897C1268}"/>
-    <pc:docChg chg="undo custSel addSld delSld modSld sldOrd">
-      <pc:chgData name="Wang, Aili" userId="5a9127d9-68dd-458b-beb6-6d3b6c430786" providerId="ADAL" clId="{197794DE-43EB-4DAF-BC57-5DF3897C1268}" dt="2026-06-24T03:46:44.392" v="519" actId="47"/>
-      <pc:docMkLst>
-        <pc:docMk/>
-      </pc:docMkLst>
-      <pc:sldChg chg="del">
-        <pc:chgData name="Wang, Aili" userId="5a9127d9-68dd-458b-beb6-6d3b6c430786" providerId="ADAL" clId="{197794DE-43EB-4DAF-BC57-5DF3897C1268}" dt="2026-06-24T03:46:44.392" v="519" actId="47"/>
-        <pc:sldMkLst>
-          <pc:docMk/>
-          <pc:sldMk cId="3915884378" sldId="523"/>
-        </pc:sldMkLst>
-      </pc:sldChg>
-      <pc:sldChg chg="del">
-        <pc:chgData name="Wang, Aili" userId="5a9127d9-68dd-458b-beb6-6d3b6c430786" providerId="ADAL" clId="{197794DE-43EB-4DAF-BC57-5DF3897C1268}" dt="2026-06-24T03:19:17.521" v="445" actId="47"/>
-        <pc:sldMkLst>
-          <pc:docMk/>
-          <pc:sldMk cId="0" sldId="547"/>
-        </pc:sldMkLst>
-      </pc:sldChg>
-      <pc:sldChg chg="addSp delSp modSp mod">
-        <pc:chgData name="Wang, Aili" userId="5a9127d9-68dd-458b-beb6-6d3b6c430786" providerId="ADAL" clId="{197794DE-43EB-4DAF-BC57-5DF3897C1268}" dt="2026-06-24T02:41:14.977" v="31" actId="207"/>
-        <pc:sldMkLst>
-          <pc:docMk/>
-          <pc:sldMk cId="0" sldId="548"/>
-        </pc:sldMkLst>
-        <pc:spChg chg="mod">
-          <ac:chgData name="Wang, Aili" userId="5a9127d9-68dd-458b-beb6-6d3b6c430786" providerId="ADAL" clId="{197794DE-43EB-4DAF-BC57-5DF3897C1268}" dt="2026-06-24T02:38:08.891" v="4" actId="20577"/>
-          <ac:spMkLst>
-            <pc:docMk/>
-            <pc:sldMk cId="0" sldId="548"/>
-            <ac:spMk id="2" creationId="{00000000-0000-0000-0000-000000000000}"/>
-          </ac:spMkLst>
-        </pc:spChg>
-        <pc:spChg chg="mod">
-          <ac:chgData name="Wang, Aili" userId="5a9127d9-68dd-458b-beb6-6d3b6c430786" providerId="ADAL" clId="{197794DE-43EB-4DAF-BC57-5DF3897C1268}" dt="2026-06-24T02:41:14.977" v="31" actId="207"/>
-          <ac:spMkLst>
-            <pc:docMk/>
-            <pc:sldMk cId="0" sldId="548"/>
-            <ac:spMk id="3" creationId="{00000000-0000-0000-0000-000000000000}"/>
-          </ac:spMkLst>
-        </pc:spChg>
-        <pc:spChg chg="add del">
-          <ac:chgData name="Wang, Aili" userId="5a9127d9-68dd-458b-beb6-6d3b6c430786" providerId="ADAL" clId="{197794DE-43EB-4DAF-BC57-5DF3897C1268}" dt="2026-06-24T02:38:43.820" v="7"/>
-          <ac:spMkLst>
-            <pc:docMk/>
-            <pc:sldMk cId="0" sldId="548"/>
-            <ac:spMk id="6" creationId="{026322A3-149B-4637-91E3-C9225DFADD99}"/>
-          </ac:spMkLst>
-        </pc:spChg>
-      </pc:sldChg>
-      <pc:sldChg chg="del">
-        <pc:chgData name="Wang, Aili" userId="5a9127d9-68dd-458b-beb6-6d3b6c430786" providerId="ADAL" clId="{197794DE-43EB-4DAF-BC57-5DF3897C1268}" dt="2026-06-24T02:41:30.773" v="32" actId="47"/>
-        <pc:sldMkLst>
-          <pc:docMk/>
-          <pc:sldMk cId="0" sldId="549"/>
-        </pc:sldMkLst>
-      </pc:sldChg>
-      <pc:sldChg chg="modSp mod">
-        <pc:chgData name="Wang, Aili" userId="5a9127d9-68dd-458b-beb6-6d3b6c430786" providerId="ADAL" clId="{197794DE-43EB-4DAF-BC57-5DF3897C1268}" dt="2026-06-24T03:02:36.150" v="311" actId="27636"/>
-        <pc:sldMkLst>
-          <pc:docMk/>
-          <pc:sldMk cId="0" sldId="554"/>
-        </pc:sldMkLst>
-        <pc:spChg chg="mod">
-          <ac:chgData name="Wang, Aili" userId="5a9127d9-68dd-458b-beb6-6d3b6c430786" providerId="ADAL" clId="{197794DE-43EB-4DAF-BC57-5DF3897C1268}" dt="2026-06-24T03:00:42.904" v="293"/>
-          <ac:spMkLst>
-            <pc:docMk/>
-            <pc:sldMk cId="0" sldId="554"/>
-            <ac:spMk id="2" creationId="{00000000-0000-0000-0000-000000000000}"/>
-          </ac:spMkLst>
-        </pc:spChg>
-        <pc:spChg chg="mod">
-          <ac:chgData name="Wang, Aili" userId="5a9127d9-68dd-458b-beb6-6d3b6c430786" providerId="ADAL" clId="{197794DE-43EB-4DAF-BC57-5DF3897C1268}" dt="2026-06-24T03:02:36.150" v="311" actId="27636"/>
-          <ac:spMkLst>
-            <pc:docMk/>
-            <pc:sldMk cId="0" sldId="554"/>
-            <ac:spMk id="3" creationId="{00000000-0000-0000-0000-000000000000}"/>
-          </ac:spMkLst>
-        </pc:spChg>
-      </pc:sldChg>
-      <pc:sldChg chg="addSp modSp mod">
-        <pc:chgData name="Wang, Aili" userId="5a9127d9-68dd-458b-beb6-6d3b6c430786" providerId="ADAL" clId="{197794DE-43EB-4DAF-BC57-5DF3897C1268}" dt="2026-06-24T03:07:30.773" v="335" actId="20577"/>
-        <pc:sldMkLst>
-          <pc:docMk/>
-          <pc:sldMk cId="0" sldId="555"/>
-        </pc:sldMkLst>
-        <pc:spChg chg="mod">
-          <ac:chgData name="Wang, Aili" userId="5a9127d9-68dd-458b-beb6-6d3b6c430786" providerId="ADAL" clId="{197794DE-43EB-4DAF-BC57-5DF3897C1268}" dt="2026-06-24T03:07:04.691" v="333" actId="20577"/>
-          <ac:spMkLst>
-            <pc:docMk/>
-            <pc:sldMk cId="0" sldId="555"/>
-            <ac:spMk id="2" creationId="{00000000-0000-0000-0000-000000000000}"/>
-          </ac:spMkLst>
-        </pc:spChg>
-        <pc:spChg chg="mod">
-          <ac:chgData name="Wang, Aili" userId="5a9127d9-68dd-458b-beb6-6d3b6c430786" providerId="ADAL" clId="{197794DE-43EB-4DAF-BC57-5DF3897C1268}" dt="2026-06-24T03:07:30.773" v="335" actId="20577"/>
-          <ac:spMkLst>
-            <pc:docMk/>
-            <pc:sldMk cId="0" sldId="555"/>
-            <ac:spMk id="3" creationId="{00000000-0000-0000-0000-000000000000}"/>
-          </ac:spMkLst>
-        </pc:spChg>
-        <pc:picChg chg="add mod modCrop">
-          <ac:chgData name="Wang, Aili" userId="5a9127d9-68dd-458b-beb6-6d3b6c430786" providerId="ADAL" clId="{197794DE-43EB-4DAF-BC57-5DF3897C1268}" dt="2026-06-24T03:06:37.303" v="325" actId="1076"/>
-          <ac:picMkLst>
-            <pc:docMk/>
-            <pc:sldMk cId="0" sldId="555"/>
-            <ac:picMk id="7" creationId="{45A29213-409F-4394-8AD0-DF430D32C303}"/>
-          </ac:picMkLst>
-        </pc:picChg>
-        <pc:picChg chg="add mod modCrop">
-          <ac:chgData name="Wang, Aili" userId="5a9127d9-68dd-458b-beb6-6d3b6c430786" providerId="ADAL" clId="{197794DE-43EB-4DAF-BC57-5DF3897C1268}" dt="2026-06-24T03:06:40.230" v="326" actId="1076"/>
-          <ac:picMkLst>
-            <pc:docMk/>
-            <pc:sldMk cId="0" sldId="555"/>
-            <ac:picMk id="8" creationId="{1067C6B0-056A-4A62-98C2-059EBA5EE8A1}"/>
-          </ac:picMkLst>
-        </pc:picChg>
-      </pc:sldChg>
-      <pc:sldChg chg="del">
-        <pc:chgData name="Wang, Aili" userId="5a9127d9-68dd-458b-beb6-6d3b6c430786" providerId="ADAL" clId="{197794DE-43EB-4DAF-BC57-5DF3897C1268}" dt="2026-06-24T03:18:57.224" v="444" actId="47"/>
-        <pc:sldMkLst>
-          <pc:docMk/>
-          <pc:sldMk cId="0" sldId="556"/>
-        </pc:sldMkLst>
-      </pc:sldChg>
-      <pc:sldChg chg="del">
-        <pc:chgData name="Wang, Aili" userId="5a9127d9-68dd-458b-beb6-6d3b6c430786" providerId="ADAL" clId="{197794DE-43EB-4DAF-BC57-5DF3897C1268}" dt="2026-06-24T03:18:57.224" v="444" actId="47"/>
-        <pc:sldMkLst>
-          <pc:docMk/>
-          <pc:sldMk cId="0" sldId="557"/>
-        </pc:sldMkLst>
-      </pc:sldChg>
-      <pc:sldChg chg="del">
-        <pc:chgData name="Wang, Aili" userId="5a9127d9-68dd-458b-beb6-6d3b6c430786" providerId="ADAL" clId="{197794DE-43EB-4DAF-BC57-5DF3897C1268}" dt="2026-06-24T03:18:57.224" v="444" actId="47"/>
-        <pc:sldMkLst>
-          <pc:docMk/>
-          <pc:sldMk cId="0" sldId="558"/>
-        </pc:sldMkLst>
-      </pc:sldChg>
-      <pc:sldChg chg="del">
-        <pc:chgData name="Wang, Aili" userId="5a9127d9-68dd-458b-beb6-6d3b6c430786" providerId="ADAL" clId="{197794DE-43EB-4DAF-BC57-5DF3897C1268}" dt="2026-06-24T03:18:57.224" v="444" actId="47"/>
-        <pc:sldMkLst>
-          <pc:docMk/>
-          <pc:sldMk cId="0" sldId="559"/>
-        </pc:sldMkLst>
-      </pc:sldChg>
-      <pc:sldChg chg="del">
-        <pc:chgData name="Wang, Aili" userId="5a9127d9-68dd-458b-beb6-6d3b6c430786" providerId="ADAL" clId="{197794DE-43EB-4DAF-BC57-5DF3897C1268}" dt="2026-06-24T03:18:57.224" v="444" actId="47"/>
-        <pc:sldMkLst>
-          <pc:docMk/>
-          <pc:sldMk cId="0" sldId="560"/>
-        </pc:sldMkLst>
-      </pc:sldChg>
-      <pc:sldChg chg="del">
-        <pc:chgData name="Wang, Aili" userId="5a9127d9-68dd-458b-beb6-6d3b6c430786" providerId="ADAL" clId="{197794DE-43EB-4DAF-BC57-5DF3897C1268}" dt="2026-06-24T03:18:57.224" v="444" actId="47"/>
-        <pc:sldMkLst>
-          <pc:docMk/>
-          <pc:sldMk cId="0" sldId="561"/>
-        </pc:sldMkLst>
-      </pc:sldChg>
-      <pc:sldChg chg="del">
-        <pc:chgData name="Wang, Aili" userId="5a9127d9-68dd-458b-beb6-6d3b6c430786" providerId="ADAL" clId="{197794DE-43EB-4DAF-BC57-5DF3897C1268}" dt="2026-06-24T03:18:57.224" v="444" actId="47"/>
-        <pc:sldMkLst>
-          <pc:docMk/>
-          <pc:sldMk cId="0" sldId="562"/>
-        </pc:sldMkLst>
-      </pc:sldChg>
-      <pc:sldChg chg="del">
-        <pc:chgData name="Wang, Aili" userId="5a9127d9-68dd-458b-beb6-6d3b6c430786" providerId="ADAL" clId="{197794DE-43EB-4DAF-BC57-5DF3897C1268}" dt="2026-06-24T03:18:57.224" v="444" actId="47"/>
-        <pc:sldMkLst>
-          <pc:docMk/>
-          <pc:sldMk cId="0" sldId="563"/>
-        </pc:sldMkLst>
-      </pc:sldChg>
-      <pc:sldChg chg="del">
-        <pc:chgData name="Wang, Aili" userId="5a9127d9-68dd-458b-beb6-6d3b6c430786" providerId="ADAL" clId="{197794DE-43EB-4DAF-BC57-5DF3897C1268}" dt="2026-06-24T03:18:57.224" v="444" actId="47"/>
-        <pc:sldMkLst>
-          <pc:docMk/>
-          <pc:sldMk cId="0" sldId="564"/>
-        </pc:sldMkLst>
-      </pc:sldChg>
-      <pc:sldChg chg="modSp mod">
-        <pc:chgData name="Wang, Aili" userId="5a9127d9-68dd-458b-beb6-6d3b6c430786" providerId="ADAL" clId="{197794DE-43EB-4DAF-BC57-5DF3897C1268}" dt="2026-06-24T03:46:28.011" v="518" actId="20577"/>
-        <pc:sldMkLst>
-          <pc:docMk/>
-          <pc:sldMk cId="0" sldId="565"/>
-        </pc:sldMkLst>
-        <pc:spChg chg="mod">
-          <ac:chgData name="Wang, Aili" userId="5a9127d9-68dd-458b-beb6-6d3b6c430786" providerId="ADAL" clId="{197794DE-43EB-4DAF-BC57-5DF3897C1268}" dt="2026-06-24T03:46:28.011" v="518" actId="20577"/>
-          <ac:spMkLst>
-            <pc:docMk/>
-            <pc:sldMk cId="0" sldId="565"/>
-            <ac:spMk id="3" creationId="{00000000-0000-0000-0000-000000000000}"/>
-          </ac:spMkLst>
-        </pc:spChg>
-      </pc:sldChg>
-      <pc:sldChg chg="modSp mod">
-        <pc:chgData name="Wang, Aili" userId="5a9127d9-68dd-458b-beb6-6d3b6c430786" providerId="ADAL" clId="{197794DE-43EB-4DAF-BC57-5DF3897C1268}" dt="2026-06-24T03:34:21.709" v="475" actId="20577"/>
-        <pc:sldMkLst>
-          <pc:docMk/>
-          <pc:sldMk cId="0" sldId="566"/>
-        </pc:sldMkLst>
-        <pc:spChg chg="mod">
-          <ac:chgData name="Wang, Aili" userId="5a9127d9-68dd-458b-beb6-6d3b6c430786" providerId="ADAL" clId="{197794DE-43EB-4DAF-BC57-5DF3897C1268}" dt="2026-06-24T03:34:21.709" v="475" actId="20577"/>
-          <ac:spMkLst>
-            <pc:docMk/>
-            <pc:sldMk cId="0" sldId="566"/>
-            <ac:spMk id="3" creationId="{00000000-0000-0000-0000-000000000000}"/>
-          </ac:spMkLst>
-        </pc:spChg>
-      </pc:sldChg>
-      <pc:sldChg chg="modSp new mod ord modNotesTx">
-        <pc:chgData name="Wang, Aili" userId="5a9127d9-68dd-458b-beb6-6d3b6c430786" providerId="ADAL" clId="{197794DE-43EB-4DAF-BC57-5DF3897C1268}" dt="2026-06-24T02:50:09.482" v="202"/>
-        <pc:sldMkLst>
-          <pc:docMk/>
-          <pc:sldMk cId="1079410162" sldId="567"/>
-        </pc:sldMkLst>
-        <pc:spChg chg="mod">
-          <ac:chgData name="Wang, Aili" userId="5a9127d9-68dd-458b-beb6-6d3b6c430786" providerId="ADAL" clId="{197794DE-43EB-4DAF-BC57-5DF3897C1268}" dt="2026-06-24T02:41:43.883" v="36"/>
-          <ac:spMkLst>
-            <pc:docMk/>
-            <pc:sldMk cId="1079410162" sldId="567"/>
-            <ac:spMk id="2" creationId="{8609959E-965E-4DE9-A43B-97E57383C01C}"/>
-          </ac:spMkLst>
-        </pc:spChg>
-        <pc:spChg chg="mod">
-          <ac:chgData name="Wang, Aili" userId="5a9127d9-68dd-458b-beb6-6d3b6c430786" providerId="ADAL" clId="{197794DE-43EB-4DAF-BC57-5DF3897C1268}" dt="2026-06-24T02:49:52.293" v="199" actId="113"/>
-          <ac:spMkLst>
-            <pc:docMk/>
-            <pc:sldMk cId="1079410162" sldId="567"/>
-            <ac:spMk id="3" creationId="{8B3EA2FF-CECE-443E-B80A-017F29F760E5}"/>
-          </ac:spMkLst>
-        </pc:spChg>
-      </pc:sldChg>
-      <pc:sldChg chg="addSp modSp new mod modNotesTx">
-        <pc:chgData name="Wang, Aili" userId="5a9127d9-68dd-458b-beb6-6d3b6c430786" providerId="ADAL" clId="{197794DE-43EB-4DAF-BC57-5DF3897C1268}" dt="2026-06-24T02:59:48.142" v="291"/>
-        <pc:sldMkLst>
-          <pc:docMk/>
-          <pc:sldMk cId="1725450651" sldId="568"/>
-        </pc:sldMkLst>
-        <pc:spChg chg="mod">
-          <ac:chgData name="Wang, Aili" userId="5a9127d9-68dd-458b-beb6-6d3b6c430786" providerId="ADAL" clId="{197794DE-43EB-4DAF-BC57-5DF3897C1268}" dt="2026-06-24T02:53:45.303" v="215" actId="20577"/>
-          <ac:spMkLst>
-            <pc:docMk/>
-            <pc:sldMk cId="1725450651" sldId="568"/>
-            <ac:spMk id="2" creationId="{E9F6196B-1203-488A-A7BD-50C5747E9898}"/>
-          </ac:spMkLst>
-        </pc:spChg>
-        <pc:spChg chg="mod">
-          <ac:chgData name="Wang, Aili" userId="5a9127d9-68dd-458b-beb6-6d3b6c430786" providerId="ADAL" clId="{197794DE-43EB-4DAF-BC57-5DF3897C1268}" dt="2026-06-24T02:59:04.217" v="286" actId="20577"/>
-          <ac:spMkLst>
-            <pc:docMk/>
-            <pc:sldMk cId="1725450651" sldId="568"/>
-            <ac:spMk id="3" creationId="{599D1764-E7C8-4FD2-BFC9-31B900A0B36A}"/>
-          </ac:spMkLst>
-        </pc:spChg>
-        <pc:picChg chg="add mod">
-          <ac:chgData name="Wang, Aili" userId="5a9127d9-68dd-458b-beb6-6d3b6c430786" providerId="ADAL" clId="{197794DE-43EB-4DAF-BC57-5DF3897C1268}" dt="2026-06-24T02:58:47.538" v="283" actId="1076"/>
-          <ac:picMkLst>
-            <pc:docMk/>
-            <pc:sldMk cId="1725450651" sldId="568"/>
-            <ac:picMk id="7" creationId="{E246C0D9-A8BE-4401-844F-FE59E7F87579}"/>
-          </ac:picMkLst>
-        </pc:picChg>
-      </pc:sldChg>
-      <pc:sldChg chg="delSp modSp add mod">
-        <pc:chgData name="Wang, Aili" userId="5a9127d9-68dd-458b-beb6-6d3b6c430786" providerId="ADAL" clId="{197794DE-43EB-4DAF-BC57-5DF3897C1268}" dt="2026-06-24T03:13:32.756" v="403" actId="20577"/>
-        <pc:sldMkLst>
-          <pc:docMk/>
-          <pc:sldMk cId="2899136302" sldId="569"/>
-        </pc:sldMkLst>
-        <pc:spChg chg="mod">
-          <ac:chgData name="Wang, Aili" userId="5a9127d9-68dd-458b-beb6-6d3b6c430786" providerId="ADAL" clId="{197794DE-43EB-4DAF-BC57-5DF3897C1268}" dt="2026-06-24T03:13:32.756" v="403" actId="20577"/>
-          <ac:spMkLst>
-            <pc:docMk/>
-            <pc:sldMk cId="2899136302" sldId="569"/>
-            <ac:spMk id="3" creationId="{00000000-0000-0000-0000-000000000000}"/>
-          </ac:spMkLst>
-        </pc:spChg>
-        <pc:picChg chg="del">
-          <ac:chgData name="Wang, Aili" userId="5a9127d9-68dd-458b-beb6-6d3b6c430786" providerId="ADAL" clId="{197794DE-43EB-4DAF-BC57-5DF3897C1268}" dt="2026-06-24T03:07:37.731" v="337" actId="478"/>
-          <ac:picMkLst>
-            <pc:docMk/>
-            <pc:sldMk cId="2899136302" sldId="569"/>
-            <ac:picMk id="7" creationId="{45A29213-409F-4394-8AD0-DF430D32C303}"/>
-          </ac:picMkLst>
-        </pc:picChg>
-        <pc:picChg chg="del">
-          <ac:chgData name="Wang, Aili" userId="5a9127d9-68dd-458b-beb6-6d3b6c430786" providerId="ADAL" clId="{197794DE-43EB-4DAF-BC57-5DF3897C1268}" dt="2026-06-24T03:07:38.442" v="338" actId="478"/>
-          <ac:picMkLst>
-            <pc:docMk/>
-            <pc:sldMk cId="2899136302" sldId="569"/>
-            <ac:picMk id="8" creationId="{1067C6B0-056A-4A62-98C2-059EBA5EE8A1}"/>
-          </ac:picMkLst>
-        </pc:picChg>
-      </pc:sldChg>
-      <pc:sldChg chg="modSp new mod modNotesTx">
-        <pc:chgData name="Wang, Aili" userId="5a9127d9-68dd-458b-beb6-6d3b6c430786" providerId="ADAL" clId="{197794DE-43EB-4DAF-BC57-5DF3897C1268}" dt="2026-06-24T03:23:07.480" v="453"/>
-        <pc:sldMkLst>
-          <pc:docMk/>
-          <pc:sldMk cId="2907971957" sldId="570"/>
-        </pc:sldMkLst>
-        <pc:spChg chg="mod">
-          <ac:chgData name="Wang, Aili" userId="5a9127d9-68dd-458b-beb6-6d3b6c430786" providerId="ADAL" clId="{197794DE-43EB-4DAF-BC57-5DF3897C1268}" dt="2026-06-24T03:13:40.818" v="405"/>
-          <ac:spMkLst>
-            <pc:docMk/>
-            <pc:sldMk cId="2907971957" sldId="570"/>
-            <ac:spMk id="2" creationId="{5D6869BD-26AB-436F-89E8-6B0A0B282E78}"/>
-          </ac:spMkLst>
-        </pc:spChg>
-        <pc:spChg chg="mod">
-          <ac:chgData name="Wang, Aili" userId="5a9127d9-68dd-458b-beb6-6d3b6c430786" providerId="ADAL" clId="{197794DE-43EB-4DAF-BC57-5DF3897C1268}" dt="2026-06-24T03:22:48.141" v="452" actId="20577"/>
-          <ac:spMkLst>
-            <pc:docMk/>
-            <pc:sldMk cId="2907971957" sldId="570"/>
-            <ac:spMk id="3" creationId="{B26CA19B-D1C3-49B7-8BBF-E8B31283BB55}"/>
-          </ac:spMkLst>
-        </pc:spChg>
-      </pc:sldChg>
-      <pc:sldChg chg="modSp new mod modNotesTx">
-        <pc:chgData name="Wang, Aili" userId="5a9127d9-68dd-458b-beb6-6d3b6c430786" providerId="ADAL" clId="{197794DE-43EB-4DAF-BC57-5DF3897C1268}" dt="2026-06-24T03:32:59.750" v="474" actId="20577"/>
-        <pc:sldMkLst>
-          <pc:docMk/>
-          <pc:sldMk cId="2501928754" sldId="571"/>
-        </pc:sldMkLst>
-        <pc:spChg chg="mod">
-          <ac:chgData name="Wang, Aili" userId="5a9127d9-68dd-458b-beb6-6d3b6c430786" providerId="ADAL" clId="{197794DE-43EB-4DAF-BC57-5DF3897C1268}" dt="2026-06-24T03:16:43.728" v="435"/>
-          <ac:spMkLst>
-            <pc:docMk/>
-            <pc:sldMk cId="2501928754" sldId="571"/>
-            <ac:spMk id="2" creationId="{DB82E75C-BF04-491C-B7B0-7B969DB1392E}"/>
-          </ac:spMkLst>
-        </pc:spChg>
-        <pc:spChg chg="mod">
-          <ac:chgData name="Wang, Aili" userId="5a9127d9-68dd-458b-beb6-6d3b6c430786" providerId="ADAL" clId="{197794DE-43EB-4DAF-BC57-5DF3897C1268}" dt="2026-06-24T03:32:59.750" v="474" actId="20577"/>
-          <ac:spMkLst>
-            <pc:docMk/>
-            <pc:sldMk cId="2501928754" sldId="571"/>
-            <ac:spMk id="3" creationId="{BCFA0938-E757-4566-A5D3-F51C4F9FE467}"/>
-          </ac:spMkLst>
-        </pc:spChg>
-      </pc:sldChg>
-      <pc:sldChg chg="modSp new mod">
-        <pc:chgData name="Wang, Aili" userId="5a9127d9-68dd-458b-beb6-6d3b6c430786" providerId="ADAL" clId="{197794DE-43EB-4DAF-BC57-5DF3897C1268}" dt="2026-06-24T03:36:20.694" v="478"/>
-        <pc:sldMkLst>
-          <pc:docMk/>
-          <pc:sldMk cId="3732404059" sldId="572"/>
-        </pc:sldMkLst>
-        <pc:spChg chg="mod">
-          <ac:chgData name="Wang, Aili" userId="5a9127d9-68dd-458b-beb6-6d3b6c430786" providerId="ADAL" clId="{197794DE-43EB-4DAF-BC57-5DF3897C1268}" dt="2026-06-24T03:36:20.694" v="478"/>
-          <ac:spMkLst>
-            <pc:docMk/>
-            <pc:sldMk cId="3732404059" sldId="572"/>
-            <ac:spMk id="2" creationId="{BA17AE49-D33F-43BB-B420-DA6DDD3893FF}"/>
-          </ac:spMkLst>
-        </pc:spChg>
-      </pc:sldChg>
-      <pc:sldChg chg="modSp new mod">
-        <pc:chgData name="Wang, Aili" userId="5a9127d9-68dd-458b-beb6-6d3b6c430786" providerId="ADAL" clId="{197794DE-43EB-4DAF-BC57-5DF3897C1268}" dt="2026-06-24T03:37:45.871" v="508" actId="20577"/>
-        <pc:sldMkLst>
-          <pc:docMk/>
-          <pc:sldMk cId="2664306108" sldId="573"/>
-        </pc:sldMkLst>
-        <pc:spChg chg="mod">
-          <ac:chgData name="Wang, Aili" userId="5a9127d9-68dd-458b-beb6-6d3b6c430786" providerId="ADAL" clId="{197794DE-43EB-4DAF-BC57-5DF3897C1268}" dt="2026-06-24T03:37:45.871" v="508" actId="20577"/>
-          <ac:spMkLst>
-            <pc:docMk/>
-            <pc:sldMk cId="2664306108" sldId="573"/>
-            <ac:spMk id="2" creationId="{26F7D2EC-6267-4CA9-940D-B21F1114F8FA}"/>
-          </ac:spMkLst>
-        </pc:spChg>
-      </pc:sldChg>
-      <pc:sldChg chg="modSp add mod">
-        <pc:chgData name="Wang, Aili" userId="5a9127d9-68dd-458b-beb6-6d3b6c430786" providerId="ADAL" clId="{197794DE-43EB-4DAF-BC57-5DF3897C1268}" dt="2026-06-24T03:38:01.045" v="510"/>
-        <pc:sldMkLst>
-          <pc:docMk/>
-          <pc:sldMk cId="3490890331" sldId="574"/>
-        </pc:sldMkLst>
-        <pc:spChg chg="mod">
-          <ac:chgData name="Wang, Aili" userId="5a9127d9-68dd-458b-beb6-6d3b6c430786" providerId="ADAL" clId="{197794DE-43EB-4DAF-BC57-5DF3897C1268}" dt="2026-06-24T03:38:01.045" v="510"/>
-          <ac:spMkLst>
-            <pc:docMk/>
-            <pc:sldMk cId="3490890331" sldId="574"/>
-            <ac:spMk id="2" creationId="{26F7D2EC-6267-4CA9-940D-B21F1114F8FA}"/>
-          </ac:spMkLst>
-        </pc:spChg>
-      </pc:sldChg>
-      <pc:sldChg chg="new">
-        <pc:chgData name="Wang, Aili" userId="5a9127d9-68dd-458b-beb6-6d3b6c430786" providerId="ADAL" clId="{197794DE-43EB-4DAF-BC57-5DF3897C1268}" dt="2026-06-24T03:38:03.622" v="511" actId="680"/>
-        <pc:sldMkLst>
-          <pc:docMk/>
-          <pc:sldMk cId="2643839248" sldId="575"/>
-        </pc:sldMkLst>
-      </pc:sldChg>
-      <pc:sldChg chg="modSp add mod">
-        <pc:chgData name="Wang, Aili" userId="5a9127d9-68dd-458b-beb6-6d3b6c430786" providerId="ADAL" clId="{197794DE-43EB-4DAF-BC57-5DF3897C1268}" dt="2026-06-24T03:38:19.717" v="514"/>
-        <pc:sldMkLst>
-          <pc:docMk/>
-          <pc:sldMk cId="4008255350" sldId="576"/>
-        </pc:sldMkLst>
-        <pc:spChg chg="mod">
-          <ac:chgData name="Wang, Aili" userId="5a9127d9-68dd-458b-beb6-6d3b6c430786" providerId="ADAL" clId="{197794DE-43EB-4DAF-BC57-5DF3897C1268}" dt="2026-06-24T03:38:19.717" v="514"/>
-          <ac:spMkLst>
-            <pc:docMk/>
-            <pc:sldMk cId="4008255350" sldId="576"/>
-            <ac:spMk id="2" creationId="{26F7D2EC-6267-4CA9-940D-B21F1114F8FA}"/>
-          </ac:spMkLst>
-        </pc:spChg>
-      </pc:sldChg>
-      <pc:sldChg chg="modSp add mod modNotesTx">
-        <pc:chgData name="Wang, Aili" userId="5a9127d9-68dd-458b-beb6-6d3b6c430786" providerId="ADAL" clId="{197794DE-43EB-4DAF-BC57-5DF3897C1268}" dt="2026-06-24T03:39:10.600" v="517"/>
-        <pc:sldMkLst>
-          <pc:docMk/>
-          <pc:sldMk cId="1871769152" sldId="577"/>
-        </pc:sldMkLst>
-        <pc:spChg chg="mod">
-          <ac:chgData name="Wang, Aili" userId="5a9127d9-68dd-458b-beb6-6d3b6c430786" providerId="ADAL" clId="{197794DE-43EB-4DAF-BC57-5DF3897C1268}" dt="2026-06-24T03:38:38.771" v="516"/>
-          <ac:spMkLst>
-            <pc:docMk/>
-            <pc:sldMk cId="1871769152" sldId="577"/>
-            <ac:spMk id="2" creationId="{26F7D2EC-6267-4CA9-940D-B21F1114F8FA}"/>
-          </ac:spMkLst>
-        </pc:spChg>
-      </pc:sldChg>
-    </pc:docChg>
-  </pc:docChgLst>
-  <pc:docChgLst>
-    <pc:chgData name="Wang, Aili" userId="5a9127d9-68dd-458b-beb6-6d3b6c430786" providerId="ADAL" clId="{EB5525E5-F1B3-4912-B828-83AB97B5BC15}"/>
-    <pc:docChg chg="undo redo custSel delSld modSld">
-      <pc:chgData name="Wang, Aili" userId="5a9127d9-68dd-458b-beb6-6d3b6c430786" providerId="ADAL" clId="{EB5525E5-F1B3-4912-B828-83AB97B5BC15}" dt="2026-06-24T02:00:14.997" v="50" actId="20577"/>
-      <pc:docMkLst>
-        <pc:docMk/>
-      </pc:docMkLst>
-      <pc:sldChg chg="modSp mod">
-        <pc:chgData name="Wang, Aili" userId="5a9127d9-68dd-458b-beb6-6d3b6c430786" providerId="ADAL" clId="{EB5525E5-F1B3-4912-B828-83AB97B5BC15}" dt="2026-06-24T01:35:38.807" v="10" actId="20577"/>
-        <pc:sldMkLst>
-          <pc:docMk/>
-          <pc:sldMk cId="3391350155" sldId="257"/>
-        </pc:sldMkLst>
-        <pc:spChg chg="mod">
-          <ac:chgData name="Wang, Aili" userId="5a9127d9-68dd-458b-beb6-6d3b6c430786" providerId="ADAL" clId="{EB5525E5-F1B3-4912-B828-83AB97B5BC15}" dt="2026-06-24T01:35:38.807" v="10" actId="20577"/>
-          <ac:spMkLst>
-            <pc:docMk/>
-            <pc:sldMk cId="3391350155" sldId="257"/>
-            <ac:spMk id="2" creationId="{0B953A8E-06B8-E1CB-BEC3-A88D4721EF5F}"/>
-          </ac:spMkLst>
-        </pc:spChg>
-        <pc:spChg chg="mod">
-          <ac:chgData name="Wang, Aili" userId="5a9127d9-68dd-458b-beb6-6d3b6c430786" providerId="ADAL" clId="{EB5525E5-F1B3-4912-B828-83AB97B5BC15}" dt="2026-06-24T01:35:34.684" v="8"/>
-          <ac:spMkLst>
-            <pc:docMk/>
-            <pc:sldMk cId="3391350155" sldId="257"/>
-            <ac:spMk id="3" creationId="{9305ADCC-E6F1-E544-FCC2-4E434569C511}"/>
-          </ac:spMkLst>
-        </pc:spChg>
-      </pc:sldChg>
-      <pc:sldChg chg="modSp mod">
-        <pc:chgData name="Wang, Aili" userId="5a9127d9-68dd-458b-beb6-6d3b6c430786" providerId="ADAL" clId="{EB5525E5-F1B3-4912-B828-83AB97B5BC15}" dt="2026-06-24T01:58:26.369" v="14" actId="20577"/>
-        <pc:sldMkLst>
-          <pc:docMk/>
-          <pc:sldMk cId="249957202" sldId="258"/>
-        </pc:sldMkLst>
-        <pc:spChg chg="mod">
-          <ac:chgData name="Wang, Aili" userId="5a9127d9-68dd-458b-beb6-6d3b6c430786" providerId="ADAL" clId="{EB5525E5-F1B3-4912-B828-83AB97B5BC15}" dt="2026-06-24T01:58:26.369" v="14" actId="20577"/>
-          <ac:spMkLst>
-            <pc:docMk/>
-            <pc:sldMk cId="249957202" sldId="258"/>
-            <ac:spMk id="3" creationId="{A576A446-BA2B-E074-AD16-8BB05A9535FE}"/>
-          </ac:spMkLst>
-        </pc:spChg>
-      </pc:sldChg>
-      <pc:sldChg chg="del">
-        <pc:chgData name="Wang, Aili" userId="5a9127d9-68dd-458b-beb6-6d3b6c430786" providerId="ADAL" clId="{EB5525E5-F1B3-4912-B828-83AB97B5BC15}" dt="2026-06-24T01:36:07.419" v="11" actId="47"/>
-        <pc:sldMkLst>
-          <pc:docMk/>
-          <pc:sldMk cId="3293432899" sldId="492"/>
-        </pc:sldMkLst>
-      </pc:sldChg>
-      <pc:sldChg chg="del">
-        <pc:chgData name="Wang, Aili" userId="5a9127d9-68dd-458b-beb6-6d3b6c430786" providerId="ADAL" clId="{EB5525E5-F1B3-4912-B828-83AB97B5BC15}" dt="2026-06-24T01:36:07.419" v="11" actId="47"/>
-        <pc:sldMkLst>
-          <pc:docMk/>
-          <pc:sldMk cId="2577186074" sldId="502"/>
-        </pc:sldMkLst>
-      </pc:sldChg>
-      <pc:sldChg chg="del">
-        <pc:chgData name="Wang, Aili" userId="5a9127d9-68dd-458b-beb6-6d3b6c430786" providerId="ADAL" clId="{EB5525E5-F1B3-4912-B828-83AB97B5BC15}" dt="2026-06-24T01:36:07.419" v="11" actId="47"/>
-        <pc:sldMkLst>
-          <pc:docMk/>
-          <pc:sldMk cId="369646929" sldId="504"/>
-        </pc:sldMkLst>
-      </pc:sldChg>
-      <pc:sldChg chg="del">
-        <pc:chgData name="Wang, Aili" userId="5a9127d9-68dd-458b-beb6-6d3b6c430786" providerId="ADAL" clId="{EB5525E5-F1B3-4912-B828-83AB97B5BC15}" dt="2026-06-24T01:36:07.419" v="11" actId="47"/>
-        <pc:sldMkLst>
-          <pc:docMk/>
-          <pc:sldMk cId="622284761" sldId="505"/>
-        </pc:sldMkLst>
-      </pc:sldChg>
-      <pc:sldChg chg="del">
-        <pc:chgData name="Wang, Aili" userId="5a9127d9-68dd-458b-beb6-6d3b6c430786" providerId="ADAL" clId="{EB5525E5-F1B3-4912-B828-83AB97B5BC15}" dt="2026-06-24T01:36:07.419" v="11" actId="47"/>
-        <pc:sldMkLst>
-          <pc:docMk/>
-          <pc:sldMk cId="2275220938" sldId="507"/>
-        </pc:sldMkLst>
-      </pc:sldChg>
-      <pc:sldChg chg="del">
-        <pc:chgData name="Wang, Aili" userId="5a9127d9-68dd-458b-beb6-6d3b6c430786" providerId="ADAL" clId="{EB5525E5-F1B3-4912-B828-83AB97B5BC15}" dt="2026-06-24T01:36:07.419" v="11" actId="47"/>
-        <pc:sldMkLst>
-          <pc:docMk/>
-          <pc:sldMk cId="2928905792" sldId="508"/>
-        </pc:sldMkLst>
-      </pc:sldChg>
-      <pc:sldChg chg="del">
-        <pc:chgData name="Wang, Aili" userId="5a9127d9-68dd-458b-beb6-6d3b6c430786" providerId="ADAL" clId="{EB5525E5-F1B3-4912-B828-83AB97B5BC15}" dt="2026-06-24T01:36:07.419" v="11" actId="47"/>
-        <pc:sldMkLst>
-          <pc:docMk/>
-          <pc:sldMk cId="3552103052" sldId="510"/>
-        </pc:sldMkLst>
-      </pc:sldChg>
-      <pc:sldChg chg="del">
-        <pc:chgData name="Wang, Aili" userId="5a9127d9-68dd-458b-beb6-6d3b6c430786" providerId="ADAL" clId="{EB5525E5-F1B3-4912-B828-83AB97B5BC15}" dt="2026-06-24T01:36:07.419" v="11" actId="47"/>
-        <pc:sldMkLst>
-          <pc:docMk/>
-          <pc:sldMk cId="493733749" sldId="511"/>
-        </pc:sldMkLst>
-      </pc:sldChg>
-      <pc:sldChg chg="del">
-        <pc:chgData name="Wang, Aili" userId="5a9127d9-68dd-458b-beb6-6d3b6c430786" providerId="ADAL" clId="{EB5525E5-F1B3-4912-B828-83AB97B5BC15}" dt="2026-06-24T01:36:07.419" v="11" actId="47"/>
-        <pc:sldMkLst>
-          <pc:docMk/>
-          <pc:sldMk cId="816867532" sldId="512"/>
-        </pc:sldMkLst>
-      </pc:sldChg>
-      <pc:sldChg chg="del">
-        <pc:chgData name="Wang, Aili" userId="5a9127d9-68dd-458b-beb6-6d3b6c430786" providerId="ADAL" clId="{EB5525E5-F1B3-4912-B828-83AB97B5BC15}" dt="2026-06-24T01:36:07.419" v="11" actId="47"/>
-        <pc:sldMkLst>
-          <pc:docMk/>
-          <pc:sldMk cId="1778369885" sldId="513"/>
-        </pc:sldMkLst>
-      </pc:sldChg>
-      <pc:sldChg chg="del">
-        <pc:chgData name="Wang, Aili" userId="5a9127d9-68dd-458b-beb6-6d3b6c430786" providerId="ADAL" clId="{EB5525E5-F1B3-4912-B828-83AB97B5BC15}" dt="2026-06-24T01:36:07.419" v="11" actId="47"/>
-        <pc:sldMkLst>
-          <pc:docMk/>
-          <pc:sldMk cId="131055874" sldId="516"/>
-        </pc:sldMkLst>
-      </pc:sldChg>
-      <pc:sldChg chg="del">
-        <pc:chgData name="Wang, Aili" userId="5a9127d9-68dd-458b-beb6-6d3b6c430786" providerId="ADAL" clId="{EB5525E5-F1B3-4912-B828-83AB97B5BC15}" dt="2026-06-24T01:36:07.419" v="11" actId="47"/>
-        <pc:sldMkLst>
-          <pc:docMk/>
-          <pc:sldMk cId="3716715646" sldId="517"/>
-        </pc:sldMkLst>
-      </pc:sldChg>
-      <pc:sldChg chg="del">
-        <pc:chgData name="Wang, Aili" userId="5a9127d9-68dd-458b-beb6-6d3b6c430786" providerId="ADAL" clId="{EB5525E5-F1B3-4912-B828-83AB97B5BC15}" dt="2026-06-24T01:36:07.419" v="11" actId="47"/>
-        <pc:sldMkLst>
-          <pc:docMk/>
-          <pc:sldMk cId="3651803070" sldId="518"/>
-        </pc:sldMkLst>
-      </pc:sldChg>
-      <pc:sldChg chg="del">
-        <pc:chgData name="Wang, Aili" userId="5a9127d9-68dd-458b-beb6-6d3b6c430786" providerId="ADAL" clId="{EB5525E5-F1B3-4912-B828-83AB97B5BC15}" dt="2026-06-24T01:36:07.419" v="11" actId="47"/>
-        <pc:sldMkLst>
-          <pc:docMk/>
-          <pc:sldMk cId="2228131451" sldId="519"/>
-        </pc:sldMkLst>
-      </pc:sldChg>
-      <pc:sldChg chg="del">
-        <pc:chgData name="Wang, Aili" userId="5a9127d9-68dd-458b-beb6-6d3b6c430786" providerId="ADAL" clId="{EB5525E5-F1B3-4912-B828-83AB97B5BC15}" dt="2026-06-24T01:36:07.419" v="11" actId="47"/>
-        <pc:sldMkLst>
-          <pc:docMk/>
-          <pc:sldMk cId="1467310138" sldId="520"/>
-        </pc:sldMkLst>
-      </pc:sldChg>
-      <pc:sldChg chg="del">
-        <pc:chgData name="Wang, Aili" userId="5a9127d9-68dd-458b-beb6-6d3b6c430786" providerId="ADAL" clId="{EB5525E5-F1B3-4912-B828-83AB97B5BC15}" dt="2026-06-24T01:36:07.419" v="11" actId="47"/>
-        <pc:sldMkLst>
-          <pc:docMk/>
-          <pc:sldMk cId="10165368" sldId="521"/>
-        </pc:sldMkLst>
-      </pc:sldChg>
-      <pc:sldChg chg="del">
-        <pc:chgData name="Wang, Aili" userId="5a9127d9-68dd-458b-beb6-6d3b6c430786" providerId="ADAL" clId="{EB5525E5-F1B3-4912-B828-83AB97B5BC15}" dt="2026-06-24T01:36:07.419" v="11" actId="47"/>
-        <pc:sldMkLst>
-          <pc:docMk/>
-          <pc:sldMk cId="589589645" sldId="522"/>
-        </pc:sldMkLst>
-      </pc:sldChg>
-      <pc:sldChg chg="del">
-        <pc:chgData name="Wang, Aili" userId="5a9127d9-68dd-458b-beb6-6d3b6c430786" providerId="ADAL" clId="{EB5525E5-F1B3-4912-B828-83AB97B5BC15}" dt="2026-06-24T01:36:07.419" v="11" actId="47"/>
-        <pc:sldMkLst>
-          <pc:docMk/>
-          <pc:sldMk cId="318399957" sldId="525"/>
-        </pc:sldMkLst>
-      </pc:sldChg>
-      <pc:sldChg chg="del">
-        <pc:chgData name="Wang, Aili" userId="5a9127d9-68dd-458b-beb6-6d3b6c430786" providerId="ADAL" clId="{EB5525E5-F1B3-4912-B828-83AB97B5BC15}" dt="2026-06-24T01:36:07.419" v="11" actId="47"/>
-        <pc:sldMkLst>
-          <pc:docMk/>
-          <pc:sldMk cId="1786469793" sldId="528"/>
-        </pc:sldMkLst>
-      </pc:sldChg>
-      <pc:sldChg chg="del">
-        <pc:chgData name="Wang, Aili" userId="5a9127d9-68dd-458b-beb6-6d3b6c430786" providerId="ADAL" clId="{EB5525E5-F1B3-4912-B828-83AB97B5BC15}" dt="2026-06-24T01:36:07.419" v="11" actId="47"/>
-        <pc:sldMkLst>
-          <pc:docMk/>
-          <pc:sldMk cId="2836987546" sldId="529"/>
-        </pc:sldMkLst>
-      </pc:sldChg>
-      <pc:sldChg chg="del">
-        <pc:chgData name="Wang, Aili" userId="5a9127d9-68dd-458b-beb6-6d3b6c430786" providerId="ADAL" clId="{EB5525E5-F1B3-4912-B828-83AB97B5BC15}" dt="2026-06-24T01:36:07.419" v="11" actId="47"/>
-        <pc:sldMkLst>
-          <pc:docMk/>
-          <pc:sldMk cId="701819808" sldId="530"/>
-        </pc:sldMkLst>
-      </pc:sldChg>
-      <pc:sldChg chg="del">
-        <pc:chgData name="Wang, Aili" userId="5a9127d9-68dd-458b-beb6-6d3b6c430786" providerId="ADAL" clId="{EB5525E5-F1B3-4912-B828-83AB97B5BC15}" dt="2026-06-24T01:36:07.419" v="11" actId="47"/>
-        <pc:sldMkLst>
-          <pc:docMk/>
-          <pc:sldMk cId="0" sldId="532"/>
-        </pc:sldMkLst>
-      </pc:sldChg>
-      <pc:sldChg chg="del">
-        <pc:chgData name="Wang, Aili" userId="5a9127d9-68dd-458b-beb6-6d3b6c430786" providerId="ADAL" clId="{EB5525E5-F1B3-4912-B828-83AB97B5BC15}" dt="2026-06-24T01:36:07.419" v="11" actId="47"/>
-        <pc:sldMkLst>
-          <pc:docMk/>
-          <pc:sldMk cId="0" sldId="533"/>
-        </pc:sldMkLst>
-      </pc:sldChg>
-      <pc:sldChg chg="del">
-        <pc:chgData name="Wang, Aili" userId="5a9127d9-68dd-458b-beb6-6d3b6c430786" providerId="ADAL" clId="{EB5525E5-F1B3-4912-B828-83AB97B5BC15}" dt="2026-06-24T01:36:07.419" v="11" actId="47"/>
-        <pc:sldMkLst>
-          <pc:docMk/>
-          <pc:sldMk cId="0" sldId="534"/>
-        </pc:sldMkLst>
-      </pc:sldChg>
-      <pc:sldChg chg="del">
-        <pc:chgData name="Wang, Aili" userId="5a9127d9-68dd-458b-beb6-6d3b6c430786" providerId="ADAL" clId="{EB5525E5-F1B3-4912-B828-83AB97B5BC15}" dt="2026-06-24T01:36:07.419" v="11" actId="47"/>
-        <pc:sldMkLst>
-          <pc:docMk/>
-          <pc:sldMk cId="0" sldId="535"/>
-        </pc:sldMkLst>
-      </pc:sldChg>
-      <pc:sldChg chg="del">
-        <pc:chgData name="Wang, Aili" userId="5a9127d9-68dd-458b-beb6-6d3b6c430786" providerId="ADAL" clId="{EB5525E5-F1B3-4912-B828-83AB97B5BC15}" dt="2026-06-24T01:36:07.419" v="11" actId="47"/>
-        <pc:sldMkLst>
-          <pc:docMk/>
-          <pc:sldMk cId="0" sldId="536"/>
-        </pc:sldMkLst>
-      </pc:sldChg>
-      <pc:sldChg chg="del">
-        <pc:chgData name="Wang, Aili" userId="5a9127d9-68dd-458b-beb6-6d3b6c430786" providerId="ADAL" clId="{EB5525E5-F1B3-4912-B828-83AB97B5BC15}" dt="2026-06-24T01:36:07.419" v="11" actId="47"/>
-        <pc:sldMkLst>
-          <pc:docMk/>
-          <pc:sldMk cId="0" sldId="541"/>
-        </pc:sldMkLst>
-      </pc:sldChg>
-      <pc:sldChg chg="del">
-        <pc:chgData name="Wang, Aili" userId="5a9127d9-68dd-458b-beb6-6d3b6c430786" providerId="ADAL" clId="{EB5525E5-F1B3-4912-B828-83AB97B5BC15}" dt="2026-06-24T01:36:07.419" v="11" actId="47"/>
-        <pc:sldMkLst>
-          <pc:docMk/>
-          <pc:sldMk cId="0" sldId="542"/>
-        </pc:sldMkLst>
-      </pc:sldChg>
-      <pc:sldChg chg="modSp mod">
-        <pc:chgData name="Wang, Aili" userId="5a9127d9-68dd-458b-beb6-6d3b6c430786" providerId="ADAL" clId="{EB5525E5-F1B3-4912-B828-83AB97B5BC15}" dt="2026-06-24T02:00:14.997" v="50" actId="20577"/>
-        <pc:sldMkLst>
-          <pc:docMk/>
-          <pc:sldMk cId="0" sldId="549"/>
-        </pc:sldMkLst>
-        <pc:spChg chg="mod">
-          <ac:chgData name="Wang, Aili" userId="5a9127d9-68dd-458b-beb6-6d3b6c430786" providerId="ADAL" clId="{EB5525E5-F1B3-4912-B828-83AB97B5BC15}" dt="2026-06-24T02:00:14.997" v="50" actId="20577"/>
-          <ac:spMkLst>
-            <pc:docMk/>
-            <pc:sldMk cId="0" sldId="549"/>
-            <ac:spMk id="3" creationId="{00000000-0000-0000-0000-000000000000}"/>
-          </ac:spMkLst>
-        </pc:spChg>
-      </pc:sldChg>
-      <pc:sldChg chg="del">
-        <pc:chgData name="Wang, Aili" userId="5a9127d9-68dd-458b-beb6-6d3b6c430786" providerId="ADAL" clId="{EB5525E5-F1B3-4912-B828-83AB97B5BC15}" dt="2026-06-24T01:59:12.108" v="15" actId="47"/>
-        <pc:sldMkLst>
-          <pc:docMk/>
-          <pc:sldMk cId="0" sldId="550"/>
-        </pc:sldMkLst>
-      </pc:sldChg>
-      <pc:sldChg chg="del">
-        <pc:chgData name="Wang, Aili" userId="5a9127d9-68dd-458b-beb6-6d3b6c430786" providerId="ADAL" clId="{EB5525E5-F1B3-4912-B828-83AB97B5BC15}" dt="2026-06-24T01:59:12.108" v="15" actId="47"/>
-        <pc:sldMkLst>
-          <pc:docMk/>
-          <pc:sldMk cId="0" sldId="551"/>
-        </pc:sldMkLst>
-      </pc:sldChg>
-      <pc:sldChg chg="del">
-        <pc:chgData name="Wang, Aili" userId="5a9127d9-68dd-458b-beb6-6d3b6c430786" providerId="ADAL" clId="{EB5525E5-F1B3-4912-B828-83AB97B5BC15}" dt="2026-06-24T01:59:12.108" v="15" actId="47"/>
-        <pc:sldMkLst>
-          <pc:docMk/>
-          <pc:sldMk cId="0" sldId="552"/>
-        </pc:sldMkLst>
-      </pc:sldChg>
-      <pc:sldChg chg="del">
-        <pc:chgData name="Wang, Aili" userId="5a9127d9-68dd-458b-beb6-6d3b6c430786" providerId="ADAL" clId="{EB5525E5-F1B3-4912-B828-83AB97B5BC15}" dt="2026-06-24T01:59:12.108" v="15" actId="47"/>
-        <pc:sldMkLst>
-          <pc:docMk/>
-          <pc:sldMk cId="0" sldId="553"/>
-        </pc:sldMkLst>
-      </pc:sldChg>
-      <pc:sldChg chg="del">
-        <pc:chgData name="Wang, Aili" userId="5a9127d9-68dd-458b-beb6-6d3b6c430786" providerId="ADAL" clId="{EB5525E5-F1B3-4912-B828-83AB97B5BC15}" dt="2026-06-24T01:36:07.419" v="11" actId="47"/>
-        <pc:sldMkLst>
-          <pc:docMk/>
-          <pc:sldMk cId="100629869" sldId="567"/>
-        </pc:sldMkLst>
-      </pc:sldChg>
-      <pc:sldChg chg="del">
-        <pc:chgData name="Wang, Aili" userId="5a9127d9-68dd-458b-beb6-6d3b6c430786" providerId="ADAL" clId="{EB5525E5-F1B3-4912-B828-83AB97B5BC15}" dt="2026-06-24T01:36:07.419" v="11" actId="47"/>
-        <pc:sldMkLst>
-          <pc:docMk/>
-          <pc:sldMk cId="1805013056" sldId="568"/>
-        </pc:sldMkLst>
-      </pc:sldChg>
-      <pc:sldChg chg="del">
-        <pc:chgData name="Wang, Aili" userId="5a9127d9-68dd-458b-beb6-6d3b6c430786" providerId="ADAL" clId="{EB5525E5-F1B3-4912-B828-83AB97B5BC15}" dt="2026-06-24T01:36:07.419" v="11" actId="47"/>
-        <pc:sldMkLst>
-          <pc:docMk/>
-          <pc:sldMk cId="1050544309" sldId="569"/>
-        </pc:sldMkLst>
-      </pc:sldChg>
-      <pc:sldChg chg="del">
-        <pc:chgData name="Wang, Aili" userId="5a9127d9-68dd-458b-beb6-6d3b6c430786" providerId="ADAL" clId="{EB5525E5-F1B3-4912-B828-83AB97B5BC15}" dt="2026-06-24T01:36:07.419" v="11" actId="47"/>
-        <pc:sldMkLst>
-          <pc:docMk/>
-          <pc:sldMk cId="1086008017" sldId="570"/>
-        </pc:sldMkLst>
-      </pc:sldChg>
-      <pc:sldChg chg="del">
-        <pc:chgData name="Wang, Aili" userId="5a9127d9-68dd-458b-beb6-6d3b6c430786" providerId="ADAL" clId="{EB5525E5-F1B3-4912-B828-83AB97B5BC15}" dt="2026-06-24T01:36:07.419" v="11" actId="47"/>
-        <pc:sldMkLst>
-          <pc:docMk/>
-          <pc:sldMk cId="1999848619" sldId="571"/>
-        </pc:sldMkLst>
-      </pc:sldChg>
-    </pc:docChg>
-  </pc:docChgLst>
-  <pc:docChgLst>
-    <pc:chgData name="Wang, Aili" userId="5a9127d9-68dd-458b-beb6-6d3b6c430786" providerId="ADAL" clId="{BDC593C2-9FB4-437A-9335-12DD20EDC83F}"/>
-    <pc:docChg chg="modSld">
-      <pc:chgData name="Wang, Aili" userId="5a9127d9-68dd-458b-beb6-6d3b6c430786" providerId="ADAL" clId="{BDC593C2-9FB4-437A-9335-12DD20EDC83F}" dt="2026-06-24T10:21:50.544" v="41" actId="20577"/>
-      <pc:docMkLst>
-        <pc:docMk/>
-      </pc:docMkLst>
-      <pc:sldChg chg="modSp mod">
-        <pc:chgData name="Wang, Aili" userId="5a9127d9-68dd-458b-beb6-6d3b6c430786" providerId="ADAL" clId="{BDC593C2-9FB4-437A-9335-12DD20EDC83F}" dt="2026-06-24T10:20:54.670" v="32" actId="20577"/>
-        <pc:sldMkLst>
-          <pc:docMk/>
-          <pc:sldMk cId="3391350155" sldId="257"/>
-        </pc:sldMkLst>
-        <pc:spChg chg="mod">
-          <ac:chgData name="Wang, Aili" userId="5a9127d9-68dd-458b-beb6-6d3b6c430786" providerId="ADAL" clId="{BDC593C2-9FB4-437A-9335-12DD20EDC83F}" dt="2026-06-24T10:20:54.670" v="32" actId="20577"/>
-          <ac:spMkLst>
-            <pc:docMk/>
-            <pc:sldMk cId="3391350155" sldId="257"/>
-            <ac:spMk id="3" creationId="{9305ADCC-E6F1-E544-FCC2-4E434569C511}"/>
-          </ac:spMkLst>
-        </pc:spChg>
-      </pc:sldChg>
-      <pc:sldChg chg="modSp mod">
-        <pc:chgData name="Wang, Aili" userId="5a9127d9-68dd-458b-beb6-6d3b6c430786" providerId="ADAL" clId="{BDC593C2-9FB4-437A-9335-12DD20EDC83F}" dt="2026-06-24T10:21:50.544" v="41" actId="20577"/>
-        <pc:sldMkLst>
-          <pc:docMk/>
-          <pc:sldMk cId="1871769152" sldId="577"/>
-        </pc:sldMkLst>
-        <pc:spChg chg="mod">
-          <ac:chgData name="Wang, Aili" userId="5a9127d9-68dd-458b-beb6-6d3b6c430786" providerId="ADAL" clId="{BDC593C2-9FB4-437A-9335-12DD20EDC83F}" dt="2026-06-24T10:21:50.544" v="41" actId="20577"/>
-          <ac:spMkLst>
-            <pc:docMk/>
-            <pc:sldMk cId="1871769152" sldId="577"/>
-            <ac:spMk id="2" creationId="{26F7D2EC-6267-4CA9-940D-B21F1114F8FA}"/>
-          </ac:spMkLst>
-        </pc:spChg>
-      </pc:sldChg>
-    </pc:docChg>
-  </pc:docChgLst>
-</pc:chgInfo>
 </file>
 
 <file path=ppt/notesMasters/notesMaster1.xml><?xml version="1.0" encoding="utf-8"?>
@@ -1008,7 +211,6 @@
           <a:p>
             <a:fld id="{7D6F1B72-1F8A-48DA-94DF-978082504800}" type="datetimeFigureOut">
               <a:rPr lang="zh-CN" altLang="en-US" smtClean="0"/>
-              <a:t>2026/6/24</a:t>
             </a:fld>
             <a:endParaRPr lang="zh-CN" altLang="en-US"/>
           </a:p>
@@ -1075,6 +277,7 @@
               <a:rPr lang="zh-CN" altLang="en-US"/>
               <a:t>单击此处编辑母版文本样式</a:t>
             </a:r>
+            <a:endParaRPr lang="zh-CN" altLang="en-US"/>
           </a:p>
           <a:p>
             <a:pPr lvl="1"/>
@@ -1082,6 +285,7 @@
               <a:rPr lang="zh-CN" altLang="en-US"/>
               <a:t>二级</a:t>
             </a:r>
+            <a:endParaRPr lang="zh-CN" altLang="en-US"/>
           </a:p>
           <a:p>
             <a:pPr lvl="2"/>
@@ -1089,6 +293,7 @@
               <a:rPr lang="zh-CN" altLang="en-US"/>
               <a:t>三级</a:t>
             </a:r>
+            <a:endParaRPr lang="zh-CN" altLang="en-US"/>
           </a:p>
           <a:p>
             <a:pPr lvl="3"/>
@@ -1096,6 +301,7 @@
               <a:rPr lang="zh-CN" altLang="en-US"/>
               <a:t>四级</a:t>
             </a:r>
+            <a:endParaRPr lang="zh-CN" altLang="en-US"/>
           </a:p>
           <a:p>
             <a:pPr lvl="4"/>
@@ -1103,6 +309,7 @@
               <a:rPr lang="zh-CN" altLang="en-US"/>
               <a:t>五级</a:t>
             </a:r>
+            <a:endParaRPr lang="zh-CN" altLang="en-US"/>
           </a:p>
         </p:txBody>
       </p:sp>
@@ -1166,18 +373,12 @@
           <a:p>
             <a:fld id="{095ECFFD-F771-4A99-B596-9BEE74658088}" type="slidenum">
               <a:rPr lang="zh-CN" altLang="en-US" smtClean="0"/>
-              <a:t>‹#›</a:t>
             </a:fld>
             <a:endParaRPr lang="zh-CN" altLang="en-US"/>
           </a:p>
         </p:txBody>
       </p:sp>
     </p:spTree>
-    <p:extLst>
-      <p:ext uri="{BB962C8B-B14F-4D97-AF65-F5344CB8AC3E}">
-        <p14:creationId xmlns:p14="http://schemas.microsoft.com/office/powerpoint/2010/main" val="1327841631"/>
-      </p:ext>
-    </p:extLst>
   </p:cSld>
   <p:clrMap bg1="lt1" tx1="dk1" bg2="lt2" tx2="dk2" accent1="accent1" accent2="accent2" accent3="accent3" accent4="accent4" accent5="accent5" accent6="accent6" hlink="hlink" folHlink="folHlink"/>
   <p:notesStyle>
@@ -1352,7 +553,6 @@
               <a:buSzTx/>
               <a:buFontTx/>
               <a:buNone/>
-              <a:tabLst/>
               <a:defRPr/>
             </a:pPr>
             <a:fld id="{E27C95F4-9479-47C4-9CC0-82E2C085454D}" type="slidenum">
@@ -1366,28 +566,10 @@
                 <a:effectLst/>
                 <a:uLnTx/>
                 <a:uFillTx/>
-                <a:latin typeface="等线" panose="02110004020202020204"/>
-                <a:ea typeface="等线" panose="02010600030101010101" pitchFamily="2" charset="-122"/>
+                <a:latin typeface="等线" panose="02010600030101010101" charset="-122"/>
+                <a:ea typeface="等线" panose="02010600030101010101" charset="-122"/>
                 <a:cs typeface="+mn-cs"/>
               </a:rPr>
-              <a:pPr marL="0" marR="0" lvl="0" indent="0" algn="r" defTabSz="914400" rtl="0" eaLnBrk="1" fontAlgn="auto" latinLnBrk="0" hangingPunct="1">
-                <a:lnSpc>
-                  <a:spcPct val="100000"/>
-                </a:lnSpc>
-                <a:spcBef>
-                  <a:spcPts val="0"/>
-                </a:spcBef>
-                <a:spcAft>
-                  <a:spcPts val="0"/>
-                </a:spcAft>
-                <a:buClrTx/>
-                <a:buSzTx/>
-                <a:buFontTx/>
-                <a:buNone/>
-                <a:tabLst/>
-                <a:defRPr/>
-              </a:pPr>
-              <a:t>1</a:t>
             </a:fld>
             <a:endParaRPr kumimoji="0" lang="zh-CN" altLang="en-US" sz="1200" b="0" i="0" u="none" strike="noStrike" kern="1200" cap="none" spc="0" normalizeH="0" baseline="0" noProof="0">
               <a:ln>
@@ -1399,8 +581,8 @@
               <a:effectLst/>
               <a:uLnTx/>
               <a:uFillTx/>
-              <a:latin typeface="等线" panose="02110004020202020204"/>
-              <a:ea typeface="等线" panose="02010600030101010101" pitchFamily="2" charset="-122"/>
+              <a:latin typeface="等线" panose="02010600030101010101" charset="-122"/>
+              <a:ea typeface="等线" panose="02010600030101010101" charset="-122"/>
               <a:cs typeface="+mn-cs"/>
             </a:endParaRPr>
           </a:p>
@@ -1408,13 +590,7 @@
       </p:sp>
       <p:sp>
         <p:nvSpPr>
-          <p:cNvPr id="5" name="Footer Placeholder 4">
-            <a:extLst>
-              <a:ext uri="{FF2B5EF4-FFF2-40B4-BE49-F238E27FC236}">
-                <a16:creationId xmlns:a16="http://schemas.microsoft.com/office/drawing/2014/main" id="{067625EF-E209-4CCC-88E7-142A1FE6A1B6}"/>
-              </a:ext>
-            </a:extLst>
-          </p:cNvPr>
+          <p:cNvPr id="5" name="Footer Placeholder 4"/>
           <p:cNvSpPr>
             <a:spLocks noGrp="1"/>
           </p:cNvSpPr>
@@ -1441,7 +617,6 @@
               <a:buSzTx/>
               <a:buFontTx/>
               <a:buNone/>
-              <a:tabLst/>
               <a:defRPr/>
             </a:pPr>
             <a:endParaRPr kumimoji="0" lang="zh-CN" altLang="en-US" sz="1200" b="0" i="0" u="none" strike="noStrike" kern="1200" cap="none" spc="0" normalizeH="0" baseline="0" noProof="0">
@@ -1454,19 +629,14 @@
               <a:effectLst/>
               <a:uLnTx/>
               <a:uFillTx/>
-              <a:latin typeface="等线" panose="02110004020202020204"/>
-              <a:ea typeface="等线" panose="02010600030101010101" pitchFamily="2" charset="-122"/>
+              <a:latin typeface="等线" panose="02010600030101010101" charset="-122"/>
+              <a:ea typeface="等线" panose="02010600030101010101" charset="-122"/>
               <a:cs typeface="+mn-cs"/>
             </a:endParaRPr>
           </a:p>
         </p:txBody>
       </p:sp>
     </p:spTree>
-    <p:extLst>
-      <p:ext uri="{BB962C8B-B14F-4D97-AF65-F5344CB8AC3E}">
-        <p14:creationId xmlns:p14="http://schemas.microsoft.com/office/powerpoint/2010/main" val="3155062530"/>
-      </p:ext>
-    </p:extLst>
   </p:cSld>
   <p:clrMapOvr>
     <a:masterClrMapping/>
@@ -1551,7 +721,6 @@
               <a:buSzTx/>
               <a:buFontTx/>
               <a:buNone/>
-              <a:tabLst/>
               <a:defRPr/>
             </a:pPr>
             <a:endParaRPr kumimoji="0" lang="zh-CN" altLang="en-US" sz="1200" b="0" i="0" u="none" strike="noStrike" kern="1200" cap="none" spc="0" normalizeH="0" baseline="0" noProof="0">
@@ -1564,8 +733,8 @@
               <a:effectLst/>
               <a:uLnTx/>
               <a:uFillTx/>
-              <a:latin typeface="等线" panose="02110004020202020204"/>
-              <a:ea typeface="等线" panose="02010600030101010101" pitchFamily="2" charset="-122"/>
+              <a:latin typeface="等线" panose="02010600030101010101" charset="-122"/>
+              <a:ea typeface="等线" panose="02010600030101010101" charset="-122"/>
               <a:cs typeface="+mn-cs"/>
             </a:endParaRPr>
           </a:p>
@@ -1600,7 +769,6 @@
               <a:buSzTx/>
               <a:buFontTx/>
               <a:buNone/>
-              <a:tabLst/>
               <a:defRPr/>
             </a:pPr>
             <a:fld id="{E27C95F4-9479-47C4-9CC0-82E2C085454D}" type="slidenum">
@@ -1614,28 +782,10 @@
                 <a:effectLst/>
                 <a:uLnTx/>
                 <a:uFillTx/>
-                <a:latin typeface="等线" panose="02110004020202020204"/>
-                <a:ea typeface="等线" panose="02010600030101010101" pitchFamily="2" charset="-122"/>
+                <a:latin typeface="等线" panose="02010600030101010101" charset="-122"/>
+                <a:ea typeface="等线" panose="02010600030101010101" charset="-122"/>
                 <a:cs typeface="+mn-cs"/>
               </a:rPr>
-              <a:pPr marL="0" marR="0" lvl="0" indent="0" algn="r" defTabSz="914400" rtl="0" eaLnBrk="1" fontAlgn="auto" latinLnBrk="0" hangingPunct="1">
-                <a:lnSpc>
-                  <a:spcPct val="100000"/>
-                </a:lnSpc>
-                <a:spcBef>
-                  <a:spcPts val="0"/>
-                </a:spcBef>
-                <a:spcAft>
-                  <a:spcPts val="0"/>
-                </a:spcAft>
-                <a:buClrTx/>
-                <a:buSzTx/>
-                <a:buFontTx/>
-                <a:buNone/>
-                <a:tabLst/>
-                <a:defRPr/>
-              </a:pPr>
-              <a:t>2</a:t>
             </a:fld>
             <a:endParaRPr kumimoji="0" lang="zh-CN" altLang="en-US" sz="1200" b="0" i="0" u="none" strike="noStrike" kern="1200" cap="none" spc="0" normalizeH="0" baseline="0" noProof="0">
               <a:ln>
@@ -1647,19 +797,14 @@
               <a:effectLst/>
               <a:uLnTx/>
               <a:uFillTx/>
-              <a:latin typeface="等线" panose="02110004020202020204"/>
-              <a:ea typeface="等线" panose="02010600030101010101" pitchFamily="2" charset="-122"/>
+              <a:latin typeface="等线" panose="02010600030101010101" charset="-122"/>
+              <a:ea typeface="等线" panose="02010600030101010101" charset="-122"/>
               <a:cs typeface="+mn-cs"/>
             </a:endParaRPr>
           </a:p>
         </p:txBody>
       </p:sp>
     </p:spTree>
-    <p:extLst>
-      <p:ext uri="{BB962C8B-B14F-4D97-AF65-F5344CB8AC3E}">
-        <p14:creationId xmlns:p14="http://schemas.microsoft.com/office/powerpoint/2010/main" val="1111671455"/>
-      </p:ext>
-    </p:extLst>
   </p:cSld>
   <p:clrMapOvr>
     <a:masterClrMapping/>
@@ -1725,6 +870,7 @@
               <a:rPr lang="en-US" b="1" dirty="0"/>
               <a:t>Key Insight</a:t>
             </a:r>
+            <a:endParaRPr lang="en-US" b="1" dirty="0"/>
           </a:p>
           <a:p>
             <a:pPr>
@@ -1735,6 +881,7 @@
               <a:rPr lang="en-US" dirty="0"/>
               <a:t>Forward pass remains biologically plausible. </a:t>
             </a:r>
+            <a:endParaRPr lang="en-US" dirty="0"/>
           </a:p>
           <a:p>
             <a:pPr>
@@ -1745,6 +892,7 @@
               <a:rPr lang="en-US" dirty="0"/>
               <a:t>Backward pass becomes differentiable. </a:t>
             </a:r>
+            <a:endParaRPr lang="en-US" dirty="0"/>
           </a:p>
           <a:p>
             <a:pPr>
@@ -1755,6 +903,7 @@
               <a:rPr lang="en-US" dirty="0"/>
               <a:t>Enables gradient-based optimization.</a:t>
             </a:r>
+            <a:endParaRPr lang="en-US" dirty="0"/>
           </a:p>
           <a:p>
             <a:endParaRPr lang="en-US" dirty="0"/>
@@ -1778,18 +927,12 @@
           <a:p>
             <a:fld id="{095ECFFD-F771-4A99-B596-9BEE74658088}" type="slidenum">
               <a:rPr lang="zh-CN" altLang="en-US" smtClean="0"/>
-              <a:t>4</a:t>
             </a:fld>
             <a:endParaRPr lang="zh-CN" altLang="en-US"/>
           </a:p>
         </p:txBody>
       </p:sp>
     </p:spTree>
-    <p:extLst>
-      <p:ext uri="{BB962C8B-B14F-4D97-AF65-F5344CB8AC3E}">
-        <p14:creationId xmlns:p14="http://schemas.microsoft.com/office/powerpoint/2010/main" val="3728508028"/>
-      </p:ext>
-    </p:extLst>
   </p:cSld>
   <p:clrMapOvr>
     <a:masterClrMapping/>
@@ -1844,66 +987,70 @@
             <a:r>
               <a:rPr lang="en-US" altLang="zh-CN" sz="1800" b="0" i="1" u="none" strike="noStrike" baseline="0" dirty="0">
                 <a:latin typeface="CMMI12"/>
-                <a:ea typeface="FangSong" panose="02010609060101010101" pitchFamily="49" charset="-122"/>
+                <a:ea typeface="仿宋" panose="02010609060101010101" pitchFamily="49" charset="-122"/>
               </a:rPr>
               <a:t>α </a:t>
             </a:r>
             <a:r>
               <a:rPr lang="zh-CN" altLang="en-US" sz="1800" b="0" i="0" u="none" strike="noStrike" baseline="0" dirty="0">
-                <a:latin typeface="FangSong" panose="02010609060101010101" pitchFamily="49" charset="-122"/>
-                <a:ea typeface="FangSong" panose="02010609060101010101" pitchFamily="49" charset="-122"/>
+                <a:latin typeface="仿宋" panose="02010609060101010101" pitchFamily="49" charset="-122"/>
+                <a:ea typeface="仿宋" panose="02010609060101010101" pitchFamily="49" charset="-122"/>
               </a:rPr>
               <a:t>是控制曲线陡峭程度的超参数</a:t>
             </a:r>
             <a:endParaRPr lang="en-US" altLang="zh-CN" sz="1800" b="0" i="0" u="none" strike="noStrike" baseline="0" dirty="0">
               <a:latin typeface="TimesNewRomanPSMT"/>
-              <a:ea typeface="FangSong" panose="02010609060101010101" pitchFamily="49" charset="-122"/>
+              <a:ea typeface="仿宋" panose="02010609060101010101" pitchFamily="49" charset="-122"/>
             </a:endParaRPr>
           </a:p>
           <a:p>
             <a:pPr algn="l"/>
             <a:r>
               <a:rPr lang="zh-CN" altLang="en-US" sz="1800" b="0" i="0" u="none" strike="noStrike" baseline="0" dirty="0">
-                <a:latin typeface="FangSong" panose="02010609060101010101" pitchFamily="49" charset="-122"/>
-                <a:ea typeface="FangSong" panose="02010609060101010101" pitchFamily="49" charset="-122"/>
+                <a:latin typeface="仿宋" panose="02010609060101010101" pitchFamily="49" charset="-122"/>
+                <a:ea typeface="仿宋" panose="02010609060101010101" pitchFamily="49" charset="-122"/>
               </a:rPr>
               <a:t>通过调节</a:t>
             </a:r>
             <a:r>
               <a:rPr lang="en-US" altLang="zh-CN" sz="1800" b="0" i="1" u="none" strike="noStrike" baseline="0" dirty="0">
                 <a:latin typeface="CMMI12"/>
-                <a:ea typeface="FangSong" panose="02010609060101010101" pitchFamily="49" charset="-122"/>
+                <a:ea typeface="仿宋" panose="02010609060101010101" pitchFamily="49" charset="-122"/>
               </a:rPr>
               <a:t>α</a:t>
             </a:r>
             <a:r>
               <a:rPr lang="zh-CN" altLang="en-US" sz="1800" b="0" i="0" u="none" strike="noStrike" baseline="0" dirty="0">
-                <a:latin typeface="FangSong" panose="02010609060101010101" pitchFamily="49" charset="-122"/>
-                <a:ea typeface="FangSong" panose="02010609060101010101" pitchFamily="49" charset="-122"/>
+                <a:latin typeface="仿宋" panose="02010609060101010101" pitchFamily="49" charset="-122"/>
+                <a:ea typeface="仿宋" panose="02010609060101010101" pitchFamily="49" charset="-122"/>
               </a:rPr>
               <a:t>，模型可以在梯度的</a:t>
             </a:r>
+            <a:endParaRPr lang="zh-CN" altLang="en-US" sz="1800" b="0" i="0" u="none" strike="noStrike" baseline="0" dirty="0">
+              <a:latin typeface="仿宋" panose="02010609060101010101" pitchFamily="49" charset="-122"/>
+              <a:ea typeface="仿宋" panose="02010609060101010101" pitchFamily="49" charset="-122"/>
+            </a:endParaRPr>
           </a:p>
           <a:p>
             <a:pPr algn="l"/>
             <a:r>
               <a:rPr lang="zh-CN" altLang="en-US" sz="1800" b="0" i="0" u="none" strike="noStrike" baseline="0" dirty="0">
-                <a:latin typeface="FangSong" panose="02010609060101010101" pitchFamily="49" charset="-122"/>
-                <a:ea typeface="FangSong" panose="02010609060101010101" pitchFamily="49" charset="-122"/>
+                <a:latin typeface="仿宋" panose="02010609060101010101" pitchFamily="49" charset="-122"/>
+                <a:ea typeface="仿宋" panose="02010609060101010101" pitchFamily="49" charset="-122"/>
               </a:rPr>
               <a:t>准确性与传播的有效性之间取得平衡，从而实现</a:t>
             </a:r>
             <a:r>
               <a:rPr lang="en-US" altLang="zh-CN" sz="1800" b="0" i="0" u="none" strike="noStrike" baseline="0" dirty="0">
                 <a:latin typeface="TimesNewRomanPSMT"/>
-                <a:ea typeface="FangSong" panose="02010609060101010101" pitchFamily="49" charset="-122"/>
+                <a:ea typeface="仿宋" panose="02010609060101010101" pitchFamily="49" charset="-122"/>
               </a:rPr>
               <a:t>SNN </a:t>
             </a:r>
             <a:r>
               <a:rPr lang="zh-CN" altLang="en-US" sz="1800" b="0" i="0" u="none" strike="noStrike" baseline="0" dirty="0">
-                <a:latin typeface="FangSong" panose="02010609060101010101" pitchFamily="49" charset="-122"/>
-                <a:ea typeface="FangSong" panose="02010609060101010101" pitchFamily="49" charset="-122"/>
+                <a:latin typeface="仿宋" panose="02010609060101010101" pitchFamily="49" charset="-122"/>
+                <a:ea typeface="仿宋" panose="02010609060101010101" pitchFamily="49" charset="-122"/>
               </a:rPr>
               <a:t>的高性能训练。</a:t>
             </a:r>
@@ -1928,18 +1075,12 @@
           <a:p>
             <a:fld id="{095ECFFD-F771-4A99-B596-9BEE74658088}" type="slidenum">
               <a:rPr lang="zh-CN" altLang="en-US" smtClean="0"/>
-              <a:t>5</a:t>
             </a:fld>
             <a:endParaRPr lang="zh-CN" altLang="en-US"/>
           </a:p>
         </p:txBody>
       </p:sp>
     </p:spTree>
-    <p:extLst>
-      <p:ext uri="{BB962C8B-B14F-4D97-AF65-F5344CB8AC3E}">
-        <p14:creationId xmlns:p14="http://schemas.microsoft.com/office/powerpoint/2010/main" val="857356002"/>
-      </p:ext>
-    </p:extLst>
   </p:cSld>
   <p:clrMapOvr>
     <a:masterClrMapping/>
@@ -1995,30 +1136,35 @@
               <a:rPr lang="en-US" dirty="0"/>
               <a:t>To compute gradients:</a:t>
             </a:r>
+            <a:endParaRPr lang="en-US" dirty="0"/>
           </a:p>
           <a:p>
             <a:r>
               <a:rPr lang="en-US" dirty="0"/>
               <a:t>✓ Store membrane potentials</a:t>
             </a:r>
+            <a:endParaRPr lang="en-US" dirty="0"/>
           </a:p>
           <a:p>
             <a:r>
               <a:rPr lang="en-US" dirty="0"/>
               <a:t>✓ Store spikes</a:t>
             </a:r>
+            <a:endParaRPr lang="en-US" dirty="0"/>
           </a:p>
           <a:p>
             <a:r>
               <a:rPr lang="en-US" dirty="0"/>
               <a:t>✓ Store computation graph</a:t>
             </a:r>
+            <a:endParaRPr lang="en-US" dirty="0"/>
           </a:p>
           <a:p>
             <a:r>
               <a:rPr lang="en-US" dirty="0"/>
               <a:t>for every timestep.</a:t>
             </a:r>
+            <a:endParaRPr lang="en-US" dirty="0"/>
           </a:p>
           <a:p>
             <a:endParaRPr lang="en-US" dirty="0"/>
@@ -2035,6 +1181,7 @@
               <a:rPr lang="en-US" dirty="0"/>
               <a:t>may cause:</a:t>
             </a:r>
+            <a:endParaRPr lang="en-US" dirty="0"/>
           </a:p>
           <a:p>
             <a:pPr>
@@ -2045,6 +1192,7 @@
               <a:rPr lang="en-US" dirty="0"/>
               <a:t>vanishing gradients </a:t>
             </a:r>
+            <a:endParaRPr lang="en-US" dirty="0"/>
           </a:p>
           <a:p>
             <a:pPr>
@@ -2055,6 +1203,7 @@
               <a:rPr lang="en-US" dirty="0"/>
               <a:t>exploding gradients</a:t>
             </a:r>
+            <a:endParaRPr lang="en-US" dirty="0"/>
           </a:p>
           <a:p>
             <a:endParaRPr lang="en-US" dirty="0"/>
@@ -2084,18 +1233,12 @@
           <a:p>
             <a:fld id="{095ECFFD-F771-4A99-B596-9BEE74658088}" type="slidenum">
               <a:rPr lang="zh-CN" altLang="en-US" smtClean="0"/>
-              <a:t>9</a:t>
             </a:fld>
             <a:endParaRPr lang="zh-CN" altLang="en-US"/>
           </a:p>
         </p:txBody>
       </p:sp>
     </p:spTree>
-    <p:extLst>
-      <p:ext uri="{BB962C8B-B14F-4D97-AF65-F5344CB8AC3E}">
-        <p14:creationId xmlns:p14="http://schemas.microsoft.com/office/powerpoint/2010/main" val="4254355151"/>
-      </p:ext>
-    </p:extLst>
   </p:cSld>
   <p:clrMapOvr>
     <a:masterClrMapping/>
@@ -2151,6 +1294,7 @@
               <a:rPr lang="en-US" dirty="0"/>
               <a:t>Use only local information:</a:t>
             </a:r>
+            <a:endParaRPr lang="en-US" dirty="0"/>
           </a:p>
         </p:txBody>
       </p:sp>
@@ -2171,18 +1315,12 @@
           <a:p>
             <a:fld id="{095ECFFD-F771-4A99-B596-9BEE74658088}" type="slidenum">
               <a:rPr lang="zh-CN" altLang="en-US" smtClean="0"/>
-              <a:t>10</a:t>
             </a:fld>
             <a:endParaRPr lang="zh-CN" altLang="en-US"/>
           </a:p>
         </p:txBody>
       </p:sp>
     </p:spTree>
-    <p:extLst>
-      <p:ext uri="{BB962C8B-B14F-4D97-AF65-F5344CB8AC3E}">
-        <p14:creationId xmlns:p14="http://schemas.microsoft.com/office/powerpoint/2010/main" val="2135890768"/>
-      </p:ext>
-    </p:extLst>
   </p:cSld>
   <p:clrMapOvr>
     <a:masterClrMapping/>
@@ -2238,6 +1376,7 @@
               <a:rPr lang="en-US" dirty="0"/>
               <a:t>BPTT remembers every timestep and computes gradients later; Online Learning summarizes the past into an eligibility trace and updates weights immediately.</a:t>
             </a:r>
+            <a:endParaRPr lang="en-US" dirty="0"/>
           </a:p>
         </p:txBody>
       </p:sp>
@@ -2258,18 +1397,94 @@
           <a:p>
             <a:fld id="{095ECFFD-F771-4A99-B596-9BEE74658088}" type="slidenum">
               <a:rPr lang="zh-CN" altLang="en-US" smtClean="0"/>
-              <a:t>15</a:t>
             </a:fld>
             <a:endParaRPr lang="zh-CN" altLang="en-US"/>
           </a:p>
         </p:txBody>
       </p:sp>
     </p:spTree>
-    <p:extLst>
-      <p:ext uri="{BB962C8B-B14F-4D97-AF65-F5344CB8AC3E}">
-        <p14:creationId xmlns:p14="http://schemas.microsoft.com/office/powerpoint/2010/main" val="2252150634"/>
-      </p:ext>
-    </p:extLst>
+  </p:cSld>
+  <p:clrMapOvr>
+    <a:masterClrMapping/>
+  </p:clrMapOvr>
+</p:notes>
+</file>
+
+<file path=ppt/notesSlides/notesSlide8.xml><?xml version="1.0" encoding="utf-8"?>
+<p:notes xmlns:a="http://schemas.openxmlformats.org/drawingml/2006/main" xmlns:r="http://schemas.openxmlformats.org/officeDocument/2006/relationships" xmlns:p="http://schemas.openxmlformats.org/presentationml/2006/main">
+  <p:cSld>
+    <p:spTree>
+      <p:nvGrpSpPr>
+        <p:cNvPr id="1" name=""/>
+        <p:cNvGrpSpPr/>
+        <p:nvPr/>
+      </p:nvGrpSpPr>
+      <p:grpSpPr>
+        <a:xfrm>
+          <a:off x="0" y="0"/>
+          <a:ext cx="0" cy="0"/>
+          <a:chOff x="0" y="0"/>
+          <a:chExt cx="0" cy="0"/>
+        </a:xfrm>
+      </p:grpSpPr>
+      <p:sp>
+        <p:nvSpPr>
+          <p:cNvPr id="2" name="Slide Image Placeholder 1"/>
+          <p:cNvSpPr>
+            <a:spLocks noGrp="1" noRot="1" noChangeAspect="1"/>
+          </p:cNvSpPr>
+          <p:nvPr>
+            <p:ph type="sldImg"/>
+          </p:nvPr>
+        </p:nvSpPr>
+        <p:spPr/>
+      </p:sp>
+      <p:sp>
+        <p:nvSpPr>
+          <p:cNvPr id="3" name="Notes Placeholder 2"/>
+          <p:cNvSpPr>
+            <a:spLocks noGrp="1"/>
+          </p:cNvSpPr>
+          <p:nvPr>
+            <p:ph type="body" idx="1"/>
+          </p:nvPr>
+        </p:nvSpPr>
+        <p:spPr/>
+        <p:txBody>
+          <a:bodyPr/>
+          <a:lstStyle/>
+          <a:p>
+            <a:r>
+              <a:rPr lang="en-US" dirty="0"/>
+              <a:t>BPTT remembers every timestep and computes gradients later; Online Learning summarizes the past into an eligibility trace and updates weights immediately.</a:t>
+            </a:r>
+            <a:endParaRPr lang="en-US" dirty="0"/>
+          </a:p>
+        </p:txBody>
+      </p:sp>
+      <p:sp>
+        <p:nvSpPr>
+          <p:cNvPr id="4" name="Slide Number Placeholder 3"/>
+          <p:cNvSpPr>
+            <a:spLocks noGrp="1"/>
+          </p:cNvSpPr>
+          <p:nvPr>
+            <p:ph type="sldNum" sz="quarter" idx="5"/>
+          </p:nvPr>
+        </p:nvSpPr>
+        <p:spPr/>
+        <p:txBody>
+          <a:bodyPr/>
+          <a:lstStyle/>
+          <a:p>
+            <a:fld id="{095ECFFD-F771-4A99-B596-9BEE74658088}" type="slidenum">
+              <a:rPr lang="zh-CN" altLang="en-US" smtClean="0"/>
+            </a:fld>
+            <a:endParaRPr lang="zh-CN" altLang="en-US"/>
+          </a:p>
+        </p:txBody>
+      </p:sp>
+    </p:spTree>
   </p:cSld>
   <p:clrMapOvr>
     <a:masterClrMapping/>
@@ -2296,13 +1511,7 @@
       </p:grpSpPr>
       <p:sp>
         <p:nvSpPr>
-          <p:cNvPr id="2" name="Title 1">
-            <a:extLst>
-              <a:ext uri="{FF2B5EF4-FFF2-40B4-BE49-F238E27FC236}">
-                <a16:creationId xmlns:a16="http://schemas.microsoft.com/office/drawing/2014/main" id="{22E5ACA3-A30B-EC99-3284-2C6AF51F1A6E}"/>
-              </a:ext>
-            </a:extLst>
-          </p:cNvPr>
+          <p:cNvPr id="2" name="Title 1"/>
           <p:cNvSpPr>
             <a:spLocks noGrp="1"/>
           </p:cNvSpPr>
@@ -2334,13 +1543,7 @@
       </p:sp>
       <p:sp>
         <p:nvSpPr>
-          <p:cNvPr id="3" name="Subtitle 2">
-            <a:extLst>
-              <a:ext uri="{FF2B5EF4-FFF2-40B4-BE49-F238E27FC236}">
-                <a16:creationId xmlns:a16="http://schemas.microsoft.com/office/drawing/2014/main" id="{77C91F50-4A64-F65D-8A80-851D0F5FFA77}"/>
-              </a:ext>
-            </a:extLst>
-          </p:cNvPr>
+          <p:cNvPr id="3" name="Subtitle 2"/>
           <p:cNvSpPr>
             <a:spLocks noGrp="1"/>
           </p:cNvSpPr>
@@ -2405,13 +1608,7 @@
       </p:sp>
       <p:sp>
         <p:nvSpPr>
-          <p:cNvPr id="4" name="Date Placeholder 3">
-            <a:extLst>
-              <a:ext uri="{FF2B5EF4-FFF2-40B4-BE49-F238E27FC236}">
-                <a16:creationId xmlns:a16="http://schemas.microsoft.com/office/drawing/2014/main" id="{1DE59D97-17A3-8693-DBDA-01E02C8CFB5C}"/>
-              </a:ext>
-            </a:extLst>
-          </p:cNvPr>
+          <p:cNvPr id="4" name="Date Placeholder 3"/>
           <p:cNvSpPr>
             <a:spLocks noGrp="1"/>
           </p:cNvSpPr>
@@ -2426,7 +1623,6 @@
           <a:p>
             <a:fld id="{172DC942-475A-4069-94A2-11EB87937FD4}" type="datetime1">
               <a:rPr lang="en-US" smtClean="0"/>
-              <a:t>6/24/2026</a:t>
             </a:fld>
             <a:endParaRPr lang="en-US" dirty="0"/>
           </a:p>
@@ -2434,13 +1630,7 @@
       </p:sp>
       <p:sp>
         <p:nvSpPr>
-          <p:cNvPr id="5" name="Footer Placeholder 4">
-            <a:extLst>
-              <a:ext uri="{FF2B5EF4-FFF2-40B4-BE49-F238E27FC236}">
-                <a16:creationId xmlns:a16="http://schemas.microsoft.com/office/drawing/2014/main" id="{D848F064-91E0-F44C-0083-33359338C89D}"/>
-              </a:ext>
-            </a:extLst>
-          </p:cNvPr>
+          <p:cNvPr id="5" name="Footer Placeholder 4"/>
           <p:cNvSpPr>
             <a:spLocks noGrp="1"/>
           </p:cNvSpPr>
@@ -2463,13 +1653,7 @@
       </p:sp>
       <p:sp>
         <p:nvSpPr>
-          <p:cNvPr id="6" name="Slide Number Placeholder 5">
-            <a:extLst>
-              <a:ext uri="{FF2B5EF4-FFF2-40B4-BE49-F238E27FC236}">
-                <a16:creationId xmlns:a16="http://schemas.microsoft.com/office/drawing/2014/main" id="{FA47BF33-7C14-65BD-29CA-EB07481CF65B}"/>
-              </a:ext>
-            </a:extLst>
-          </p:cNvPr>
+          <p:cNvPr id="6" name="Slide Number Placeholder 5"/>
           <p:cNvSpPr>
             <a:spLocks noGrp="1"/>
           </p:cNvSpPr>
@@ -2484,18 +1668,12 @@
           <a:p>
             <a:fld id="{48F63A3B-78C7-47BE-AE5E-E10140E04643}" type="slidenum">
               <a:rPr lang="en-US" smtClean="0"/>
-              <a:t>‹#›</a:t>
             </a:fld>
             <a:endParaRPr lang="en-US" dirty="0"/>
           </a:p>
         </p:txBody>
       </p:sp>
     </p:spTree>
-    <p:extLst>
-      <p:ext uri="{BB962C8B-B14F-4D97-AF65-F5344CB8AC3E}">
-        <p14:creationId xmlns:p14="http://schemas.microsoft.com/office/powerpoint/2010/main" val="766518219"/>
-      </p:ext>
-    </p:extLst>
   </p:cSld>
   <p:clrMapOvr>
     <a:masterClrMapping/>
@@ -2522,13 +1700,7 @@
       </p:grpSpPr>
       <p:sp>
         <p:nvSpPr>
-          <p:cNvPr id="2" name="Title 1">
-            <a:extLst>
-              <a:ext uri="{FF2B5EF4-FFF2-40B4-BE49-F238E27FC236}">
-                <a16:creationId xmlns:a16="http://schemas.microsoft.com/office/drawing/2014/main" id="{4D38E82A-07C4-4787-B765-8869DA855005}"/>
-              </a:ext>
-            </a:extLst>
-          </p:cNvPr>
+          <p:cNvPr id="2" name="Title 1"/>
           <p:cNvSpPr>
             <a:spLocks noGrp="1"/>
           </p:cNvSpPr>
@@ -2551,13 +1723,7 @@
       </p:sp>
       <p:sp>
         <p:nvSpPr>
-          <p:cNvPr id="3" name="Vertical Text Placeholder 2">
-            <a:extLst>
-              <a:ext uri="{FF2B5EF4-FFF2-40B4-BE49-F238E27FC236}">
-                <a16:creationId xmlns:a16="http://schemas.microsoft.com/office/drawing/2014/main" id="{B30F419D-1941-499C-8A18-F353ECD9D272}"/>
-              </a:ext>
-            </a:extLst>
-          </p:cNvPr>
+          <p:cNvPr id="3" name="Vertical Text Placeholder 2"/>
           <p:cNvSpPr>
             <a:spLocks noGrp="1"/>
           </p:cNvSpPr>
@@ -2575,6 +1741,7 @@
               <a:rPr lang="en-US" altLang="zh-CN"/>
               <a:t>Click to edit Master text styles</a:t>
             </a:r>
+            <a:endParaRPr lang="en-US" altLang="zh-CN"/>
           </a:p>
           <a:p>
             <a:pPr lvl="1"/>
@@ -2582,6 +1749,7 @@
               <a:rPr lang="en-US" altLang="zh-CN"/>
               <a:t>Second level</a:t>
             </a:r>
+            <a:endParaRPr lang="en-US" altLang="zh-CN"/>
           </a:p>
           <a:p>
             <a:pPr lvl="2"/>
@@ -2589,6 +1757,7 @@
               <a:rPr lang="en-US" altLang="zh-CN"/>
               <a:t>Third level</a:t>
             </a:r>
+            <a:endParaRPr lang="en-US" altLang="zh-CN"/>
           </a:p>
           <a:p>
             <a:pPr lvl="3"/>
@@ -2596,6 +1765,7 @@
               <a:rPr lang="en-US" altLang="zh-CN"/>
               <a:t>Fourth level</a:t>
             </a:r>
+            <a:endParaRPr lang="en-US" altLang="zh-CN"/>
           </a:p>
           <a:p>
             <a:pPr lvl="4"/>
@@ -2609,13 +1779,7 @@
       </p:sp>
       <p:sp>
         <p:nvSpPr>
-          <p:cNvPr id="4" name="Date Placeholder 3">
-            <a:extLst>
-              <a:ext uri="{FF2B5EF4-FFF2-40B4-BE49-F238E27FC236}">
-                <a16:creationId xmlns:a16="http://schemas.microsoft.com/office/drawing/2014/main" id="{3246FC6C-1460-CDFA-7B7B-E8D0A5B6EB6D}"/>
-              </a:ext>
-            </a:extLst>
-          </p:cNvPr>
+          <p:cNvPr id="4" name="Date Placeholder 3"/>
           <p:cNvSpPr>
             <a:spLocks noGrp="1"/>
           </p:cNvSpPr>
@@ -2630,7 +1794,6 @@
           <a:p>
             <a:fld id="{5E8C43C7-A0FE-4403-800C-056E5346ED83}" type="datetime1">
               <a:rPr lang="en-US" smtClean="0"/>
-              <a:t>6/24/2026</a:t>
             </a:fld>
             <a:endParaRPr lang="en-US" dirty="0"/>
           </a:p>
@@ -2638,13 +1801,7 @@
       </p:sp>
       <p:sp>
         <p:nvSpPr>
-          <p:cNvPr id="5" name="Footer Placeholder 4">
-            <a:extLst>
-              <a:ext uri="{FF2B5EF4-FFF2-40B4-BE49-F238E27FC236}">
-                <a16:creationId xmlns:a16="http://schemas.microsoft.com/office/drawing/2014/main" id="{2C8F130D-A307-DE42-6DA5-593F08E1642A}"/>
-              </a:ext>
-            </a:extLst>
-          </p:cNvPr>
+          <p:cNvPr id="5" name="Footer Placeholder 4"/>
           <p:cNvSpPr>
             <a:spLocks noGrp="1"/>
           </p:cNvSpPr>
@@ -2667,13 +1824,7 @@
       </p:sp>
       <p:sp>
         <p:nvSpPr>
-          <p:cNvPr id="6" name="Slide Number Placeholder 5">
-            <a:extLst>
-              <a:ext uri="{FF2B5EF4-FFF2-40B4-BE49-F238E27FC236}">
-                <a16:creationId xmlns:a16="http://schemas.microsoft.com/office/drawing/2014/main" id="{8A144793-9975-CF3D-6736-80386274753B}"/>
-              </a:ext>
-            </a:extLst>
-          </p:cNvPr>
+          <p:cNvPr id="6" name="Slide Number Placeholder 5"/>
           <p:cNvSpPr>
             <a:spLocks noGrp="1"/>
           </p:cNvSpPr>
@@ -2688,18 +1839,12 @@
           <a:p>
             <a:fld id="{48F63A3B-78C7-47BE-AE5E-E10140E04643}" type="slidenum">
               <a:rPr lang="en-US" smtClean="0"/>
-              <a:t>‹#›</a:t>
             </a:fld>
             <a:endParaRPr lang="en-US" dirty="0"/>
           </a:p>
         </p:txBody>
       </p:sp>
     </p:spTree>
-    <p:extLst>
-      <p:ext uri="{BB962C8B-B14F-4D97-AF65-F5344CB8AC3E}">
-        <p14:creationId xmlns:p14="http://schemas.microsoft.com/office/powerpoint/2010/main" val="2213767935"/>
-      </p:ext>
-    </p:extLst>
   </p:cSld>
   <p:clrMapOvr>
     <a:masterClrMapping/>
@@ -2726,13 +1871,7 @@
       </p:grpSpPr>
       <p:sp>
         <p:nvSpPr>
-          <p:cNvPr id="2" name="Vertical Title 1">
-            <a:extLst>
-              <a:ext uri="{FF2B5EF4-FFF2-40B4-BE49-F238E27FC236}">
-                <a16:creationId xmlns:a16="http://schemas.microsoft.com/office/drawing/2014/main" id="{75D79F8C-875B-583C-7536-78E7666FA2B6}"/>
-              </a:ext>
-            </a:extLst>
-          </p:cNvPr>
+          <p:cNvPr id="2" name="Vertical Title 1"/>
           <p:cNvSpPr>
             <a:spLocks noGrp="1"/>
           </p:cNvSpPr>
@@ -2760,13 +1899,7 @@
       </p:sp>
       <p:sp>
         <p:nvSpPr>
-          <p:cNvPr id="3" name="Vertical Text Placeholder 2">
-            <a:extLst>
-              <a:ext uri="{FF2B5EF4-FFF2-40B4-BE49-F238E27FC236}">
-                <a16:creationId xmlns:a16="http://schemas.microsoft.com/office/drawing/2014/main" id="{DF8AD453-1472-D8FF-5984-CA6A82BE33E5}"/>
-              </a:ext>
-            </a:extLst>
-          </p:cNvPr>
+          <p:cNvPr id="3" name="Vertical Text Placeholder 2"/>
           <p:cNvSpPr>
             <a:spLocks noGrp="1"/>
           </p:cNvSpPr>
@@ -2789,6 +1922,7 @@
               <a:rPr lang="en-US" altLang="zh-CN"/>
               <a:t>Click to edit Master text styles</a:t>
             </a:r>
+            <a:endParaRPr lang="en-US" altLang="zh-CN"/>
           </a:p>
           <a:p>
             <a:pPr lvl="1"/>
@@ -2796,6 +1930,7 @@
               <a:rPr lang="en-US" altLang="zh-CN"/>
               <a:t>Second level</a:t>
             </a:r>
+            <a:endParaRPr lang="en-US" altLang="zh-CN"/>
           </a:p>
           <a:p>
             <a:pPr lvl="2"/>
@@ -2803,6 +1938,7 @@
               <a:rPr lang="en-US" altLang="zh-CN"/>
               <a:t>Third level</a:t>
             </a:r>
+            <a:endParaRPr lang="en-US" altLang="zh-CN"/>
           </a:p>
           <a:p>
             <a:pPr lvl="3"/>
@@ -2810,6 +1946,7 @@
               <a:rPr lang="en-US" altLang="zh-CN"/>
               <a:t>Fourth level</a:t>
             </a:r>
+            <a:endParaRPr lang="en-US" altLang="zh-CN"/>
           </a:p>
           <a:p>
             <a:pPr lvl="4"/>
@@ -2823,13 +1960,7 @@
       </p:sp>
       <p:sp>
         <p:nvSpPr>
-          <p:cNvPr id="4" name="Date Placeholder 3">
-            <a:extLst>
-              <a:ext uri="{FF2B5EF4-FFF2-40B4-BE49-F238E27FC236}">
-                <a16:creationId xmlns:a16="http://schemas.microsoft.com/office/drawing/2014/main" id="{985F59E5-0B05-E53A-7AF5-64596D15161D}"/>
-              </a:ext>
-            </a:extLst>
-          </p:cNvPr>
+          <p:cNvPr id="4" name="Date Placeholder 3"/>
           <p:cNvSpPr>
             <a:spLocks noGrp="1"/>
           </p:cNvSpPr>
@@ -2844,7 +1975,6 @@
           <a:p>
             <a:fld id="{092B2655-FAB5-4AA0-B2E3-3B849CA19F9E}" type="datetime1">
               <a:rPr lang="en-US" smtClean="0"/>
-              <a:t>6/24/2026</a:t>
             </a:fld>
             <a:endParaRPr lang="en-US" dirty="0"/>
           </a:p>
@@ -2852,13 +1982,7 @@
       </p:sp>
       <p:sp>
         <p:nvSpPr>
-          <p:cNvPr id="5" name="Footer Placeholder 4">
-            <a:extLst>
-              <a:ext uri="{FF2B5EF4-FFF2-40B4-BE49-F238E27FC236}">
-                <a16:creationId xmlns:a16="http://schemas.microsoft.com/office/drawing/2014/main" id="{4F2E12FF-2EC4-F556-4348-868DCDF091AE}"/>
-              </a:ext>
-            </a:extLst>
-          </p:cNvPr>
+          <p:cNvPr id="5" name="Footer Placeholder 4"/>
           <p:cNvSpPr>
             <a:spLocks noGrp="1"/>
           </p:cNvSpPr>
@@ -2881,13 +2005,7 @@
       </p:sp>
       <p:sp>
         <p:nvSpPr>
-          <p:cNvPr id="6" name="Slide Number Placeholder 5">
-            <a:extLst>
-              <a:ext uri="{FF2B5EF4-FFF2-40B4-BE49-F238E27FC236}">
-                <a16:creationId xmlns:a16="http://schemas.microsoft.com/office/drawing/2014/main" id="{70365FD3-2DBC-98A2-B874-2604BCC2CF37}"/>
-              </a:ext>
-            </a:extLst>
-          </p:cNvPr>
+          <p:cNvPr id="6" name="Slide Number Placeholder 5"/>
           <p:cNvSpPr>
             <a:spLocks noGrp="1"/>
           </p:cNvSpPr>
@@ -2902,18 +2020,12 @@
           <a:p>
             <a:fld id="{48F63A3B-78C7-47BE-AE5E-E10140E04643}" type="slidenum">
               <a:rPr lang="en-US" smtClean="0"/>
-              <a:t>‹#›</a:t>
             </a:fld>
             <a:endParaRPr lang="en-US" dirty="0"/>
           </a:p>
         </p:txBody>
       </p:sp>
     </p:spTree>
-    <p:extLst>
-      <p:ext uri="{BB962C8B-B14F-4D97-AF65-F5344CB8AC3E}">
-        <p14:creationId xmlns:p14="http://schemas.microsoft.com/office/powerpoint/2010/main" val="3351257085"/>
-      </p:ext>
-    </p:extLst>
   </p:cSld>
   <p:clrMapOvr>
     <a:masterClrMapping/>
@@ -2921,7 +2033,196 @@
 </p:sldLayout>
 </file>
 
-<file path=ppt/slideLayouts/slideLayout2.xml><?xml version="1.0" encoding="utf-8"?>
+<file path=ppt/slideLayouts/slideLayout12.xml><?xml version="1.0" encoding="utf-8"?>
+<p:sldLayout xmlns:a="http://schemas.openxmlformats.org/drawingml/2006/main" xmlns:r="http://schemas.openxmlformats.org/officeDocument/2006/relationships" xmlns:p="http://schemas.openxmlformats.org/presentationml/2006/main" type="title" preserve="1">
+  <p:cSld name="Title Slide">
+    <p:spTree>
+      <p:nvGrpSpPr>
+        <p:cNvPr id="1" name=""/>
+        <p:cNvGrpSpPr/>
+        <p:nvPr/>
+      </p:nvGrpSpPr>
+      <p:grpSpPr>
+        <a:xfrm>
+          <a:off x="0" y="0"/>
+          <a:ext cx="0" cy="0"/>
+          <a:chOff x="0" y="0"/>
+          <a:chExt cx="0" cy="0"/>
+        </a:xfrm>
+      </p:grpSpPr>
+      <p:sp>
+        <p:nvSpPr>
+          <p:cNvPr id="2" name="Title 1"/>
+          <p:cNvSpPr>
+            <a:spLocks noGrp="1"/>
+          </p:cNvSpPr>
+          <p:nvPr>
+            <p:ph type="ctrTitle"/>
+          </p:nvPr>
+        </p:nvSpPr>
+        <p:spPr>
+          <a:xfrm>
+            <a:off x="1524000" y="1122363"/>
+            <a:ext cx="9144000" cy="2387600"/>
+          </a:xfrm>
+        </p:spPr>
+        <p:txBody>
+          <a:bodyPr anchor="b"/>
+          <a:lstStyle>
+            <a:lvl1pPr algn="ctr">
+              <a:defRPr sz="6000"/>
+            </a:lvl1pPr>
+          </a:lstStyle>
+          <a:p>
+            <a:r>
+              <a:rPr lang="en-US" altLang="zh-CN" dirty="0"/>
+              <a:t>Click to edit Master title style</a:t>
+            </a:r>
+            <a:endParaRPr lang="zh-CN" altLang="en-US" dirty="0"/>
+          </a:p>
+        </p:txBody>
+      </p:sp>
+      <p:sp>
+        <p:nvSpPr>
+          <p:cNvPr id="3" name="Subtitle 2"/>
+          <p:cNvSpPr>
+            <a:spLocks noGrp="1"/>
+          </p:cNvSpPr>
+          <p:nvPr>
+            <p:ph type="subTitle" idx="1"/>
+          </p:nvPr>
+        </p:nvSpPr>
+        <p:spPr>
+          <a:xfrm>
+            <a:off x="1524000" y="3602038"/>
+            <a:ext cx="9144000" cy="1655762"/>
+          </a:xfrm>
+        </p:spPr>
+        <p:txBody>
+          <a:bodyPr/>
+          <a:lstStyle>
+            <a:lvl1pPr marL="0" indent="0" algn="ctr">
+              <a:buNone/>
+              <a:defRPr sz="2400"/>
+            </a:lvl1pPr>
+            <a:lvl2pPr marL="457200" indent="0" algn="ctr">
+              <a:buNone/>
+              <a:defRPr sz="2000"/>
+            </a:lvl2pPr>
+            <a:lvl3pPr marL="914400" indent="0" algn="ctr">
+              <a:buNone/>
+              <a:defRPr sz="1800"/>
+            </a:lvl3pPr>
+            <a:lvl4pPr marL="1371600" indent="0" algn="ctr">
+              <a:buNone/>
+              <a:defRPr sz="1600"/>
+            </a:lvl4pPr>
+            <a:lvl5pPr marL="1828800" indent="0" algn="ctr">
+              <a:buNone/>
+              <a:defRPr sz="1600"/>
+            </a:lvl5pPr>
+            <a:lvl6pPr marL="2286000" indent="0" algn="ctr">
+              <a:buNone/>
+              <a:defRPr sz="1600"/>
+            </a:lvl6pPr>
+            <a:lvl7pPr marL="2743200" indent="0" algn="ctr">
+              <a:buNone/>
+              <a:defRPr sz="1600"/>
+            </a:lvl7pPr>
+            <a:lvl8pPr marL="3200400" indent="0" algn="ctr">
+              <a:buNone/>
+              <a:defRPr sz="1600"/>
+            </a:lvl8pPr>
+            <a:lvl9pPr marL="3657600" indent="0" algn="ctr">
+              <a:buNone/>
+              <a:defRPr sz="1600"/>
+            </a:lvl9pPr>
+          </a:lstStyle>
+          <a:p>
+            <a:r>
+              <a:rPr lang="en-US" altLang="zh-CN" dirty="0"/>
+              <a:t>Click to edit Master subtitle style</a:t>
+            </a:r>
+            <a:endParaRPr lang="zh-CN" altLang="en-US" dirty="0"/>
+          </a:p>
+        </p:txBody>
+      </p:sp>
+      <p:sp>
+        <p:nvSpPr>
+          <p:cNvPr id="4" name="Date Placeholder 3"/>
+          <p:cNvSpPr>
+            <a:spLocks noGrp="1"/>
+          </p:cNvSpPr>
+          <p:nvPr>
+            <p:ph type="dt" sz="half" idx="10"/>
+          </p:nvPr>
+        </p:nvSpPr>
+        <p:spPr/>
+        <p:txBody>
+          <a:bodyPr/>
+          <a:lstStyle/>
+          <a:p>
+            <a:fld id="{172DC942-475A-4069-94A2-11EB87937FD4}" type="datetime1">
+              <a:rPr lang="en-US" smtClean="0"/>
+            </a:fld>
+            <a:endParaRPr lang="en-US" dirty="0"/>
+          </a:p>
+        </p:txBody>
+      </p:sp>
+      <p:sp>
+        <p:nvSpPr>
+          <p:cNvPr id="5" name="Footer Placeholder 4"/>
+          <p:cNvSpPr>
+            <a:spLocks noGrp="1"/>
+          </p:cNvSpPr>
+          <p:nvPr>
+            <p:ph type="ftr" sz="quarter" idx="11"/>
+          </p:nvPr>
+        </p:nvSpPr>
+        <p:spPr/>
+        <p:txBody>
+          <a:bodyPr/>
+          <a:lstStyle/>
+          <a:p>
+            <a:r>
+              <a:rPr lang="en-US"/>
+              <a:t>SNN Training</a:t>
+            </a:r>
+            <a:endParaRPr lang="en-US" dirty="0"/>
+          </a:p>
+        </p:txBody>
+      </p:sp>
+      <p:sp>
+        <p:nvSpPr>
+          <p:cNvPr id="6" name="Slide Number Placeholder 5"/>
+          <p:cNvSpPr>
+            <a:spLocks noGrp="1"/>
+          </p:cNvSpPr>
+          <p:nvPr>
+            <p:ph type="sldNum" sz="quarter" idx="12"/>
+          </p:nvPr>
+        </p:nvSpPr>
+        <p:spPr/>
+        <p:txBody>
+          <a:bodyPr/>
+          <a:lstStyle/>
+          <a:p>
+            <a:fld id="{48F63A3B-78C7-47BE-AE5E-E10140E04643}" type="slidenum">
+              <a:rPr lang="en-US" smtClean="0"/>
+            </a:fld>
+            <a:endParaRPr lang="en-US" dirty="0"/>
+          </a:p>
+        </p:txBody>
+      </p:sp>
+    </p:spTree>
+  </p:cSld>
+  <p:clrMapOvr>
+    <a:masterClrMapping/>
+  </p:clrMapOvr>
+</p:sldLayout>
+</file>
+
+<file path=ppt/slideLayouts/slideLayout13.xml><?xml version="1.0" encoding="utf-8"?>
 <p:sldLayout xmlns:a="http://schemas.openxmlformats.org/drawingml/2006/main" xmlns:r="http://schemas.openxmlformats.org/officeDocument/2006/relationships" xmlns:p="http://schemas.openxmlformats.org/presentationml/2006/main" type="obj" preserve="1">
   <p:cSld name="Title and Content">
     <p:spTree>
@@ -2940,13 +2241,7 @@
       </p:grpSpPr>
       <p:sp>
         <p:nvSpPr>
-          <p:cNvPr id="2" name="Title 1">
-            <a:extLst>
-              <a:ext uri="{FF2B5EF4-FFF2-40B4-BE49-F238E27FC236}">
-                <a16:creationId xmlns:a16="http://schemas.microsoft.com/office/drawing/2014/main" id="{BF855F95-94E2-BA56-5795-348137BE208A}"/>
-              </a:ext>
-            </a:extLst>
-          </p:cNvPr>
+          <p:cNvPr id="2" name="Title 1"/>
           <p:cNvSpPr>
             <a:spLocks noGrp="1"/>
           </p:cNvSpPr>
@@ -2969,13 +2264,7 @@
       </p:sp>
       <p:sp>
         <p:nvSpPr>
-          <p:cNvPr id="3" name="Content Placeholder 2">
-            <a:extLst>
-              <a:ext uri="{FF2B5EF4-FFF2-40B4-BE49-F238E27FC236}">
-                <a16:creationId xmlns:a16="http://schemas.microsoft.com/office/drawing/2014/main" id="{DC09B677-0DBA-6A9E-BA3D-6887024C80A5}"/>
-              </a:ext>
-            </a:extLst>
-          </p:cNvPr>
+          <p:cNvPr id="3" name="Content Placeholder 2"/>
           <p:cNvSpPr>
             <a:spLocks noGrp="1"/>
           </p:cNvSpPr>
@@ -2993,6 +2282,7 @@
               <a:rPr lang="en-US" altLang="zh-CN"/>
               <a:t>Click to edit Master text styles</a:t>
             </a:r>
+            <a:endParaRPr lang="en-US" altLang="zh-CN"/>
           </a:p>
           <a:p>
             <a:pPr lvl="1"/>
@@ -3000,6 +2290,7 @@
               <a:rPr lang="en-US" altLang="zh-CN"/>
               <a:t>Second level</a:t>
             </a:r>
+            <a:endParaRPr lang="en-US" altLang="zh-CN"/>
           </a:p>
           <a:p>
             <a:pPr lvl="2"/>
@@ -3007,6 +2298,7 @@
               <a:rPr lang="en-US" altLang="zh-CN"/>
               <a:t>Third level</a:t>
             </a:r>
+            <a:endParaRPr lang="en-US" altLang="zh-CN"/>
           </a:p>
           <a:p>
             <a:pPr lvl="3"/>
@@ -3014,6 +2306,7 @@
               <a:rPr lang="en-US" altLang="zh-CN"/>
               <a:t>Fourth level</a:t>
             </a:r>
+            <a:endParaRPr lang="en-US" altLang="zh-CN"/>
           </a:p>
           <a:p>
             <a:pPr lvl="4"/>
@@ -3027,13 +2320,7 @@
       </p:sp>
       <p:sp>
         <p:nvSpPr>
-          <p:cNvPr id="4" name="Date Placeholder 3">
-            <a:extLst>
-              <a:ext uri="{FF2B5EF4-FFF2-40B4-BE49-F238E27FC236}">
-                <a16:creationId xmlns:a16="http://schemas.microsoft.com/office/drawing/2014/main" id="{01FDFB89-CA24-D05F-CEF8-C6854AF08F38}"/>
-              </a:ext>
-            </a:extLst>
-          </p:cNvPr>
+          <p:cNvPr id="4" name="Date Placeholder 3"/>
           <p:cNvSpPr>
             <a:spLocks noGrp="1"/>
           </p:cNvSpPr>
@@ -3048,7 +2335,6 @@
           <a:p>
             <a:fld id="{4234D187-79CA-49C9-AC45-7398EC219FEB}" type="datetime1">
               <a:rPr lang="en-US" smtClean="0"/>
-              <a:t>6/24/2026</a:t>
             </a:fld>
             <a:endParaRPr lang="en-US" dirty="0"/>
           </a:p>
@@ -3056,13 +2342,7 @@
       </p:sp>
       <p:sp>
         <p:nvSpPr>
-          <p:cNvPr id="5" name="Footer Placeholder 4">
-            <a:extLst>
-              <a:ext uri="{FF2B5EF4-FFF2-40B4-BE49-F238E27FC236}">
-                <a16:creationId xmlns:a16="http://schemas.microsoft.com/office/drawing/2014/main" id="{41241487-D5C2-5B59-8DC5-311869D1BC19}"/>
-              </a:ext>
-            </a:extLst>
-          </p:cNvPr>
+          <p:cNvPr id="5" name="Footer Placeholder 4"/>
           <p:cNvSpPr>
             <a:spLocks noGrp="1"/>
           </p:cNvSpPr>
@@ -3085,13 +2365,7 @@
       </p:sp>
       <p:sp>
         <p:nvSpPr>
-          <p:cNvPr id="6" name="Slide Number Placeholder 5">
-            <a:extLst>
-              <a:ext uri="{FF2B5EF4-FFF2-40B4-BE49-F238E27FC236}">
-                <a16:creationId xmlns:a16="http://schemas.microsoft.com/office/drawing/2014/main" id="{5E93583B-220E-EE17-3104-981D4696B558}"/>
-              </a:ext>
-            </a:extLst>
-          </p:cNvPr>
+          <p:cNvPr id="6" name="Slide Number Placeholder 5"/>
           <p:cNvSpPr>
             <a:spLocks noGrp="1"/>
           </p:cNvSpPr>
@@ -3106,18 +2380,12 @@
           <a:p>
             <a:fld id="{48F63A3B-78C7-47BE-AE5E-E10140E04643}" type="slidenum">
               <a:rPr lang="en-US" smtClean="0"/>
-              <a:t>‹#›</a:t>
             </a:fld>
             <a:endParaRPr lang="en-US" dirty="0"/>
           </a:p>
         </p:txBody>
       </p:sp>
     </p:spTree>
-    <p:extLst>
-      <p:ext uri="{BB962C8B-B14F-4D97-AF65-F5344CB8AC3E}">
-        <p14:creationId xmlns:p14="http://schemas.microsoft.com/office/powerpoint/2010/main" val="2418648360"/>
-      </p:ext>
-    </p:extLst>
   </p:cSld>
   <p:clrMapOvr>
     <a:masterClrMapping/>
@@ -3125,7 +2393,7 @@
 </p:sldLayout>
 </file>
 
-<file path=ppt/slideLayouts/slideLayout3.xml><?xml version="1.0" encoding="utf-8"?>
+<file path=ppt/slideLayouts/slideLayout14.xml><?xml version="1.0" encoding="utf-8"?>
 <p:sldLayout xmlns:a="http://schemas.openxmlformats.org/drawingml/2006/main" xmlns:r="http://schemas.openxmlformats.org/officeDocument/2006/relationships" xmlns:p="http://schemas.openxmlformats.org/presentationml/2006/main" type="secHead" preserve="1">
   <p:cSld name="Section Header">
     <p:spTree>
@@ -3144,13 +2412,7 @@
       </p:grpSpPr>
       <p:sp>
         <p:nvSpPr>
-          <p:cNvPr id="2" name="Title 1">
-            <a:extLst>
-              <a:ext uri="{FF2B5EF4-FFF2-40B4-BE49-F238E27FC236}">
-                <a16:creationId xmlns:a16="http://schemas.microsoft.com/office/drawing/2014/main" id="{4190680A-CE4F-BB17-F491-3575F5A1282C}"/>
-              </a:ext>
-            </a:extLst>
-          </p:cNvPr>
+          <p:cNvPr id="2" name="Title 1"/>
           <p:cNvSpPr>
             <a:spLocks noGrp="1"/>
           </p:cNvSpPr>
@@ -3182,13 +2444,7 @@
       </p:sp>
       <p:sp>
         <p:nvSpPr>
-          <p:cNvPr id="3" name="Text Placeholder 2">
-            <a:extLst>
-              <a:ext uri="{FF2B5EF4-FFF2-40B4-BE49-F238E27FC236}">
-                <a16:creationId xmlns:a16="http://schemas.microsoft.com/office/drawing/2014/main" id="{A735C6F3-4275-9278-3601-4CF197F2A499}"/>
-              </a:ext>
-            </a:extLst>
-          </p:cNvPr>
+          <p:cNvPr id="3" name="Text Placeholder 2"/>
           <p:cNvSpPr>
             <a:spLocks noGrp="1"/>
           </p:cNvSpPr>
@@ -3302,18 +2558,13 @@
               <a:rPr lang="en-US" altLang="zh-CN"/>
               <a:t>Click to edit Master text styles</a:t>
             </a:r>
-          </a:p>
-        </p:txBody>
-      </p:sp>
-      <p:sp>
-        <p:nvSpPr>
-          <p:cNvPr id="4" name="Date Placeholder 3">
-            <a:extLst>
-              <a:ext uri="{FF2B5EF4-FFF2-40B4-BE49-F238E27FC236}">
-                <a16:creationId xmlns:a16="http://schemas.microsoft.com/office/drawing/2014/main" id="{164B11D0-8469-7665-3CD1-C7EBB7DBD30D}"/>
-              </a:ext>
-            </a:extLst>
-          </p:cNvPr>
+            <a:endParaRPr lang="en-US" altLang="zh-CN"/>
+          </a:p>
+        </p:txBody>
+      </p:sp>
+      <p:sp>
+        <p:nvSpPr>
+          <p:cNvPr id="4" name="Date Placeholder 3"/>
           <p:cNvSpPr>
             <a:spLocks noGrp="1"/>
           </p:cNvSpPr>
@@ -3328,7 +2579,6 @@
           <a:p>
             <a:fld id="{453EF72E-264F-40E9-86EF-DDFC8BEA29BE}" type="datetime1">
               <a:rPr lang="en-US" smtClean="0"/>
-              <a:t>6/24/2026</a:t>
             </a:fld>
             <a:endParaRPr lang="en-US" dirty="0"/>
           </a:p>
@@ -3336,13 +2586,7 @@
       </p:sp>
       <p:sp>
         <p:nvSpPr>
-          <p:cNvPr id="5" name="Footer Placeholder 4">
-            <a:extLst>
-              <a:ext uri="{FF2B5EF4-FFF2-40B4-BE49-F238E27FC236}">
-                <a16:creationId xmlns:a16="http://schemas.microsoft.com/office/drawing/2014/main" id="{718CFDF6-6F6E-2589-43C4-CA3DF2CA056D}"/>
-              </a:ext>
-            </a:extLst>
-          </p:cNvPr>
+          <p:cNvPr id="5" name="Footer Placeholder 4"/>
           <p:cNvSpPr>
             <a:spLocks noGrp="1"/>
           </p:cNvSpPr>
@@ -3365,13 +2609,7 @@
       </p:sp>
       <p:sp>
         <p:nvSpPr>
-          <p:cNvPr id="6" name="Slide Number Placeholder 5">
-            <a:extLst>
-              <a:ext uri="{FF2B5EF4-FFF2-40B4-BE49-F238E27FC236}">
-                <a16:creationId xmlns:a16="http://schemas.microsoft.com/office/drawing/2014/main" id="{5400CF87-CF7D-7F93-2EA9-1EAB2D4555AD}"/>
-              </a:ext>
-            </a:extLst>
-          </p:cNvPr>
+          <p:cNvPr id="6" name="Slide Number Placeholder 5"/>
           <p:cNvSpPr>
             <a:spLocks noGrp="1"/>
           </p:cNvSpPr>
@@ -3386,18 +2624,12 @@
           <a:p>
             <a:fld id="{48F63A3B-78C7-47BE-AE5E-E10140E04643}" type="slidenum">
               <a:rPr lang="en-US" smtClean="0"/>
-              <a:t>‹#›</a:t>
             </a:fld>
             <a:endParaRPr lang="en-US" dirty="0"/>
           </a:p>
         </p:txBody>
       </p:sp>
     </p:spTree>
-    <p:extLst>
-      <p:ext uri="{BB962C8B-B14F-4D97-AF65-F5344CB8AC3E}">
-        <p14:creationId xmlns:p14="http://schemas.microsoft.com/office/powerpoint/2010/main" val="3474197840"/>
-      </p:ext>
-    </p:extLst>
   </p:cSld>
   <p:clrMapOvr>
     <a:masterClrMapping/>
@@ -3405,7 +2637,7 @@
 </p:sldLayout>
 </file>
 
-<file path=ppt/slideLayouts/slideLayout4.xml><?xml version="1.0" encoding="utf-8"?>
+<file path=ppt/slideLayouts/slideLayout15.xml><?xml version="1.0" encoding="utf-8"?>
 <p:sldLayout xmlns:a="http://schemas.openxmlformats.org/drawingml/2006/main" xmlns:r="http://schemas.openxmlformats.org/officeDocument/2006/relationships" xmlns:p="http://schemas.openxmlformats.org/presentationml/2006/main" type="twoObj" preserve="1">
   <p:cSld name="Two Content">
     <p:spTree>
@@ -3424,13 +2656,7 @@
       </p:grpSpPr>
       <p:sp>
         <p:nvSpPr>
-          <p:cNvPr id="2" name="Title 1">
-            <a:extLst>
-              <a:ext uri="{FF2B5EF4-FFF2-40B4-BE49-F238E27FC236}">
-                <a16:creationId xmlns:a16="http://schemas.microsoft.com/office/drawing/2014/main" id="{7A3CA633-F20A-1249-1593-E31A3DCE47D0}"/>
-              </a:ext>
-            </a:extLst>
-          </p:cNvPr>
+          <p:cNvPr id="2" name="Title 1"/>
           <p:cNvSpPr>
             <a:spLocks noGrp="1"/>
           </p:cNvSpPr>
@@ -3453,13 +2679,7 @@
       </p:sp>
       <p:sp>
         <p:nvSpPr>
-          <p:cNvPr id="3" name="Content Placeholder 2">
-            <a:extLst>
-              <a:ext uri="{FF2B5EF4-FFF2-40B4-BE49-F238E27FC236}">
-                <a16:creationId xmlns:a16="http://schemas.microsoft.com/office/drawing/2014/main" id="{90481545-150F-3F70-E886-0FD77A7F7908}"/>
-              </a:ext>
-            </a:extLst>
-          </p:cNvPr>
+          <p:cNvPr id="3" name="Content Placeholder 2"/>
           <p:cNvSpPr>
             <a:spLocks noGrp="1"/>
           </p:cNvSpPr>
@@ -3482,6 +2702,7 @@
               <a:rPr lang="en-US" altLang="zh-CN"/>
               <a:t>Click to edit Master text styles</a:t>
             </a:r>
+            <a:endParaRPr lang="en-US" altLang="zh-CN"/>
           </a:p>
           <a:p>
             <a:pPr lvl="1"/>
@@ -3489,6 +2710,7 @@
               <a:rPr lang="en-US" altLang="zh-CN"/>
               <a:t>Second level</a:t>
             </a:r>
+            <a:endParaRPr lang="en-US" altLang="zh-CN"/>
           </a:p>
           <a:p>
             <a:pPr lvl="2"/>
@@ -3496,6 +2718,7 @@
               <a:rPr lang="en-US" altLang="zh-CN"/>
               <a:t>Third level</a:t>
             </a:r>
+            <a:endParaRPr lang="en-US" altLang="zh-CN"/>
           </a:p>
           <a:p>
             <a:pPr lvl="3"/>
@@ -3503,6 +2726,7 @@
               <a:rPr lang="en-US" altLang="zh-CN"/>
               <a:t>Fourth level</a:t>
             </a:r>
+            <a:endParaRPr lang="en-US" altLang="zh-CN"/>
           </a:p>
           <a:p>
             <a:pPr lvl="4"/>
@@ -3516,13 +2740,7 @@
       </p:sp>
       <p:sp>
         <p:nvSpPr>
-          <p:cNvPr id="4" name="Content Placeholder 3">
-            <a:extLst>
-              <a:ext uri="{FF2B5EF4-FFF2-40B4-BE49-F238E27FC236}">
-                <a16:creationId xmlns:a16="http://schemas.microsoft.com/office/drawing/2014/main" id="{9E1589A8-4A23-35DA-5A09-3F7B293A4C17}"/>
-              </a:ext>
-            </a:extLst>
-          </p:cNvPr>
+          <p:cNvPr id="4" name="Content Placeholder 3"/>
           <p:cNvSpPr>
             <a:spLocks noGrp="1"/>
           </p:cNvSpPr>
@@ -3545,6 +2763,7 @@
               <a:rPr lang="en-US" altLang="zh-CN"/>
               <a:t>Click to edit Master text styles</a:t>
             </a:r>
+            <a:endParaRPr lang="en-US" altLang="zh-CN"/>
           </a:p>
           <a:p>
             <a:pPr lvl="1"/>
@@ -3552,6 +2771,7 @@
               <a:rPr lang="en-US" altLang="zh-CN"/>
               <a:t>Second level</a:t>
             </a:r>
+            <a:endParaRPr lang="en-US" altLang="zh-CN"/>
           </a:p>
           <a:p>
             <a:pPr lvl="2"/>
@@ -3559,6 +2779,7 @@
               <a:rPr lang="en-US" altLang="zh-CN"/>
               <a:t>Third level</a:t>
             </a:r>
+            <a:endParaRPr lang="en-US" altLang="zh-CN"/>
           </a:p>
           <a:p>
             <a:pPr lvl="3"/>
@@ -3566,6 +2787,7 @@
               <a:rPr lang="en-US" altLang="zh-CN"/>
               <a:t>Fourth level</a:t>
             </a:r>
+            <a:endParaRPr lang="en-US" altLang="zh-CN"/>
           </a:p>
           <a:p>
             <a:pPr lvl="4"/>
@@ -3579,13 +2801,7 @@
       </p:sp>
       <p:sp>
         <p:nvSpPr>
-          <p:cNvPr id="5" name="Date Placeholder 4">
-            <a:extLst>
-              <a:ext uri="{FF2B5EF4-FFF2-40B4-BE49-F238E27FC236}">
-                <a16:creationId xmlns:a16="http://schemas.microsoft.com/office/drawing/2014/main" id="{539D6901-BF9F-8CD4-A2B0-91AAD451F543}"/>
-              </a:ext>
-            </a:extLst>
-          </p:cNvPr>
+          <p:cNvPr id="5" name="Date Placeholder 4"/>
           <p:cNvSpPr>
             <a:spLocks noGrp="1"/>
           </p:cNvSpPr>
@@ -3600,7 +2816,6 @@
           <a:p>
             <a:fld id="{8C5EDC1F-6584-473C-AC6C-8F1A8A7EB5C8}" type="datetime1">
               <a:rPr lang="en-US" smtClean="0"/>
-              <a:t>6/24/2026</a:t>
             </a:fld>
             <a:endParaRPr lang="en-US" dirty="0"/>
           </a:p>
@@ -3608,13 +2823,7 @@
       </p:sp>
       <p:sp>
         <p:nvSpPr>
-          <p:cNvPr id="6" name="Footer Placeholder 5">
-            <a:extLst>
-              <a:ext uri="{FF2B5EF4-FFF2-40B4-BE49-F238E27FC236}">
-                <a16:creationId xmlns:a16="http://schemas.microsoft.com/office/drawing/2014/main" id="{6957D302-D86A-E682-72FB-5F8D9B4EDA5C}"/>
-              </a:ext>
-            </a:extLst>
-          </p:cNvPr>
+          <p:cNvPr id="6" name="Footer Placeholder 5"/>
           <p:cNvSpPr>
             <a:spLocks noGrp="1"/>
           </p:cNvSpPr>
@@ -3637,13 +2846,7 @@
       </p:sp>
       <p:sp>
         <p:nvSpPr>
-          <p:cNvPr id="7" name="Slide Number Placeholder 6">
-            <a:extLst>
-              <a:ext uri="{FF2B5EF4-FFF2-40B4-BE49-F238E27FC236}">
-                <a16:creationId xmlns:a16="http://schemas.microsoft.com/office/drawing/2014/main" id="{BEFDC92F-CE00-5E0A-08B0-E45363A30FE6}"/>
-              </a:ext>
-            </a:extLst>
-          </p:cNvPr>
+          <p:cNvPr id="7" name="Slide Number Placeholder 6"/>
           <p:cNvSpPr>
             <a:spLocks noGrp="1"/>
           </p:cNvSpPr>
@@ -3658,18 +2861,12 @@
           <a:p>
             <a:fld id="{48F63A3B-78C7-47BE-AE5E-E10140E04643}" type="slidenum">
               <a:rPr lang="en-US" smtClean="0"/>
-              <a:t>‹#›</a:t>
             </a:fld>
             <a:endParaRPr lang="en-US" dirty="0"/>
           </a:p>
         </p:txBody>
       </p:sp>
     </p:spTree>
-    <p:extLst>
-      <p:ext uri="{BB962C8B-B14F-4D97-AF65-F5344CB8AC3E}">
-        <p14:creationId xmlns:p14="http://schemas.microsoft.com/office/powerpoint/2010/main" val="1428512793"/>
-      </p:ext>
-    </p:extLst>
   </p:cSld>
   <p:clrMapOvr>
     <a:masterClrMapping/>
@@ -3677,7 +2874,7 @@
 </p:sldLayout>
 </file>
 
-<file path=ppt/slideLayouts/slideLayout5.xml><?xml version="1.0" encoding="utf-8"?>
+<file path=ppt/slideLayouts/slideLayout16.xml><?xml version="1.0" encoding="utf-8"?>
 <p:sldLayout xmlns:a="http://schemas.openxmlformats.org/drawingml/2006/main" xmlns:r="http://schemas.openxmlformats.org/officeDocument/2006/relationships" xmlns:p="http://schemas.openxmlformats.org/presentationml/2006/main" type="twoTxTwoObj" preserve="1">
   <p:cSld name="Comparison">
     <p:spTree>
@@ -3696,13 +2893,7 @@
       </p:grpSpPr>
       <p:sp>
         <p:nvSpPr>
-          <p:cNvPr id="2" name="Title 1">
-            <a:extLst>
-              <a:ext uri="{FF2B5EF4-FFF2-40B4-BE49-F238E27FC236}">
-                <a16:creationId xmlns:a16="http://schemas.microsoft.com/office/drawing/2014/main" id="{F8F7FC91-4490-5E5D-FFB9-98E2931703A8}"/>
-              </a:ext>
-            </a:extLst>
-          </p:cNvPr>
+          <p:cNvPr id="2" name="Title 1"/>
           <p:cNvSpPr>
             <a:spLocks noGrp="1"/>
           </p:cNvSpPr>
@@ -3730,13 +2921,7 @@
       </p:sp>
       <p:sp>
         <p:nvSpPr>
-          <p:cNvPr id="3" name="Text Placeholder 2">
-            <a:extLst>
-              <a:ext uri="{FF2B5EF4-FFF2-40B4-BE49-F238E27FC236}">
-                <a16:creationId xmlns:a16="http://schemas.microsoft.com/office/drawing/2014/main" id="{A9B44F76-ED49-2979-F0C8-A8788EDF5368}"/>
-              </a:ext>
-            </a:extLst>
-          </p:cNvPr>
+          <p:cNvPr id="3" name="Text Placeholder 2"/>
           <p:cNvSpPr>
             <a:spLocks noGrp="1"/>
           </p:cNvSpPr>
@@ -3796,18 +2981,13 @@
               <a:rPr lang="en-US" altLang="zh-CN"/>
               <a:t>Click to edit Master text styles</a:t>
             </a:r>
-          </a:p>
-        </p:txBody>
-      </p:sp>
-      <p:sp>
-        <p:nvSpPr>
-          <p:cNvPr id="4" name="Content Placeholder 3">
-            <a:extLst>
-              <a:ext uri="{FF2B5EF4-FFF2-40B4-BE49-F238E27FC236}">
-                <a16:creationId xmlns:a16="http://schemas.microsoft.com/office/drawing/2014/main" id="{D2D3BBCA-01C2-0277-EFA8-90A7A27C8AF6}"/>
-              </a:ext>
-            </a:extLst>
-          </p:cNvPr>
+            <a:endParaRPr lang="en-US" altLang="zh-CN"/>
+          </a:p>
+        </p:txBody>
+      </p:sp>
+      <p:sp>
+        <p:nvSpPr>
+          <p:cNvPr id="4" name="Content Placeholder 3"/>
           <p:cNvSpPr>
             <a:spLocks noGrp="1"/>
           </p:cNvSpPr>
@@ -3830,6 +3010,7 @@
               <a:rPr lang="en-US" altLang="zh-CN"/>
               <a:t>Click to edit Master text styles</a:t>
             </a:r>
+            <a:endParaRPr lang="en-US" altLang="zh-CN"/>
           </a:p>
           <a:p>
             <a:pPr lvl="1"/>
@@ -3837,6 +3018,7 @@
               <a:rPr lang="en-US" altLang="zh-CN"/>
               <a:t>Second level</a:t>
             </a:r>
+            <a:endParaRPr lang="en-US" altLang="zh-CN"/>
           </a:p>
           <a:p>
             <a:pPr lvl="2"/>
@@ -3844,6 +3026,7 @@
               <a:rPr lang="en-US" altLang="zh-CN"/>
               <a:t>Third level</a:t>
             </a:r>
+            <a:endParaRPr lang="en-US" altLang="zh-CN"/>
           </a:p>
           <a:p>
             <a:pPr lvl="3"/>
@@ -3851,6 +3034,7 @@
               <a:rPr lang="en-US" altLang="zh-CN"/>
               <a:t>Fourth level</a:t>
             </a:r>
+            <a:endParaRPr lang="en-US" altLang="zh-CN"/>
           </a:p>
           <a:p>
             <a:pPr lvl="4"/>
@@ -3864,13 +3048,7 @@
       </p:sp>
       <p:sp>
         <p:nvSpPr>
-          <p:cNvPr id="5" name="Text Placeholder 4">
-            <a:extLst>
-              <a:ext uri="{FF2B5EF4-FFF2-40B4-BE49-F238E27FC236}">
-                <a16:creationId xmlns:a16="http://schemas.microsoft.com/office/drawing/2014/main" id="{9B255518-6879-97D0-67FB-D1E62D8EA25F}"/>
-              </a:ext>
-            </a:extLst>
-          </p:cNvPr>
+          <p:cNvPr id="5" name="Text Placeholder 4"/>
           <p:cNvSpPr>
             <a:spLocks noGrp="1"/>
           </p:cNvSpPr>
@@ -3930,18 +3108,13 @@
               <a:rPr lang="en-US" altLang="zh-CN"/>
               <a:t>Click to edit Master text styles</a:t>
             </a:r>
-          </a:p>
-        </p:txBody>
-      </p:sp>
-      <p:sp>
-        <p:nvSpPr>
-          <p:cNvPr id="6" name="Content Placeholder 5">
-            <a:extLst>
-              <a:ext uri="{FF2B5EF4-FFF2-40B4-BE49-F238E27FC236}">
-                <a16:creationId xmlns:a16="http://schemas.microsoft.com/office/drawing/2014/main" id="{C38053A7-8C32-8E21-9AEE-A1E1FFAC2C37}"/>
-              </a:ext>
-            </a:extLst>
-          </p:cNvPr>
+            <a:endParaRPr lang="en-US" altLang="zh-CN"/>
+          </a:p>
+        </p:txBody>
+      </p:sp>
+      <p:sp>
+        <p:nvSpPr>
+          <p:cNvPr id="6" name="Content Placeholder 5"/>
           <p:cNvSpPr>
             <a:spLocks noGrp="1"/>
           </p:cNvSpPr>
@@ -3964,6 +3137,7 @@
               <a:rPr lang="en-US" altLang="zh-CN"/>
               <a:t>Click to edit Master text styles</a:t>
             </a:r>
+            <a:endParaRPr lang="en-US" altLang="zh-CN"/>
           </a:p>
           <a:p>
             <a:pPr lvl="1"/>
@@ -3971,6 +3145,7 @@
               <a:rPr lang="en-US" altLang="zh-CN"/>
               <a:t>Second level</a:t>
             </a:r>
+            <a:endParaRPr lang="en-US" altLang="zh-CN"/>
           </a:p>
           <a:p>
             <a:pPr lvl="2"/>
@@ -3978,6 +3153,7 @@
               <a:rPr lang="en-US" altLang="zh-CN"/>
               <a:t>Third level</a:t>
             </a:r>
+            <a:endParaRPr lang="en-US" altLang="zh-CN"/>
           </a:p>
           <a:p>
             <a:pPr lvl="3"/>
@@ -3985,6 +3161,7 @@
               <a:rPr lang="en-US" altLang="zh-CN"/>
               <a:t>Fourth level</a:t>
             </a:r>
+            <a:endParaRPr lang="en-US" altLang="zh-CN"/>
           </a:p>
           <a:p>
             <a:pPr lvl="4"/>
@@ -3998,13 +3175,7 @@
       </p:sp>
       <p:sp>
         <p:nvSpPr>
-          <p:cNvPr id="7" name="Date Placeholder 6">
-            <a:extLst>
-              <a:ext uri="{FF2B5EF4-FFF2-40B4-BE49-F238E27FC236}">
-                <a16:creationId xmlns:a16="http://schemas.microsoft.com/office/drawing/2014/main" id="{B6FFF2EC-E278-1DEB-17EB-0F358092E3B8}"/>
-              </a:ext>
-            </a:extLst>
-          </p:cNvPr>
+          <p:cNvPr id="7" name="Date Placeholder 6"/>
           <p:cNvSpPr>
             <a:spLocks noGrp="1"/>
           </p:cNvSpPr>
@@ -4019,7 +3190,6 @@
           <a:p>
             <a:fld id="{6311681B-E263-42AF-ACA7-AB753620E14D}" type="datetime1">
               <a:rPr lang="en-US" smtClean="0"/>
-              <a:t>6/24/2026</a:t>
             </a:fld>
             <a:endParaRPr lang="en-US" dirty="0"/>
           </a:p>
@@ -4027,13 +3197,7 @@
       </p:sp>
       <p:sp>
         <p:nvSpPr>
-          <p:cNvPr id="8" name="Footer Placeholder 7">
-            <a:extLst>
-              <a:ext uri="{FF2B5EF4-FFF2-40B4-BE49-F238E27FC236}">
-                <a16:creationId xmlns:a16="http://schemas.microsoft.com/office/drawing/2014/main" id="{7304EC84-3D35-4D6A-3BAE-2F946D4E8B28}"/>
-              </a:ext>
-            </a:extLst>
-          </p:cNvPr>
+          <p:cNvPr id="8" name="Footer Placeholder 7"/>
           <p:cNvSpPr>
             <a:spLocks noGrp="1"/>
           </p:cNvSpPr>
@@ -4056,13 +3220,7 @@
       </p:sp>
       <p:sp>
         <p:nvSpPr>
-          <p:cNvPr id="9" name="Slide Number Placeholder 8">
-            <a:extLst>
-              <a:ext uri="{FF2B5EF4-FFF2-40B4-BE49-F238E27FC236}">
-                <a16:creationId xmlns:a16="http://schemas.microsoft.com/office/drawing/2014/main" id="{45CCB9FD-E829-2A59-07F5-093FBC7C7270}"/>
-              </a:ext>
-            </a:extLst>
-          </p:cNvPr>
+          <p:cNvPr id="9" name="Slide Number Placeholder 8"/>
           <p:cNvSpPr>
             <a:spLocks noGrp="1"/>
           </p:cNvSpPr>
@@ -4077,18 +3235,12 @@
           <a:p>
             <a:fld id="{48F63A3B-78C7-47BE-AE5E-E10140E04643}" type="slidenum">
               <a:rPr lang="en-US" smtClean="0"/>
-              <a:t>‹#›</a:t>
             </a:fld>
             <a:endParaRPr lang="en-US" dirty="0"/>
           </a:p>
         </p:txBody>
       </p:sp>
     </p:spTree>
-    <p:extLst>
-      <p:ext uri="{BB962C8B-B14F-4D97-AF65-F5344CB8AC3E}">
-        <p14:creationId xmlns:p14="http://schemas.microsoft.com/office/powerpoint/2010/main" val="1025976889"/>
-      </p:ext>
-    </p:extLst>
   </p:cSld>
   <p:clrMapOvr>
     <a:masterClrMapping/>
@@ -4096,7 +3248,7 @@
 </p:sldLayout>
 </file>
 
-<file path=ppt/slideLayouts/slideLayout6.xml><?xml version="1.0" encoding="utf-8"?>
+<file path=ppt/slideLayouts/slideLayout17.xml><?xml version="1.0" encoding="utf-8"?>
 <p:sldLayout xmlns:a="http://schemas.openxmlformats.org/drawingml/2006/main" xmlns:r="http://schemas.openxmlformats.org/officeDocument/2006/relationships" xmlns:p="http://schemas.openxmlformats.org/presentationml/2006/main" type="titleOnly" preserve="1">
   <p:cSld name="Title Only">
     <p:spTree>
@@ -4115,13 +3267,7 @@
       </p:grpSpPr>
       <p:sp>
         <p:nvSpPr>
-          <p:cNvPr id="2" name="Title 1">
-            <a:extLst>
-              <a:ext uri="{FF2B5EF4-FFF2-40B4-BE49-F238E27FC236}">
-                <a16:creationId xmlns:a16="http://schemas.microsoft.com/office/drawing/2014/main" id="{7AFBB7D3-2EE5-35D4-C18F-AD9A36F8AEF8}"/>
-              </a:ext>
-            </a:extLst>
-          </p:cNvPr>
+          <p:cNvPr id="2" name="Title 1"/>
           <p:cNvSpPr>
             <a:spLocks noGrp="1"/>
           </p:cNvSpPr>
@@ -4144,13 +3290,7 @@
       </p:sp>
       <p:sp>
         <p:nvSpPr>
-          <p:cNvPr id="3" name="Date Placeholder 2">
-            <a:extLst>
-              <a:ext uri="{FF2B5EF4-FFF2-40B4-BE49-F238E27FC236}">
-                <a16:creationId xmlns:a16="http://schemas.microsoft.com/office/drawing/2014/main" id="{C67133D5-6E1E-7CBF-D196-163E44474B0A}"/>
-              </a:ext>
-            </a:extLst>
-          </p:cNvPr>
+          <p:cNvPr id="3" name="Date Placeholder 2"/>
           <p:cNvSpPr>
             <a:spLocks noGrp="1"/>
           </p:cNvSpPr>
@@ -4165,7 +3305,6 @@
           <a:p>
             <a:fld id="{EC1D2BBB-8843-40DB-B672-A0CA5D7101CE}" type="datetime1">
               <a:rPr lang="en-US" smtClean="0"/>
-              <a:t>6/24/2026</a:t>
             </a:fld>
             <a:endParaRPr lang="en-US" dirty="0"/>
           </a:p>
@@ -4173,13 +3312,7 @@
       </p:sp>
       <p:sp>
         <p:nvSpPr>
-          <p:cNvPr id="4" name="Footer Placeholder 3">
-            <a:extLst>
-              <a:ext uri="{FF2B5EF4-FFF2-40B4-BE49-F238E27FC236}">
-                <a16:creationId xmlns:a16="http://schemas.microsoft.com/office/drawing/2014/main" id="{565DF9C1-CCBE-43B1-F51C-526B315C84CD}"/>
-              </a:ext>
-            </a:extLst>
-          </p:cNvPr>
+          <p:cNvPr id="4" name="Footer Placeholder 3"/>
           <p:cNvSpPr>
             <a:spLocks noGrp="1"/>
           </p:cNvSpPr>
@@ -4202,13 +3335,7 @@
       </p:sp>
       <p:sp>
         <p:nvSpPr>
-          <p:cNvPr id="5" name="Slide Number Placeholder 4">
-            <a:extLst>
-              <a:ext uri="{FF2B5EF4-FFF2-40B4-BE49-F238E27FC236}">
-                <a16:creationId xmlns:a16="http://schemas.microsoft.com/office/drawing/2014/main" id="{D3B77282-A538-97CA-6C9E-AC486664635F}"/>
-              </a:ext>
-            </a:extLst>
-          </p:cNvPr>
+          <p:cNvPr id="5" name="Slide Number Placeholder 4"/>
           <p:cNvSpPr>
             <a:spLocks noGrp="1"/>
           </p:cNvSpPr>
@@ -4223,18 +3350,12 @@
           <a:p>
             <a:fld id="{48F63A3B-78C7-47BE-AE5E-E10140E04643}" type="slidenum">
               <a:rPr lang="en-US" smtClean="0"/>
-              <a:t>‹#›</a:t>
             </a:fld>
             <a:endParaRPr lang="en-US" dirty="0"/>
           </a:p>
         </p:txBody>
       </p:sp>
     </p:spTree>
-    <p:extLst>
-      <p:ext uri="{BB962C8B-B14F-4D97-AF65-F5344CB8AC3E}">
-        <p14:creationId xmlns:p14="http://schemas.microsoft.com/office/powerpoint/2010/main" val="2946729486"/>
-      </p:ext>
-    </p:extLst>
   </p:cSld>
   <p:clrMapOvr>
     <a:masterClrMapping/>
@@ -4242,7 +3363,7 @@
 </p:sldLayout>
 </file>
 
-<file path=ppt/slideLayouts/slideLayout7.xml><?xml version="1.0" encoding="utf-8"?>
+<file path=ppt/slideLayouts/slideLayout18.xml><?xml version="1.0" encoding="utf-8"?>
 <p:sldLayout xmlns:a="http://schemas.openxmlformats.org/drawingml/2006/main" xmlns:r="http://schemas.openxmlformats.org/officeDocument/2006/relationships" xmlns:p="http://schemas.openxmlformats.org/presentationml/2006/main" type="blank" preserve="1">
   <p:cSld name="Blank">
     <p:spTree>
@@ -4261,13 +3382,7 @@
       </p:grpSpPr>
       <p:sp>
         <p:nvSpPr>
-          <p:cNvPr id="2" name="Date Placeholder 1">
-            <a:extLst>
-              <a:ext uri="{FF2B5EF4-FFF2-40B4-BE49-F238E27FC236}">
-                <a16:creationId xmlns:a16="http://schemas.microsoft.com/office/drawing/2014/main" id="{E2B4DF19-C288-9179-7E7F-6A8B04D13B55}"/>
-              </a:ext>
-            </a:extLst>
-          </p:cNvPr>
+          <p:cNvPr id="2" name="Date Placeholder 1"/>
           <p:cNvSpPr>
             <a:spLocks noGrp="1"/>
           </p:cNvSpPr>
@@ -4282,7 +3397,6 @@
           <a:p>
             <a:fld id="{9001B7B1-DA79-4221-A5A5-460CD134413C}" type="datetime1">
               <a:rPr lang="en-US" smtClean="0"/>
-              <a:t>6/24/2026</a:t>
             </a:fld>
             <a:endParaRPr lang="en-US" dirty="0"/>
           </a:p>
@@ -4290,13 +3404,7 @@
       </p:sp>
       <p:sp>
         <p:nvSpPr>
-          <p:cNvPr id="3" name="Footer Placeholder 2">
-            <a:extLst>
-              <a:ext uri="{FF2B5EF4-FFF2-40B4-BE49-F238E27FC236}">
-                <a16:creationId xmlns:a16="http://schemas.microsoft.com/office/drawing/2014/main" id="{E4627A04-CAB2-F0A3-55D5-F94AFD7EE433}"/>
-              </a:ext>
-            </a:extLst>
-          </p:cNvPr>
+          <p:cNvPr id="3" name="Footer Placeholder 2"/>
           <p:cNvSpPr>
             <a:spLocks noGrp="1"/>
           </p:cNvSpPr>
@@ -4319,13 +3427,7 @@
       </p:sp>
       <p:sp>
         <p:nvSpPr>
-          <p:cNvPr id="4" name="Slide Number Placeholder 3">
-            <a:extLst>
-              <a:ext uri="{FF2B5EF4-FFF2-40B4-BE49-F238E27FC236}">
-                <a16:creationId xmlns:a16="http://schemas.microsoft.com/office/drawing/2014/main" id="{C98C24FE-A7E5-77FD-563A-F0AE57F8C0F5}"/>
-              </a:ext>
-            </a:extLst>
-          </p:cNvPr>
+          <p:cNvPr id="4" name="Slide Number Placeholder 3"/>
           <p:cNvSpPr>
             <a:spLocks noGrp="1"/>
           </p:cNvSpPr>
@@ -4340,18 +3442,12 @@
           <a:p>
             <a:fld id="{48F63A3B-78C7-47BE-AE5E-E10140E04643}" type="slidenum">
               <a:rPr lang="en-US" smtClean="0"/>
-              <a:t>‹#›</a:t>
             </a:fld>
             <a:endParaRPr lang="en-US" dirty="0"/>
           </a:p>
         </p:txBody>
       </p:sp>
     </p:spTree>
-    <p:extLst>
-      <p:ext uri="{BB962C8B-B14F-4D97-AF65-F5344CB8AC3E}">
-        <p14:creationId xmlns:p14="http://schemas.microsoft.com/office/powerpoint/2010/main" val="2311189749"/>
-      </p:ext>
-    </p:extLst>
   </p:cSld>
   <p:clrMapOvr>
     <a:masterClrMapping/>
@@ -4359,7 +3455,7 @@
 </p:sldLayout>
 </file>
 
-<file path=ppt/slideLayouts/slideLayout8.xml><?xml version="1.0" encoding="utf-8"?>
+<file path=ppt/slideLayouts/slideLayout19.xml><?xml version="1.0" encoding="utf-8"?>
 <p:sldLayout xmlns:a="http://schemas.openxmlformats.org/drawingml/2006/main" xmlns:r="http://schemas.openxmlformats.org/officeDocument/2006/relationships" xmlns:p="http://schemas.openxmlformats.org/presentationml/2006/main" type="objTx" preserve="1">
   <p:cSld name="Content with Caption">
     <p:spTree>
@@ -4378,13 +3474,7 @@
       </p:grpSpPr>
       <p:sp>
         <p:nvSpPr>
-          <p:cNvPr id="2" name="Title 1">
-            <a:extLst>
-              <a:ext uri="{FF2B5EF4-FFF2-40B4-BE49-F238E27FC236}">
-                <a16:creationId xmlns:a16="http://schemas.microsoft.com/office/drawing/2014/main" id="{D9EABFDD-16A9-0729-3AA7-838E0BBEDB37}"/>
-              </a:ext>
-            </a:extLst>
-          </p:cNvPr>
+          <p:cNvPr id="2" name="Title 1"/>
           <p:cNvSpPr>
             <a:spLocks noGrp="1"/>
           </p:cNvSpPr>
@@ -4416,13 +3506,7 @@
       </p:sp>
       <p:sp>
         <p:nvSpPr>
-          <p:cNvPr id="3" name="Content Placeholder 2">
-            <a:extLst>
-              <a:ext uri="{FF2B5EF4-FFF2-40B4-BE49-F238E27FC236}">
-                <a16:creationId xmlns:a16="http://schemas.microsoft.com/office/drawing/2014/main" id="{467C107B-E167-5265-3F82-61D8C6CB35EC}"/>
-              </a:ext>
-            </a:extLst>
-          </p:cNvPr>
+          <p:cNvPr id="3" name="Content Placeholder 2"/>
           <p:cNvSpPr>
             <a:spLocks noGrp="1"/>
           </p:cNvSpPr>
@@ -4473,6 +3557,7 @@
               <a:rPr lang="en-US" altLang="zh-CN"/>
               <a:t>Click to edit Master text styles</a:t>
             </a:r>
+            <a:endParaRPr lang="en-US" altLang="zh-CN"/>
           </a:p>
           <a:p>
             <a:pPr lvl="1"/>
@@ -4480,6 +3565,7 @@
               <a:rPr lang="en-US" altLang="zh-CN"/>
               <a:t>Second level</a:t>
             </a:r>
+            <a:endParaRPr lang="en-US" altLang="zh-CN"/>
           </a:p>
           <a:p>
             <a:pPr lvl="2"/>
@@ -4487,6 +3573,7 @@
               <a:rPr lang="en-US" altLang="zh-CN"/>
               <a:t>Third level</a:t>
             </a:r>
+            <a:endParaRPr lang="en-US" altLang="zh-CN"/>
           </a:p>
           <a:p>
             <a:pPr lvl="3"/>
@@ -4494,6 +3581,7 @@
               <a:rPr lang="en-US" altLang="zh-CN"/>
               <a:t>Fourth level</a:t>
             </a:r>
+            <a:endParaRPr lang="en-US" altLang="zh-CN"/>
           </a:p>
           <a:p>
             <a:pPr lvl="4"/>
@@ -4507,13 +3595,7 @@
       </p:sp>
       <p:sp>
         <p:nvSpPr>
-          <p:cNvPr id="4" name="Text Placeholder 3">
-            <a:extLst>
-              <a:ext uri="{FF2B5EF4-FFF2-40B4-BE49-F238E27FC236}">
-                <a16:creationId xmlns:a16="http://schemas.microsoft.com/office/drawing/2014/main" id="{D7E9325E-12CF-67BB-E7A6-3853D9C0AB20}"/>
-              </a:ext>
-            </a:extLst>
-          </p:cNvPr>
+          <p:cNvPr id="4" name="Text Placeholder 3"/>
           <p:cNvSpPr>
             <a:spLocks noGrp="1"/>
           </p:cNvSpPr>
@@ -4573,18 +3655,13 @@
               <a:rPr lang="en-US" altLang="zh-CN"/>
               <a:t>Click to edit Master text styles</a:t>
             </a:r>
-          </a:p>
-        </p:txBody>
-      </p:sp>
-      <p:sp>
-        <p:nvSpPr>
-          <p:cNvPr id="5" name="Date Placeholder 4">
-            <a:extLst>
-              <a:ext uri="{FF2B5EF4-FFF2-40B4-BE49-F238E27FC236}">
-                <a16:creationId xmlns:a16="http://schemas.microsoft.com/office/drawing/2014/main" id="{39F46335-26CC-ED0F-82DF-98C4B917F7CF}"/>
-              </a:ext>
-            </a:extLst>
-          </p:cNvPr>
+            <a:endParaRPr lang="en-US" altLang="zh-CN"/>
+          </a:p>
+        </p:txBody>
+      </p:sp>
+      <p:sp>
+        <p:nvSpPr>
+          <p:cNvPr id="5" name="Date Placeholder 4"/>
           <p:cNvSpPr>
             <a:spLocks noGrp="1"/>
           </p:cNvSpPr>
@@ -4599,7 +3676,6 @@
           <a:p>
             <a:fld id="{116A8B25-E15D-49B8-BC14-F9CBE12C3CE7}" type="datetime1">
               <a:rPr lang="en-US" smtClean="0"/>
-              <a:t>6/24/2026</a:t>
             </a:fld>
             <a:endParaRPr lang="en-US" dirty="0"/>
           </a:p>
@@ -4607,13 +3683,7 @@
       </p:sp>
       <p:sp>
         <p:nvSpPr>
-          <p:cNvPr id="6" name="Footer Placeholder 5">
-            <a:extLst>
-              <a:ext uri="{FF2B5EF4-FFF2-40B4-BE49-F238E27FC236}">
-                <a16:creationId xmlns:a16="http://schemas.microsoft.com/office/drawing/2014/main" id="{A80011B0-DC27-EB26-D0BE-51EFD2717F47}"/>
-              </a:ext>
-            </a:extLst>
-          </p:cNvPr>
+          <p:cNvPr id="6" name="Footer Placeholder 5"/>
           <p:cNvSpPr>
             <a:spLocks noGrp="1"/>
           </p:cNvSpPr>
@@ -4636,13 +3706,7 @@
       </p:sp>
       <p:sp>
         <p:nvSpPr>
-          <p:cNvPr id="7" name="Slide Number Placeholder 6">
-            <a:extLst>
-              <a:ext uri="{FF2B5EF4-FFF2-40B4-BE49-F238E27FC236}">
-                <a16:creationId xmlns:a16="http://schemas.microsoft.com/office/drawing/2014/main" id="{2F4D1FFA-704A-8A65-A256-CC71CEAA629E}"/>
-              </a:ext>
-            </a:extLst>
-          </p:cNvPr>
+          <p:cNvPr id="7" name="Slide Number Placeholder 6"/>
           <p:cNvSpPr>
             <a:spLocks noGrp="1"/>
           </p:cNvSpPr>
@@ -4657,18 +3721,2127 @@
           <a:p>
             <a:fld id="{48F63A3B-78C7-47BE-AE5E-E10140E04643}" type="slidenum">
               <a:rPr lang="en-US" smtClean="0"/>
-              <a:t>‹#›</a:t>
             </a:fld>
             <a:endParaRPr lang="en-US" dirty="0"/>
           </a:p>
         </p:txBody>
       </p:sp>
     </p:spTree>
-    <p:extLst>
-      <p:ext uri="{BB962C8B-B14F-4D97-AF65-F5344CB8AC3E}">
-        <p14:creationId xmlns:p14="http://schemas.microsoft.com/office/powerpoint/2010/main" val="2977023626"/>
-      </p:ext>
-    </p:extLst>
+  </p:cSld>
+  <p:clrMapOvr>
+    <a:masterClrMapping/>
+  </p:clrMapOvr>
+</p:sldLayout>
+</file>
+
+<file path=ppt/slideLayouts/slideLayout2.xml><?xml version="1.0" encoding="utf-8"?>
+<p:sldLayout xmlns:a="http://schemas.openxmlformats.org/drawingml/2006/main" xmlns:r="http://schemas.openxmlformats.org/officeDocument/2006/relationships" xmlns:p="http://schemas.openxmlformats.org/presentationml/2006/main" type="obj" preserve="1">
+  <p:cSld name="Title and Content">
+    <p:spTree>
+      <p:nvGrpSpPr>
+        <p:cNvPr id="1" name=""/>
+        <p:cNvGrpSpPr/>
+        <p:nvPr/>
+      </p:nvGrpSpPr>
+      <p:grpSpPr>
+        <a:xfrm>
+          <a:off x="0" y="0"/>
+          <a:ext cx="0" cy="0"/>
+          <a:chOff x="0" y="0"/>
+          <a:chExt cx="0" cy="0"/>
+        </a:xfrm>
+      </p:grpSpPr>
+      <p:sp>
+        <p:nvSpPr>
+          <p:cNvPr id="2" name="Title 1"/>
+          <p:cNvSpPr>
+            <a:spLocks noGrp="1"/>
+          </p:cNvSpPr>
+          <p:nvPr>
+            <p:ph type="title"/>
+          </p:nvPr>
+        </p:nvSpPr>
+        <p:spPr/>
+        <p:txBody>
+          <a:bodyPr/>
+          <a:lstStyle/>
+          <a:p>
+            <a:r>
+              <a:rPr lang="en-US" altLang="zh-CN"/>
+              <a:t>Click to edit Master title style</a:t>
+            </a:r>
+            <a:endParaRPr lang="zh-CN" altLang="en-US"/>
+          </a:p>
+        </p:txBody>
+      </p:sp>
+      <p:sp>
+        <p:nvSpPr>
+          <p:cNvPr id="3" name="Content Placeholder 2"/>
+          <p:cNvSpPr>
+            <a:spLocks noGrp="1"/>
+          </p:cNvSpPr>
+          <p:nvPr>
+            <p:ph idx="1"/>
+          </p:nvPr>
+        </p:nvSpPr>
+        <p:spPr/>
+        <p:txBody>
+          <a:bodyPr/>
+          <a:lstStyle/>
+          <a:p>
+            <a:pPr lvl="0"/>
+            <a:r>
+              <a:rPr lang="en-US" altLang="zh-CN"/>
+              <a:t>Click to edit Master text styles</a:t>
+            </a:r>
+            <a:endParaRPr lang="en-US" altLang="zh-CN"/>
+          </a:p>
+          <a:p>
+            <a:pPr lvl="1"/>
+            <a:r>
+              <a:rPr lang="en-US" altLang="zh-CN"/>
+              <a:t>Second level</a:t>
+            </a:r>
+            <a:endParaRPr lang="en-US" altLang="zh-CN"/>
+          </a:p>
+          <a:p>
+            <a:pPr lvl="2"/>
+            <a:r>
+              <a:rPr lang="en-US" altLang="zh-CN"/>
+              <a:t>Third level</a:t>
+            </a:r>
+            <a:endParaRPr lang="en-US" altLang="zh-CN"/>
+          </a:p>
+          <a:p>
+            <a:pPr lvl="3"/>
+            <a:r>
+              <a:rPr lang="en-US" altLang="zh-CN"/>
+              <a:t>Fourth level</a:t>
+            </a:r>
+            <a:endParaRPr lang="en-US" altLang="zh-CN"/>
+          </a:p>
+          <a:p>
+            <a:pPr lvl="4"/>
+            <a:r>
+              <a:rPr lang="en-US" altLang="zh-CN"/>
+              <a:t>Fifth level</a:t>
+            </a:r>
+            <a:endParaRPr lang="zh-CN" altLang="en-US"/>
+          </a:p>
+        </p:txBody>
+      </p:sp>
+      <p:sp>
+        <p:nvSpPr>
+          <p:cNvPr id="4" name="Date Placeholder 3"/>
+          <p:cNvSpPr>
+            <a:spLocks noGrp="1"/>
+          </p:cNvSpPr>
+          <p:nvPr>
+            <p:ph type="dt" sz="half" idx="10"/>
+          </p:nvPr>
+        </p:nvSpPr>
+        <p:spPr/>
+        <p:txBody>
+          <a:bodyPr/>
+          <a:lstStyle/>
+          <a:p>
+            <a:fld id="{4234D187-79CA-49C9-AC45-7398EC219FEB}" type="datetime1">
+              <a:rPr lang="en-US" smtClean="0"/>
+            </a:fld>
+            <a:endParaRPr lang="en-US" dirty="0"/>
+          </a:p>
+        </p:txBody>
+      </p:sp>
+      <p:sp>
+        <p:nvSpPr>
+          <p:cNvPr id="5" name="Footer Placeholder 4"/>
+          <p:cNvSpPr>
+            <a:spLocks noGrp="1"/>
+          </p:cNvSpPr>
+          <p:nvPr>
+            <p:ph type="ftr" sz="quarter" idx="11"/>
+          </p:nvPr>
+        </p:nvSpPr>
+        <p:spPr/>
+        <p:txBody>
+          <a:bodyPr/>
+          <a:lstStyle/>
+          <a:p>
+            <a:r>
+              <a:rPr lang="en-US"/>
+              <a:t>SNN Training</a:t>
+            </a:r>
+            <a:endParaRPr lang="en-US" dirty="0"/>
+          </a:p>
+        </p:txBody>
+      </p:sp>
+      <p:sp>
+        <p:nvSpPr>
+          <p:cNvPr id="6" name="Slide Number Placeholder 5"/>
+          <p:cNvSpPr>
+            <a:spLocks noGrp="1"/>
+          </p:cNvSpPr>
+          <p:nvPr>
+            <p:ph type="sldNum" sz="quarter" idx="12"/>
+          </p:nvPr>
+        </p:nvSpPr>
+        <p:spPr/>
+        <p:txBody>
+          <a:bodyPr/>
+          <a:lstStyle/>
+          <a:p>
+            <a:fld id="{48F63A3B-78C7-47BE-AE5E-E10140E04643}" type="slidenum">
+              <a:rPr lang="en-US" smtClean="0"/>
+            </a:fld>
+            <a:endParaRPr lang="en-US" dirty="0"/>
+          </a:p>
+        </p:txBody>
+      </p:sp>
+    </p:spTree>
+  </p:cSld>
+  <p:clrMapOvr>
+    <a:masterClrMapping/>
+  </p:clrMapOvr>
+</p:sldLayout>
+</file>
+
+<file path=ppt/slideLayouts/slideLayout20.xml><?xml version="1.0" encoding="utf-8"?>
+<p:sldLayout xmlns:a="http://schemas.openxmlformats.org/drawingml/2006/main" xmlns:r="http://schemas.openxmlformats.org/officeDocument/2006/relationships" xmlns:p="http://schemas.openxmlformats.org/presentationml/2006/main" type="picTx" preserve="1">
+  <p:cSld name="Picture with Caption">
+    <p:spTree>
+      <p:nvGrpSpPr>
+        <p:cNvPr id="1" name=""/>
+        <p:cNvGrpSpPr/>
+        <p:nvPr/>
+      </p:nvGrpSpPr>
+      <p:grpSpPr>
+        <a:xfrm>
+          <a:off x="0" y="0"/>
+          <a:ext cx="0" cy="0"/>
+          <a:chOff x="0" y="0"/>
+          <a:chExt cx="0" cy="0"/>
+        </a:xfrm>
+      </p:grpSpPr>
+      <p:sp>
+        <p:nvSpPr>
+          <p:cNvPr id="2" name="Title 1"/>
+          <p:cNvSpPr>
+            <a:spLocks noGrp="1"/>
+          </p:cNvSpPr>
+          <p:nvPr>
+            <p:ph type="title"/>
+          </p:nvPr>
+        </p:nvSpPr>
+        <p:spPr>
+          <a:xfrm>
+            <a:off x="839788" y="457200"/>
+            <a:ext cx="3932237" cy="1600200"/>
+          </a:xfrm>
+        </p:spPr>
+        <p:txBody>
+          <a:bodyPr anchor="b"/>
+          <a:lstStyle>
+            <a:lvl1pPr>
+              <a:defRPr sz="3200"/>
+            </a:lvl1pPr>
+          </a:lstStyle>
+          <a:p>
+            <a:r>
+              <a:rPr lang="en-US" altLang="zh-CN"/>
+              <a:t>Click to edit Master title style</a:t>
+            </a:r>
+            <a:endParaRPr lang="zh-CN" altLang="en-US"/>
+          </a:p>
+        </p:txBody>
+      </p:sp>
+      <p:sp>
+        <p:nvSpPr>
+          <p:cNvPr id="3" name="Picture Placeholder 2"/>
+          <p:cNvSpPr>
+            <a:spLocks noGrp="1"/>
+          </p:cNvSpPr>
+          <p:nvPr>
+            <p:ph type="pic" idx="1"/>
+          </p:nvPr>
+        </p:nvSpPr>
+        <p:spPr>
+          <a:xfrm>
+            <a:off x="5183188" y="987425"/>
+            <a:ext cx="6172200" cy="4873625"/>
+          </a:xfrm>
+        </p:spPr>
+        <p:txBody>
+          <a:bodyPr/>
+          <a:lstStyle>
+            <a:lvl1pPr marL="0" indent="0">
+              <a:buNone/>
+              <a:defRPr sz="3200"/>
+            </a:lvl1pPr>
+            <a:lvl2pPr marL="457200" indent="0">
+              <a:buNone/>
+              <a:defRPr sz="2800"/>
+            </a:lvl2pPr>
+            <a:lvl3pPr marL="914400" indent="0">
+              <a:buNone/>
+              <a:defRPr sz="2400"/>
+            </a:lvl3pPr>
+            <a:lvl4pPr marL="1371600" indent="0">
+              <a:buNone/>
+              <a:defRPr sz="2000"/>
+            </a:lvl4pPr>
+            <a:lvl5pPr marL="1828800" indent="0">
+              <a:buNone/>
+              <a:defRPr sz="2000"/>
+            </a:lvl5pPr>
+            <a:lvl6pPr marL="2286000" indent="0">
+              <a:buNone/>
+              <a:defRPr sz="2000"/>
+            </a:lvl6pPr>
+            <a:lvl7pPr marL="2743200" indent="0">
+              <a:buNone/>
+              <a:defRPr sz="2000"/>
+            </a:lvl7pPr>
+            <a:lvl8pPr marL="3200400" indent="0">
+              <a:buNone/>
+              <a:defRPr sz="2000"/>
+            </a:lvl8pPr>
+            <a:lvl9pPr marL="3657600" indent="0">
+              <a:buNone/>
+              <a:defRPr sz="2000"/>
+            </a:lvl9pPr>
+          </a:lstStyle>
+          <a:p>
+            <a:endParaRPr lang="zh-CN" altLang="en-US"/>
+          </a:p>
+        </p:txBody>
+      </p:sp>
+      <p:sp>
+        <p:nvSpPr>
+          <p:cNvPr id="4" name="Text Placeholder 3"/>
+          <p:cNvSpPr>
+            <a:spLocks noGrp="1"/>
+          </p:cNvSpPr>
+          <p:nvPr>
+            <p:ph type="body" sz="half" idx="2"/>
+          </p:nvPr>
+        </p:nvSpPr>
+        <p:spPr>
+          <a:xfrm>
+            <a:off x="839788" y="2057400"/>
+            <a:ext cx="3932237" cy="3811588"/>
+          </a:xfrm>
+        </p:spPr>
+        <p:txBody>
+          <a:bodyPr/>
+          <a:lstStyle>
+            <a:lvl1pPr marL="0" indent="0">
+              <a:buNone/>
+              <a:defRPr sz="1600"/>
+            </a:lvl1pPr>
+            <a:lvl2pPr marL="457200" indent="0">
+              <a:buNone/>
+              <a:defRPr sz="1400"/>
+            </a:lvl2pPr>
+            <a:lvl3pPr marL="914400" indent="0">
+              <a:buNone/>
+              <a:defRPr sz="1200"/>
+            </a:lvl3pPr>
+            <a:lvl4pPr marL="1371600" indent="0">
+              <a:buNone/>
+              <a:defRPr sz="1000"/>
+            </a:lvl4pPr>
+            <a:lvl5pPr marL="1828800" indent="0">
+              <a:buNone/>
+              <a:defRPr sz="1000"/>
+            </a:lvl5pPr>
+            <a:lvl6pPr marL="2286000" indent="0">
+              <a:buNone/>
+              <a:defRPr sz="1000"/>
+            </a:lvl6pPr>
+            <a:lvl7pPr marL="2743200" indent="0">
+              <a:buNone/>
+              <a:defRPr sz="1000"/>
+            </a:lvl7pPr>
+            <a:lvl8pPr marL="3200400" indent="0">
+              <a:buNone/>
+              <a:defRPr sz="1000"/>
+            </a:lvl8pPr>
+            <a:lvl9pPr marL="3657600" indent="0">
+              <a:buNone/>
+              <a:defRPr sz="1000"/>
+            </a:lvl9pPr>
+          </a:lstStyle>
+          <a:p>
+            <a:pPr lvl="0"/>
+            <a:r>
+              <a:rPr lang="en-US" altLang="zh-CN"/>
+              <a:t>Click to edit Master text styles</a:t>
+            </a:r>
+            <a:endParaRPr lang="en-US" altLang="zh-CN"/>
+          </a:p>
+        </p:txBody>
+      </p:sp>
+      <p:sp>
+        <p:nvSpPr>
+          <p:cNvPr id="5" name="Date Placeholder 4"/>
+          <p:cNvSpPr>
+            <a:spLocks noGrp="1"/>
+          </p:cNvSpPr>
+          <p:nvPr>
+            <p:ph type="dt" sz="half" idx="10"/>
+          </p:nvPr>
+        </p:nvSpPr>
+        <p:spPr/>
+        <p:txBody>
+          <a:bodyPr/>
+          <a:lstStyle/>
+          <a:p>
+            <a:fld id="{2091504F-6E90-4C51-838A-7127758B1AC9}" type="datetime1">
+              <a:rPr lang="en-US" smtClean="0"/>
+            </a:fld>
+            <a:endParaRPr lang="en-US" dirty="0"/>
+          </a:p>
+        </p:txBody>
+      </p:sp>
+      <p:sp>
+        <p:nvSpPr>
+          <p:cNvPr id="6" name="Footer Placeholder 5"/>
+          <p:cNvSpPr>
+            <a:spLocks noGrp="1"/>
+          </p:cNvSpPr>
+          <p:nvPr>
+            <p:ph type="ftr" sz="quarter" idx="11"/>
+          </p:nvPr>
+        </p:nvSpPr>
+        <p:spPr/>
+        <p:txBody>
+          <a:bodyPr/>
+          <a:lstStyle/>
+          <a:p>
+            <a:r>
+              <a:rPr lang="en-US"/>
+              <a:t>SNN Training</a:t>
+            </a:r>
+            <a:endParaRPr lang="en-US" dirty="0"/>
+          </a:p>
+        </p:txBody>
+      </p:sp>
+      <p:sp>
+        <p:nvSpPr>
+          <p:cNvPr id="7" name="Slide Number Placeholder 6"/>
+          <p:cNvSpPr>
+            <a:spLocks noGrp="1"/>
+          </p:cNvSpPr>
+          <p:nvPr>
+            <p:ph type="sldNum" sz="quarter" idx="12"/>
+          </p:nvPr>
+        </p:nvSpPr>
+        <p:spPr/>
+        <p:txBody>
+          <a:bodyPr/>
+          <a:lstStyle/>
+          <a:p>
+            <a:fld id="{48F63A3B-78C7-47BE-AE5E-E10140E04643}" type="slidenum">
+              <a:rPr lang="en-US" smtClean="0"/>
+            </a:fld>
+            <a:endParaRPr lang="en-US" dirty="0"/>
+          </a:p>
+        </p:txBody>
+      </p:sp>
+    </p:spTree>
+  </p:cSld>
+  <p:clrMapOvr>
+    <a:masterClrMapping/>
+  </p:clrMapOvr>
+</p:sldLayout>
+</file>
+
+<file path=ppt/slideLayouts/slideLayout21.xml><?xml version="1.0" encoding="utf-8"?>
+<p:sldLayout xmlns:a="http://schemas.openxmlformats.org/drawingml/2006/main" xmlns:r="http://schemas.openxmlformats.org/officeDocument/2006/relationships" xmlns:p="http://schemas.openxmlformats.org/presentationml/2006/main" type="vertTx" preserve="1">
+  <p:cSld name="Title and Vertical Text">
+    <p:spTree>
+      <p:nvGrpSpPr>
+        <p:cNvPr id="1" name=""/>
+        <p:cNvGrpSpPr/>
+        <p:nvPr/>
+      </p:nvGrpSpPr>
+      <p:grpSpPr>
+        <a:xfrm>
+          <a:off x="0" y="0"/>
+          <a:ext cx="0" cy="0"/>
+          <a:chOff x="0" y="0"/>
+          <a:chExt cx="0" cy="0"/>
+        </a:xfrm>
+      </p:grpSpPr>
+      <p:sp>
+        <p:nvSpPr>
+          <p:cNvPr id="2" name="Title 1"/>
+          <p:cNvSpPr>
+            <a:spLocks noGrp="1"/>
+          </p:cNvSpPr>
+          <p:nvPr>
+            <p:ph type="title"/>
+          </p:nvPr>
+        </p:nvSpPr>
+        <p:spPr/>
+        <p:txBody>
+          <a:bodyPr/>
+          <a:lstStyle/>
+          <a:p>
+            <a:r>
+              <a:rPr lang="en-US" altLang="zh-CN"/>
+              <a:t>Click to edit Master title style</a:t>
+            </a:r>
+            <a:endParaRPr lang="zh-CN" altLang="en-US"/>
+          </a:p>
+        </p:txBody>
+      </p:sp>
+      <p:sp>
+        <p:nvSpPr>
+          <p:cNvPr id="3" name="Vertical Text Placeholder 2"/>
+          <p:cNvSpPr>
+            <a:spLocks noGrp="1"/>
+          </p:cNvSpPr>
+          <p:nvPr>
+            <p:ph type="body" orient="vert" idx="1"/>
+          </p:nvPr>
+        </p:nvSpPr>
+        <p:spPr/>
+        <p:txBody>
+          <a:bodyPr vert="eaVert"/>
+          <a:lstStyle/>
+          <a:p>
+            <a:pPr lvl="0"/>
+            <a:r>
+              <a:rPr lang="en-US" altLang="zh-CN"/>
+              <a:t>Click to edit Master text styles</a:t>
+            </a:r>
+            <a:endParaRPr lang="en-US" altLang="zh-CN"/>
+          </a:p>
+          <a:p>
+            <a:pPr lvl="1"/>
+            <a:r>
+              <a:rPr lang="en-US" altLang="zh-CN"/>
+              <a:t>Second level</a:t>
+            </a:r>
+            <a:endParaRPr lang="en-US" altLang="zh-CN"/>
+          </a:p>
+          <a:p>
+            <a:pPr lvl="2"/>
+            <a:r>
+              <a:rPr lang="en-US" altLang="zh-CN"/>
+              <a:t>Third level</a:t>
+            </a:r>
+            <a:endParaRPr lang="en-US" altLang="zh-CN"/>
+          </a:p>
+          <a:p>
+            <a:pPr lvl="3"/>
+            <a:r>
+              <a:rPr lang="en-US" altLang="zh-CN"/>
+              <a:t>Fourth level</a:t>
+            </a:r>
+            <a:endParaRPr lang="en-US" altLang="zh-CN"/>
+          </a:p>
+          <a:p>
+            <a:pPr lvl="4"/>
+            <a:r>
+              <a:rPr lang="en-US" altLang="zh-CN"/>
+              <a:t>Fifth level</a:t>
+            </a:r>
+            <a:endParaRPr lang="zh-CN" altLang="en-US"/>
+          </a:p>
+        </p:txBody>
+      </p:sp>
+      <p:sp>
+        <p:nvSpPr>
+          <p:cNvPr id="4" name="Date Placeholder 3"/>
+          <p:cNvSpPr>
+            <a:spLocks noGrp="1"/>
+          </p:cNvSpPr>
+          <p:nvPr>
+            <p:ph type="dt" sz="half" idx="10"/>
+          </p:nvPr>
+        </p:nvSpPr>
+        <p:spPr/>
+        <p:txBody>
+          <a:bodyPr/>
+          <a:lstStyle/>
+          <a:p>
+            <a:fld id="{5E8C43C7-A0FE-4403-800C-056E5346ED83}" type="datetime1">
+              <a:rPr lang="en-US" smtClean="0"/>
+            </a:fld>
+            <a:endParaRPr lang="en-US" dirty="0"/>
+          </a:p>
+        </p:txBody>
+      </p:sp>
+      <p:sp>
+        <p:nvSpPr>
+          <p:cNvPr id="5" name="Footer Placeholder 4"/>
+          <p:cNvSpPr>
+            <a:spLocks noGrp="1"/>
+          </p:cNvSpPr>
+          <p:nvPr>
+            <p:ph type="ftr" sz="quarter" idx="11"/>
+          </p:nvPr>
+        </p:nvSpPr>
+        <p:spPr/>
+        <p:txBody>
+          <a:bodyPr/>
+          <a:lstStyle/>
+          <a:p>
+            <a:r>
+              <a:rPr lang="en-US"/>
+              <a:t>SNN Training</a:t>
+            </a:r>
+            <a:endParaRPr lang="en-US" dirty="0"/>
+          </a:p>
+        </p:txBody>
+      </p:sp>
+      <p:sp>
+        <p:nvSpPr>
+          <p:cNvPr id="6" name="Slide Number Placeholder 5"/>
+          <p:cNvSpPr>
+            <a:spLocks noGrp="1"/>
+          </p:cNvSpPr>
+          <p:nvPr>
+            <p:ph type="sldNum" sz="quarter" idx="12"/>
+          </p:nvPr>
+        </p:nvSpPr>
+        <p:spPr/>
+        <p:txBody>
+          <a:bodyPr/>
+          <a:lstStyle/>
+          <a:p>
+            <a:fld id="{48F63A3B-78C7-47BE-AE5E-E10140E04643}" type="slidenum">
+              <a:rPr lang="en-US" smtClean="0"/>
+            </a:fld>
+            <a:endParaRPr lang="en-US" dirty="0"/>
+          </a:p>
+        </p:txBody>
+      </p:sp>
+    </p:spTree>
+  </p:cSld>
+  <p:clrMapOvr>
+    <a:masterClrMapping/>
+  </p:clrMapOvr>
+</p:sldLayout>
+</file>
+
+<file path=ppt/slideLayouts/slideLayout22.xml><?xml version="1.0" encoding="utf-8"?>
+<p:sldLayout xmlns:a="http://schemas.openxmlformats.org/drawingml/2006/main" xmlns:r="http://schemas.openxmlformats.org/officeDocument/2006/relationships" xmlns:p="http://schemas.openxmlformats.org/presentationml/2006/main" type="vertTitleAndTx" preserve="1">
+  <p:cSld name="Vertical Title and Text">
+    <p:spTree>
+      <p:nvGrpSpPr>
+        <p:cNvPr id="1" name=""/>
+        <p:cNvGrpSpPr/>
+        <p:nvPr/>
+      </p:nvGrpSpPr>
+      <p:grpSpPr>
+        <a:xfrm>
+          <a:off x="0" y="0"/>
+          <a:ext cx="0" cy="0"/>
+          <a:chOff x="0" y="0"/>
+          <a:chExt cx="0" cy="0"/>
+        </a:xfrm>
+      </p:grpSpPr>
+      <p:sp>
+        <p:nvSpPr>
+          <p:cNvPr id="2" name="Vertical Title 1"/>
+          <p:cNvSpPr>
+            <a:spLocks noGrp="1"/>
+          </p:cNvSpPr>
+          <p:nvPr>
+            <p:ph type="title" orient="vert"/>
+          </p:nvPr>
+        </p:nvSpPr>
+        <p:spPr>
+          <a:xfrm>
+            <a:off x="8724900" y="365125"/>
+            <a:ext cx="2628900" cy="5811838"/>
+          </a:xfrm>
+        </p:spPr>
+        <p:txBody>
+          <a:bodyPr vert="eaVert"/>
+          <a:lstStyle/>
+          <a:p>
+            <a:r>
+              <a:rPr lang="en-US" altLang="zh-CN"/>
+              <a:t>Click to edit Master title style</a:t>
+            </a:r>
+            <a:endParaRPr lang="zh-CN" altLang="en-US"/>
+          </a:p>
+        </p:txBody>
+      </p:sp>
+      <p:sp>
+        <p:nvSpPr>
+          <p:cNvPr id="3" name="Vertical Text Placeholder 2"/>
+          <p:cNvSpPr>
+            <a:spLocks noGrp="1"/>
+          </p:cNvSpPr>
+          <p:nvPr>
+            <p:ph type="body" orient="vert" idx="1"/>
+          </p:nvPr>
+        </p:nvSpPr>
+        <p:spPr>
+          <a:xfrm>
+            <a:off x="838200" y="365125"/>
+            <a:ext cx="7734300" cy="5811838"/>
+          </a:xfrm>
+        </p:spPr>
+        <p:txBody>
+          <a:bodyPr vert="eaVert"/>
+          <a:lstStyle/>
+          <a:p>
+            <a:pPr lvl="0"/>
+            <a:r>
+              <a:rPr lang="en-US" altLang="zh-CN"/>
+              <a:t>Click to edit Master text styles</a:t>
+            </a:r>
+            <a:endParaRPr lang="en-US" altLang="zh-CN"/>
+          </a:p>
+          <a:p>
+            <a:pPr lvl="1"/>
+            <a:r>
+              <a:rPr lang="en-US" altLang="zh-CN"/>
+              <a:t>Second level</a:t>
+            </a:r>
+            <a:endParaRPr lang="en-US" altLang="zh-CN"/>
+          </a:p>
+          <a:p>
+            <a:pPr lvl="2"/>
+            <a:r>
+              <a:rPr lang="en-US" altLang="zh-CN"/>
+              <a:t>Third level</a:t>
+            </a:r>
+            <a:endParaRPr lang="en-US" altLang="zh-CN"/>
+          </a:p>
+          <a:p>
+            <a:pPr lvl="3"/>
+            <a:r>
+              <a:rPr lang="en-US" altLang="zh-CN"/>
+              <a:t>Fourth level</a:t>
+            </a:r>
+            <a:endParaRPr lang="en-US" altLang="zh-CN"/>
+          </a:p>
+          <a:p>
+            <a:pPr lvl="4"/>
+            <a:r>
+              <a:rPr lang="en-US" altLang="zh-CN"/>
+              <a:t>Fifth level</a:t>
+            </a:r>
+            <a:endParaRPr lang="zh-CN" altLang="en-US"/>
+          </a:p>
+        </p:txBody>
+      </p:sp>
+      <p:sp>
+        <p:nvSpPr>
+          <p:cNvPr id="4" name="Date Placeholder 3"/>
+          <p:cNvSpPr>
+            <a:spLocks noGrp="1"/>
+          </p:cNvSpPr>
+          <p:nvPr>
+            <p:ph type="dt" sz="half" idx="10"/>
+          </p:nvPr>
+        </p:nvSpPr>
+        <p:spPr/>
+        <p:txBody>
+          <a:bodyPr/>
+          <a:lstStyle/>
+          <a:p>
+            <a:fld id="{092B2655-FAB5-4AA0-B2E3-3B849CA19F9E}" type="datetime1">
+              <a:rPr lang="en-US" smtClean="0"/>
+            </a:fld>
+            <a:endParaRPr lang="en-US" dirty="0"/>
+          </a:p>
+        </p:txBody>
+      </p:sp>
+      <p:sp>
+        <p:nvSpPr>
+          <p:cNvPr id="5" name="Footer Placeholder 4"/>
+          <p:cNvSpPr>
+            <a:spLocks noGrp="1"/>
+          </p:cNvSpPr>
+          <p:nvPr>
+            <p:ph type="ftr" sz="quarter" idx="11"/>
+          </p:nvPr>
+        </p:nvSpPr>
+        <p:spPr/>
+        <p:txBody>
+          <a:bodyPr/>
+          <a:lstStyle/>
+          <a:p>
+            <a:r>
+              <a:rPr lang="en-US"/>
+              <a:t>SNN Training</a:t>
+            </a:r>
+            <a:endParaRPr lang="en-US" dirty="0"/>
+          </a:p>
+        </p:txBody>
+      </p:sp>
+      <p:sp>
+        <p:nvSpPr>
+          <p:cNvPr id="6" name="Slide Number Placeholder 5"/>
+          <p:cNvSpPr>
+            <a:spLocks noGrp="1"/>
+          </p:cNvSpPr>
+          <p:nvPr>
+            <p:ph type="sldNum" sz="quarter" idx="12"/>
+          </p:nvPr>
+        </p:nvSpPr>
+        <p:spPr/>
+        <p:txBody>
+          <a:bodyPr/>
+          <a:lstStyle/>
+          <a:p>
+            <a:fld id="{48F63A3B-78C7-47BE-AE5E-E10140E04643}" type="slidenum">
+              <a:rPr lang="en-US" smtClean="0"/>
+            </a:fld>
+            <a:endParaRPr lang="en-US" dirty="0"/>
+          </a:p>
+        </p:txBody>
+      </p:sp>
+    </p:spTree>
+  </p:cSld>
+  <p:clrMapOvr>
+    <a:masterClrMapping/>
+  </p:clrMapOvr>
+</p:sldLayout>
+</file>
+
+<file path=ppt/slideLayouts/slideLayout3.xml><?xml version="1.0" encoding="utf-8"?>
+<p:sldLayout xmlns:a="http://schemas.openxmlformats.org/drawingml/2006/main" xmlns:r="http://schemas.openxmlformats.org/officeDocument/2006/relationships" xmlns:p="http://schemas.openxmlformats.org/presentationml/2006/main" type="secHead" preserve="1">
+  <p:cSld name="Section Header">
+    <p:spTree>
+      <p:nvGrpSpPr>
+        <p:cNvPr id="1" name=""/>
+        <p:cNvGrpSpPr/>
+        <p:nvPr/>
+      </p:nvGrpSpPr>
+      <p:grpSpPr>
+        <a:xfrm>
+          <a:off x="0" y="0"/>
+          <a:ext cx="0" cy="0"/>
+          <a:chOff x="0" y="0"/>
+          <a:chExt cx="0" cy="0"/>
+        </a:xfrm>
+      </p:grpSpPr>
+      <p:sp>
+        <p:nvSpPr>
+          <p:cNvPr id="2" name="Title 1"/>
+          <p:cNvSpPr>
+            <a:spLocks noGrp="1"/>
+          </p:cNvSpPr>
+          <p:nvPr>
+            <p:ph type="title"/>
+          </p:nvPr>
+        </p:nvSpPr>
+        <p:spPr>
+          <a:xfrm>
+            <a:off x="831850" y="1709738"/>
+            <a:ext cx="10515600" cy="2852737"/>
+          </a:xfrm>
+        </p:spPr>
+        <p:txBody>
+          <a:bodyPr anchor="b"/>
+          <a:lstStyle>
+            <a:lvl1pPr>
+              <a:defRPr sz="6000"/>
+            </a:lvl1pPr>
+          </a:lstStyle>
+          <a:p>
+            <a:r>
+              <a:rPr lang="en-US" altLang="zh-CN" dirty="0"/>
+              <a:t>Click to edit Master title style</a:t>
+            </a:r>
+            <a:endParaRPr lang="zh-CN" altLang="en-US" dirty="0"/>
+          </a:p>
+        </p:txBody>
+      </p:sp>
+      <p:sp>
+        <p:nvSpPr>
+          <p:cNvPr id="3" name="Text Placeholder 2"/>
+          <p:cNvSpPr>
+            <a:spLocks noGrp="1"/>
+          </p:cNvSpPr>
+          <p:nvPr>
+            <p:ph type="body" idx="1"/>
+          </p:nvPr>
+        </p:nvSpPr>
+        <p:spPr>
+          <a:xfrm>
+            <a:off x="831850" y="4589463"/>
+            <a:ext cx="10515600" cy="1500187"/>
+          </a:xfrm>
+        </p:spPr>
+        <p:txBody>
+          <a:bodyPr/>
+          <a:lstStyle>
+            <a:lvl1pPr marL="0" indent="0">
+              <a:buNone/>
+              <a:defRPr sz="2400">
+                <a:solidFill>
+                  <a:schemeClr val="tx1">
+                    <a:tint val="82000"/>
+                  </a:schemeClr>
+                </a:solidFill>
+              </a:defRPr>
+            </a:lvl1pPr>
+            <a:lvl2pPr marL="457200" indent="0">
+              <a:buNone/>
+              <a:defRPr sz="2000">
+                <a:solidFill>
+                  <a:schemeClr val="tx1">
+                    <a:tint val="82000"/>
+                  </a:schemeClr>
+                </a:solidFill>
+              </a:defRPr>
+            </a:lvl2pPr>
+            <a:lvl3pPr marL="914400" indent="0">
+              <a:buNone/>
+              <a:defRPr sz="1800">
+                <a:solidFill>
+                  <a:schemeClr val="tx1">
+                    <a:tint val="82000"/>
+                  </a:schemeClr>
+                </a:solidFill>
+              </a:defRPr>
+            </a:lvl3pPr>
+            <a:lvl4pPr marL="1371600" indent="0">
+              <a:buNone/>
+              <a:defRPr sz="1600">
+                <a:solidFill>
+                  <a:schemeClr val="tx1">
+                    <a:tint val="82000"/>
+                  </a:schemeClr>
+                </a:solidFill>
+              </a:defRPr>
+            </a:lvl4pPr>
+            <a:lvl5pPr marL="1828800" indent="0">
+              <a:buNone/>
+              <a:defRPr sz="1600">
+                <a:solidFill>
+                  <a:schemeClr val="tx1">
+                    <a:tint val="82000"/>
+                  </a:schemeClr>
+                </a:solidFill>
+              </a:defRPr>
+            </a:lvl5pPr>
+            <a:lvl6pPr marL="2286000" indent="0">
+              <a:buNone/>
+              <a:defRPr sz="1600">
+                <a:solidFill>
+                  <a:schemeClr val="tx1">
+                    <a:tint val="82000"/>
+                  </a:schemeClr>
+                </a:solidFill>
+              </a:defRPr>
+            </a:lvl6pPr>
+            <a:lvl7pPr marL="2743200" indent="0">
+              <a:buNone/>
+              <a:defRPr sz="1600">
+                <a:solidFill>
+                  <a:schemeClr val="tx1">
+                    <a:tint val="82000"/>
+                  </a:schemeClr>
+                </a:solidFill>
+              </a:defRPr>
+            </a:lvl7pPr>
+            <a:lvl8pPr marL="3200400" indent="0">
+              <a:buNone/>
+              <a:defRPr sz="1600">
+                <a:solidFill>
+                  <a:schemeClr val="tx1">
+                    <a:tint val="82000"/>
+                  </a:schemeClr>
+                </a:solidFill>
+              </a:defRPr>
+            </a:lvl8pPr>
+            <a:lvl9pPr marL="3657600" indent="0">
+              <a:buNone/>
+              <a:defRPr sz="1600">
+                <a:solidFill>
+                  <a:schemeClr val="tx1">
+                    <a:tint val="82000"/>
+                  </a:schemeClr>
+                </a:solidFill>
+              </a:defRPr>
+            </a:lvl9pPr>
+          </a:lstStyle>
+          <a:p>
+            <a:pPr lvl="0"/>
+            <a:r>
+              <a:rPr lang="en-US" altLang="zh-CN"/>
+              <a:t>Click to edit Master text styles</a:t>
+            </a:r>
+            <a:endParaRPr lang="en-US" altLang="zh-CN"/>
+          </a:p>
+        </p:txBody>
+      </p:sp>
+      <p:sp>
+        <p:nvSpPr>
+          <p:cNvPr id="4" name="Date Placeholder 3"/>
+          <p:cNvSpPr>
+            <a:spLocks noGrp="1"/>
+          </p:cNvSpPr>
+          <p:nvPr>
+            <p:ph type="dt" sz="half" idx="10"/>
+          </p:nvPr>
+        </p:nvSpPr>
+        <p:spPr/>
+        <p:txBody>
+          <a:bodyPr/>
+          <a:lstStyle/>
+          <a:p>
+            <a:fld id="{453EF72E-264F-40E9-86EF-DDFC8BEA29BE}" type="datetime1">
+              <a:rPr lang="en-US" smtClean="0"/>
+            </a:fld>
+            <a:endParaRPr lang="en-US" dirty="0"/>
+          </a:p>
+        </p:txBody>
+      </p:sp>
+      <p:sp>
+        <p:nvSpPr>
+          <p:cNvPr id="5" name="Footer Placeholder 4"/>
+          <p:cNvSpPr>
+            <a:spLocks noGrp="1"/>
+          </p:cNvSpPr>
+          <p:nvPr>
+            <p:ph type="ftr" sz="quarter" idx="11"/>
+          </p:nvPr>
+        </p:nvSpPr>
+        <p:spPr/>
+        <p:txBody>
+          <a:bodyPr/>
+          <a:lstStyle/>
+          <a:p>
+            <a:r>
+              <a:rPr lang="en-US"/>
+              <a:t>SNN Training</a:t>
+            </a:r>
+            <a:endParaRPr lang="en-US" dirty="0"/>
+          </a:p>
+        </p:txBody>
+      </p:sp>
+      <p:sp>
+        <p:nvSpPr>
+          <p:cNvPr id="6" name="Slide Number Placeholder 5"/>
+          <p:cNvSpPr>
+            <a:spLocks noGrp="1"/>
+          </p:cNvSpPr>
+          <p:nvPr>
+            <p:ph type="sldNum" sz="quarter" idx="12"/>
+          </p:nvPr>
+        </p:nvSpPr>
+        <p:spPr/>
+        <p:txBody>
+          <a:bodyPr/>
+          <a:lstStyle/>
+          <a:p>
+            <a:fld id="{48F63A3B-78C7-47BE-AE5E-E10140E04643}" type="slidenum">
+              <a:rPr lang="en-US" smtClean="0"/>
+            </a:fld>
+            <a:endParaRPr lang="en-US" dirty="0"/>
+          </a:p>
+        </p:txBody>
+      </p:sp>
+    </p:spTree>
+  </p:cSld>
+  <p:clrMapOvr>
+    <a:masterClrMapping/>
+  </p:clrMapOvr>
+</p:sldLayout>
+</file>
+
+<file path=ppt/slideLayouts/slideLayout4.xml><?xml version="1.0" encoding="utf-8"?>
+<p:sldLayout xmlns:a="http://schemas.openxmlformats.org/drawingml/2006/main" xmlns:r="http://schemas.openxmlformats.org/officeDocument/2006/relationships" xmlns:p="http://schemas.openxmlformats.org/presentationml/2006/main" type="twoObj" preserve="1">
+  <p:cSld name="Two Content">
+    <p:spTree>
+      <p:nvGrpSpPr>
+        <p:cNvPr id="1" name=""/>
+        <p:cNvGrpSpPr/>
+        <p:nvPr/>
+      </p:nvGrpSpPr>
+      <p:grpSpPr>
+        <a:xfrm>
+          <a:off x="0" y="0"/>
+          <a:ext cx="0" cy="0"/>
+          <a:chOff x="0" y="0"/>
+          <a:chExt cx="0" cy="0"/>
+        </a:xfrm>
+      </p:grpSpPr>
+      <p:sp>
+        <p:nvSpPr>
+          <p:cNvPr id="2" name="Title 1"/>
+          <p:cNvSpPr>
+            <a:spLocks noGrp="1"/>
+          </p:cNvSpPr>
+          <p:nvPr>
+            <p:ph type="title"/>
+          </p:nvPr>
+        </p:nvSpPr>
+        <p:spPr/>
+        <p:txBody>
+          <a:bodyPr/>
+          <a:lstStyle/>
+          <a:p>
+            <a:r>
+              <a:rPr lang="en-US" altLang="zh-CN"/>
+              <a:t>Click to edit Master title style</a:t>
+            </a:r>
+            <a:endParaRPr lang="zh-CN" altLang="en-US"/>
+          </a:p>
+        </p:txBody>
+      </p:sp>
+      <p:sp>
+        <p:nvSpPr>
+          <p:cNvPr id="3" name="Content Placeholder 2"/>
+          <p:cNvSpPr>
+            <a:spLocks noGrp="1"/>
+          </p:cNvSpPr>
+          <p:nvPr>
+            <p:ph sz="half" idx="1"/>
+          </p:nvPr>
+        </p:nvSpPr>
+        <p:spPr>
+          <a:xfrm>
+            <a:off x="838200" y="1825625"/>
+            <a:ext cx="5181600" cy="4351338"/>
+          </a:xfrm>
+        </p:spPr>
+        <p:txBody>
+          <a:bodyPr/>
+          <a:lstStyle/>
+          <a:p>
+            <a:pPr lvl="0"/>
+            <a:r>
+              <a:rPr lang="en-US" altLang="zh-CN"/>
+              <a:t>Click to edit Master text styles</a:t>
+            </a:r>
+            <a:endParaRPr lang="en-US" altLang="zh-CN"/>
+          </a:p>
+          <a:p>
+            <a:pPr lvl="1"/>
+            <a:r>
+              <a:rPr lang="en-US" altLang="zh-CN"/>
+              <a:t>Second level</a:t>
+            </a:r>
+            <a:endParaRPr lang="en-US" altLang="zh-CN"/>
+          </a:p>
+          <a:p>
+            <a:pPr lvl="2"/>
+            <a:r>
+              <a:rPr lang="en-US" altLang="zh-CN"/>
+              <a:t>Third level</a:t>
+            </a:r>
+            <a:endParaRPr lang="en-US" altLang="zh-CN"/>
+          </a:p>
+          <a:p>
+            <a:pPr lvl="3"/>
+            <a:r>
+              <a:rPr lang="en-US" altLang="zh-CN"/>
+              <a:t>Fourth level</a:t>
+            </a:r>
+            <a:endParaRPr lang="en-US" altLang="zh-CN"/>
+          </a:p>
+          <a:p>
+            <a:pPr lvl="4"/>
+            <a:r>
+              <a:rPr lang="en-US" altLang="zh-CN"/>
+              <a:t>Fifth level</a:t>
+            </a:r>
+            <a:endParaRPr lang="zh-CN" altLang="en-US"/>
+          </a:p>
+        </p:txBody>
+      </p:sp>
+      <p:sp>
+        <p:nvSpPr>
+          <p:cNvPr id="4" name="Content Placeholder 3"/>
+          <p:cNvSpPr>
+            <a:spLocks noGrp="1"/>
+          </p:cNvSpPr>
+          <p:nvPr>
+            <p:ph sz="half" idx="2"/>
+          </p:nvPr>
+        </p:nvSpPr>
+        <p:spPr>
+          <a:xfrm>
+            <a:off x="6172200" y="1825625"/>
+            <a:ext cx="5181600" cy="4351338"/>
+          </a:xfrm>
+        </p:spPr>
+        <p:txBody>
+          <a:bodyPr/>
+          <a:lstStyle/>
+          <a:p>
+            <a:pPr lvl="0"/>
+            <a:r>
+              <a:rPr lang="en-US" altLang="zh-CN"/>
+              <a:t>Click to edit Master text styles</a:t>
+            </a:r>
+            <a:endParaRPr lang="en-US" altLang="zh-CN"/>
+          </a:p>
+          <a:p>
+            <a:pPr lvl="1"/>
+            <a:r>
+              <a:rPr lang="en-US" altLang="zh-CN"/>
+              <a:t>Second level</a:t>
+            </a:r>
+            <a:endParaRPr lang="en-US" altLang="zh-CN"/>
+          </a:p>
+          <a:p>
+            <a:pPr lvl="2"/>
+            <a:r>
+              <a:rPr lang="en-US" altLang="zh-CN"/>
+              <a:t>Third level</a:t>
+            </a:r>
+            <a:endParaRPr lang="en-US" altLang="zh-CN"/>
+          </a:p>
+          <a:p>
+            <a:pPr lvl="3"/>
+            <a:r>
+              <a:rPr lang="en-US" altLang="zh-CN"/>
+              <a:t>Fourth level</a:t>
+            </a:r>
+            <a:endParaRPr lang="en-US" altLang="zh-CN"/>
+          </a:p>
+          <a:p>
+            <a:pPr lvl="4"/>
+            <a:r>
+              <a:rPr lang="en-US" altLang="zh-CN"/>
+              <a:t>Fifth level</a:t>
+            </a:r>
+            <a:endParaRPr lang="zh-CN" altLang="en-US"/>
+          </a:p>
+        </p:txBody>
+      </p:sp>
+      <p:sp>
+        <p:nvSpPr>
+          <p:cNvPr id="5" name="Date Placeholder 4"/>
+          <p:cNvSpPr>
+            <a:spLocks noGrp="1"/>
+          </p:cNvSpPr>
+          <p:nvPr>
+            <p:ph type="dt" sz="half" idx="10"/>
+          </p:nvPr>
+        </p:nvSpPr>
+        <p:spPr/>
+        <p:txBody>
+          <a:bodyPr/>
+          <a:lstStyle/>
+          <a:p>
+            <a:fld id="{8C5EDC1F-6584-473C-AC6C-8F1A8A7EB5C8}" type="datetime1">
+              <a:rPr lang="en-US" smtClean="0"/>
+            </a:fld>
+            <a:endParaRPr lang="en-US" dirty="0"/>
+          </a:p>
+        </p:txBody>
+      </p:sp>
+      <p:sp>
+        <p:nvSpPr>
+          <p:cNvPr id="6" name="Footer Placeholder 5"/>
+          <p:cNvSpPr>
+            <a:spLocks noGrp="1"/>
+          </p:cNvSpPr>
+          <p:nvPr>
+            <p:ph type="ftr" sz="quarter" idx="11"/>
+          </p:nvPr>
+        </p:nvSpPr>
+        <p:spPr/>
+        <p:txBody>
+          <a:bodyPr/>
+          <a:lstStyle/>
+          <a:p>
+            <a:r>
+              <a:rPr lang="en-US"/>
+              <a:t>SNN Training</a:t>
+            </a:r>
+            <a:endParaRPr lang="en-US" dirty="0"/>
+          </a:p>
+        </p:txBody>
+      </p:sp>
+      <p:sp>
+        <p:nvSpPr>
+          <p:cNvPr id="7" name="Slide Number Placeholder 6"/>
+          <p:cNvSpPr>
+            <a:spLocks noGrp="1"/>
+          </p:cNvSpPr>
+          <p:nvPr>
+            <p:ph type="sldNum" sz="quarter" idx="12"/>
+          </p:nvPr>
+        </p:nvSpPr>
+        <p:spPr/>
+        <p:txBody>
+          <a:bodyPr/>
+          <a:lstStyle/>
+          <a:p>
+            <a:fld id="{48F63A3B-78C7-47BE-AE5E-E10140E04643}" type="slidenum">
+              <a:rPr lang="en-US" smtClean="0"/>
+            </a:fld>
+            <a:endParaRPr lang="en-US" dirty="0"/>
+          </a:p>
+        </p:txBody>
+      </p:sp>
+    </p:spTree>
+  </p:cSld>
+  <p:clrMapOvr>
+    <a:masterClrMapping/>
+  </p:clrMapOvr>
+</p:sldLayout>
+</file>
+
+<file path=ppt/slideLayouts/slideLayout5.xml><?xml version="1.0" encoding="utf-8"?>
+<p:sldLayout xmlns:a="http://schemas.openxmlformats.org/drawingml/2006/main" xmlns:r="http://schemas.openxmlformats.org/officeDocument/2006/relationships" xmlns:p="http://schemas.openxmlformats.org/presentationml/2006/main" type="twoTxTwoObj" preserve="1">
+  <p:cSld name="Comparison">
+    <p:spTree>
+      <p:nvGrpSpPr>
+        <p:cNvPr id="1" name=""/>
+        <p:cNvGrpSpPr/>
+        <p:nvPr/>
+      </p:nvGrpSpPr>
+      <p:grpSpPr>
+        <a:xfrm>
+          <a:off x="0" y="0"/>
+          <a:ext cx="0" cy="0"/>
+          <a:chOff x="0" y="0"/>
+          <a:chExt cx="0" cy="0"/>
+        </a:xfrm>
+      </p:grpSpPr>
+      <p:sp>
+        <p:nvSpPr>
+          <p:cNvPr id="2" name="Title 1"/>
+          <p:cNvSpPr>
+            <a:spLocks noGrp="1"/>
+          </p:cNvSpPr>
+          <p:nvPr>
+            <p:ph type="title"/>
+          </p:nvPr>
+        </p:nvSpPr>
+        <p:spPr>
+          <a:xfrm>
+            <a:off x="839788" y="365125"/>
+            <a:ext cx="10515600" cy="1325563"/>
+          </a:xfrm>
+        </p:spPr>
+        <p:txBody>
+          <a:bodyPr/>
+          <a:lstStyle/>
+          <a:p>
+            <a:r>
+              <a:rPr lang="en-US" altLang="zh-CN"/>
+              <a:t>Click to edit Master title style</a:t>
+            </a:r>
+            <a:endParaRPr lang="zh-CN" altLang="en-US"/>
+          </a:p>
+        </p:txBody>
+      </p:sp>
+      <p:sp>
+        <p:nvSpPr>
+          <p:cNvPr id="3" name="Text Placeholder 2"/>
+          <p:cNvSpPr>
+            <a:spLocks noGrp="1"/>
+          </p:cNvSpPr>
+          <p:nvPr>
+            <p:ph type="body" idx="1"/>
+          </p:nvPr>
+        </p:nvSpPr>
+        <p:spPr>
+          <a:xfrm>
+            <a:off x="839788" y="1681163"/>
+            <a:ext cx="5157787" cy="823912"/>
+          </a:xfrm>
+        </p:spPr>
+        <p:txBody>
+          <a:bodyPr anchor="b"/>
+          <a:lstStyle>
+            <a:lvl1pPr marL="0" indent="0">
+              <a:buNone/>
+              <a:defRPr sz="2400" b="1"/>
+            </a:lvl1pPr>
+            <a:lvl2pPr marL="457200" indent="0">
+              <a:buNone/>
+              <a:defRPr sz="2000" b="1"/>
+            </a:lvl2pPr>
+            <a:lvl3pPr marL="914400" indent="0">
+              <a:buNone/>
+              <a:defRPr sz="1800" b="1"/>
+            </a:lvl3pPr>
+            <a:lvl4pPr marL="1371600" indent="0">
+              <a:buNone/>
+              <a:defRPr sz="1600" b="1"/>
+            </a:lvl4pPr>
+            <a:lvl5pPr marL="1828800" indent="0">
+              <a:buNone/>
+              <a:defRPr sz="1600" b="1"/>
+            </a:lvl5pPr>
+            <a:lvl6pPr marL="2286000" indent="0">
+              <a:buNone/>
+              <a:defRPr sz="1600" b="1"/>
+            </a:lvl6pPr>
+            <a:lvl7pPr marL="2743200" indent="0">
+              <a:buNone/>
+              <a:defRPr sz="1600" b="1"/>
+            </a:lvl7pPr>
+            <a:lvl8pPr marL="3200400" indent="0">
+              <a:buNone/>
+              <a:defRPr sz="1600" b="1"/>
+            </a:lvl8pPr>
+            <a:lvl9pPr marL="3657600" indent="0">
+              <a:buNone/>
+              <a:defRPr sz="1600" b="1"/>
+            </a:lvl9pPr>
+          </a:lstStyle>
+          <a:p>
+            <a:pPr lvl="0"/>
+            <a:r>
+              <a:rPr lang="en-US" altLang="zh-CN"/>
+              <a:t>Click to edit Master text styles</a:t>
+            </a:r>
+            <a:endParaRPr lang="en-US" altLang="zh-CN"/>
+          </a:p>
+        </p:txBody>
+      </p:sp>
+      <p:sp>
+        <p:nvSpPr>
+          <p:cNvPr id="4" name="Content Placeholder 3"/>
+          <p:cNvSpPr>
+            <a:spLocks noGrp="1"/>
+          </p:cNvSpPr>
+          <p:nvPr>
+            <p:ph sz="half" idx="2"/>
+          </p:nvPr>
+        </p:nvSpPr>
+        <p:spPr>
+          <a:xfrm>
+            <a:off x="839788" y="2505075"/>
+            <a:ext cx="5157787" cy="3684588"/>
+          </a:xfrm>
+        </p:spPr>
+        <p:txBody>
+          <a:bodyPr/>
+          <a:lstStyle/>
+          <a:p>
+            <a:pPr lvl="0"/>
+            <a:r>
+              <a:rPr lang="en-US" altLang="zh-CN"/>
+              <a:t>Click to edit Master text styles</a:t>
+            </a:r>
+            <a:endParaRPr lang="en-US" altLang="zh-CN"/>
+          </a:p>
+          <a:p>
+            <a:pPr lvl="1"/>
+            <a:r>
+              <a:rPr lang="en-US" altLang="zh-CN"/>
+              <a:t>Second level</a:t>
+            </a:r>
+            <a:endParaRPr lang="en-US" altLang="zh-CN"/>
+          </a:p>
+          <a:p>
+            <a:pPr lvl="2"/>
+            <a:r>
+              <a:rPr lang="en-US" altLang="zh-CN"/>
+              <a:t>Third level</a:t>
+            </a:r>
+            <a:endParaRPr lang="en-US" altLang="zh-CN"/>
+          </a:p>
+          <a:p>
+            <a:pPr lvl="3"/>
+            <a:r>
+              <a:rPr lang="en-US" altLang="zh-CN"/>
+              <a:t>Fourth level</a:t>
+            </a:r>
+            <a:endParaRPr lang="en-US" altLang="zh-CN"/>
+          </a:p>
+          <a:p>
+            <a:pPr lvl="4"/>
+            <a:r>
+              <a:rPr lang="en-US" altLang="zh-CN"/>
+              <a:t>Fifth level</a:t>
+            </a:r>
+            <a:endParaRPr lang="zh-CN" altLang="en-US"/>
+          </a:p>
+        </p:txBody>
+      </p:sp>
+      <p:sp>
+        <p:nvSpPr>
+          <p:cNvPr id="5" name="Text Placeholder 4"/>
+          <p:cNvSpPr>
+            <a:spLocks noGrp="1"/>
+          </p:cNvSpPr>
+          <p:nvPr>
+            <p:ph type="body" sz="quarter" idx="3"/>
+          </p:nvPr>
+        </p:nvSpPr>
+        <p:spPr>
+          <a:xfrm>
+            <a:off x="6172200" y="1681163"/>
+            <a:ext cx="5183188" cy="823912"/>
+          </a:xfrm>
+        </p:spPr>
+        <p:txBody>
+          <a:bodyPr anchor="b"/>
+          <a:lstStyle>
+            <a:lvl1pPr marL="0" indent="0">
+              <a:buNone/>
+              <a:defRPr sz="2400" b="1"/>
+            </a:lvl1pPr>
+            <a:lvl2pPr marL="457200" indent="0">
+              <a:buNone/>
+              <a:defRPr sz="2000" b="1"/>
+            </a:lvl2pPr>
+            <a:lvl3pPr marL="914400" indent="0">
+              <a:buNone/>
+              <a:defRPr sz="1800" b="1"/>
+            </a:lvl3pPr>
+            <a:lvl4pPr marL="1371600" indent="0">
+              <a:buNone/>
+              <a:defRPr sz="1600" b="1"/>
+            </a:lvl4pPr>
+            <a:lvl5pPr marL="1828800" indent="0">
+              <a:buNone/>
+              <a:defRPr sz="1600" b="1"/>
+            </a:lvl5pPr>
+            <a:lvl6pPr marL="2286000" indent="0">
+              <a:buNone/>
+              <a:defRPr sz="1600" b="1"/>
+            </a:lvl6pPr>
+            <a:lvl7pPr marL="2743200" indent="0">
+              <a:buNone/>
+              <a:defRPr sz="1600" b="1"/>
+            </a:lvl7pPr>
+            <a:lvl8pPr marL="3200400" indent="0">
+              <a:buNone/>
+              <a:defRPr sz="1600" b="1"/>
+            </a:lvl8pPr>
+            <a:lvl9pPr marL="3657600" indent="0">
+              <a:buNone/>
+              <a:defRPr sz="1600" b="1"/>
+            </a:lvl9pPr>
+          </a:lstStyle>
+          <a:p>
+            <a:pPr lvl="0"/>
+            <a:r>
+              <a:rPr lang="en-US" altLang="zh-CN"/>
+              <a:t>Click to edit Master text styles</a:t>
+            </a:r>
+            <a:endParaRPr lang="en-US" altLang="zh-CN"/>
+          </a:p>
+        </p:txBody>
+      </p:sp>
+      <p:sp>
+        <p:nvSpPr>
+          <p:cNvPr id="6" name="Content Placeholder 5"/>
+          <p:cNvSpPr>
+            <a:spLocks noGrp="1"/>
+          </p:cNvSpPr>
+          <p:nvPr>
+            <p:ph sz="quarter" idx="4"/>
+          </p:nvPr>
+        </p:nvSpPr>
+        <p:spPr>
+          <a:xfrm>
+            <a:off x="6172200" y="2505075"/>
+            <a:ext cx="5183188" cy="3684588"/>
+          </a:xfrm>
+        </p:spPr>
+        <p:txBody>
+          <a:bodyPr/>
+          <a:lstStyle/>
+          <a:p>
+            <a:pPr lvl="0"/>
+            <a:r>
+              <a:rPr lang="en-US" altLang="zh-CN"/>
+              <a:t>Click to edit Master text styles</a:t>
+            </a:r>
+            <a:endParaRPr lang="en-US" altLang="zh-CN"/>
+          </a:p>
+          <a:p>
+            <a:pPr lvl="1"/>
+            <a:r>
+              <a:rPr lang="en-US" altLang="zh-CN"/>
+              <a:t>Second level</a:t>
+            </a:r>
+            <a:endParaRPr lang="en-US" altLang="zh-CN"/>
+          </a:p>
+          <a:p>
+            <a:pPr lvl="2"/>
+            <a:r>
+              <a:rPr lang="en-US" altLang="zh-CN"/>
+              <a:t>Third level</a:t>
+            </a:r>
+            <a:endParaRPr lang="en-US" altLang="zh-CN"/>
+          </a:p>
+          <a:p>
+            <a:pPr lvl="3"/>
+            <a:r>
+              <a:rPr lang="en-US" altLang="zh-CN"/>
+              <a:t>Fourth level</a:t>
+            </a:r>
+            <a:endParaRPr lang="en-US" altLang="zh-CN"/>
+          </a:p>
+          <a:p>
+            <a:pPr lvl="4"/>
+            <a:r>
+              <a:rPr lang="en-US" altLang="zh-CN"/>
+              <a:t>Fifth level</a:t>
+            </a:r>
+            <a:endParaRPr lang="zh-CN" altLang="en-US"/>
+          </a:p>
+        </p:txBody>
+      </p:sp>
+      <p:sp>
+        <p:nvSpPr>
+          <p:cNvPr id="7" name="Date Placeholder 6"/>
+          <p:cNvSpPr>
+            <a:spLocks noGrp="1"/>
+          </p:cNvSpPr>
+          <p:nvPr>
+            <p:ph type="dt" sz="half" idx="10"/>
+          </p:nvPr>
+        </p:nvSpPr>
+        <p:spPr/>
+        <p:txBody>
+          <a:bodyPr/>
+          <a:lstStyle/>
+          <a:p>
+            <a:fld id="{6311681B-E263-42AF-ACA7-AB753620E14D}" type="datetime1">
+              <a:rPr lang="en-US" smtClean="0"/>
+            </a:fld>
+            <a:endParaRPr lang="en-US" dirty="0"/>
+          </a:p>
+        </p:txBody>
+      </p:sp>
+      <p:sp>
+        <p:nvSpPr>
+          <p:cNvPr id="8" name="Footer Placeholder 7"/>
+          <p:cNvSpPr>
+            <a:spLocks noGrp="1"/>
+          </p:cNvSpPr>
+          <p:nvPr>
+            <p:ph type="ftr" sz="quarter" idx="11"/>
+          </p:nvPr>
+        </p:nvSpPr>
+        <p:spPr/>
+        <p:txBody>
+          <a:bodyPr/>
+          <a:lstStyle/>
+          <a:p>
+            <a:r>
+              <a:rPr lang="en-US"/>
+              <a:t>SNN Training</a:t>
+            </a:r>
+            <a:endParaRPr lang="en-US" dirty="0"/>
+          </a:p>
+        </p:txBody>
+      </p:sp>
+      <p:sp>
+        <p:nvSpPr>
+          <p:cNvPr id="9" name="Slide Number Placeholder 8"/>
+          <p:cNvSpPr>
+            <a:spLocks noGrp="1"/>
+          </p:cNvSpPr>
+          <p:nvPr>
+            <p:ph type="sldNum" sz="quarter" idx="12"/>
+          </p:nvPr>
+        </p:nvSpPr>
+        <p:spPr/>
+        <p:txBody>
+          <a:bodyPr/>
+          <a:lstStyle/>
+          <a:p>
+            <a:fld id="{48F63A3B-78C7-47BE-AE5E-E10140E04643}" type="slidenum">
+              <a:rPr lang="en-US" smtClean="0"/>
+            </a:fld>
+            <a:endParaRPr lang="en-US" dirty="0"/>
+          </a:p>
+        </p:txBody>
+      </p:sp>
+    </p:spTree>
+  </p:cSld>
+  <p:clrMapOvr>
+    <a:masterClrMapping/>
+  </p:clrMapOvr>
+</p:sldLayout>
+</file>
+
+<file path=ppt/slideLayouts/slideLayout6.xml><?xml version="1.0" encoding="utf-8"?>
+<p:sldLayout xmlns:a="http://schemas.openxmlformats.org/drawingml/2006/main" xmlns:r="http://schemas.openxmlformats.org/officeDocument/2006/relationships" xmlns:p="http://schemas.openxmlformats.org/presentationml/2006/main" type="titleOnly" preserve="1">
+  <p:cSld name="Title Only">
+    <p:spTree>
+      <p:nvGrpSpPr>
+        <p:cNvPr id="1" name=""/>
+        <p:cNvGrpSpPr/>
+        <p:nvPr/>
+      </p:nvGrpSpPr>
+      <p:grpSpPr>
+        <a:xfrm>
+          <a:off x="0" y="0"/>
+          <a:ext cx="0" cy="0"/>
+          <a:chOff x="0" y="0"/>
+          <a:chExt cx="0" cy="0"/>
+        </a:xfrm>
+      </p:grpSpPr>
+      <p:sp>
+        <p:nvSpPr>
+          <p:cNvPr id="2" name="Title 1"/>
+          <p:cNvSpPr>
+            <a:spLocks noGrp="1"/>
+          </p:cNvSpPr>
+          <p:nvPr>
+            <p:ph type="title"/>
+          </p:nvPr>
+        </p:nvSpPr>
+        <p:spPr/>
+        <p:txBody>
+          <a:bodyPr/>
+          <a:lstStyle/>
+          <a:p>
+            <a:r>
+              <a:rPr lang="en-US" altLang="zh-CN"/>
+              <a:t>Click to edit Master title style</a:t>
+            </a:r>
+            <a:endParaRPr lang="zh-CN" altLang="en-US"/>
+          </a:p>
+        </p:txBody>
+      </p:sp>
+      <p:sp>
+        <p:nvSpPr>
+          <p:cNvPr id="3" name="Date Placeholder 2"/>
+          <p:cNvSpPr>
+            <a:spLocks noGrp="1"/>
+          </p:cNvSpPr>
+          <p:nvPr>
+            <p:ph type="dt" sz="half" idx="10"/>
+          </p:nvPr>
+        </p:nvSpPr>
+        <p:spPr/>
+        <p:txBody>
+          <a:bodyPr/>
+          <a:lstStyle/>
+          <a:p>
+            <a:fld id="{EC1D2BBB-8843-40DB-B672-A0CA5D7101CE}" type="datetime1">
+              <a:rPr lang="en-US" smtClean="0"/>
+            </a:fld>
+            <a:endParaRPr lang="en-US" dirty="0"/>
+          </a:p>
+        </p:txBody>
+      </p:sp>
+      <p:sp>
+        <p:nvSpPr>
+          <p:cNvPr id="4" name="Footer Placeholder 3"/>
+          <p:cNvSpPr>
+            <a:spLocks noGrp="1"/>
+          </p:cNvSpPr>
+          <p:nvPr>
+            <p:ph type="ftr" sz="quarter" idx="11"/>
+          </p:nvPr>
+        </p:nvSpPr>
+        <p:spPr/>
+        <p:txBody>
+          <a:bodyPr/>
+          <a:lstStyle/>
+          <a:p>
+            <a:r>
+              <a:rPr lang="en-US"/>
+              <a:t>SNN Training</a:t>
+            </a:r>
+            <a:endParaRPr lang="en-US" dirty="0"/>
+          </a:p>
+        </p:txBody>
+      </p:sp>
+      <p:sp>
+        <p:nvSpPr>
+          <p:cNvPr id="5" name="Slide Number Placeholder 4"/>
+          <p:cNvSpPr>
+            <a:spLocks noGrp="1"/>
+          </p:cNvSpPr>
+          <p:nvPr>
+            <p:ph type="sldNum" sz="quarter" idx="12"/>
+          </p:nvPr>
+        </p:nvSpPr>
+        <p:spPr/>
+        <p:txBody>
+          <a:bodyPr/>
+          <a:lstStyle/>
+          <a:p>
+            <a:fld id="{48F63A3B-78C7-47BE-AE5E-E10140E04643}" type="slidenum">
+              <a:rPr lang="en-US" smtClean="0"/>
+            </a:fld>
+            <a:endParaRPr lang="en-US" dirty="0"/>
+          </a:p>
+        </p:txBody>
+      </p:sp>
+    </p:spTree>
+  </p:cSld>
+  <p:clrMapOvr>
+    <a:masterClrMapping/>
+  </p:clrMapOvr>
+</p:sldLayout>
+</file>
+
+<file path=ppt/slideLayouts/slideLayout7.xml><?xml version="1.0" encoding="utf-8"?>
+<p:sldLayout xmlns:a="http://schemas.openxmlformats.org/drawingml/2006/main" xmlns:r="http://schemas.openxmlformats.org/officeDocument/2006/relationships" xmlns:p="http://schemas.openxmlformats.org/presentationml/2006/main" type="blank" preserve="1">
+  <p:cSld name="Blank">
+    <p:spTree>
+      <p:nvGrpSpPr>
+        <p:cNvPr id="1" name=""/>
+        <p:cNvGrpSpPr/>
+        <p:nvPr/>
+      </p:nvGrpSpPr>
+      <p:grpSpPr>
+        <a:xfrm>
+          <a:off x="0" y="0"/>
+          <a:ext cx="0" cy="0"/>
+          <a:chOff x="0" y="0"/>
+          <a:chExt cx="0" cy="0"/>
+        </a:xfrm>
+      </p:grpSpPr>
+      <p:sp>
+        <p:nvSpPr>
+          <p:cNvPr id="2" name="Date Placeholder 1"/>
+          <p:cNvSpPr>
+            <a:spLocks noGrp="1"/>
+          </p:cNvSpPr>
+          <p:nvPr>
+            <p:ph type="dt" sz="half" idx="10"/>
+          </p:nvPr>
+        </p:nvSpPr>
+        <p:spPr/>
+        <p:txBody>
+          <a:bodyPr/>
+          <a:lstStyle/>
+          <a:p>
+            <a:fld id="{9001B7B1-DA79-4221-A5A5-460CD134413C}" type="datetime1">
+              <a:rPr lang="en-US" smtClean="0"/>
+            </a:fld>
+            <a:endParaRPr lang="en-US" dirty="0"/>
+          </a:p>
+        </p:txBody>
+      </p:sp>
+      <p:sp>
+        <p:nvSpPr>
+          <p:cNvPr id="3" name="Footer Placeholder 2"/>
+          <p:cNvSpPr>
+            <a:spLocks noGrp="1"/>
+          </p:cNvSpPr>
+          <p:nvPr>
+            <p:ph type="ftr" sz="quarter" idx="11"/>
+          </p:nvPr>
+        </p:nvSpPr>
+        <p:spPr/>
+        <p:txBody>
+          <a:bodyPr/>
+          <a:lstStyle/>
+          <a:p>
+            <a:r>
+              <a:rPr lang="en-US"/>
+              <a:t>SNN Training</a:t>
+            </a:r>
+            <a:endParaRPr lang="en-US" dirty="0"/>
+          </a:p>
+        </p:txBody>
+      </p:sp>
+      <p:sp>
+        <p:nvSpPr>
+          <p:cNvPr id="4" name="Slide Number Placeholder 3"/>
+          <p:cNvSpPr>
+            <a:spLocks noGrp="1"/>
+          </p:cNvSpPr>
+          <p:nvPr>
+            <p:ph type="sldNum" sz="quarter" idx="12"/>
+          </p:nvPr>
+        </p:nvSpPr>
+        <p:spPr/>
+        <p:txBody>
+          <a:bodyPr/>
+          <a:lstStyle/>
+          <a:p>
+            <a:fld id="{48F63A3B-78C7-47BE-AE5E-E10140E04643}" type="slidenum">
+              <a:rPr lang="en-US" smtClean="0"/>
+            </a:fld>
+            <a:endParaRPr lang="en-US" dirty="0"/>
+          </a:p>
+        </p:txBody>
+      </p:sp>
+    </p:spTree>
+  </p:cSld>
+  <p:clrMapOvr>
+    <a:masterClrMapping/>
+  </p:clrMapOvr>
+</p:sldLayout>
+</file>
+
+<file path=ppt/slideLayouts/slideLayout8.xml><?xml version="1.0" encoding="utf-8"?>
+<p:sldLayout xmlns:a="http://schemas.openxmlformats.org/drawingml/2006/main" xmlns:r="http://schemas.openxmlformats.org/officeDocument/2006/relationships" xmlns:p="http://schemas.openxmlformats.org/presentationml/2006/main" type="objTx" preserve="1">
+  <p:cSld name="Content with Caption">
+    <p:spTree>
+      <p:nvGrpSpPr>
+        <p:cNvPr id="1" name=""/>
+        <p:cNvGrpSpPr/>
+        <p:nvPr/>
+      </p:nvGrpSpPr>
+      <p:grpSpPr>
+        <a:xfrm>
+          <a:off x="0" y="0"/>
+          <a:ext cx="0" cy="0"/>
+          <a:chOff x="0" y="0"/>
+          <a:chExt cx="0" cy="0"/>
+        </a:xfrm>
+      </p:grpSpPr>
+      <p:sp>
+        <p:nvSpPr>
+          <p:cNvPr id="2" name="Title 1"/>
+          <p:cNvSpPr>
+            <a:spLocks noGrp="1"/>
+          </p:cNvSpPr>
+          <p:nvPr>
+            <p:ph type="title"/>
+          </p:nvPr>
+        </p:nvSpPr>
+        <p:spPr>
+          <a:xfrm>
+            <a:off x="839788" y="457200"/>
+            <a:ext cx="3932237" cy="1600200"/>
+          </a:xfrm>
+        </p:spPr>
+        <p:txBody>
+          <a:bodyPr anchor="b"/>
+          <a:lstStyle>
+            <a:lvl1pPr>
+              <a:defRPr sz="3200"/>
+            </a:lvl1pPr>
+          </a:lstStyle>
+          <a:p>
+            <a:r>
+              <a:rPr lang="en-US" altLang="zh-CN"/>
+              <a:t>Click to edit Master title style</a:t>
+            </a:r>
+            <a:endParaRPr lang="zh-CN" altLang="en-US"/>
+          </a:p>
+        </p:txBody>
+      </p:sp>
+      <p:sp>
+        <p:nvSpPr>
+          <p:cNvPr id="3" name="Content Placeholder 2"/>
+          <p:cNvSpPr>
+            <a:spLocks noGrp="1"/>
+          </p:cNvSpPr>
+          <p:nvPr>
+            <p:ph idx="1"/>
+          </p:nvPr>
+        </p:nvSpPr>
+        <p:spPr>
+          <a:xfrm>
+            <a:off x="5183188" y="987425"/>
+            <a:ext cx="6172200" cy="4873625"/>
+          </a:xfrm>
+        </p:spPr>
+        <p:txBody>
+          <a:bodyPr/>
+          <a:lstStyle>
+            <a:lvl1pPr>
+              <a:defRPr sz="3200"/>
+            </a:lvl1pPr>
+            <a:lvl2pPr>
+              <a:defRPr sz="2800"/>
+            </a:lvl2pPr>
+            <a:lvl3pPr>
+              <a:defRPr sz="2400"/>
+            </a:lvl3pPr>
+            <a:lvl4pPr>
+              <a:defRPr sz="2000"/>
+            </a:lvl4pPr>
+            <a:lvl5pPr>
+              <a:defRPr sz="2000"/>
+            </a:lvl5pPr>
+            <a:lvl6pPr>
+              <a:defRPr sz="2000"/>
+            </a:lvl6pPr>
+            <a:lvl7pPr>
+              <a:defRPr sz="2000"/>
+            </a:lvl7pPr>
+            <a:lvl8pPr>
+              <a:defRPr sz="2000"/>
+            </a:lvl8pPr>
+            <a:lvl9pPr>
+              <a:defRPr sz="2000"/>
+            </a:lvl9pPr>
+          </a:lstStyle>
+          <a:p>
+            <a:pPr lvl="0"/>
+            <a:r>
+              <a:rPr lang="en-US" altLang="zh-CN"/>
+              <a:t>Click to edit Master text styles</a:t>
+            </a:r>
+            <a:endParaRPr lang="en-US" altLang="zh-CN"/>
+          </a:p>
+          <a:p>
+            <a:pPr lvl="1"/>
+            <a:r>
+              <a:rPr lang="en-US" altLang="zh-CN"/>
+              <a:t>Second level</a:t>
+            </a:r>
+            <a:endParaRPr lang="en-US" altLang="zh-CN"/>
+          </a:p>
+          <a:p>
+            <a:pPr lvl="2"/>
+            <a:r>
+              <a:rPr lang="en-US" altLang="zh-CN"/>
+              <a:t>Third level</a:t>
+            </a:r>
+            <a:endParaRPr lang="en-US" altLang="zh-CN"/>
+          </a:p>
+          <a:p>
+            <a:pPr lvl="3"/>
+            <a:r>
+              <a:rPr lang="en-US" altLang="zh-CN"/>
+              <a:t>Fourth level</a:t>
+            </a:r>
+            <a:endParaRPr lang="en-US" altLang="zh-CN"/>
+          </a:p>
+          <a:p>
+            <a:pPr lvl="4"/>
+            <a:r>
+              <a:rPr lang="en-US" altLang="zh-CN"/>
+              <a:t>Fifth level</a:t>
+            </a:r>
+            <a:endParaRPr lang="zh-CN" altLang="en-US"/>
+          </a:p>
+        </p:txBody>
+      </p:sp>
+      <p:sp>
+        <p:nvSpPr>
+          <p:cNvPr id="4" name="Text Placeholder 3"/>
+          <p:cNvSpPr>
+            <a:spLocks noGrp="1"/>
+          </p:cNvSpPr>
+          <p:nvPr>
+            <p:ph type="body" sz="half" idx="2"/>
+          </p:nvPr>
+        </p:nvSpPr>
+        <p:spPr>
+          <a:xfrm>
+            <a:off x="839788" y="2057400"/>
+            <a:ext cx="3932237" cy="3811588"/>
+          </a:xfrm>
+        </p:spPr>
+        <p:txBody>
+          <a:bodyPr/>
+          <a:lstStyle>
+            <a:lvl1pPr marL="0" indent="0">
+              <a:buNone/>
+              <a:defRPr sz="1600"/>
+            </a:lvl1pPr>
+            <a:lvl2pPr marL="457200" indent="0">
+              <a:buNone/>
+              <a:defRPr sz="1400"/>
+            </a:lvl2pPr>
+            <a:lvl3pPr marL="914400" indent="0">
+              <a:buNone/>
+              <a:defRPr sz="1200"/>
+            </a:lvl3pPr>
+            <a:lvl4pPr marL="1371600" indent="0">
+              <a:buNone/>
+              <a:defRPr sz="1000"/>
+            </a:lvl4pPr>
+            <a:lvl5pPr marL="1828800" indent="0">
+              <a:buNone/>
+              <a:defRPr sz="1000"/>
+            </a:lvl5pPr>
+            <a:lvl6pPr marL="2286000" indent="0">
+              <a:buNone/>
+              <a:defRPr sz="1000"/>
+            </a:lvl6pPr>
+            <a:lvl7pPr marL="2743200" indent="0">
+              <a:buNone/>
+              <a:defRPr sz="1000"/>
+            </a:lvl7pPr>
+            <a:lvl8pPr marL="3200400" indent="0">
+              <a:buNone/>
+              <a:defRPr sz="1000"/>
+            </a:lvl8pPr>
+            <a:lvl9pPr marL="3657600" indent="0">
+              <a:buNone/>
+              <a:defRPr sz="1000"/>
+            </a:lvl9pPr>
+          </a:lstStyle>
+          <a:p>
+            <a:pPr lvl="0"/>
+            <a:r>
+              <a:rPr lang="en-US" altLang="zh-CN"/>
+              <a:t>Click to edit Master text styles</a:t>
+            </a:r>
+            <a:endParaRPr lang="en-US" altLang="zh-CN"/>
+          </a:p>
+        </p:txBody>
+      </p:sp>
+      <p:sp>
+        <p:nvSpPr>
+          <p:cNvPr id="5" name="Date Placeholder 4"/>
+          <p:cNvSpPr>
+            <a:spLocks noGrp="1"/>
+          </p:cNvSpPr>
+          <p:nvPr>
+            <p:ph type="dt" sz="half" idx="10"/>
+          </p:nvPr>
+        </p:nvSpPr>
+        <p:spPr/>
+        <p:txBody>
+          <a:bodyPr/>
+          <a:lstStyle/>
+          <a:p>
+            <a:fld id="{116A8B25-E15D-49B8-BC14-F9CBE12C3CE7}" type="datetime1">
+              <a:rPr lang="en-US" smtClean="0"/>
+            </a:fld>
+            <a:endParaRPr lang="en-US" dirty="0"/>
+          </a:p>
+        </p:txBody>
+      </p:sp>
+      <p:sp>
+        <p:nvSpPr>
+          <p:cNvPr id="6" name="Footer Placeholder 5"/>
+          <p:cNvSpPr>
+            <a:spLocks noGrp="1"/>
+          </p:cNvSpPr>
+          <p:nvPr>
+            <p:ph type="ftr" sz="quarter" idx="11"/>
+          </p:nvPr>
+        </p:nvSpPr>
+        <p:spPr/>
+        <p:txBody>
+          <a:bodyPr/>
+          <a:lstStyle/>
+          <a:p>
+            <a:r>
+              <a:rPr lang="en-US"/>
+              <a:t>SNN Training</a:t>
+            </a:r>
+            <a:endParaRPr lang="en-US" dirty="0"/>
+          </a:p>
+        </p:txBody>
+      </p:sp>
+      <p:sp>
+        <p:nvSpPr>
+          <p:cNvPr id="7" name="Slide Number Placeholder 6"/>
+          <p:cNvSpPr>
+            <a:spLocks noGrp="1"/>
+          </p:cNvSpPr>
+          <p:nvPr>
+            <p:ph type="sldNum" sz="quarter" idx="12"/>
+          </p:nvPr>
+        </p:nvSpPr>
+        <p:spPr/>
+        <p:txBody>
+          <a:bodyPr/>
+          <a:lstStyle/>
+          <a:p>
+            <a:fld id="{48F63A3B-78C7-47BE-AE5E-E10140E04643}" type="slidenum">
+              <a:rPr lang="en-US" smtClean="0"/>
+            </a:fld>
+            <a:endParaRPr lang="en-US" dirty="0"/>
+          </a:p>
+        </p:txBody>
+      </p:sp>
+    </p:spTree>
   </p:cSld>
   <p:clrMapOvr>
     <a:masterClrMapping/>
@@ -4695,13 +5868,7 @@
       </p:grpSpPr>
       <p:sp>
         <p:nvSpPr>
-          <p:cNvPr id="2" name="Title 1">
-            <a:extLst>
-              <a:ext uri="{FF2B5EF4-FFF2-40B4-BE49-F238E27FC236}">
-                <a16:creationId xmlns:a16="http://schemas.microsoft.com/office/drawing/2014/main" id="{2AC49B68-107F-F575-3C6C-304010C486D4}"/>
-              </a:ext>
-            </a:extLst>
-          </p:cNvPr>
+          <p:cNvPr id="2" name="Title 1"/>
           <p:cNvSpPr>
             <a:spLocks noGrp="1"/>
           </p:cNvSpPr>
@@ -4733,13 +5900,7 @@
       </p:sp>
       <p:sp>
         <p:nvSpPr>
-          <p:cNvPr id="3" name="Picture Placeholder 2">
-            <a:extLst>
-              <a:ext uri="{FF2B5EF4-FFF2-40B4-BE49-F238E27FC236}">
-                <a16:creationId xmlns:a16="http://schemas.microsoft.com/office/drawing/2014/main" id="{2E53E658-1595-6493-7992-1714526A1F47}"/>
-              </a:ext>
-            </a:extLst>
-          </p:cNvPr>
+          <p:cNvPr id="3" name="Picture Placeholder 2"/>
           <p:cNvSpPr>
             <a:spLocks noGrp="1"/>
           </p:cNvSpPr>
@@ -4800,13 +5961,7 @@
       </p:sp>
       <p:sp>
         <p:nvSpPr>
-          <p:cNvPr id="4" name="Text Placeholder 3">
-            <a:extLst>
-              <a:ext uri="{FF2B5EF4-FFF2-40B4-BE49-F238E27FC236}">
-                <a16:creationId xmlns:a16="http://schemas.microsoft.com/office/drawing/2014/main" id="{174BEB89-4F92-B1BD-9A47-1C9057314F87}"/>
-              </a:ext>
-            </a:extLst>
-          </p:cNvPr>
+          <p:cNvPr id="4" name="Text Placeholder 3"/>
           <p:cNvSpPr>
             <a:spLocks noGrp="1"/>
           </p:cNvSpPr>
@@ -4866,18 +6021,13 @@
               <a:rPr lang="en-US" altLang="zh-CN"/>
               <a:t>Click to edit Master text styles</a:t>
             </a:r>
-          </a:p>
-        </p:txBody>
-      </p:sp>
-      <p:sp>
-        <p:nvSpPr>
-          <p:cNvPr id="5" name="Date Placeholder 4">
-            <a:extLst>
-              <a:ext uri="{FF2B5EF4-FFF2-40B4-BE49-F238E27FC236}">
-                <a16:creationId xmlns:a16="http://schemas.microsoft.com/office/drawing/2014/main" id="{3BB98CFC-1B42-B48D-0717-82C5C46389B4}"/>
-              </a:ext>
-            </a:extLst>
-          </p:cNvPr>
+            <a:endParaRPr lang="en-US" altLang="zh-CN"/>
+          </a:p>
+        </p:txBody>
+      </p:sp>
+      <p:sp>
+        <p:nvSpPr>
+          <p:cNvPr id="5" name="Date Placeholder 4"/>
           <p:cNvSpPr>
             <a:spLocks noGrp="1"/>
           </p:cNvSpPr>
@@ -4892,7 +6042,6 @@
           <a:p>
             <a:fld id="{2091504F-6E90-4C51-838A-7127758B1AC9}" type="datetime1">
               <a:rPr lang="en-US" smtClean="0"/>
-              <a:t>6/24/2026</a:t>
             </a:fld>
             <a:endParaRPr lang="en-US" dirty="0"/>
           </a:p>
@@ -4900,13 +6049,7 @@
       </p:sp>
       <p:sp>
         <p:nvSpPr>
-          <p:cNvPr id="6" name="Footer Placeholder 5">
-            <a:extLst>
-              <a:ext uri="{FF2B5EF4-FFF2-40B4-BE49-F238E27FC236}">
-                <a16:creationId xmlns:a16="http://schemas.microsoft.com/office/drawing/2014/main" id="{D862F716-FA96-C2DC-D842-D77F46FFCAC1}"/>
-              </a:ext>
-            </a:extLst>
-          </p:cNvPr>
+          <p:cNvPr id="6" name="Footer Placeholder 5"/>
           <p:cNvSpPr>
             <a:spLocks noGrp="1"/>
           </p:cNvSpPr>
@@ -4929,13 +6072,7 @@
       </p:sp>
       <p:sp>
         <p:nvSpPr>
-          <p:cNvPr id="7" name="Slide Number Placeholder 6">
-            <a:extLst>
-              <a:ext uri="{FF2B5EF4-FFF2-40B4-BE49-F238E27FC236}">
-                <a16:creationId xmlns:a16="http://schemas.microsoft.com/office/drawing/2014/main" id="{1F0526CE-B1E9-599D-4845-2DD98745C24B}"/>
-              </a:ext>
-            </a:extLst>
-          </p:cNvPr>
+          <p:cNvPr id="7" name="Slide Number Placeholder 6"/>
           <p:cNvSpPr>
             <a:spLocks noGrp="1"/>
           </p:cNvSpPr>
@@ -4950,18 +6087,12 @@
           <a:p>
             <a:fld id="{48F63A3B-78C7-47BE-AE5E-E10140E04643}" type="slidenum">
               <a:rPr lang="en-US" smtClean="0"/>
-              <a:t>‹#›</a:t>
             </a:fld>
             <a:endParaRPr lang="en-US" dirty="0"/>
           </a:p>
         </p:txBody>
       </p:sp>
     </p:spTree>
-    <p:extLst>
-      <p:ext uri="{BB962C8B-B14F-4D97-AF65-F5344CB8AC3E}">
-        <p14:creationId xmlns:p14="http://schemas.microsoft.com/office/powerpoint/2010/main" val="3456200914"/>
-      </p:ext>
-    </p:extLst>
   </p:cSld>
   <p:clrMapOvr>
     <a:masterClrMapping/>
@@ -4993,13 +6124,7 @@
       </p:grpSpPr>
       <p:sp>
         <p:nvSpPr>
-          <p:cNvPr id="2" name="Title Placeholder 1">
-            <a:extLst>
-              <a:ext uri="{FF2B5EF4-FFF2-40B4-BE49-F238E27FC236}">
-                <a16:creationId xmlns:a16="http://schemas.microsoft.com/office/drawing/2014/main" id="{E57E1F70-3505-6431-F4F8-E3571AD8DC9D}"/>
-              </a:ext>
-            </a:extLst>
-          </p:cNvPr>
+          <p:cNvPr id="2" name="Title Placeholder 1"/>
           <p:cNvSpPr>
             <a:spLocks noGrp="1"/>
           </p:cNvSpPr>
@@ -5032,13 +6157,7 @@
       </p:sp>
       <p:sp>
         <p:nvSpPr>
-          <p:cNvPr id="3" name="Text Placeholder 2">
-            <a:extLst>
-              <a:ext uri="{FF2B5EF4-FFF2-40B4-BE49-F238E27FC236}">
-                <a16:creationId xmlns:a16="http://schemas.microsoft.com/office/drawing/2014/main" id="{ADE72AC9-2D00-9412-0C2F-CF01AFF84E7A}"/>
-              </a:ext>
-            </a:extLst>
-          </p:cNvPr>
+          <p:cNvPr id="3" name="Text Placeholder 2"/>
           <p:cNvSpPr>
             <a:spLocks noGrp="1"/>
           </p:cNvSpPr>
@@ -5066,6 +6185,7 @@
               <a:rPr lang="en-US" altLang="zh-CN" dirty="0"/>
               <a:t>Click to edit Master text styles</a:t>
             </a:r>
+            <a:endParaRPr lang="en-US" altLang="zh-CN" dirty="0"/>
           </a:p>
           <a:p>
             <a:pPr lvl="1"/>
@@ -5073,6 +6193,7 @@
               <a:rPr lang="en-US" altLang="zh-CN" dirty="0"/>
               <a:t>Second level</a:t>
             </a:r>
+            <a:endParaRPr lang="en-US" altLang="zh-CN" dirty="0"/>
           </a:p>
           <a:p>
             <a:pPr lvl="2"/>
@@ -5080,6 +6201,7 @@
               <a:rPr lang="en-US" altLang="zh-CN" dirty="0"/>
               <a:t>Third level</a:t>
             </a:r>
+            <a:endParaRPr lang="en-US" altLang="zh-CN" dirty="0"/>
           </a:p>
           <a:p>
             <a:pPr lvl="3"/>
@@ -5087,6 +6209,7 @@
               <a:rPr lang="en-US" altLang="zh-CN" dirty="0"/>
               <a:t>Fourth level</a:t>
             </a:r>
+            <a:endParaRPr lang="en-US" altLang="zh-CN" dirty="0"/>
           </a:p>
           <a:p>
             <a:pPr lvl="4"/>
@@ -5100,13 +6223,7 @@
       </p:sp>
       <p:sp>
         <p:nvSpPr>
-          <p:cNvPr id="4" name="Date Placeholder 3">
-            <a:extLst>
-              <a:ext uri="{FF2B5EF4-FFF2-40B4-BE49-F238E27FC236}">
-                <a16:creationId xmlns:a16="http://schemas.microsoft.com/office/drawing/2014/main" id="{E16E88D5-01F8-ADC1-1DCC-D721EACA8B6E}"/>
-              </a:ext>
-            </a:extLst>
-          </p:cNvPr>
+          <p:cNvPr id="4" name="Date Placeholder 3"/>
           <p:cNvSpPr>
             <a:spLocks noGrp="1"/>
           </p:cNvSpPr>
@@ -5139,7 +6256,6 @@
           <a:p>
             <a:fld id="{DF0CB939-C62B-4AC8-AC93-4DE9ACFF5AC4}" type="datetime1">
               <a:rPr lang="en-US" smtClean="0"/>
-              <a:t>6/24/2026</a:t>
             </a:fld>
             <a:endParaRPr lang="en-US" dirty="0"/>
           </a:p>
@@ -5147,13 +6263,7 @@
       </p:sp>
       <p:sp>
         <p:nvSpPr>
-          <p:cNvPr id="5" name="Footer Placeholder 4">
-            <a:extLst>
-              <a:ext uri="{FF2B5EF4-FFF2-40B4-BE49-F238E27FC236}">
-                <a16:creationId xmlns:a16="http://schemas.microsoft.com/office/drawing/2014/main" id="{FE94B1A6-C9A2-749C-FBAD-A1064C84F5A1}"/>
-              </a:ext>
-            </a:extLst>
-          </p:cNvPr>
+          <p:cNvPr id="5" name="Footer Placeholder 4"/>
           <p:cNvSpPr>
             <a:spLocks noGrp="1"/>
           </p:cNvSpPr>
@@ -5194,13 +6304,7 @@
       </p:sp>
       <p:sp>
         <p:nvSpPr>
-          <p:cNvPr id="6" name="Slide Number Placeholder 5">
-            <a:extLst>
-              <a:ext uri="{FF2B5EF4-FFF2-40B4-BE49-F238E27FC236}">
-                <a16:creationId xmlns:a16="http://schemas.microsoft.com/office/drawing/2014/main" id="{04DD58A4-4B5E-0C10-2999-D659840B0578}"/>
-              </a:ext>
-            </a:extLst>
-          </p:cNvPr>
+          <p:cNvPr id="6" name="Slide Number Placeholder 5"/>
           <p:cNvSpPr>
             <a:spLocks noGrp="1"/>
           </p:cNvSpPr>
@@ -5233,18 +6337,554 @@
           <a:p>
             <a:fld id="{48F63A3B-78C7-47BE-AE5E-E10140E04643}" type="slidenum">
               <a:rPr lang="en-US" smtClean="0"/>
-              <a:t>‹#›</a:t>
             </a:fld>
             <a:endParaRPr lang="en-US" dirty="0"/>
           </a:p>
         </p:txBody>
       </p:sp>
     </p:spTree>
-    <p:extLst>
-      <p:ext uri="{BB962C8B-B14F-4D97-AF65-F5344CB8AC3E}">
-        <p14:creationId xmlns:p14="http://schemas.microsoft.com/office/powerpoint/2010/main" val="2035484067"/>
-      </p:ext>
-    </p:extLst>
+  </p:cSld>
+  <p:clrMap bg1="lt1" tx1="dk1" bg2="lt2" tx2="dk2" accent1="accent1" accent2="accent2" accent3="accent3" accent4="accent4" accent5="accent5" accent6="accent6" hlink="hlink" folHlink="folHlink"/>
+  <p:sldLayoutIdLst>
+    <p:sldLayoutId id="2147483649" r:id="rId1"/>
+    <p:sldLayoutId id="2147483650" r:id="rId2"/>
+    <p:sldLayoutId id="2147483651" r:id="rId3"/>
+    <p:sldLayoutId id="2147483652" r:id="rId4"/>
+    <p:sldLayoutId id="2147483653" r:id="rId5"/>
+    <p:sldLayoutId id="2147483654" r:id="rId6"/>
+    <p:sldLayoutId id="2147483655" r:id="rId7"/>
+    <p:sldLayoutId id="2147483656" r:id="rId8"/>
+    <p:sldLayoutId id="2147483657" r:id="rId9"/>
+    <p:sldLayoutId id="2147483658" r:id="rId10"/>
+    <p:sldLayoutId id="2147483659" r:id="rId11"/>
+  </p:sldLayoutIdLst>
+  <p:hf hdr="0" dt="0"/>
+  <p:txStyles>
+    <p:titleStyle>
+      <a:lvl1pPr algn="l" defTabSz="914400" rtl="0" eaLnBrk="1" latinLnBrk="0" hangingPunct="1">
+        <a:lnSpc>
+          <a:spcPct val="90000"/>
+        </a:lnSpc>
+        <a:spcBef>
+          <a:spcPct val="0"/>
+        </a:spcBef>
+        <a:buNone/>
+        <a:defRPr sz="4400" kern="1200" baseline="0">
+          <a:solidFill>
+            <a:schemeClr val="tx1"/>
+          </a:solidFill>
+          <a:latin typeface="Arial" panose="020B0604020202020204"/>
+          <a:ea typeface="+mj-ea"/>
+          <a:cs typeface="+mj-cs"/>
+        </a:defRPr>
+      </a:lvl1pPr>
+    </p:titleStyle>
+    <p:bodyStyle>
+      <a:lvl1pPr marL="228600" indent="-228600" algn="l" defTabSz="914400" rtl="0" eaLnBrk="1" latinLnBrk="0" hangingPunct="1">
+        <a:lnSpc>
+          <a:spcPct val="90000"/>
+        </a:lnSpc>
+        <a:spcBef>
+          <a:spcPts val="1000"/>
+        </a:spcBef>
+        <a:buFont typeface="Arial" panose="020B0604020202020204" pitchFamily="34" charset="0"/>
+        <a:buChar char="•"/>
+        <a:defRPr sz="2800" kern="1200" baseline="0">
+          <a:solidFill>
+            <a:schemeClr val="tx1"/>
+          </a:solidFill>
+          <a:latin typeface="Arial" panose="020B0604020202020204" pitchFamily="34" charset="0"/>
+          <a:ea typeface="+mn-ea"/>
+          <a:cs typeface="+mn-cs"/>
+        </a:defRPr>
+      </a:lvl1pPr>
+      <a:lvl2pPr marL="685800" indent="-228600" algn="l" defTabSz="914400" rtl="0" eaLnBrk="1" latinLnBrk="0" hangingPunct="1">
+        <a:lnSpc>
+          <a:spcPct val="90000"/>
+        </a:lnSpc>
+        <a:spcBef>
+          <a:spcPts val="500"/>
+        </a:spcBef>
+        <a:buFont typeface="Arial" panose="020B0604020202020204" pitchFamily="34" charset="0"/>
+        <a:buChar char="•"/>
+        <a:defRPr sz="2400" kern="1200" baseline="0">
+          <a:solidFill>
+            <a:schemeClr val="tx1"/>
+          </a:solidFill>
+          <a:latin typeface="Arial" panose="020B0604020202020204" pitchFamily="34" charset="0"/>
+          <a:ea typeface="+mn-ea"/>
+          <a:cs typeface="+mn-cs"/>
+        </a:defRPr>
+      </a:lvl2pPr>
+      <a:lvl3pPr marL="1143000" indent="-228600" algn="l" defTabSz="914400" rtl="0" eaLnBrk="1" latinLnBrk="0" hangingPunct="1">
+        <a:lnSpc>
+          <a:spcPct val="90000"/>
+        </a:lnSpc>
+        <a:spcBef>
+          <a:spcPts val="500"/>
+        </a:spcBef>
+        <a:buFont typeface="Arial" panose="020B0604020202020204" pitchFamily="34" charset="0"/>
+        <a:buChar char="•"/>
+        <a:defRPr sz="2000" kern="1200" baseline="0">
+          <a:solidFill>
+            <a:schemeClr val="tx1"/>
+          </a:solidFill>
+          <a:latin typeface="Arial" panose="020B0604020202020204" pitchFamily="34" charset="0"/>
+          <a:ea typeface="+mn-ea"/>
+          <a:cs typeface="+mn-cs"/>
+        </a:defRPr>
+      </a:lvl3pPr>
+      <a:lvl4pPr marL="1600200" indent="-228600" algn="l" defTabSz="914400" rtl="0" eaLnBrk="1" latinLnBrk="0" hangingPunct="1">
+        <a:lnSpc>
+          <a:spcPct val="90000"/>
+        </a:lnSpc>
+        <a:spcBef>
+          <a:spcPts val="500"/>
+        </a:spcBef>
+        <a:buFont typeface="Arial" panose="020B0604020202020204" pitchFamily="34" charset="0"/>
+        <a:buChar char="•"/>
+        <a:defRPr sz="1800" kern="1200" baseline="0">
+          <a:solidFill>
+            <a:schemeClr val="tx1"/>
+          </a:solidFill>
+          <a:latin typeface="Arial" panose="020B0604020202020204" pitchFamily="34" charset="0"/>
+          <a:ea typeface="+mn-ea"/>
+          <a:cs typeface="+mn-cs"/>
+        </a:defRPr>
+      </a:lvl4pPr>
+      <a:lvl5pPr marL="2057400" indent="-228600" algn="l" defTabSz="914400" rtl="0" eaLnBrk="1" latinLnBrk="0" hangingPunct="1">
+        <a:lnSpc>
+          <a:spcPct val="90000"/>
+        </a:lnSpc>
+        <a:spcBef>
+          <a:spcPts val="500"/>
+        </a:spcBef>
+        <a:buFont typeface="Arial" panose="020B0604020202020204" pitchFamily="34" charset="0"/>
+        <a:buChar char="•"/>
+        <a:defRPr sz="1800" kern="1200" baseline="0">
+          <a:solidFill>
+            <a:schemeClr val="tx1"/>
+          </a:solidFill>
+          <a:latin typeface="Arial" panose="020B0604020202020204" pitchFamily="34" charset="0"/>
+          <a:ea typeface="+mn-ea"/>
+          <a:cs typeface="+mn-cs"/>
+        </a:defRPr>
+      </a:lvl5pPr>
+      <a:lvl6pPr marL="2514600" indent="-228600" algn="l" defTabSz="914400" rtl="0" eaLnBrk="1" latinLnBrk="0" hangingPunct="1">
+        <a:lnSpc>
+          <a:spcPct val="90000"/>
+        </a:lnSpc>
+        <a:spcBef>
+          <a:spcPts val="500"/>
+        </a:spcBef>
+        <a:buFont typeface="Arial" panose="020B0604020202020204" pitchFamily="34" charset="0"/>
+        <a:buChar char="•"/>
+        <a:defRPr sz="1800" kern="1200">
+          <a:solidFill>
+            <a:schemeClr val="tx1"/>
+          </a:solidFill>
+          <a:latin typeface="+mn-lt"/>
+          <a:ea typeface="+mn-ea"/>
+          <a:cs typeface="+mn-cs"/>
+        </a:defRPr>
+      </a:lvl6pPr>
+      <a:lvl7pPr marL="2971800" indent="-228600" algn="l" defTabSz="914400" rtl="0" eaLnBrk="1" latinLnBrk="0" hangingPunct="1">
+        <a:lnSpc>
+          <a:spcPct val="90000"/>
+        </a:lnSpc>
+        <a:spcBef>
+          <a:spcPts val="500"/>
+        </a:spcBef>
+        <a:buFont typeface="Arial" panose="020B0604020202020204" pitchFamily="34" charset="0"/>
+        <a:buChar char="•"/>
+        <a:defRPr sz="1800" kern="1200">
+          <a:solidFill>
+            <a:schemeClr val="tx1"/>
+          </a:solidFill>
+          <a:latin typeface="+mn-lt"/>
+          <a:ea typeface="+mn-ea"/>
+          <a:cs typeface="+mn-cs"/>
+        </a:defRPr>
+      </a:lvl7pPr>
+      <a:lvl8pPr marL="3429000" indent="-228600" algn="l" defTabSz="914400" rtl="0" eaLnBrk="1" latinLnBrk="0" hangingPunct="1">
+        <a:lnSpc>
+          <a:spcPct val="90000"/>
+        </a:lnSpc>
+        <a:spcBef>
+          <a:spcPts val="500"/>
+        </a:spcBef>
+        <a:buFont typeface="Arial" panose="020B0604020202020204" pitchFamily="34" charset="0"/>
+        <a:buChar char="•"/>
+        <a:defRPr sz="1800" kern="1200">
+          <a:solidFill>
+            <a:schemeClr val="tx1"/>
+          </a:solidFill>
+          <a:latin typeface="+mn-lt"/>
+          <a:ea typeface="+mn-ea"/>
+          <a:cs typeface="+mn-cs"/>
+        </a:defRPr>
+      </a:lvl8pPr>
+      <a:lvl9pPr marL="3886200" indent="-228600" algn="l" defTabSz="914400" rtl="0" eaLnBrk="1" latinLnBrk="0" hangingPunct="1">
+        <a:lnSpc>
+          <a:spcPct val="90000"/>
+        </a:lnSpc>
+        <a:spcBef>
+          <a:spcPts val="500"/>
+        </a:spcBef>
+        <a:buFont typeface="Arial" panose="020B0604020202020204" pitchFamily="34" charset="0"/>
+        <a:buChar char="•"/>
+        <a:defRPr sz="1800" kern="1200">
+          <a:solidFill>
+            <a:schemeClr val="tx1"/>
+          </a:solidFill>
+          <a:latin typeface="+mn-lt"/>
+          <a:ea typeface="+mn-ea"/>
+          <a:cs typeface="+mn-cs"/>
+        </a:defRPr>
+      </a:lvl9pPr>
+    </p:bodyStyle>
+    <p:otherStyle>
+      <a:defPPr>
+        <a:defRPr lang="zh-CN"/>
+      </a:defPPr>
+      <a:lvl1pPr marL="0" algn="l" defTabSz="914400" rtl="0" eaLnBrk="1" latinLnBrk="0" hangingPunct="1">
+        <a:defRPr sz="1800" kern="1200">
+          <a:solidFill>
+            <a:schemeClr val="tx1"/>
+          </a:solidFill>
+          <a:latin typeface="+mn-lt"/>
+          <a:ea typeface="+mn-ea"/>
+          <a:cs typeface="+mn-cs"/>
+        </a:defRPr>
+      </a:lvl1pPr>
+      <a:lvl2pPr marL="457200" algn="l" defTabSz="914400" rtl="0" eaLnBrk="1" latinLnBrk="0" hangingPunct="1">
+        <a:defRPr sz="1800" kern="1200">
+          <a:solidFill>
+            <a:schemeClr val="tx1"/>
+          </a:solidFill>
+          <a:latin typeface="+mn-lt"/>
+          <a:ea typeface="+mn-ea"/>
+          <a:cs typeface="+mn-cs"/>
+        </a:defRPr>
+      </a:lvl2pPr>
+      <a:lvl3pPr marL="914400" algn="l" defTabSz="914400" rtl="0" eaLnBrk="1" latinLnBrk="0" hangingPunct="1">
+        <a:defRPr sz="1800" kern="1200">
+          <a:solidFill>
+            <a:schemeClr val="tx1"/>
+          </a:solidFill>
+          <a:latin typeface="+mn-lt"/>
+          <a:ea typeface="+mn-ea"/>
+          <a:cs typeface="+mn-cs"/>
+        </a:defRPr>
+      </a:lvl3pPr>
+      <a:lvl4pPr marL="1371600" algn="l" defTabSz="914400" rtl="0" eaLnBrk="1" latinLnBrk="0" hangingPunct="1">
+        <a:defRPr sz="1800" kern="1200">
+          <a:solidFill>
+            <a:schemeClr val="tx1"/>
+          </a:solidFill>
+          <a:latin typeface="+mn-lt"/>
+          <a:ea typeface="+mn-ea"/>
+          <a:cs typeface="+mn-cs"/>
+        </a:defRPr>
+      </a:lvl4pPr>
+      <a:lvl5pPr marL="1828800" algn="l" defTabSz="914400" rtl="0" eaLnBrk="1" latinLnBrk="0" hangingPunct="1">
+        <a:defRPr sz="1800" kern="1200">
+          <a:solidFill>
+            <a:schemeClr val="tx1"/>
+          </a:solidFill>
+          <a:latin typeface="+mn-lt"/>
+          <a:ea typeface="+mn-ea"/>
+          <a:cs typeface="+mn-cs"/>
+        </a:defRPr>
+      </a:lvl5pPr>
+      <a:lvl6pPr marL="2286000" algn="l" defTabSz="914400" rtl="0" eaLnBrk="1" latinLnBrk="0" hangingPunct="1">
+        <a:defRPr sz="1800" kern="1200">
+          <a:solidFill>
+            <a:schemeClr val="tx1"/>
+          </a:solidFill>
+          <a:latin typeface="+mn-lt"/>
+          <a:ea typeface="+mn-ea"/>
+          <a:cs typeface="+mn-cs"/>
+        </a:defRPr>
+      </a:lvl6pPr>
+      <a:lvl7pPr marL="2743200" algn="l" defTabSz="914400" rtl="0" eaLnBrk="1" latinLnBrk="0" hangingPunct="1">
+        <a:defRPr sz="1800" kern="1200">
+          <a:solidFill>
+            <a:schemeClr val="tx1"/>
+          </a:solidFill>
+          <a:latin typeface="+mn-lt"/>
+          <a:ea typeface="+mn-ea"/>
+          <a:cs typeface="+mn-cs"/>
+        </a:defRPr>
+      </a:lvl7pPr>
+      <a:lvl8pPr marL="3200400" algn="l" defTabSz="914400" rtl="0" eaLnBrk="1" latinLnBrk="0" hangingPunct="1">
+        <a:defRPr sz="1800" kern="1200">
+          <a:solidFill>
+            <a:schemeClr val="tx1"/>
+          </a:solidFill>
+          <a:latin typeface="+mn-lt"/>
+          <a:ea typeface="+mn-ea"/>
+          <a:cs typeface="+mn-cs"/>
+        </a:defRPr>
+      </a:lvl8pPr>
+      <a:lvl9pPr marL="3657600" algn="l" defTabSz="914400" rtl="0" eaLnBrk="1" latinLnBrk="0" hangingPunct="1">
+        <a:defRPr sz="1800" kern="1200">
+          <a:solidFill>
+            <a:schemeClr val="tx1"/>
+          </a:solidFill>
+          <a:latin typeface="+mn-lt"/>
+          <a:ea typeface="+mn-ea"/>
+          <a:cs typeface="+mn-cs"/>
+        </a:defRPr>
+      </a:lvl9pPr>
+    </p:otherStyle>
+  </p:txStyles>
+</p:sldMaster>
+</file>
+
+<file path=ppt/slideMasters/slideMaster2.xml><?xml version="1.0" encoding="utf-8"?>
+<p:sldMaster xmlns:a="http://schemas.openxmlformats.org/drawingml/2006/main" xmlns:r="http://schemas.openxmlformats.org/officeDocument/2006/relationships" xmlns:p="http://schemas.openxmlformats.org/presentationml/2006/main">
+  <p:cSld>
+    <p:bg>
+      <p:bgRef idx="1001">
+        <a:schemeClr val="bg1"/>
+      </p:bgRef>
+    </p:bg>
+    <p:spTree>
+      <p:nvGrpSpPr>
+        <p:cNvPr id="1" name=""/>
+        <p:cNvGrpSpPr/>
+        <p:nvPr/>
+      </p:nvGrpSpPr>
+      <p:grpSpPr>
+        <a:xfrm>
+          <a:off x="0" y="0"/>
+          <a:ext cx="0" cy="0"/>
+          <a:chOff x="0" y="0"/>
+          <a:chExt cx="0" cy="0"/>
+        </a:xfrm>
+      </p:grpSpPr>
+      <p:sp>
+        <p:nvSpPr>
+          <p:cNvPr id="2" name="Title Placeholder 1"/>
+          <p:cNvSpPr>
+            <a:spLocks noGrp="1"/>
+          </p:cNvSpPr>
+          <p:nvPr>
+            <p:ph type="title"/>
+          </p:nvPr>
+        </p:nvSpPr>
+        <p:spPr>
+          <a:xfrm>
+            <a:off x="193466" y="136525"/>
+            <a:ext cx="11805068" cy="1325563"/>
+          </a:xfrm>
+          <a:prstGeom prst="rect">
+            <a:avLst/>
+          </a:prstGeom>
+        </p:spPr>
+        <p:txBody>
+          <a:bodyPr vert="horz" lIns="91440" tIns="45720" rIns="91440" bIns="45720" rtlCol="0" anchor="ctr">
+            <a:normAutofit/>
+          </a:bodyPr>
+          <a:lstStyle/>
+          <a:p>
+            <a:r>
+              <a:rPr lang="en-US" altLang="zh-CN" dirty="0"/>
+              <a:t>Click to edit Master title style</a:t>
+            </a:r>
+            <a:endParaRPr lang="zh-CN" altLang="en-US" dirty="0"/>
+          </a:p>
+        </p:txBody>
+      </p:sp>
+      <p:sp>
+        <p:nvSpPr>
+          <p:cNvPr id="3" name="Text Placeholder 2"/>
+          <p:cNvSpPr>
+            <a:spLocks noGrp="1"/>
+          </p:cNvSpPr>
+          <p:nvPr>
+            <p:ph type="body" idx="1"/>
+          </p:nvPr>
+        </p:nvSpPr>
+        <p:spPr>
+          <a:xfrm>
+            <a:off x="193466" y="1549552"/>
+            <a:ext cx="11805068" cy="4703411"/>
+          </a:xfrm>
+          <a:prstGeom prst="rect">
+            <a:avLst/>
+          </a:prstGeom>
+        </p:spPr>
+        <p:txBody>
+          <a:bodyPr vert="horz" lIns="91440" tIns="45720" rIns="91440" bIns="45720" rtlCol="0">
+            <a:normAutofit/>
+          </a:bodyPr>
+          <a:lstStyle/>
+          <a:p>
+            <a:pPr lvl="0"/>
+            <a:r>
+              <a:rPr lang="en-US" altLang="zh-CN" dirty="0"/>
+              <a:t>Click to edit Master text styles</a:t>
+            </a:r>
+            <a:endParaRPr lang="en-US" altLang="zh-CN" dirty="0"/>
+          </a:p>
+          <a:p>
+            <a:pPr lvl="1"/>
+            <a:r>
+              <a:rPr lang="en-US" altLang="zh-CN" dirty="0"/>
+              <a:t>Second level</a:t>
+            </a:r>
+            <a:endParaRPr lang="en-US" altLang="zh-CN" dirty="0"/>
+          </a:p>
+          <a:p>
+            <a:pPr lvl="2"/>
+            <a:r>
+              <a:rPr lang="en-US" altLang="zh-CN" dirty="0"/>
+              <a:t>Third level</a:t>
+            </a:r>
+            <a:endParaRPr lang="en-US" altLang="zh-CN" dirty="0"/>
+          </a:p>
+          <a:p>
+            <a:pPr lvl="3"/>
+            <a:r>
+              <a:rPr lang="en-US" altLang="zh-CN" dirty="0"/>
+              <a:t>Fourth level</a:t>
+            </a:r>
+            <a:endParaRPr lang="en-US" altLang="zh-CN" dirty="0"/>
+          </a:p>
+          <a:p>
+            <a:pPr lvl="4"/>
+            <a:r>
+              <a:rPr lang="en-US" altLang="zh-CN" dirty="0"/>
+              <a:t>Fifth level</a:t>
+            </a:r>
+            <a:endParaRPr lang="zh-CN" altLang="en-US" dirty="0"/>
+          </a:p>
+        </p:txBody>
+      </p:sp>
+      <p:sp>
+        <p:nvSpPr>
+          <p:cNvPr id="4" name="Date Placeholder 3"/>
+          <p:cNvSpPr>
+            <a:spLocks noGrp="1"/>
+          </p:cNvSpPr>
+          <p:nvPr>
+            <p:ph type="dt" sz="half" idx="2"/>
+          </p:nvPr>
+        </p:nvSpPr>
+        <p:spPr>
+          <a:xfrm>
+            <a:off x="838200" y="6356350"/>
+            <a:ext cx="2743200" cy="365125"/>
+          </a:xfrm>
+          <a:prstGeom prst="rect">
+            <a:avLst/>
+          </a:prstGeom>
+        </p:spPr>
+        <p:txBody>
+          <a:bodyPr vert="horz" lIns="91440" tIns="45720" rIns="91440" bIns="45720" rtlCol="0" anchor="ctr"/>
+          <a:lstStyle>
+            <a:lvl1pPr algn="l">
+              <a:defRPr sz="1200">
+                <a:solidFill>
+                  <a:schemeClr val="tx1">
+                    <a:tint val="82000"/>
+                  </a:schemeClr>
+                </a:solidFill>
+              </a:defRPr>
+            </a:lvl1pPr>
+          </a:lstStyle>
+          <a:p>
+            <a:fld id="{DF0CB939-C62B-4AC8-AC93-4DE9ACFF5AC4}" type="datetime1">
+              <a:rPr lang="en-US" smtClean="0"/>
+            </a:fld>
+            <a:endParaRPr lang="en-US" dirty="0"/>
+          </a:p>
+        </p:txBody>
+      </p:sp>
+      <p:sp>
+        <p:nvSpPr>
+          <p:cNvPr id="5" name="Footer Placeholder 4"/>
+          <p:cNvSpPr>
+            <a:spLocks noGrp="1"/>
+          </p:cNvSpPr>
+          <p:nvPr>
+            <p:ph type="ftr" sz="quarter" idx="3"/>
+          </p:nvPr>
+        </p:nvSpPr>
+        <p:spPr>
+          <a:xfrm>
+            <a:off x="4038600" y="6356350"/>
+            <a:ext cx="4114800" cy="365125"/>
+          </a:xfrm>
+          <a:prstGeom prst="rect">
+            <a:avLst/>
+          </a:prstGeom>
+        </p:spPr>
+        <p:txBody>
+          <a:bodyPr vert="horz" lIns="91440" tIns="45720" rIns="91440" bIns="45720" rtlCol="0" anchor="ctr"/>
+          <a:lstStyle>
+            <a:lvl1pPr algn="ctr">
+              <a:defRPr sz="1200">
+                <a:solidFill>
+                  <a:schemeClr val="tx1">
+                    <a:tint val="82000"/>
+                  </a:schemeClr>
+                </a:solidFill>
+              </a:defRPr>
+            </a:lvl1pPr>
+          </a:lstStyle>
+          <a:p>
+            <a:r>
+              <a:rPr lang="en-US"/>
+              <a:t>SNN Training</a:t>
+            </a:r>
+            <a:endParaRPr lang="en-US" dirty="0"/>
+          </a:p>
+        </p:txBody>
+      </p:sp>
+      <p:sp>
+        <p:nvSpPr>
+          <p:cNvPr id="6" name="Slide Number Placeholder 5"/>
+          <p:cNvSpPr>
+            <a:spLocks noGrp="1"/>
+          </p:cNvSpPr>
+          <p:nvPr>
+            <p:ph type="sldNum" sz="quarter" idx="4"/>
+          </p:nvPr>
+        </p:nvSpPr>
+        <p:spPr>
+          <a:xfrm>
+            <a:off x="8610600" y="6356350"/>
+            <a:ext cx="2743200" cy="365125"/>
+          </a:xfrm>
+          <a:prstGeom prst="rect">
+            <a:avLst/>
+          </a:prstGeom>
+        </p:spPr>
+        <p:txBody>
+          <a:bodyPr vert="horz" lIns="91440" tIns="45720" rIns="91440" bIns="45720" rtlCol="0" anchor="ctr"/>
+          <a:lstStyle>
+            <a:lvl1pPr algn="r">
+              <a:defRPr sz="1200">
+                <a:solidFill>
+                  <a:schemeClr val="tx1">
+                    <a:tint val="82000"/>
+                  </a:schemeClr>
+                </a:solidFill>
+              </a:defRPr>
+            </a:lvl1pPr>
+          </a:lstStyle>
+          <a:p>
+            <a:fld id="{48F63A3B-78C7-47BE-AE5E-E10140E04643}" type="slidenum">
+              <a:rPr lang="en-US" smtClean="0"/>
+            </a:fld>
+            <a:endParaRPr lang="en-US" dirty="0"/>
+          </a:p>
+        </p:txBody>
+      </p:sp>
+    </p:spTree>
   </p:cSld>
   <p:clrMap bg1="lt1" tx1="dk1" bg2="lt2" tx2="dk2" accent1="accent1" accent2="accent2" accent3="accent3" accent4="accent4" accent5="accent5" accent6="accent6" hlink="hlink" folHlink="folHlink"/>
   <p:sldLayoutIdLst>
@@ -5275,7 +6915,7 @@
           <a:solidFill>
             <a:schemeClr val="tx1"/>
           </a:solidFill>
-          <a:latin typeface="Arial "/>
+          <a:latin typeface="Arial" panose="020B0604020202020204"/>
           <a:ea typeface="+mj-ea"/>
           <a:cs typeface="+mj-cs"/>
         </a:defRPr>
@@ -5563,13 +7203,7 @@
       </p:grpSpPr>
       <p:sp>
         <p:nvSpPr>
-          <p:cNvPr id="2" name="Title 1">
-            <a:extLst>
-              <a:ext uri="{FF2B5EF4-FFF2-40B4-BE49-F238E27FC236}">
-                <a16:creationId xmlns:a16="http://schemas.microsoft.com/office/drawing/2014/main" id="{0B953A8E-06B8-E1CB-BEC3-A88D4721EF5F}"/>
-              </a:ext>
-            </a:extLst>
-          </p:cNvPr>
+          <p:cNvPr id="2" name="Title 1"/>
           <p:cNvSpPr>
             <a:spLocks noGrp="1"/>
           </p:cNvSpPr>
@@ -5622,13 +7256,7 @@
       </p:sp>
       <p:sp>
         <p:nvSpPr>
-          <p:cNvPr id="3" name="Subtitle 2">
-            <a:extLst>
-              <a:ext uri="{FF2B5EF4-FFF2-40B4-BE49-F238E27FC236}">
-                <a16:creationId xmlns:a16="http://schemas.microsoft.com/office/drawing/2014/main" id="{9305ADCC-E6F1-E544-FCC2-4E434569C511}"/>
-              </a:ext>
-            </a:extLst>
-          </p:cNvPr>
+          <p:cNvPr id="3" name="Subtitle 2"/>
           <p:cNvSpPr>
             <a:spLocks noGrp="1"/>
           </p:cNvSpPr>
@@ -5661,12 +7289,14 @@
               <a:rPr lang="en-US" altLang="zh-CN" dirty="0"/>
               <a:t>Lab</a:t>
             </a:r>
+            <a:endParaRPr lang="en-US" altLang="zh-CN" dirty="0"/>
           </a:p>
           <a:p>
             <a:r>
               <a:rPr lang="en-US" altLang="zh-CN" dirty="0"/>
               <a:t>Fall 2026</a:t>
             </a:r>
+            <a:endParaRPr lang="en-US" altLang="zh-CN" dirty="0"/>
           </a:p>
           <a:p>
             <a:endParaRPr lang="zh-CN" altLang="en-US" dirty="0"/>
@@ -5675,13 +7305,7 @@
       </p:sp>
       <p:sp>
         <p:nvSpPr>
-          <p:cNvPr id="4" name="Footer Placeholder 3">
-            <a:extLst>
-              <a:ext uri="{FF2B5EF4-FFF2-40B4-BE49-F238E27FC236}">
-                <a16:creationId xmlns:a16="http://schemas.microsoft.com/office/drawing/2014/main" id="{17F76ABE-5875-E1A1-49DC-32DE17183426}"/>
-              </a:ext>
-            </a:extLst>
-          </p:cNvPr>
+          <p:cNvPr id="4" name="Footer Placeholder 3"/>
           <p:cNvSpPr>
             <a:spLocks noGrp="1"/>
           </p:cNvSpPr>
@@ -5704,13 +7328,7 @@
       </p:sp>
       <p:sp>
         <p:nvSpPr>
-          <p:cNvPr id="5" name="Slide Number Placeholder 4">
-            <a:extLst>
-              <a:ext uri="{FF2B5EF4-FFF2-40B4-BE49-F238E27FC236}">
-                <a16:creationId xmlns:a16="http://schemas.microsoft.com/office/drawing/2014/main" id="{5E4FBF15-1D85-BB13-127E-C95C0E42EC30}"/>
-              </a:ext>
-            </a:extLst>
-          </p:cNvPr>
+          <p:cNvPr id="5" name="Slide Number Placeholder 4"/>
           <p:cNvSpPr>
             <a:spLocks noGrp="1"/>
           </p:cNvSpPr>
@@ -5725,18 +7343,12 @@
           <a:p>
             <a:fld id="{48F63A3B-78C7-47BE-AE5E-E10140E04643}" type="slidenum">
               <a:rPr lang="en-US" smtClean="0"/>
-              <a:t>1</a:t>
             </a:fld>
             <a:endParaRPr lang="en-US" dirty="0"/>
           </a:p>
         </p:txBody>
       </p:sp>
     </p:spTree>
-    <p:extLst>
-      <p:ext uri="{BB962C8B-B14F-4D97-AF65-F5344CB8AC3E}">
-        <p14:creationId xmlns:p14="http://schemas.microsoft.com/office/powerpoint/2010/main" val="3391350155"/>
-      </p:ext>
-    </p:extLst>
   </p:cSld>
   <p:clrMapOvr>
     <a:masterClrMapping/>
@@ -5763,13 +7375,7 @@
       </p:grpSpPr>
       <p:sp>
         <p:nvSpPr>
-          <p:cNvPr id="2" name="Title 1">
-            <a:extLst>
-              <a:ext uri="{FF2B5EF4-FFF2-40B4-BE49-F238E27FC236}">
-                <a16:creationId xmlns:a16="http://schemas.microsoft.com/office/drawing/2014/main" id="{DB82E75C-BF04-491C-B7B0-7B969DB1392E}"/>
-              </a:ext>
-            </a:extLst>
-          </p:cNvPr>
+          <p:cNvPr id="2" name="Title 1"/>
           <p:cNvSpPr>
             <a:spLocks noGrp="1"/>
           </p:cNvSpPr>
@@ -5786,20 +7392,15 @@
               <a:rPr lang="en-US" dirty="0"/>
               <a:t>Online Learning for SNNs</a:t>
             </a:r>
-          </a:p>
-        </p:txBody>
-      </p:sp>
-      <mc:AlternateContent xmlns:mc="http://schemas.openxmlformats.org/markup-compatibility/2006" xmlns:a14="http://schemas.microsoft.com/office/drawing/2010/main">
-        <mc:Choice Requires="a14">
+            <a:endParaRPr lang="en-US" dirty="0"/>
+          </a:p>
+        </p:txBody>
+      </p:sp>
+      <mc:AlternateContent xmlns:mc="http://schemas.openxmlformats.org/markup-compatibility/2006">
+        <mc:Choice xmlns:a14="http://schemas.microsoft.com/office/drawing/2010/main" Requires="a14">
           <p:sp>
             <p:nvSpPr>
-              <p:cNvPr id="3" name="Content Placeholder 2">
-                <a:extLst>
-                  <a:ext uri="{FF2B5EF4-FFF2-40B4-BE49-F238E27FC236}">
-                    <a16:creationId xmlns:a16="http://schemas.microsoft.com/office/drawing/2014/main" id="{BCFA0938-E757-4566-A5D3-F51C4F9FE467}"/>
-                  </a:ext>
-                </a:extLst>
-              </p:cNvPr>
+              <p:cNvPr id="3" name="Content Placeholder 2"/>
               <p:cNvSpPr>
                 <a:spLocks noGrp="1"/>
               </p:cNvSpPr>
@@ -5816,18 +7417,21 @@
                   <a:rPr lang="en-US" dirty="0"/>
                   <a:t>Can we update weights immediately without storing all history?</a:t>
                 </a:r>
+                <a:endParaRPr lang="en-US" dirty="0"/>
               </a:p>
               <a:p>
                 <a:r>
                   <a:rPr lang="en-US" dirty="0"/>
                   <a:t>Core Idea</a:t>
                 </a:r>
+                <a:endParaRPr lang="en-US" dirty="0"/>
               </a:p>
               <a:p>
                 <a:r>
                   <a:rPr lang="en-US" dirty="0"/>
                   <a:t>Instead of computing</a:t>
                 </a:r>
+                <a:endParaRPr lang="en-US" dirty="0"/>
               </a:p>
               <a:p>
                 <a:pPr marL="0" indent="0" algn="ctr">
@@ -5880,6 +7484,7 @@
                   <a:rPr lang="en-US" dirty="0"/>
                   <a:t> </a:t>
                 </a:r>
+                <a:endParaRPr lang="en-US" dirty="0"/>
               </a:p>
               <a:p>
                 <a:pPr marL="0" indent="0">
@@ -5889,12 +7494,14 @@
                   <a:rPr lang="en-US" dirty="0"/>
                   <a:t>after observing all timesteps,</a:t>
                 </a:r>
+                <a:endParaRPr lang="en-US" dirty="0"/>
               </a:p>
               <a:p>
                 <a:r>
                   <a:rPr lang="en-US" dirty="0"/>
                   <a:t>compute updates immediately at timestep t:</a:t>
                 </a:r>
+                <a:endParaRPr lang="en-US" dirty="0"/>
               </a:p>
               <a:p>
                 <a:pPr marL="0" indent="0">
@@ -5950,6 +7557,7 @@
                   <a:rPr lang="en-US" dirty="0"/>
                   <a:t> using only local information.</a:t>
                 </a:r>
+                <a:endParaRPr lang="en-US" dirty="0"/>
               </a:p>
               <a:p>
                 <a:pPr marL="0" indent="0">
@@ -5960,28 +7568,22 @@
             </p:txBody>
           </p:sp>
         </mc:Choice>
-        <mc:Fallback xmlns="">
+        <mc:Fallback>
           <p:sp>
             <p:nvSpPr>
-              <p:cNvPr id="3" name="Content Placeholder 2">
-                <a:extLst>
-                  <a:ext uri="{FF2B5EF4-FFF2-40B4-BE49-F238E27FC236}">
-                    <a16:creationId xmlns:a16="http://schemas.microsoft.com/office/drawing/2014/main" id="{BCFA0938-E757-4566-A5D3-F51C4F9FE467}"/>
-                  </a:ext>
-                </a:extLst>
-              </p:cNvPr>
+              <p:cNvPr id="3" name="Content Placeholder 2"/>
               <p:cNvSpPr>
-                <a:spLocks noGrp="1" noRot="1" noChangeAspect="1" noMove="1" noResize="1" noEditPoints="1" noAdjustHandles="1" noChangeArrowheads="1" noChangeShapeType="1" noTextEdit="1"/>
+                <a:spLocks noRot="1" noChangeAspect="1" noMove="1" noResize="1" noEditPoints="1" noAdjustHandles="1" noChangeArrowheads="1" noChangeShapeType="1" noTextEdit="1"/>
               </p:cNvSpPr>
               <p:nvPr>
                 <p:ph idx="1"/>
               </p:nvPr>
             </p:nvSpPr>
             <p:spPr>
-              <a:blipFill>
-                <a:blip r:embed="rId3"/>
+              <a:blipFill rotWithShape="1">
+                <a:blip r:embed="rId1"/>
                 <a:stretch>
-                  <a:fillRect l="-1085" t="-2202"/>
+                  <a:fillRect l="-4" t="-3" r="2" b="3"/>
                 </a:stretch>
               </a:blipFill>
             </p:spPr>
@@ -5990,7 +7592,7 @@
               <a:lstStyle/>
               <a:p>
                 <a:r>
-                  <a:rPr lang="en-US">
+                  <a:rPr lang="zh-CN" altLang="en-US">
                     <a:noFill/>
                   </a:rPr>
                   <a:t> </a:t>
@@ -6002,13 +7604,7 @@
       </mc:AlternateContent>
       <p:sp>
         <p:nvSpPr>
-          <p:cNvPr id="4" name="Footer Placeholder 3">
-            <a:extLst>
-              <a:ext uri="{FF2B5EF4-FFF2-40B4-BE49-F238E27FC236}">
-                <a16:creationId xmlns:a16="http://schemas.microsoft.com/office/drawing/2014/main" id="{8D0F992F-8A41-4191-AC94-F34325BBD9A9}"/>
-              </a:ext>
-            </a:extLst>
-          </p:cNvPr>
+          <p:cNvPr id="4" name="Footer Placeholder 3"/>
           <p:cNvSpPr>
             <a:spLocks noGrp="1"/>
           </p:cNvSpPr>
@@ -6031,13 +7627,7 @@
       </p:sp>
       <p:sp>
         <p:nvSpPr>
-          <p:cNvPr id="5" name="Slide Number Placeholder 4">
-            <a:extLst>
-              <a:ext uri="{FF2B5EF4-FFF2-40B4-BE49-F238E27FC236}">
-                <a16:creationId xmlns:a16="http://schemas.microsoft.com/office/drawing/2014/main" id="{51454179-A2F9-4402-9500-D1998D89E8E1}"/>
-              </a:ext>
-            </a:extLst>
-          </p:cNvPr>
+          <p:cNvPr id="5" name="Slide Number Placeholder 4"/>
           <p:cNvSpPr>
             <a:spLocks noGrp="1"/>
           </p:cNvSpPr>
@@ -6052,18 +7642,12 @@
           <a:p>
             <a:fld id="{48F63A3B-78C7-47BE-AE5E-E10140E04643}" type="slidenum">
               <a:rPr lang="en-US" smtClean="0"/>
-              <a:t>10</a:t>
             </a:fld>
             <a:endParaRPr lang="en-US" dirty="0"/>
           </a:p>
         </p:txBody>
       </p:sp>
     </p:spTree>
-    <p:extLst>
-      <p:ext uri="{BB962C8B-B14F-4D97-AF65-F5344CB8AC3E}">
-        <p14:creationId xmlns:p14="http://schemas.microsoft.com/office/powerpoint/2010/main" val="2501928754"/>
-      </p:ext>
-    </p:extLst>
   </p:cSld>
   <p:clrMapOvr>
     <a:masterClrMapping/>
@@ -6090,13 +7674,7 @@
       </p:grpSpPr>
       <p:sp>
         <p:nvSpPr>
-          <p:cNvPr id="2" name="Title 1">
-            <a:extLst>
-              <a:ext uri="{FF2B5EF4-FFF2-40B4-BE49-F238E27FC236}">
-                <a16:creationId xmlns:a16="http://schemas.microsoft.com/office/drawing/2014/main" id="{BA17AE49-D33F-43BB-B420-DA6DDD3893FF}"/>
-              </a:ext>
-            </a:extLst>
-          </p:cNvPr>
+          <p:cNvPr id="2" name="Title 1"/>
           <p:cNvSpPr>
             <a:spLocks noGrp="1"/>
           </p:cNvSpPr>
@@ -6113,18 +7691,13 @@
               <a:rPr lang="en-US" dirty="0"/>
               <a:t>Eligibility Trace: Replacing BPTT Memory</a:t>
             </a:r>
-          </a:p>
-        </p:txBody>
-      </p:sp>
-      <p:sp>
-        <p:nvSpPr>
-          <p:cNvPr id="3" name="Content Placeholder 2">
-            <a:extLst>
-              <a:ext uri="{FF2B5EF4-FFF2-40B4-BE49-F238E27FC236}">
-                <a16:creationId xmlns:a16="http://schemas.microsoft.com/office/drawing/2014/main" id="{9098B274-6F1F-415F-9557-2E6370971D0B}"/>
-              </a:ext>
-            </a:extLst>
-          </p:cNvPr>
+            <a:endParaRPr lang="en-US" dirty="0"/>
+          </a:p>
+        </p:txBody>
+      </p:sp>
+      <p:sp>
+        <p:nvSpPr>
+          <p:cNvPr id="3" name="Content Placeholder 2"/>
           <p:cNvSpPr>
             <a:spLocks noGrp="1"/>
           </p:cNvSpPr>
@@ -6143,13 +7716,7 @@
       </p:sp>
       <p:sp>
         <p:nvSpPr>
-          <p:cNvPr id="4" name="Footer Placeholder 3">
-            <a:extLst>
-              <a:ext uri="{FF2B5EF4-FFF2-40B4-BE49-F238E27FC236}">
-                <a16:creationId xmlns:a16="http://schemas.microsoft.com/office/drawing/2014/main" id="{21700BEB-F0DC-4EF4-86F8-8F5801FB01AB}"/>
-              </a:ext>
-            </a:extLst>
-          </p:cNvPr>
+          <p:cNvPr id="4" name="Footer Placeholder 3"/>
           <p:cNvSpPr>
             <a:spLocks noGrp="1"/>
           </p:cNvSpPr>
@@ -6172,13 +7739,7 @@
       </p:sp>
       <p:sp>
         <p:nvSpPr>
-          <p:cNvPr id="5" name="Slide Number Placeholder 4">
-            <a:extLst>
-              <a:ext uri="{FF2B5EF4-FFF2-40B4-BE49-F238E27FC236}">
-                <a16:creationId xmlns:a16="http://schemas.microsoft.com/office/drawing/2014/main" id="{3276030E-5837-4187-B555-422426F12BCC}"/>
-              </a:ext>
-            </a:extLst>
-          </p:cNvPr>
+          <p:cNvPr id="5" name="Slide Number Placeholder 4"/>
           <p:cNvSpPr>
             <a:spLocks noGrp="1"/>
           </p:cNvSpPr>
@@ -6193,18 +7754,12 @@
           <a:p>
             <a:fld id="{48F63A3B-78C7-47BE-AE5E-E10140E04643}" type="slidenum">
               <a:rPr lang="en-US" smtClean="0"/>
-              <a:t>11</a:t>
             </a:fld>
             <a:endParaRPr lang="en-US" dirty="0"/>
           </a:p>
         </p:txBody>
       </p:sp>
     </p:spTree>
-    <p:extLst>
-      <p:ext uri="{BB962C8B-B14F-4D97-AF65-F5344CB8AC3E}">
-        <p14:creationId xmlns:p14="http://schemas.microsoft.com/office/powerpoint/2010/main" val="3732404059"/>
-      </p:ext>
-    </p:extLst>
   </p:cSld>
   <p:clrMapOvr>
     <a:masterClrMapping/>
@@ -6231,13 +7786,7 @@
       </p:grpSpPr>
       <p:sp>
         <p:nvSpPr>
-          <p:cNvPr id="2" name="Title 1">
-            <a:extLst>
-              <a:ext uri="{FF2B5EF4-FFF2-40B4-BE49-F238E27FC236}">
-                <a16:creationId xmlns:a16="http://schemas.microsoft.com/office/drawing/2014/main" id="{26F7D2EC-6267-4CA9-940D-B21F1114F8FA}"/>
-              </a:ext>
-            </a:extLst>
-          </p:cNvPr>
+          <p:cNvPr id="2" name="Title 1"/>
           <p:cNvSpPr>
             <a:spLocks noGrp="1"/>
           </p:cNvSpPr>
@@ -6254,18 +7803,13 @@
               <a:rPr lang="en-US" dirty="0"/>
               <a:t>Represent Work—e-Prop</a:t>
             </a:r>
-          </a:p>
-        </p:txBody>
-      </p:sp>
-      <p:sp>
-        <p:nvSpPr>
-          <p:cNvPr id="3" name="Content Placeholder 2">
-            <a:extLst>
-              <a:ext uri="{FF2B5EF4-FFF2-40B4-BE49-F238E27FC236}">
-                <a16:creationId xmlns:a16="http://schemas.microsoft.com/office/drawing/2014/main" id="{5AFCA32E-A578-4AC7-AC49-912C4BE7AF90}"/>
-              </a:ext>
-            </a:extLst>
-          </p:cNvPr>
+            <a:endParaRPr lang="en-US" dirty="0"/>
+          </a:p>
+        </p:txBody>
+      </p:sp>
+      <p:sp>
+        <p:nvSpPr>
+          <p:cNvPr id="3" name="Content Placeholder 2"/>
           <p:cNvSpPr>
             <a:spLocks noGrp="1"/>
           </p:cNvSpPr>
@@ -6284,13 +7828,7 @@
       </p:sp>
       <p:sp>
         <p:nvSpPr>
-          <p:cNvPr id="4" name="Footer Placeholder 3">
-            <a:extLst>
-              <a:ext uri="{FF2B5EF4-FFF2-40B4-BE49-F238E27FC236}">
-                <a16:creationId xmlns:a16="http://schemas.microsoft.com/office/drawing/2014/main" id="{D1EB2DCA-5379-40EF-B5A7-63A7B2644293}"/>
-              </a:ext>
-            </a:extLst>
-          </p:cNvPr>
+          <p:cNvPr id="4" name="Footer Placeholder 3"/>
           <p:cNvSpPr>
             <a:spLocks noGrp="1"/>
           </p:cNvSpPr>
@@ -6313,13 +7851,7 @@
       </p:sp>
       <p:sp>
         <p:nvSpPr>
-          <p:cNvPr id="5" name="Slide Number Placeholder 4">
-            <a:extLst>
-              <a:ext uri="{FF2B5EF4-FFF2-40B4-BE49-F238E27FC236}">
-                <a16:creationId xmlns:a16="http://schemas.microsoft.com/office/drawing/2014/main" id="{1BADFE8F-8C71-4023-9F8C-24E01A666C26}"/>
-              </a:ext>
-            </a:extLst>
-          </p:cNvPr>
+          <p:cNvPr id="5" name="Slide Number Placeholder 4"/>
           <p:cNvSpPr>
             <a:spLocks noGrp="1"/>
           </p:cNvSpPr>
@@ -6334,18 +7866,12 @@
           <a:p>
             <a:fld id="{48F63A3B-78C7-47BE-AE5E-E10140E04643}" type="slidenum">
               <a:rPr lang="en-US" smtClean="0"/>
-              <a:t>12</a:t>
             </a:fld>
             <a:endParaRPr lang="en-US" dirty="0"/>
           </a:p>
         </p:txBody>
       </p:sp>
     </p:spTree>
-    <p:extLst>
-      <p:ext uri="{BB962C8B-B14F-4D97-AF65-F5344CB8AC3E}">
-        <p14:creationId xmlns:p14="http://schemas.microsoft.com/office/powerpoint/2010/main" val="2664306108"/>
-      </p:ext>
-    </p:extLst>
   </p:cSld>
   <p:clrMapOvr>
     <a:masterClrMapping/>
@@ -6372,13 +7898,7 @@
       </p:grpSpPr>
       <p:sp>
         <p:nvSpPr>
-          <p:cNvPr id="2" name="Title 1">
-            <a:extLst>
-              <a:ext uri="{FF2B5EF4-FFF2-40B4-BE49-F238E27FC236}">
-                <a16:creationId xmlns:a16="http://schemas.microsoft.com/office/drawing/2014/main" id="{26F7D2EC-6267-4CA9-940D-B21F1114F8FA}"/>
-              </a:ext>
-            </a:extLst>
-          </p:cNvPr>
+          <p:cNvPr id="2" name="Title 1"/>
           <p:cNvSpPr>
             <a:spLocks noGrp="1"/>
           </p:cNvSpPr>
@@ -6388,25 +7908,30 @@
         </p:nvSpPr>
         <p:spPr/>
         <p:txBody>
-          <a:bodyPr/>
+          <a:bodyPr>
+            <a:normAutofit/>
+          </a:bodyPr>
           <a:lstStyle/>
           <a:p>
             <a:r>
               <a:rPr lang="en-US" dirty="0"/>
               <a:t>Represent Work—OTTT</a:t>
             </a:r>
-          </a:p>
-        </p:txBody>
-      </p:sp>
-      <p:sp>
-        <p:nvSpPr>
-          <p:cNvPr id="3" name="Content Placeholder 2">
-            <a:extLst>
-              <a:ext uri="{FF2B5EF4-FFF2-40B4-BE49-F238E27FC236}">
-                <a16:creationId xmlns:a16="http://schemas.microsoft.com/office/drawing/2014/main" id="{5AFCA32E-A578-4AC7-AC49-912C4BE7AF90}"/>
-              </a:ext>
-            </a:extLst>
-          </p:cNvPr>
+            <a:r>
+              <a:rPr lang="en-US" sz="1800" dirty="0"/>
+              <a:t>(</a:t>
+            </a:r>
+            <a:r>
+              <a:rPr lang="en-US" altLang="zh-CN" sz="1800" dirty="0"/>
+              <a:t>Online Training Through Time)</a:t>
+            </a:r>
+            <a:endParaRPr lang="en-US" altLang="zh-CN" sz="1800" dirty="0"/>
+          </a:p>
+        </p:txBody>
+      </p:sp>
+      <p:sp>
+        <p:nvSpPr>
+          <p:cNvPr id="3" name="Content Placeholder 2"/>
           <p:cNvSpPr>
             <a:spLocks noGrp="1"/>
           </p:cNvSpPr>
@@ -6425,13 +7950,7 @@
       </p:sp>
       <p:sp>
         <p:nvSpPr>
-          <p:cNvPr id="4" name="Footer Placeholder 3">
-            <a:extLst>
-              <a:ext uri="{FF2B5EF4-FFF2-40B4-BE49-F238E27FC236}">
-                <a16:creationId xmlns:a16="http://schemas.microsoft.com/office/drawing/2014/main" id="{D1EB2DCA-5379-40EF-B5A7-63A7B2644293}"/>
-              </a:ext>
-            </a:extLst>
-          </p:cNvPr>
+          <p:cNvPr id="4" name="Footer Placeholder 3"/>
           <p:cNvSpPr>
             <a:spLocks noGrp="1"/>
           </p:cNvSpPr>
@@ -6454,13 +7973,7 @@
       </p:sp>
       <p:sp>
         <p:nvSpPr>
-          <p:cNvPr id="5" name="Slide Number Placeholder 4">
-            <a:extLst>
-              <a:ext uri="{FF2B5EF4-FFF2-40B4-BE49-F238E27FC236}">
-                <a16:creationId xmlns:a16="http://schemas.microsoft.com/office/drawing/2014/main" id="{1BADFE8F-8C71-4023-9F8C-24E01A666C26}"/>
-              </a:ext>
-            </a:extLst>
-          </p:cNvPr>
+          <p:cNvPr id="5" name="Slide Number Placeholder 4"/>
           <p:cNvSpPr>
             <a:spLocks noGrp="1"/>
           </p:cNvSpPr>
@@ -6475,18 +7988,12 @@
           <a:p>
             <a:fld id="{48F63A3B-78C7-47BE-AE5E-E10140E04643}" type="slidenum">
               <a:rPr lang="en-US" smtClean="0"/>
-              <a:t>13</a:t>
             </a:fld>
             <a:endParaRPr lang="en-US" dirty="0"/>
           </a:p>
         </p:txBody>
       </p:sp>
     </p:spTree>
-    <p:extLst>
-      <p:ext uri="{BB962C8B-B14F-4D97-AF65-F5344CB8AC3E}">
-        <p14:creationId xmlns:p14="http://schemas.microsoft.com/office/powerpoint/2010/main" val="3490890331"/>
-      </p:ext>
-    </p:extLst>
   </p:cSld>
   <p:clrMapOvr>
     <a:masterClrMapping/>
@@ -6513,13 +8020,7 @@
       </p:grpSpPr>
       <p:sp>
         <p:nvSpPr>
-          <p:cNvPr id="2" name="Title 1">
-            <a:extLst>
-              <a:ext uri="{FF2B5EF4-FFF2-40B4-BE49-F238E27FC236}">
-                <a16:creationId xmlns:a16="http://schemas.microsoft.com/office/drawing/2014/main" id="{26F7D2EC-6267-4CA9-940D-B21F1114F8FA}"/>
-              </a:ext>
-            </a:extLst>
-          </p:cNvPr>
+          <p:cNvPr id="2" name="Title 1"/>
           <p:cNvSpPr>
             <a:spLocks noGrp="1"/>
           </p:cNvSpPr>
@@ -6529,25 +8030,35 @@
         </p:nvSpPr>
         <p:spPr/>
         <p:txBody>
-          <a:bodyPr/>
-          <a:lstStyle/>
-          <a:p>
+          <a:bodyPr>
+            <a:normAutofit/>
+          </a:bodyPr>
+          <a:lstStyle/>
+          <a:p>
+            <a:pPr algn="l">
+              <a:buClrTx/>
+              <a:buSzTx/>
+              <a:buFontTx/>
+            </a:pPr>
             <a:r>
               <a:rPr lang="en-US" dirty="0"/>
-              <a:t>Represent Work—OSTL</a:t>
-            </a:r>
-          </a:p>
-        </p:txBody>
-      </p:sp>
-      <p:sp>
-        <p:nvSpPr>
-          <p:cNvPr id="3" name="Content Placeholder 2">
-            <a:extLst>
-              <a:ext uri="{FF2B5EF4-FFF2-40B4-BE49-F238E27FC236}">
-                <a16:creationId xmlns:a16="http://schemas.microsoft.com/office/drawing/2014/main" id="{5AFCA32E-A578-4AC7-AC49-912C4BE7AF90}"/>
-              </a:ext>
-            </a:extLst>
-          </p:cNvPr>
+              <a:t>Represent Work—</a:t>
+            </a:r>
+            <a:r>
+              <a:rPr lang="en-US" altLang="zh-CN" dirty="0"/>
+              <a:t>NDOT</a:t>
+            </a:r>
+            <a:r>
+              <a:rPr lang="en-US" altLang="zh-CN" sz="2000" dirty="0"/>
+              <a:t>(Neuronal Dynamics-based Online Training)</a:t>
+            </a:r>
+            <a:endParaRPr lang="en-US" altLang="zh-CN" sz="2000" dirty="0"/>
+          </a:p>
+        </p:txBody>
+      </p:sp>
+      <p:sp>
+        <p:nvSpPr>
+          <p:cNvPr id="3" name="Content Placeholder 2"/>
           <p:cNvSpPr>
             <a:spLocks noGrp="1"/>
           </p:cNvSpPr>
@@ -6566,13 +8077,7 @@
       </p:sp>
       <p:sp>
         <p:nvSpPr>
-          <p:cNvPr id="4" name="Footer Placeholder 3">
-            <a:extLst>
-              <a:ext uri="{FF2B5EF4-FFF2-40B4-BE49-F238E27FC236}">
-                <a16:creationId xmlns:a16="http://schemas.microsoft.com/office/drawing/2014/main" id="{D1EB2DCA-5379-40EF-B5A7-63A7B2644293}"/>
-              </a:ext>
-            </a:extLst>
-          </p:cNvPr>
+          <p:cNvPr id="4" name="Footer Placeholder 3"/>
           <p:cNvSpPr>
             <a:spLocks noGrp="1"/>
           </p:cNvSpPr>
@@ -6595,13 +8100,7 @@
       </p:sp>
       <p:sp>
         <p:nvSpPr>
-          <p:cNvPr id="5" name="Slide Number Placeholder 4">
-            <a:extLst>
-              <a:ext uri="{FF2B5EF4-FFF2-40B4-BE49-F238E27FC236}">
-                <a16:creationId xmlns:a16="http://schemas.microsoft.com/office/drawing/2014/main" id="{1BADFE8F-8C71-4023-9F8C-24E01A666C26}"/>
-              </a:ext>
-            </a:extLst>
-          </p:cNvPr>
+          <p:cNvPr id="5" name="Slide Number Placeholder 4"/>
           <p:cNvSpPr>
             <a:spLocks noGrp="1"/>
           </p:cNvSpPr>
@@ -6616,18 +8115,12 @@
           <a:p>
             <a:fld id="{48F63A3B-78C7-47BE-AE5E-E10140E04643}" type="slidenum">
               <a:rPr lang="en-US" smtClean="0"/>
-              <a:t>14</a:t>
             </a:fld>
             <a:endParaRPr lang="en-US" dirty="0"/>
           </a:p>
         </p:txBody>
       </p:sp>
     </p:spTree>
-    <p:extLst>
-      <p:ext uri="{BB962C8B-B14F-4D97-AF65-F5344CB8AC3E}">
-        <p14:creationId xmlns:p14="http://schemas.microsoft.com/office/powerpoint/2010/main" val="4008255350"/>
-      </p:ext>
-    </p:extLst>
   </p:cSld>
   <p:clrMapOvr>
     <a:masterClrMapping/>
@@ -6654,13 +8147,7 @@
       </p:grpSpPr>
       <p:sp>
         <p:nvSpPr>
-          <p:cNvPr id="2" name="Title 1">
-            <a:extLst>
-              <a:ext uri="{FF2B5EF4-FFF2-40B4-BE49-F238E27FC236}">
-                <a16:creationId xmlns:a16="http://schemas.microsoft.com/office/drawing/2014/main" id="{26F7D2EC-6267-4CA9-940D-B21F1114F8FA}"/>
-              </a:ext>
-            </a:extLst>
-          </p:cNvPr>
+          <p:cNvPr id="2" name="Title 1"/>
           <p:cNvSpPr>
             <a:spLocks noGrp="1"/>
           </p:cNvSpPr>
@@ -6670,7 +8157,9 @@
         </p:nvSpPr>
         <p:spPr/>
         <p:txBody>
-          <a:bodyPr/>
+          <a:bodyPr>
+            <a:normAutofit/>
+          </a:bodyPr>
           <a:lstStyle/>
           <a:p>
             <a:r>
@@ -6679,25 +8168,26 @@
             </a:r>
             <a:r>
               <a:rPr lang="en-US"/>
-              <a:t>—Rate-</a:t>
+              <a:t>—</a:t>
             </a:r>
             <a:r>
               <a:rPr lang="en-US" altLang="zh-CN"/>
-              <a:t>based BP</a:t>
-            </a:r>
-            <a:endParaRPr lang="en-US" dirty="0"/>
-          </a:p>
-        </p:txBody>
-      </p:sp>
-      <p:sp>
-        <p:nvSpPr>
-          <p:cNvPr id="3" name="Content Placeholder 2">
-            <a:extLst>
-              <a:ext uri="{FF2B5EF4-FFF2-40B4-BE49-F238E27FC236}">
-                <a16:creationId xmlns:a16="http://schemas.microsoft.com/office/drawing/2014/main" id="{5AFCA32E-A578-4AC7-AC49-912C4BE7AF90}"/>
-              </a:ext>
-            </a:extLst>
-          </p:cNvPr>
+              <a:t>TESS:</a:t>
+            </a:r>
+            <a:br>
+              <a:rPr lang="en-US" altLang="zh-CN"/>
+            </a:br>
+            <a:r>
+              <a:rPr lang="en-US" altLang="zh-CN" sz="2000"/>
+              <a:t>Temporally and Spatially Local Learning Rule for Spiking Neural Networks</a:t>
+            </a:r>
+            <a:endParaRPr lang="en-US" altLang="zh-CN" sz="2000"/>
+          </a:p>
+        </p:txBody>
+      </p:sp>
+      <p:sp>
+        <p:nvSpPr>
+          <p:cNvPr id="3" name="Content Placeholder 2"/>
           <p:cNvSpPr>
             <a:spLocks noGrp="1"/>
           </p:cNvSpPr>
@@ -6716,13 +8206,7 @@
       </p:sp>
       <p:sp>
         <p:nvSpPr>
-          <p:cNvPr id="4" name="Footer Placeholder 3">
-            <a:extLst>
-              <a:ext uri="{FF2B5EF4-FFF2-40B4-BE49-F238E27FC236}">
-                <a16:creationId xmlns:a16="http://schemas.microsoft.com/office/drawing/2014/main" id="{D1EB2DCA-5379-40EF-B5A7-63A7B2644293}"/>
-              </a:ext>
-            </a:extLst>
-          </p:cNvPr>
+          <p:cNvPr id="4" name="Footer Placeholder 3"/>
           <p:cNvSpPr>
             <a:spLocks noGrp="1"/>
           </p:cNvSpPr>
@@ -6745,13 +8229,7 @@
       </p:sp>
       <p:sp>
         <p:nvSpPr>
-          <p:cNvPr id="5" name="Slide Number Placeholder 4">
-            <a:extLst>
-              <a:ext uri="{FF2B5EF4-FFF2-40B4-BE49-F238E27FC236}">
-                <a16:creationId xmlns:a16="http://schemas.microsoft.com/office/drawing/2014/main" id="{1BADFE8F-8C71-4023-9F8C-24E01A666C26}"/>
-              </a:ext>
-            </a:extLst>
-          </p:cNvPr>
+          <p:cNvPr id="5" name="Slide Number Placeholder 4"/>
           <p:cNvSpPr>
             <a:spLocks noGrp="1"/>
           </p:cNvSpPr>
@@ -6766,18 +8244,12 @@
           <a:p>
             <a:fld id="{48F63A3B-78C7-47BE-AE5E-E10140E04643}" type="slidenum">
               <a:rPr lang="en-US" smtClean="0"/>
-              <a:t>15</a:t>
             </a:fld>
             <a:endParaRPr lang="en-US" dirty="0"/>
           </a:p>
         </p:txBody>
       </p:sp>
     </p:spTree>
-    <p:extLst>
-      <p:ext uri="{BB962C8B-B14F-4D97-AF65-F5344CB8AC3E}">
-        <p14:creationId xmlns:p14="http://schemas.microsoft.com/office/powerpoint/2010/main" val="1871769152"/>
-      </p:ext>
-    </p:extLst>
   </p:cSld>
   <p:clrMapOvr>
     <a:masterClrMapping/>
@@ -6804,13 +8276,7 @@
       </p:grpSpPr>
       <p:sp>
         <p:nvSpPr>
-          <p:cNvPr id="2" name="Title 1">
-            <a:extLst>
-              <a:ext uri="{FF2B5EF4-FFF2-40B4-BE49-F238E27FC236}">
-                <a16:creationId xmlns:a16="http://schemas.microsoft.com/office/drawing/2014/main" id="{BD2B8909-350D-423A-B442-9117DF0317BF}"/>
-              </a:ext>
-            </a:extLst>
-          </p:cNvPr>
+          <p:cNvPr id="2" name="Title 1"/>
           <p:cNvSpPr>
             <a:spLocks noGrp="1"/>
           </p:cNvSpPr>
@@ -6820,22 +8286,37 @@
         </p:nvSpPr>
         <p:spPr/>
         <p:txBody>
-          <a:bodyPr/>
-          <a:lstStyle/>
-          <a:p>
-            <a:endParaRPr lang="en-US"/>
-          </a:p>
-        </p:txBody>
-      </p:sp>
-      <p:sp>
-        <p:nvSpPr>
-          <p:cNvPr id="3" name="Content Placeholder 2">
-            <a:extLst>
-              <a:ext uri="{FF2B5EF4-FFF2-40B4-BE49-F238E27FC236}">
-                <a16:creationId xmlns:a16="http://schemas.microsoft.com/office/drawing/2014/main" id="{606241C2-93B7-4FF1-B23F-F97BAFF100E7}"/>
-              </a:ext>
-            </a:extLst>
-          </p:cNvPr>
+          <a:bodyPr>
+            <a:normAutofit/>
+          </a:bodyPr>
+          <a:lstStyle/>
+          <a:p>
+            <a:r>
+              <a:rPr lang="en-US" dirty="0"/>
+              <a:t>Represent Work</a:t>
+            </a:r>
+            <a:r>
+              <a:rPr lang="en-US"/>
+              <a:t>—</a:t>
+            </a:r>
+            <a:r>
+              <a:rPr lang="en-US" altLang="zh-CN"/>
+              <a:t>S-TLLR: </a:t>
+            </a:r>
+            <a:br>
+              <a:rPr lang="en-US" altLang="zh-CN"/>
+            </a:br>
+            <a:r>
+              <a:rPr lang="en-US" altLang="zh-CN" sz="2000"/>
+              <a:t>STDP-inspired Temporal Local Learning Rule for Spiking Neural Networks</a:t>
+            </a:r>
+            <a:endParaRPr lang="en-US" altLang="zh-CN" sz="2000"/>
+          </a:p>
+        </p:txBody>
+      </p:sp>
+      <p:sp>
+        <p:nvSpPr>
+          <p:cNvPr id="3" name="Content Placeholder 2"/>
           <p:cNvSpPr>
             <a:spLocks noGrp="1"/>
           </p:cNvSpPr>
@@ -6848,19 +8329,13 @@
           <a:bodyPr/>
           <a:lstStyle/>
           <a:p>
-            <a:endParaRPr lang="en-US"/>
-          </a:p>
-        </p:txBody>
-      </p:sp>
-      <p:sp>
-        <p:nvSpPr>
-          <p:cNvPr id="4" name="Footer Placeholder 3">
-            <a:extLst>
-              <a:ext uri="{FF2B5EF4-FFF2-40B4-BE49-F238E27FC236}">
-                <a16:creationId xmlns:a16="http://schemas.microsoft.com/office/drawing/2014/main" id="{740F9905-314D-4E83-82E7-5BDD10A78B69}"/>
-              </a:ext>
-            </a:extLst>
-          </p:cNvPr>
+            <a:endParaRPr lang="en-US" dirty="0"/>
+          </a:p>
+        </p:txBody>
+      </p:sp>
+      <p:sp>
+        <p:nvSpPr>
+          <p:cNvPr id="4" name="Footer Placeholder 3"/>
           <p:cNvSpPr>
             <a:spLocks noGrp="1"/>
           </p:cNvSpPr>
@@ -6883,13 +8358,7 @@
       </p:sp>
       <p:sp>
         <p:nvSpPr>
-          <p:cNvPr id="5" name="Slide Number Placeholder 4">
-            <a:extLst>
-              <a:ext uri="{FF2B5EF4-FFF2-40B4-BE49-F238E27FC236}">
-                <a16:creationId xmlns:a16="http://schemas.microsoft.com/office/drawing/2014/main" id="{ADEDF18E-1A73-4D89-86F0-81AF6C229F0B}"/>
-              </a:ext>
-            </a:extLst>
-          </p:cNvPr>
+          <p:cNvPr id="5" name="Slide Number Placeholder 4"/>
           <p:cNvSpPr>
             <a:spLocks noGrp="1"/>
           </p:cNvSpPr>
@@ -6904,18 +8373,12 @@
           <a:p>
             <a:fld id="{48F63A3B-78C7-47BE-AE5E-E10140E04643}" type="slidenum">
               <a:rPr lang="en-US" smtClean="0"/>
-              <a:t>16</a:t>
             </a:fld>
             <a:endParaRPr lang="en-US" dirty="0"/>
           </a:p>
         </p:txBody>
       </p:sp>
     </p:spTree>
-    <p:extLst>
-      <p:ext uri="{BB962C8B-B14F-4D97-AF65-F5344CB8AC3E}">
-        <p14:creationId xmlns:p14="http://schemas.microsoft.com/office/powerpoint/2010/main" val="2643839248"/>
-      </p:ext>
-    </p:extLst>
   </p:cSld>
   <p:clrMapOvr>
     <a:masterClrMapping/>
@@ -6955,10 +8418,7 @@
           <a:bodyPr/>
           <a:lstStyle/>
           <a:p>
-            <a:r>
-              <a:rPr dirty="0"/>
-              <a:t>Discussion Questions</a:t>
-            </a:r>
+            <a:endParaRPr lang="en-US"/>
           </a:p>
         </p:txBody>
       </p:sp>
@@ -6977,19 +8437,13 @@
           <a:bodyPr/>
           <a:lstStyle/>
           <a:p>
-            <a:endParaRPr dirty="0"/>
-          </a:p>
-        </p:txBody>
-      </p:sp>
-      <p:sp>
-        <p:nvSpPr>
-          <p:cNvPr id="4" name="Footer Placeholder 3">
-            <a:extLst>
-              <a:ext uri="{FF2B5EF4-FFF2-40B4-BE49-F238E27FC236}">
-                <a16:creationId xmlns:a16="http://schemas.microsoft.com/office/drawing/2014/main" id="{DBD6CC58-7877-45F7-8571-56EF641369A8}"/>
-              </a:ext>
-            </a:extLst>
-          </p:cNvPr>
+            <a:endParaRPr lang="en-US"/>
+          </a:p>
+        </p:txBody>
+      </p:sp>
+      <p:sp>
+        <p:nvSpPr>
+          <p:cNvPr id="4" name="Footer Placeholder 3"/>
           <p:cNvSpPr>
             <a:spLocks noGrp="1"/>
           </p:cNvSpPr>
@@ -7012,13 +8466,7 @@
       </p:sp>
       <p:sp>
         <p:nvSpPr>
-          <p:cNvPr id="5" name="Slide Number Placeholder 4">
-            <a:extLst>
-              <a:ext uri="{FF2B5EF4-FFF2-40B4-BE49-F238E27FC236}">
-                <a16:creationId xmlns:a16="http://schemas.microsoft.com/office/drawing/2014/main" id="{83B8582B-FBF5-46DC-BF57-C2B27195E3C7}"/>
-              </a:ext>
-            </a:extLst>
-          </p:cNvPr>
+          <p:cNvPr id="5" name="Slide Number Placeholder 4"/>
           <p:cNvSpPr>
             <a:spLocks noGrp="1"/>
           </p:cNvSpPr>
@@ -7033,7 +8481,6 @@
           <a:p>
             <a:fld id="{48F63A3B-78C7-47BE-AE5E-E10140E04643}" type="slidenum">
               <a:rPr lang="en-US" smtClean="0"/>
-              <a:t>17</a:t>
             </a:fld>
             <a:endParaRPr lang="en-US" dirty="0"/>
           </a:p>
@@ -7080,8 +8527,10 @@
           <a:lstStyle/>
           <a:p>
             <a:r>
-              <a:t>Key Takeaways</a:t>
-            </a:r>
+              <a:rPr dirty="0"/>
+              <a:t>Discussion Questions</a:t>
+            </a:r>
+            <a:endParaRPr dirty="0"/>
           </a:p>
         </p:txBody>
       </p:sp>
@@ -7106,13 +8555,7 @@
       </p:sp>
       <p:sp>
         <p:nvSpPr>
-          <p:cNvPr id="4" name="Footer Placeholder 3">
-            <a:extLst>
-              <a:ext uri="{FF2B5EF4-FFF2-40B4-BE49-F238E27FC236}">
-                <a16:creationId xmlns:a16="http://schemas.microsoft.com/office/drawing/2014/main" id="{2DD91391-25E6-4ADC-B3B9-416E502EDFD3}"/>
-              </a:ext>
-            </a:extLst>
-          </p:cNvPr>
+          <p:cNvPr id="4" name="Footer Placeholder 3"/>
           <p:cNvSpPr>
             <a:spLocks noGrp="1"/>
           </p:cNvSpPr>
@@ -7135,13 +8578,7 @@
       </p:sp>
       <p:sp>
         <p:nvSpPr>
-          <p:cNvPr id="5" name="Slide Number Placeholder 4">
-            <a:extLst>
-              <a:ext uri="{FF2B5EF4-FFF2-40B4-BE49-F238E27FC236}">
-                <a16:creationId xmlns:a16="http://schemas.microsoft.com/office/drawing/2014/main" id="{57D7EA95-1511-497E-A8C7-8481AEFE8160}"/>
-              </a:ext>
-            </a:extLst>
-          </p:cNvPr>
+          <p:cNvPr id="5" name="Slide Number Placeholder 4"/>
           <p:cNvSpPr>
             <a:spLocks noGrp="1"/>
           </p:cNvSpPr>
@@ -7156,7 +8593,116 @@
           <a:p>
             <a:fld id="{48F63A3B-78C7-47BE-AE5E-E10140E04643}" type="slidenum">
               <a:rPr lang="en-US" smtClean="0"/>
-              <a:t>18</a:t>
+            </a:fld>
+            <a:endParaRPr lang="en-US" dirty="0"/>
+          </a:p>
+        </p:txBody>
+      </p:sp>
+    </p:spTree>
+  </p:cSld>
+  <p:clrMapOvr>
+    <a:masterClrMapping/>
+  </p:clrMapOvr>
+</p:sld>
+</file>
+
+<file path=ppt/slides/slide19.xml><?xml version="1.0" encoding="utf-8"?>
+<p:sld xmlns:a="http://schemas.openxmlformats.org/drawingml/2006/main" xmlns:r="http://schemas.openxmlformats.org/officeDocument/2006/relationships" xmlns:p="http://schemas.openxmlformats.org/presentationml/2006/main">
+  <p:cSld>
+    <p:spTree>
+      <p:nvGrpSpPr>
+        <p:cNvPr id="1" name=""/>
+        <p:cNvGrpSpPr/>
+        <p:nvPr/>
+      </p:nvGrpSpPr>
+      <p:grpSpPr>
+        <a:xfrm>
+          <a:off x="0" y="0"/>
+          <a:ext cx="0" cy="0"/>
+          <a:chOff x="0" y="0"/>
+          <a:chExt cx="0" cy="0"/>
+        </a:xfrm>
+      </p:grpSpPr>
+      <p:sp>
+        <p:nvSpPr>
+          <p:cNvPr id="2" name="Title 1"/>
+          <p:cNvSpPr>
+            <a:spLocks noGrp="1"/>
+          </p:cNvSpPr>
+          <p:nvPr>
+            <p:ph type="title"/>
+          </p:nvPr>
+        </p:nvSpPr>
+        <p:spPr/>
+        <p:txBody>
+          <a:bodyPr/>
+          <a:lstStyle/>
+          <a:p>
+            <a:r>
+              <a:t>Key Takeaways</a:t>
+            </a:r>
+          </a:p>
+        </p:txBody>
+      </p:sp>
+      <p:sp>
+        <p:nvSpPr>
+          <p:cNvPr id="3" name="Content Placeholder 2"/>
+          <p:cNvSpPr>
+            <a:spLocks noGrp="1"/>
+          </p:cNvSpPr>
+          <p:nvPr>
+            <p:ph idx="1"/>
+          </p:nvPr>
+        </p:nvSpPr>
+        <p:spPr/>
+        <p:txBody>
+          <a:bodyPr/>
+          <a:lstStyle/>
+          <a:p>
+            <a:endParaRPr dirty="0"/>
+          </a:p>
+        </p:txBody>
+      </p:sp>
+      <p:sp>
+        <p:nvSpPr>
+          <p:cNvPr id="4" name="Footer Placeholder 3"/>
+          <p:cNvSpPr>
+            <a:spLocks noGrp="1"/>
+          </p:cNvSpPr>
+          <p:nvPr>
+            <p:ph type="ftr" sz="quarter" idx="11"/>
+          </p:nvPr>
+        </p:nvSpPr>
+        <p:spPr/>
+        <p:txBody>
+          <a:bodyPr/>
+          <a:lstStyle/>
+          <a:p>
+            <a:r>
+              <a:rPr lang="en-US"/>
+              <a:t>SNN Training</a:t>
+            </a:r>
+            <a:endParaRPr lang="en-US" dirty="0"/>
+          </a:p>
+        </p:txBody>
+      </p:sp>
+      <p:sp>
+        <p:nvSpPr>
+          <p:cNvPr id="5" name="Slide Number Placeholder 4"/>
+          <p:cNvSpPr>
+            <a:spLocks noGrp="1"/>
+          </p:cNvSpPr>
+          <p:nvPr>
+            <p:ph type="sldNum" sz="quarter" idx="12"/>
+          </p:nvPr>
+        </p:nvSpPr>
+        <p:spPr/>
+        <p:txBody>
+          <a:bodyPr/>
+          <a:lstStyle/>
+          <a:p>
+            <a:fld id="{48F63A3B-78C7-47BE-AE5E-E10140E04643}" type="slidenum">
+              <a:rPr lang="en-US" smtClean="0"/>
             </a:fld>
             <a:endParaRPr lang="en-US" dirty="0"/>
           </a:p>
@@ -7189,13 +8735,7 @@
       </p:grpSpPr>
       <p:sp>
         <p:nvSpPr>
-          <p:cNvPr id="2" name="Title 1">
-            <a:extLst>
-              <a:ext uri="{FF2B5EF4-FFF2-40B4-BE49-F238E27FC236}">
-                <a16:creationId xmlns:a16="http://schemas.microsoft.com/office/drawing/2014/main" id="{7F37CCA3-4D1A-3CE4-E19D-121849462F42}"/>
-              </a:ext>
-            </a:extLst>
-          </p:cNvPr>
+          <p:cNvPr id="2" name="Title 1"/>
           <p:cNvSpPr>
             <a:spLocks noGrp="1"/>
           </p:cNvSpPr>
@@ -7218,13 +8758,7 @@
       </p:sp>
       <p:sp>
         <p:nvSpPr>
-          <p:cNvPr id="3" name="Content Placeholder 2">
-            <a:extLst>
-              <a:ext uri="{FF2B5EF4-FFF2-40B4-BE49-F238E27FC236}">
-                <a16:creationId xmlns:a16="http://schemas.microsoft.com/office/drawing/2014/main" id="{A576A446-BA2B-E074-AD16-8BB05A9535FE}"/>
-              </a:ext>
-            </a:extLst>
-          </p:cNvPr>
+          <p:cNvPr id="3" name="Content Placeholder 2"/>
           <p:cNvSpPr>
             <a:spLocks noGrp="1"/>
           </p:cNvSpPr>
@@ -7248,6 +8782,11 @@
               </a:rPr>
               <a:t>After this lecture, students should be able to:</a:t>
             </a:r>
+            <a:endParaRPr lang="en-US" altLang="zh-CN" dirty="0">
+              <a:effectLst/>
+              <a:ea typeface="Calibri" panose="020F0502020204030204" pitchFamily="34" charset="0"/>
+              <a:cs typeface="Arial" panose="020B0604020202020204" pitchFamily="34" charset="0"/>
+            </a:endParaRPr>
           </a:p>
           <a:p>
             <a:pPr marL="0" indent="0" rtl="0" fontAlgn="ctr">
@@ -7261,6 +8800,11 @@
               </a:rPr>
               <a:t>✓ Understand surrogate-gradient training</a:t>
             </a:r>
+            <a:endParaRPr lang="en-US" altLang="zh-CN" dirty="0">
+              <a:effectLst/>
+              <a:ea typeface="Calibri" panose="020F0502020204030204" pitchFamily="34" charset="0"/>
+              <a:cs typeface="Arial" panose="020B0604020202020204" pitchFamily="34" charset="0"/>
+            </a:endParaRPr>
           </a:p>
           <a:p>
             <a:pPr marL="0" indent="0" rtl="0" fontAlgn="ctr">
@@ -7274,6 +8818,11 @@
               </a:rPr>
               <a:t>✓ Recognize tradeoffs between accuracy, latency and hardware efficiency</a:t>
             </a:r>
+            <a:endParaRPr lang="en-US" altLang="zh-CN" dirty="0">
+              <a:effectLst/>
+              <a:ea typeface="Calibri" panose="020F0502020204030204" pitchFamily="34" charset="0"/>
+              <a:cs typeface="Arial" panose="020B0604020202020204" pitchFamily="34" charset="0"/>
+            </a:endParaRPr>
           </a:p>
           <a:p>
             <a:pPr rtl="0" fontAlgn="ctr">
@@ -7292,13 +8841,7 @@
       </p:sp>
       <p:sp>
         <p:nvSpPr>
-          <p:cNvPr id="7" name="Slide Number Placeholder 6">
-            <a:extLst>
-              <a:ext uri="{FF2B5EF4-FFF2-40B4-BE49-F238E27FC236}">
-                <a16:creationId xmlns:a16="http://schemas.microsoft.com/office/drawing/2014/main" id="{07A50B2D-26E8-452F-83AD-A7B5F78AC404}"/>
-              </a:ext>
-            </a:extLst>
-          </p:cNvPr>
+          <p:cNvPr id="7" name="Slide Number Placeholder 6"/>
           <p:cNvSpPr>
             <a:spLocks noGrp="1"/>
           </p:cNvSpPr>
@@ -7325,7 +8868,6 @@
               <a:buSzTx/>
               <a:buFontTx/>
               <a:buNone/>
-              <a:tabLst/>
               <a:defRPr/>
             </a:pPr>
             <a:fld id="{48F63A3B-78C7-47BE-AE5E-E10140E04643}" type="slidenum">
@@ -7341,28 +8883,10 @@
                 <a:effectLst/>
                 <a:uLnTx/>
                 <a:uFillTx/>
-                <a:latin typeface="等线" panose="02110004020202020204"/>
+                <a:latin typeface="等线" panose="02010600030101010101" charset="-122"/>
                 <a:ea typeface="+mn-ea"/>
                 <a:cs typeface="+mn-cs"/>
               </a:rPr>
-              <a:pPr marL="0" marR="0" lvl="0" indent="0" algn="r" defTabSz="914400" rtl="0" eaLnBrk="1" fontAlgn="auto" latinLnBrk="0" hangingPunct="1">
-                <a:lnSpc>
-                  <a:spcPct val="100000"/>
-                </a:lnSpc>
-                <a:spcBef>
-                  <a:spcPts val="0"/>
-                </a:spcBef>
-                <a:spcAft>
-                  <a:spcPts val="0"/>
-                </a:spcAft>
-                <a:buClrTx/>
-                <a:buSzTx/>
-                <a:buFontTx/>
-                <a:buNone/>
-                <a:tabLst/>
-                <a:defRPr/>
-              </a:pPr>
-              <a:t>2</a:t>
             </a:fld>
             <a:endParaRPr kumimoji="0" lang="en-US" sz="1200" b="0" i="0" u="none" strike="noStrike" kern="1200" cap="none" spc="0" normalizeH="0" baseline="0" noProof="0" dirty="0">
               <a:ln>
@@ -7376,7 +8900,7 @@
               <a:effectLst/>
               <a:uLnTx/>
               <a:uFillTx/>
-              <a:latin typeface="等线" panose="02110004020202020204"/>
+              <a:latin typeface="等线" panose="02010600030101010101" charset="-122"/>
               <a:ea typeface="+mn-ea"/>
               <a:cs typeface="+mn-cs"/>
             </a:endParaRPr>
@@ -7385,13 +8909,7 @@
       </p:sp>
       <p:sp>
         <p:nvSpPr>
-          <p:cNvPr id="8" name="Footer Placeholder 7">
-            <a:extLst>
-              <a:ext uri="{FF2B5EF4-FFF2-40B4-BE49-F238E27FC236}">
-                <a16:creationId xmlns:a16="http://schemas.microsoft.com/office/drawing/2014/main" id="{4667F521-B798-4D56-8492-9C235B919616}"/>
-              </a:ext>
-            </a:extLst>
-          </p:cNvPr>
+          <p:cNvPr id="8" name="Footer Placeholder 7"/>
           <p:cNvSpPr>
             <a:spLocks noGrp="1"/>
           </p:cNvSpPr>
@@ -7421,7 +8939,7 @@
               <a:effectLst/>
               <a:uLnTx/>
               <a:uFillTx/>
-              <a:latin typeface="等线" panose="02110004020202020204"/>
+              <a:latin typeface="等线" panose="02010600030101010101" charset="-122"/>
               <a:ea typeface="+mn-ea"/>
               <a:cs typeface="+mn-cs"/>
             </a:endParaRPr>
@@ -7429,11 +8947,6 @@
         </p:txBody>
       </p:sp>
     </p:spTree>
-    <p:extLst>
-      <p:ext uri="{BB962C8B-B14F-4D97-AF65-F5344CB8AC3E}">
-        <p14:creationId xmlns:p14="http://schemas.microsoft.com/office/powerpoint/2010/main" val="249957202"/>
-      </p:ext>
-    </p:extLst>
   </p:cSld>
   <p:clrMapOvr>
     <a:masterClrMapping/>
@@ -7481,11 +8994,12 @@
               <a:rPr dirty="0"/>
               <a:t>Training Challenge</a:t>
             </a:r>
-          </a:p>
-        </p:txBody>
-      </p:sp>
-      <mc:AlternateContent xmlns:mc="http://schemas.openxmlformats.org/markup-compatibility/2006" xmlns:a14="http://schemas.microsoft.com/office/drawing/2010/main">
-        <mc:Choice Requires="a14">
+            <a:endParaRPr dirty="0"/>
+          </a:p>
+        </p:txBody>
+      </p:sp>
+      <mc:AlternateContent xmlns:mc="http://schemas.openxmlformats.org/markup-compatibility/2006">
+        <mc:Choice xmlns:a14="http://schemas.microsoft.com/office/drawing/2010/main" Requires="a14">
           <p:sp>
             <p:nvSpPr>
               <p:cNvPr id="3" name="Content Placeholder 2"/>
@@ -7507,30 +9021,35 @@
                   <a:rPr lang="en-US" dirty="0"/>
                   <a:t>Deep learning relies on gradient descent.</a:t>
                 </a:r>
+                <a:endParaRPr lang="en-US" dirty="0"/>
               </a:p>
               <a:p>
                 <a:r>
                   <a:rPr lang="en-US" dirty="0"/>
                   <a:t>SNN neurons generate binary spikes through a threshold function.</a:t>
                 </a:r>
+                <a:endParaRPr lang="en-US" dirty="0"/>
               </a:p>
               <a:p>
                 <a:r>
                   <a:rPr lang="en-US" dirty="0"/>
                   <a:t>Spike function is non-differentiable.</a:t>
                 </a:r>
+                <a:endParaRPr lang="en-US" dirty="0"/>
               </a:p>
               <a:p>
                 <a:r>
                   <a:rPr lang="en-US" dirty="0"/>
                   <a:t>Standard backpropagation cannot directly compute gradients.</a:t>
                 </a:r>
+                <a:endParaRPr lang="en-US" dirty="0"/>
               </a:p>
               <a:p>
                 <a:r>
                   <a:rPr lang="en-US" dirty="0"/>
                   <a:t>Membrane potential:</a:t>
                 </a:r>
+                <a:endParaRPr lang="en-US" dirty="0"/>
               </a:p>
               <a:p>
                 <a:pPr marL="0" indent="0">
@@ -7594,7 +9113,19 @@
                         <a:rPr lang="en-US" i="1" dirty="0" smtClean="0">
                           <a:latin typeface="Cambria Math" panose="02040503050406030204" pitchFamily="18" charset="0"/>
                         </a:rPr>
-                        <m:t>−1]+</m:t>
+                        <m:t>−</m:t>
+                      </m:r>
+                      <m:r>
+                        <a:rPr lang="en-US" i="1" dirty="0" smtClean="0">
+                          <a:latin typeface="Cambria Math" panose="02040503050406030204" pitchFamily="18" charset="0"/>
+                        </a:rPr>
+                        <m:t>1</m:t>
+                      </m:r>
+                      <m:r>
+                        <a:rPr lang="en-US" i="1" dirty="0" smtClean="0">
+                          <a:latin typeface="Cambria Math" panose="02040503050406030204" pitchFamily="18" charset="0"/>
+                        </a:rPr>
+                        <m:t>]+</m:t>
                       </m:r>
                       <m:r>
                         <a:rPr lang="en-US" i="1" dirty="0" smtClean="0">
@@ -7630,6 +9161,7 @@
                   <a:rPr lang="en-US" dirty="0"/>
                   <a:t> Spike generation:</a:t>
                 </a:r>
+                <a:endParaRPr lang="en-US" dirty="0"/>
               </a:p>
               <a:p>
                 <a:pPr marL="0" indent="0">
@@ -7708,7 +9240,7 @@
                         <a:rPr lang="el-GR" i="1" dirty="0" smtClean="0">
                           <a:latin typeface="Cambria Math" panose="02040503050406030204" pitchFamily="18" charset="0"/>
                         </a:rPr>
-                        <m:t>𝑉𝑡h</m:t>
+                        <m:t>𝑉𝑡ℎ</m:t>
                       </m:r>
                       <m:r>
                         <a:rPr lang="el-GR" i="1" dirty="0" smtClean="0">
@@ -7730,6 +9262,11 @@
                   </a:rPr>
                   <a:t>Key Problem</a:t>
                 </a:r>
+                <a:endParaRPr lang="en-US" b="1" dirty="0">
+                  <a:solidFill>
+                    <a:srgbClr val="FF0000"/>
+                  </a:solidFill>
+                </a:endParaRPr>
               </a:p>
               <a:p>
                 <a:pPr marL="0" indent="0">
@@ -7814,7 +9351,16 @@
                           </a:solidFill>
                           <a:latin typeface="Cambria Math" panose="02040503050406030204" pitchFamily="18" charset="0"/>
                         </a:rPr>
-                        <m:t>=0</m:t>
+                        <m:t>=</m:t>
+                      </m:r>
+                      <m:r>
+                        <a:rPr lang="el-GR" i="1" dirty="0" smtClean="0">
+                          <a:solidFill>
+                            <a:srgbClr val="FF0000"/>
+                          </a:solidFill>
+                          <a:latin typeface="Cambria Math" panose="02040503050406030204" pitchFamily="18" charset="0"/>
+                        </a:rPr>
+                        <m:t>0</m:t>
                       </m:r>
                     </m:oMath>
                   </m:oMathPara>
@@ -7824,22 +9370,22 @@
             </p:txBody>
           </p:sp>
         </mc:Choice>
-        <mc:Fallback xmlns="">
+        <mc:Fallback>
           <p:sp>
             <p:nvSpPr>
               <p:cNvPr id="3" name="Content Placeholder 2"/>
               <p:cNvSpPr>
-                <a:spLocks noGrp="1" noRot="1" noChangeAspect="1" noMove="1" noResize="1" noEditPoints="1" noAdjustHandles="1" noChangeArrowheads="1" noChangeShapeType="1" noTextEdit="1"/>
+                <a:spLocks noRot="1" noChangeAspect="1" noMove="1" noResize="1" noEditPoints="1" noAdjustHandles="1" noChangeArrowheads="1" noChangeShapeType="1" noTextEdit="1"/>
               </p:cNvSpPr>
               <p:nvPr>
                 <p:ph idx="1"/>
               </p:nvPr>
             </p:nvSpPr>
             <p:spPr>
-              <a:blipFill>
-                <a:blip r:embed="rId2"/>
+              <a:blipFill rotWithShape="1">
+                <a:blip r:embed="rId1"/>
                 <a:stretch>
-                  <a:fillRect l="-930" t="-2202"/>
+                  <a:fillRect l="-4" t="-3" r="2" b="3"/>
                 </a:stretch>
               </a:blipFill>
             </p:spPr>
@@ -7848,7 +9394,7 @@
               <a:lstStyle/>
               <a:p>
                 <a:r>
-                  <a:rPr lang="en-US">
+                  <a:rPr lang="zh-CN" altLang="en-US">
                     <a:noFill/>
                   </a:rPr>
                   <a:t> </a:t>
@@ -7860,13 +9406,7 @@
       </mc:AlternateContent>
       <p:sp>
         <p:nvSpPr>
-          <p:cNvPr id="4" name="Footer Placeholder 3">
-            <a:extLst>
-              <a:ext uri="{FF2B5EF4-FFF2-40B4-BE49-F238E27FC236}">
-                <a16:creationId xmlns:a16="http://schemas.microsoft.com/office/drawing/2014/main" id="{FE2E2559-1113-4FC9-AB68-BE694811C619}"/>
-              </a:ext>
-            </a:extLst>
-          </p:cNvPr>
+          <p:cNvPr id="4" name="Footer Placeholder 3"/>
           <p:cNvSpPr>
             <a:spLocks noGrp="1"/>
           </p:cNvSpPr>
@@ -7883,18 +9423,13 @@
               <a:rPr lang="en-US" dirty="0"/>
               <a:t>SNN Training</a:t>
             </a:r>
-          </a:p>
-        </p:txBody>
-      </p:sp>
-      <p:sp>
-        <p:nvSpPr>
-          <p:cNvPr id="5" name="Slide Number Placeholder 4">
-            <a:extLst>
-              <a:ext uri="{FF2B5EF4-FFF2-40B4-BE49-F238E27FC236}">
-                <a16:creationId xmlns:a16="http://schemas.microsoft.com/office/drawing/2014/main" id="{21126F64-12C3-4710-BEE4-838F82CBEFEC}"/>
-              </a:ext>
-            </a:extLst>
-          </p:cNvPr>
+            <a:endParaRPr lang="en-US" dirty="0"/>
+          </a:p>
+        </p:txBody>
+      </p:sp>
+      <p:sp>
+        <p:nvSpPr>
+          <p:cNvPr id="5" name="Slide Number Placeholder 4"/>
           <p:cNvSpPr>
             <a:spLocks noGrp="1"/>
           </p:cNvSpPr>
@@ -7909,7 +9444,6 @@
           <a:p>
             <a:fld id="{48F63A3B-78C7-47BE-AE5E-E10140E04643}" type="slidenum">
               <a:rPr lang="en-US" smtClean="0"/>
-              <a:t>3</a:t>
             </a:fld>
             <a:endParaRPr lang="en-US" dirty="0"/>
           </a:p>
@@ -7942,13 +9476,7 @@
       </p:grpSpPr>
       <p:sp>
         <p:nvSpPr>
-          <p:cNvPr id="2" name="Title 1">
-            <a:extLst>
-              <a:ext uri="{FF2B5EF4-FFF2-40B4-BE49-F238E27FC236}">
-                <a16:creationId xmlns:a16="http://schemas.microsoft.com/office/drawing/2014/main" id="{8609959E-965E-4DE9-A43B-97E57383C01C}"/>
-              </a:ext>
-            </a:extLst>
-          </p:cNvPr>
+          <p:cNvPr id="2" name="Title 1"/>
           <p:cNvSpPr>
             <a:spLocks noGrp="1"/>
           </p:cNvSpPr>
@@ -7965,20 +9493,15 @@
               <a:rPr lang="en-US" dirty="0"/>
               <a:t>Surrogate Gradient Learning</a:t>
             </a:r>
-          </a:p>
-        </p:txBody>
-      </p:sp>
-      <mc:AlternateContent xmlns:mc="http://schemas.openxmlformats.org/markup-compatibility/2006" xmlns:a14="http://schemas.microsoft.com/office/drawing/2010/main">
-        <mc:Choice Requires="a14">
+            <a:endParaRPr lang="en-US" dirty="0"/>
+          </a:p>
+        </p:txBody>
+      </p:sp>
+      <mc:AlternateContent xmlns:mc="http://schemas.openxmlformats.org/markup-compatibility/2006">
+        <mc:Choice xmlns:a14="http://schemas.microsoft.com/office/drawing/2010/main" Requires="a14">
           <p:sp>
             <p:nvSpPr>
-              <p:cNvPr id="3" name="Content Placeholder 2">
-                <a:extLst>
-                  <a:ext uri="{FF2B5EF4-FFF2-40B4-BE49-F238E27FC236}">
-                    <a16:creationId xmlns:a16="http://schemas.microsoft.com/office/drawing/2014/main" id="{8B3EA2FF-CECE-443E-B80A-017F29F760E5}"/>
-                  </a:ext>
-                </a:extLst>
-              </p:cNvPr>
+              <p:cNvPr id="3" name="Content Placeholder 2"/>
               <p:cNvSpPr>
                 <a:spLocks noGrp="1"/>
               </p:cNvSpPr>
@@ -7997,6 +9520,7 @@
                   <a:rPr lang="en-US" b="1" dirty="0"/>
                   <a:t>Core Idea</a:t>
                 </a:r>
+                <a:endParaRPr lang="en-US" b="1" dirty="0"/>
               </a:p>
               <a:p>
                 <a:r>
@@ -8072,7 +9596,7 @@
                       <a:rPr lang="el-GR" i="1" dirty="0" smtClean="0">
                         <a:latin typeface="Cambria Math" panose="02040503050406030204" pitchFamily="18" charset="0"/>
                       </a:rPr>
-                      <m:t>𝑉𝑡h</m:t>
+                      <m:t>𝑉𝑡ℎ</m:t>
                     </m:r>
                     <m:r>
                       <a:rPr lang="el-GR" i="1" dirty="0" smtClean="0">
@@ -8089,6 +9613,7 @@
                   <a:rPr lang="en-US" dirty="0"/>
                   <a:t>Backward pass:</a:t>
                 </a:r>
+                <a:endParaRPr lang="en-US" dirty="0"/>
               </a:p>
               <a:p>
                 <a:pPr marL="0" indent="0">
@@ -8164,7 +9689,7 @@
                         <a:rPr lang="en-US" i="1" dirty="0" smtClean="0">
                           <a:latin typeface="Cambria Math" panose="02040503050406030204" pitchFamily="18" charset="0"/>
                         </a:rPr>
-                        <m:t>𝑉𝑡h</m:t>
+                        <m:t>𝑉𝑡ℎ</m:t>
                       </m:r>
                       <m:r>
                         <a:rPr lang="en-US" i="1" dirty="0" smtClean="0">
@@ -8182,6 +9707,7 @@
                   <a:rPr lang="en-US" dirty="0"/>
                   <a:t>Common Surrogate Functions</a:t>
                 </a:r>
+                <a:endParaRPr lang="en-US" dirty="0"/>
               </a:p>
               <a:p>
                 <a:pPr lvl="1"/>
@@ -8237,7 +9763,19 @@
                       <a:rPr lang="en-US" b="0" i="1" dirty="0" smtClean="0">
                         <a:latin typeface="Cambria Math" panose="02040503050406030204" pitchFamily="18" charset="0"/>
                       </a:rPr>
-                      <m:t>)(1−</m:t>
+                      <m:t>)(</m:t>
+                    </m:r>
+                    <m:r>
+                      <a:rPr lang="en-US" b="0" i="1" dirty="0" smtClean="0">
+                        <a:latin typeface="Cambria Math" panose="02040503050406030204" pitchFamily="18" charset="0"/>
+                      </a:rPr>
+                      <m:t>1</m:t>
+                    </m:r>
+                    <m:r>
+                      <a:rPr lang="en-US" b="0" i="1" dirty="0" smtClean="0">
+                        <a:latin typeface="Cambria Math" panose="02040503050406030204" pitchFamily="18" charset="0"/>
+                      </a:rPr>
+                      <m:t>−</m:t>
                     </m:r>
                     <m:r>
                       <a:rPr lang="el-GR" i="1" dirty="0" smtClean="0">
@@ -8329,7 +9867,19 @@
                               <a:rPr lang="en-US" b="0" i="1" dirty="0" smtClean="0">
                                 <a:latin typeface="Cambria Math" panose="02040503050406030204" pitchFamily="18" charset="0"/>
                               </a:rPr>
-                              <m:t>(1+</m:t>
+                              <m:t>(</m:t>
+                            </m:r>
+                            <m:r>
+                              <a:rPr lang="en-US" b="0" i="1" dirty="0" smtClean="0">
+                                <a:latin typeface="Cambria Math" panose="02040503050406030204" pitchFamily="18" charset="0"/>
+                              </a:rPr>
+                              <m:t>1</m:t>
+                            </m:r>
+                            <m:r>
+                              <a:rPr lang="en-US" b="0" i="1" dirty="0" smtClean="0">
+                                <a:latin typeface="Cambria Math" panose="02040503050406030204" pitchFamily="18" charset="0"/>
+                              </a:rPr>
+                              <m:t>+</m:t>
                             </m:r>
                             <m:r>
                               <a:rPr lang="en-US" b="0" i="1" dirty="0" smtClean="0">
@@ -8432,7 +9982,13 @@
                           <a:rPr lang="en-US" b="0" i="1" dirty="0" smtClean="0">
                             <a:latin typeface="Cambria Math" panose="02040503050406030204" pitchFamily="18" charset="0"/>
                           </a:rPr>
-                          <m:t>1+</m:t>
+                          <m:t>1</m:t>
+                        </m:r>
+                        <m:r>
+                          <a:rPr lang="en-US" b="0" i="1" dirty="0" smtClean="0">
+                            <a:latin typeface="Cambria Math" panose="02040503050406030204" pitchFamily="18" charset="0"/>
+                          </a:rPr>
+                          <m:t>+</m:t>
                         </m:r>
                         <m:sSup>
                           <m:sSupPr>
@@ -8580,7 +10136,13 @@
                               <a:rPr lang="en-US" b="0" i="1" smtClean="0">
                                 <a:latin typeface="Cambria Math" panose="02040503050406030204" pitchFamily="18" charset="0"/>
                               </a:rPr>
-                              <m:t>1−|&amp;</m:t>
+                              <m:t>1</m:t>
+                            </m:r>
+                            <m:r>
+                              <a:rPr lang="en-US" b="0" i="1" smtClean="0">
+                                <a:latin typeface="Cambria Math" panose="02040503050406030204" pitchFamily="18" charset="0"/>
+                              </a:rPr>
+                              <m:t>−|&amp;</m:t>
                             </m:r>
                             <m:r>
                               <a:rPr lang="en-US" b="0" i="1" smtClean="0">
@@ -8604,7 +10166,13 @@
                               <a:rPr lang="en-US" b="0" i="1" smtClean="0">
                                 <a:latin typeface="Cambria Math" panose="02040503050406030204" pitchFamily="18" charset="0"/>
                               </a:rPr>
-                              <m:t>|&lt;1</m:t>
+                              <m:t>|&lt;</m:t>
+                            </m:r>
+                            <m:r>
+                              <a:rPr lang="en-US" b="0" i="1" smtClean="0">
+                                <a:latin typeface="Cambria Math" panose="02040503050406030204" pitchFamily="18" charset="0"/>
+                              </a:rPr>
+                              <m:t>1</m:t>
                             </m:r>
                           </m:e>
                           <m:e>
@@ -8612,13 +10180,25 @@
                               <a:rPr lang="en-US" b="0" i="1" smtClean="0">
                                 <a:latin typeface="Cambria Math" panose="02040503050406030204" pitchFamily="18" charset="0"/>
                               </a:rPr>
-                              <m:t>&amp;0,  </m:t>
+                              <m:t>&amp;</m:t>
                             </m:r>
                             <m:r>
                               <a:rPr lang="en-US" b="0" i="1" smtClean="0">
                                 <a:latin typeface="Cambria Math" panose="02040503050406030204" pitchFamily="18" charset="0"/>
                               </a:rPr>
-                              <m:t>𝑜𝑡h𝑒𝑤𝑖𝑠𝑒</m:t>
+                              <m:t>0</m:t>
+                            </m:r>
+                            <m:r>
+                              <a:rPr lang="en-US" b="0" i="1" smtClean="0">
+                                <a:latin typeface="Cambria Math" panose="02040503050406030204" pitchFamily="18" charset="0"/>
+                              </a:rPr>
+                              <m:t>,  </m:t>
+                            </m:r>
+                            <m:r>
+                              <a:rPr lang="en-US" b="0" i="1" smtClean="0">
+                                <a:latin typeface="Cambria Math" panose="02040503050406030204" pitchFamily="18" charset="0"/>
+                              </a:rPr>
+                              <m:t>𝑜𝑡ℎ𝑒𝑤𝑖𝑠𝑒</m:t>
                             </m:r>
                           </m:e>
                         </m:eqArr>
@@ -8634,28 +10214,22 @@
             </p:txBody>
           </p:sp>
         </mc:Choice>
-        <mc:Fallback xmlns="">
+        <mc:Fallback>
           <p:sp>
             <p:nvSpPr>
-              <p:cNvPr id="3" name="Content Placeholder 2">
-                <a:extLst>
-                  <a:ext uri="{FF2B5EF4-FFF2-40B4-BE49-F238E27FC236}">
-                    <a16:creationId xmlns:a16="http://schemas.microsoft.com/office/drawing/2014/main" id="{8B3EA2FF-CECE-443E-B80A-017F29F760E5}"/>
-                  </a:ext>
-                </a:extLst>
-              </p:cNvPr>
+              <p:cNvPr id="3" name="Content Placeholder 2"/>
               <p:cNvSpPr>
-                <a:spLocks noGrp="1" noRot="1" noChangeAspect="1" noMove="1" noResize="1" noEditPoints="1" noAdjustHandles="1" noChangeArrowheads="1" noChangeShapeType="1" noTextEdit="1"/>
+                <a:spLocks noRot="1" noChangeAspect="1" noMove="1" noResize="1" noEditPoints="1" noAdjustHandles="1" noChangeArrowheads="1" noChangeShapeType="1" noTextEdit="1"/>
               </p:cNvSpPr>
               <p:nvPr>
                 <p:ph idx="1"/>
               </p:nvPr>
             </p:nvSpPr>
             <p:spPr>
-              <a:blipFill>
-                <a:blip r:embed="rId3"/>
+              <a:blipFill rotWithShape="1">
+                <a:blip r:embed="rId1"/>
                 <a:stretch>
-                  <a:fillRect l="-930" t="-2202"/>
+                  <a:fillRect l="-4" t="-3" r="2" b="-6842"/>
                 </a:stretch>
               </a:blipFill>
             </p:spPr>
@@ -8664,7 +10238,7 @@
               <a:lstStyle/>
               <a:p>
                 <a:r>
-                  <a:rPr lang="en-US">
+                  <a:rPr lang="zh-CN" altLang="en-US">
                     <a:noFill/>
                   </a:rPr>
                   <a:t> </a:t>
@@ -8676,13 +10250,7 @@
       </mc:AlternateContent>
       <p:sp>
         <p:nvSpPr>
-          <p:cNvPr id="4" name="Footer Placeholder 3">
-            <a:extLst>
-              <a:ext uri="{FF2B5EF4-FFF2-40B4-BE49-F238E27FC236}">
-                <a16:creationId xmlns:a16="http://schemas.microsoft.com/office/drawing/2014/main" id="{A2501A28-A056-4CB5-B980-D14DE2DA5DBF}"/>
-              </a:ext>
-            </a:extLst>
-          </p:cNvPr>
+          <p:cNvPr id="4" name="Footer Placeholder 3"/>
           <p:cNvSpPr>
             <a:spLocks noGrp="1"/>
           </p:cNvSpPr>
@@ -8705,13 +10273,7 @@
       </p:sp>
       <p:sp>
         <p:nvSpPr>
-          <p:cNvPr id="5" name="Slide Number Placeholder 4">
-            <a:extLst>
-              <a:ext uri="{FF2B5EF4-FFF2-40B4-BE49-F238E27FC236}">
-                <a16:creationId xmlns:a16="http://schemas.microsoft.com/office/drawing/2014/main" id="{F92A0EE7-86C4-468D-A269-E051A4797BBB}"/>
-              </a:ext>
-            </a:extLst>
-          </p:cNvPr>
+          <p:cNvPr id="5" name="Slide Number Placeholder 4"/>
           <p:cNvSpPr>
             <a:spLocks noGrp="1"/>
           </p:cNvSpPr>
@@ -8726,18 +10288,12 @@
           <a:p>
             <a:fld id="{48F63A3B-78C7-47BE-AE5E-E10140E04643}" type="slidenum">
               <a:rPr lang="en-US" smtClean="0"/>
-              <a:t>4</a:t>
             </a:fld>
             <a:endParaRPr lang="en-US" dirty="0"/>
           </a:p>
         </p:txBody>
       </p:sp>
     </p:spTree>
-    <p:extLst>
-      <p:ext uri="{BB962C8B-B14F-4D97-AF65-F5344CB8AC3E}">
-        <p14:creationId xmlns:p14="http://schemas.microsoft.com/office/powerpoint/2010/main" val="1079410162"/>
-      </p:ext>
-    </p:extLst>
   </p:cSld>
   <p:clrMapOvr>
     <a:masterClrMapping/>
@@ -8764,13 +10320,7 @@
       </p:grpSpPr>
       <p:sp>
         <p:nvSpPr>
-          <p:cNvPr id="2" name="Title 1">
-            <a:extLst>
-              <a:ext uri="{FF2B5EF4-FFF2-40B4-BE49-F238E27FC236}">
-                <a16:creationId xmlns:a16="http://schemas.microsoft.com/office/drawing/2014/main" id="{E9F6196B-1203-488A-A7BD-50C5747E9898}"/>
-              </a:ext>
-            </a:extLst>
-          </p:cNvPr>
+          <p:cNvPr id="2" name="Title 1"/>
           <p:cNvSpPr>
             <a:spLocks noGrp="1"/>
           </p:cNvSpPr>
@@ -8787,20 +10337,15 @@
               <a:rPr lang="en-US" dirty="0"/>
               <a:t>Sigmoid Surrogate Example </a:t>
             </a:r>
-          </a:p>
-        </p:txBody>
-      </p:sp>
-      <mc:AlternateContent xmlns:mc="http://schemas.openxmlformats.org/markup-compatibility/2006" xmlns:a14="http://schemas.microsoft.com/office/drawing/2010/main">
-        <mc:Choice Requires="a14">
+            <a:endParaRPr lang="en-US" dirty="0"/>
+          </a:p>
+        </p:txBody>
+      </p:sp>
+      <mc:AlternateContent xmlns:mc="http://schemas.openxmlformats.org/markup-compatibility/2006">
+        <mc:Choice xmlns:a14="http://schemas.microsoft.com/office/drawing/2010/main" Requires="a14">
           <p:sp>
             <p:nvSpPr>
-              <p:cNvPr id="3" name="Content Placeholder 2">
-                <a:extLst>
-                  <a:ext uri="{FF2B5EF4-FFF2-40B4-BE49-F238E27FC236}">
-                    <a16:creationId xmlns:a16="http://schemas.microsoft.com/office/drawing/2014/main" id="{599D1764-E7C8-4FD2-BFC9-31B900A0B36A}"/>
-                  </a:ext>
-                </a:extLst>
-              </p:cNvPr>
+              <p:cNvPr id="3" name="Content Placeholder 2"/>
               <p:cNvSpPr>
                 <a:spLocks noGrp="1"/>
               </p:cNvSpPr>
@@ -8879,7 +10424,13 @@
                             <a:rPr lang="en-US" sz="2400" b="0" i="1" dirty="0" smtClean="0">
                               <a:latin typeface="Cambria Math" panose="02040503050406030204" pitchFamily="18" charset="0"/>
                             </a:rPr>
-                            <m:t>1+</m:t>
+                            <m:t>1</m:t>
+                          </m:r>
+                          <m:r>
+                            <a:rPr lang="en-US" sz="2400" b="0" i="1" dirty="0" smtClean="0">
+                              <a:latin typeface="Cambria Math" panose="02040503050406030204" pitchFamily="18" charset="0"/>
+                            </a:rPr>
+                            <m:t>+</m:t>
                           </m:r>
                           <m:sSup>
                             <m:sSupPr>
@@ -9078,7 +10629,13 @@
                                     <a:rPr lang="en-US" sz="2400" b="0" i="1" dirty="0" smtClean="0">
                                       <a:latin typeface="Cambria Math" panose="02040503050406030204" pitchFamily="18" charset="0"/>
                                     </a:rPr>
-                                    <m:t>1+</m:t>
+                                    <m:t>1</m:t>
+                                  </m:r>
+                                  <m:r>
+                                    <a:rPr lang="en-US" sz="2400" b="0" i="1" dirty="0" smtClean="0">
+                                      <a:latin typeface="Cambria Math" panose="02040503050406030204" pitchFamily="18" charset="0"/>
+                                    </a:rPr>
+                                    <m:t>+</m:t>
                                   </m:r>
                                   <m:sSup>
                                     <m:sSupPr>
@@ -9142,18 +10699,12 @@
             </p:txBody>
           </p:sp>
         </mc:Choice>
-        <mc:Fallback xmlns="">
+        <mc:Fallback>
           <p:sp>
             <p:nvSpPr>
-              <p:cNvPr id="3" name="Content Placeholder 2">
-                <a:extLst>
-                  <a:ext uri="{FF2B5EF4-FFF2-40B4-BE49-F238E27FC236}">
-                    <a16:creationId xmlns:a16="http://schemas.microsoft.com/office/drawing/2014/main" id="{599D1764-E7C8-4FD2-BFC9-31B900A0B36A}"/>
-                  </a:ext>
-                </a:extLst>
-              </p:cNvPr>
+              <p:cNvPr id="3" name="Content Placeholder 2"/>
               <p:cNvSpPr>
-                <a:spLocks noGrp="1" noRot="1" noChangeAspect="1" noMove="1" noResize="1" noEditPoints="1" noAdjustHandles="1" noChangeArrowheads="1" noChangeShapeType="1" noTextEdit="1"/>
+                <a:spLocks noRot="1" noChangeAspect="1" noMove="1" noResize="1" noEditPoints="1" noAdjustHandles="1" noChangeArrowheads="1" noChangeShapeType="1" noTextEdit="1"/>
               </p:cNvSpPr>
               <p:nvPr>
                 <p:ph idx="1"/>
@@ -9164,10 +10715,10 @@
                 <a:off x="193466" y="2403566"/>
                 <a:ext cx="3054831" cy="3849397"/>
               </a:xfrm>
-              <a:blipFill>
-                <a:blip r:embed="rId3"/>
+              <a:blipFill rotWithShape="1">
+                <a:blip r:embed="rId1"/>
                 <a:stretch>
-                  <a:fillRect/>
+                  <a:fillRect l="-14" t="-2" r="9" b="3"/>
                 </a:stretch>
               </a:blipFill>
             </p:spPr>
@@ -9176,7 +10727,7 @@
               <a:lstStyle/>
               <a:p>
                 <a:r>
-                  <a:rPr lang="en-US">
+                  <a:rPr lang="zh-CN" altLang="en-US">
                     <a:noFill/>
                   </a:rPr>
                   <a:t> </a:t>
@@ -9188,13 +10739,7 @@
       </mc:AlternateContent>
       <p:sp>
         <p:nvSpPr>
-          <p:cNvPr id="4" name="Footer Placeholder 3">
-            <a:extLst>
-              <a:ext uri="{FF2B5EF4-FFF2-40B4-BE49-F238E27FC236}">
-                <a16:creationId xmlns:a16="http://schemas.microsoft.com/office/drawing/2014/main" id="{11A09730-F240-43AD-8AFE-8C84B1E31BAB}"/>
-              </a:ext>
-            </a:extLst>
-          </p:cNvPr>
+          <p:cNvPr id="4" name="Footer Placeholder 3"/>
           <p:cNvSpPr>
             <a:spLocks noGrp="1"/>
           </p:cNvSpPr>
@@ -9217,13 +10762,7 @@
       </p:sp>
       <p:sp>
         <p:nvSpPr>
-          <p:cNvPr id="5" name="Slide Number Placeholder 4">
-            <a:extLst>
-              <a:ext uri="{FF2B5EF4-FFF2-40B4-BE49-F238E27FC236}">
-                <a16:creationId xmlns:a16="http://schemas.microsoft.com/office/drawing/2014/main" id="{45BE317D-A214-4BD5-A0F5-EA4033077680}"/>
-              </a:ext>
-            </a:extLst>
-          </p:cNvPr>
+          <p:cNvPr id="5" name="Slide Number Placeholder 4"/>
           <p:cNvSpPr>
             <a:spLocks noGrp="1"/>
           </p:cNvSpPr>
@@ -9238,7 +10777,6 @@
           <a:p>
             <a:fld id="{48F63A3B-78C7-47BE-AE5E-E10140E04643}" type="slidenum">
               <a:rPr lang="en-US" smtClean="0"/>
-              <a:t>5</a:t>
             </a:fld>
             <a:endParaRPr lang="en-US" dirty="0"/>
           </a:p>
@@ -9246,20 +10784,14 @@
       </p:sp>
       <p:pic>
         <p:nvPicPr>
-          <p:cNvPr id="7" name="Picture 6">
-            <a:extLst>
-              <a:ext uri="{FF2B5EF4-FFF2-40B4-BE49-F238E27FC236}">
-                <a16:creationId xmlns:a16="http://schemas.microsoft.com/office/drawing/2014/main" id="{E246C0D9-A8BE-4401-844F-FE59E7F87579}"/>
-              </a:ext>
-            </a:extLst>
-          </p:cNvPr>
+          <p:cNvPr id="7" name="Picture 6"/>
           <p:cNvPicPr>
             <a:picLocks noChangeAspect="1"/>
           </p:cNvPicPr>
           <p:nvPr/>
         </p:nvPicPr>
         <p:blipFill>
-          <a:blip r:embed="rId4"/>
+          <a:blip r:embed="rId2"/>
           <a:stretch>
             <a:fillRect/>
           </a:stretch>
@@ -9275,11 +10807,6 @@
         </p:spPr>
       </p:pic>
     </p:spTree>
-    <p:extLst>
-      <p:ext uri="{BB962C8B-B14F-4D97-AF65-F5344CB8AC3E}">
-        <p14:creationId xmlns:p14="http://schemas.microsoft.com/office/powerpoint/2010/main" val="1725450651"/>
-      </p:ext>
-    </p:extLst>
   </p:cSld>
   <p:clrMapOvr>
     <a:masterClrMapping/>
@@ -9331,8 +10858,8 @@
           </a:p>
         </p:txBody>
       </p:sp>
-      <mc:AlternateContent xmlns:mc="http://schemas.openxmlformats.org/markup-compatibility/2006" xmlns:a14="http://schemas.microsoft.com/office/drawing/2010/main">
-        <mc:Choice Requires="a14">
+      <mc:AlternateContent xmlns:mc="http://schemas.openxmlformats.org/markup-compatibility/2006">
+        <mc:Choice xmlns:a14="http://schemas.microsoft.com/office/drawing/2010/main" Requires="a14">
           <p:sp>
             <p:nvSpPr>
               <p:cNvPr id="3" name="Content Placeholder 2"/>
@@ -9354,6 +10881,7 @@
                   <a:rPr lang="en-US" dirty="0"/>
                   <a:t>Train SNN parameters directly from task loss.</a:t>
                 </a:r>
+                <a:endParaRPr lang="en-US" dirty="0"/>
               </a:p>
               <a:p>
                 <a:r>
@@ -9364,18 +10892,21 @@
                   <a:rPr lang="en-US" b="1" dirty="0"/>
                   <a:t>-Temporal Backpropagation (STBP)</a:t>
                 </a:r>
+                <a:endParaRPr lang="en-US" b="1" dirty="0"/>
               </a:p>
               <a:p>
                 <a:r>
                   <a:rPr lang="en-US" dirty="0"/>
                   <a:t>View SNN as a recurrent neural network.</a:t>
                 </a:r>
+                <a:endParaRPr lang="en-US" dirty="0"/>
               </a:p>
               <a:p>
                 <a:r>
                   <a:rPr lang="en-US" dirty="0"/>
                   <a:t>Error propagates through:</a:t>
                 </a:r>
+                <a:endParaRPr lang="en-US" dirty="0"/>
               </a:p>
               <a:p>
                 <a:pPr lvl="1"/>
@@ -9383,6 +10914,7 @@
                   <a:rPr lang="en-US" dirty="0"/>
                   <a:t>spatial connections </a:t>
                 </a:r>
+                <a:endParaRPr lang="en-US" dirty="0"/>
               </a:p>
               <a:p>
                 <a:pPr lvl="1"/>
@@ -9390,18 +10922,21 @@
                   <a:rPr lang="en-US" dirty="0"/>
                   <a:t>temporal neuron states</a:t>
                 </a:r>
+                <a:endParaRPr lang="en-US" dirty="0"/>
               </a:p>
               <a:p>
                 <a:r>
                   <a:rPr lang="en-US" b="1" dirty="0"/>
                   <a:t>Temporal Unrolling</a:t>
                 </a:r>
+                <a:endParaRPr lang="en-US" b="1" dirty="0"/>
               </a:p>
               <a:p>
                 <a:r>
                   <a:rPr lang="en-US" dirty="0"/>
                   <a:t>The recurrent neuron is unfolded through time:</a:t>
                 </a:r>
+                <a:endParaRPr lang="en-US" dirty="0"/>
               </a:p>
               <a:p>
                 <a:pPr marL="0" indent="0">
@@ -9423,7 +10958,31 @@
                         <a:rPr lang="en-US" i="1" dirty="0" smtClean="0">
                           <a:latin typeface="Cambria Math" panose="02040503050406030204" pitchFamily="18" charset="0"/>
                         </a:rPr>
-                        <m:t>=1,2,…,</m:t>
+                        <m:t>=</m:t>
+                      </m:r>
+                      <m:r>
+                        <a:rPr lang="en-US" i="1" dirty="0" smtClean="0">
+                          <a:latin typeface="Cambria Math" panose="02040503050406030204" pitchFamily="18" charset="0"/>
+                        </a:rPr>
+                        <m:t>1</m:t>
+                      </m:r>
+                      <m:r>
+                        <a:rPr lang="en-US" i="1" dirty="0" smtClean="0">
+                          <a:latin typeface="Cambria Math" panose="02040503050406030204" pitchFamily="18" charset="0"/>
+                        </a:rPr>
+                        <m:t>,</m:t>
+                      </m:r>
+                      <m:r>
+                        <a:rPr lang="en-US" i="1" dirty="0" smtClean="0">
+                          <a:latin typeface="Cambria Math" panose="02040503050406030204" pitchFamily="18" charset="0"/>
+                        </a:rPr>
+                        <m:t>2</m:t>
+                      </m:r>
+                      <m:r>
+                        <a:rPr lang="en-US" i="1" dirty="0" smtClean="0">
+                          <a:latin typeface="Cambria Math" panose="02040503050406030204" pitchFamily="18" charset="0"/>
+                        </a:rPr>
+                        <m:t>,…,</m:t>
                       </m:r>
                       <m:r>
                         <a:rPr lang="en-US" i="1" dirty="0" smtClean="0">
@@ -9441,6 +11000,7 @@
                   <a:rPr lang="en-US" dirty="0"/>
                   <a:t>A recurrent SNN becomes a deep feedforward graph with shared weights.</a:t>
                 </a:r>
+                <a:endParaRPr lang="en-US" dirty="0"/>
               </a:p>
               <a:p>
                 <a:endParaRPr lang="en-US" dirty="0"/>
@@ -9451,22 +11011,22 @@
             </p:txBody>
           </p:sp>
         </mc:Choice>
-        <mc:Fallback xmlns="">
+        <mc:Fallback>
           <p:sp>
             <p:nvSpPr>
               <p:cNvPr id="3" name="Content Placeholder 2"/>
               <p:cNvSpPr>
-                <a:spLocks noGrp="1" noRot="1" noChangeAspect="1" noMove="1" noResize="1" noEditPoints="1" noAdjustHandles="1" noChangeArrowheads="1" noChangeShapeType="1" noTextEdit="1"/>
+                <a:spLocks noRot="1" noChangeAspect="1" noMove="1" noResize="1" noEditPoints="1" noAdjustHandles="1" noChangeArrowheads="1" noChangeShapeType="1" noTextEdit="1"/>
               </p:cNvSpPr>
               <p:nvPr>
                 <p:ph idx="1"/>
               </p:nvPr>
             </p:nvSpPr>
             <p:spPr>
-              <a:blipFill>
-                <a:blip r:embed="rId2"/>
+              <a:blipFill rotWithShape="1">
+                <a:blip r:embed="rId1"/>
                 <a:stretch>
-                  <a:fillRect l="-930" t="-3109" b="-3109"/>
+                  <a:fillRect l="-4" t="-219" r="2" b="-17441"/>
                 </a:stretch>
               </a:blipFill>
             </p:spPr>
@@ -9475,7 +11035,7 @@
               <a:lstStyle/>
               <a:p>
                 <a:r>
-                  <a:rPr lang="en-US">
+                  <a:rPr lang="zh-CN" altLang="en-US">
                     <a:noFill/>
                   </a:rPr>
                   <a:t> </a:t>
@@ -9487,13 +11047,7 @@
       </mc:AlternateContent>
       <p:sp>
         <p:nvSpPr>
-          <p:cNvPr id="4" name="Footer Placeholder 3">
-            <a:extLst>
-              <a:ext uri="{FF2B5EF4-FFF2-40B4-BE49-F238E27FC236}">
-                <a16:creationId xmlns:a16="http://schemas.microsoft.com/office/drawing/2014/main" id="{D15E3CE3-C396-45D9-B50C-BEFBC8B46CF3}"/>
-              </a:ext>
-            </a:extLst>
-          </p:cNvPr>
+          <p:cNvPr id="4" name="Footer Placeholder 3"/>
           <p:cNvSpPr>
             <a:spLocks noGrp="1"/>
           </p:cNvSpPr>
@@ -9516,13 +11070,7 @@
       </p:sp>
       <p:sp>
         <p:nvSpPr>
-          <p:cNvPr id="5" name="Slide Number Placeholder 4">
-            <a:extLst>
-              <a:ext uri="{FF2B5EF4-FFF2-40B4-BE49-F238E27FC236}">
-                <a16:creationId xmlns:a16="http://schemas.microsoft.com/office/drawing/2014/main" id="{706BFCBD-8D4E-4CF6-A262-48E9C87F6956}"/>
-              </a:ext>
-            </a:extLst>
-          </p:cNvPr>
+          <p:cNvPr id="5" name="Slide Number Placeholder 4"/>
           <p:cNvSpPr>
             <a:spLocks noGrp="1"/>
           </p:cNvSpPr>
@@ -9537,7 +11085,6 @@
           <a:p>
             <a:fld id="{48F63A3B-78C7-47BE-AE5E-E10140E04643}" type="slidenum">
               <a:rPr lang="en-US" smtClean="0"/>
-              <a:t>6</a:t>
             </a:fld>
             <a:endParaRPr lang="en-US" dirty="0"/>
           </a:p>
@@ -9620,13 +11167,7 @@
       </p:sp>
       <p:sp>
         <p:nvSpPr>
-          <p:cNvPr id="4" name="Footer Placeholder 3">
-            <a:extLst>
-              <a:ext uri="{FF2B5EF4-FFF2-40B4-BE49-F238E27FC236}">
-                <a16:creationId xmlns:a16="http://schemas.microsoft.com/office/drawing/2014/main" id="{D162520A-E6AA-40AE-8781-F78F7C02847B}"/>
-              </a:ext>
-            </a:extLst>
-          </p:cNvPr>
+          <p:cNvPr id="4" name="Footer Placeholder 3"/>
           <p:cNvSpPr>
             <a:spLocks noGrp="1"/>
           </p:cNvSpPr>
@@ -9649,13 +11190,7 @@
       </p:sp>
       <p:sp>
         <p:nvSpPr>
-          <p:cNvPr id="5" name="Slide Number Placeholder 4">
-            <a:extLst>
-              <a:ext uri="{FF2B5EF4-FFF2-40B4-BE49-F238E27FC236}">
-                <a16:creationId xmlns:a16="http://schemas.microsoft.com/office/drawing/2014/main" id="{55E470F8-F2E4-4607-9E1C-45D4EFE40D61}"/>
-              </a:ext>
-            </a:extLst>
-          </p:cNvPr>
+          <p:cNvPr id="5" name="Slide Number Placeholder 4"/>
           <p:cNvSpPr>
             <a:spLocks noGrp="1"/>
           </p:cNvSpPr>
@@ -9670,7 +11205,6 @@
           <a:p>
             <a:fld id="{48F63A3B-78C7-47BE-AE5E-E10140E04643}" type="slidenum">
               <a:rPr lang="en-US" smtClean="0"/>
-              <a:t>7</a:t>
             </a:fld>
             <a:endParaRPr lang="en-US" dirty="0"/>
           </a:p>
@@ -9678,22 +11212,18 @@
       </p:sp>
       <p:pic>
         <p:nvPicPr>
-          <p:cNvPr id="7" name="Picture 6">
-            <a:extLst>
-              <a:ext uri="{FF2B5EF4-FFF2-40B4-BE49-F238E27FC236}">
-                <a16:creationId xmlns:a16="http://schemas.microsoft.com/office/drawing/2014/main" id="{45A29213-409F-4394-8AD0-DF430D32C303}"/>
-              </a:ext>
-            </a:extLst>
-          </p:cNvPr>
+          <p:cNvPr id="7" name="Picture 6"/>
           <p:cNvPicPr>
             <a:picLocks noChangeAspect="1"/>
           </p:cNvPicPr>
           <p:nvPr/>
         </p:nvPicPr>
         <p:blipFill rotWithShape="1">
-          <a:blip r:embed="rId2"/>
+          <a:blip r:embed="rId1"/>
           <a:srcRect r="76518"/>
-          <a:stretch/>
+          <a:stretch>
+            <a:fillRect/>
+          </a:stretch>
         </p:blipFill>
         <p:spPr>
           <a:xfrm>
@@ -9707,22 +11237,18 @@
       </p:pic>
       <p:pic>
         <p:nvPicPr>
-          <p:cNvPr id="8" name="Picture 7">
-            <a:extLst>
-              <a:ext uri="{FF2B5EF4-FFF2-40B4-BE49-F238E27FC236}">
-                <a16:creationId xmlns:a16="http://schemas.microsoft.com/office/drawing/2014/main" id="{1067C6B0-056A-4A62-98C2-059EBA5EE8A1}"/>
-              </a:ext>
-            </a:extLst>
-          </p:cNvPr>
+          <p:cNvPr id="8" name="Picture 7"/>
           <p:cNvPicPr>
             <a:picLocks noChangeAspect="1"/>
           </p:cNvPicPr>
           <p:nvPr/>
         </p:nvPicPr>
         <p:blipFill rotWithShape="1">
-          <a:blip r:embed="rId2"/>
+          <a:blip r:embed="rId1"/>
           <a:srcRect l="51447" r="25071"/>
-          <a:stretch/>
+          <a:stretch>
+            <a:fillRect/>
+          </a:stretch>
         </p:blipFill>
         <p:spPr>
           <a:xfrm>
@@ -9786,8 +11312,8 @@
           </a:p>
         </p:txBody>
       </p:sp>
-      <mc:AlternateContent xmlns:mc="http://schemas.openxmlformats.org/markup-compatibility/2006" xmlns:a14="http://schemas.microsoft.com/office/drawing/2010/main">
-        <mc:Choice Requires="a14">
+      <mc:AlternateContent xmlns:mc="http://schemas.openxmlformats.org/markup-compatibility/2006">
+        <mc:Choice xmlns:a14="http://schemas.microsoft.com/office/drawing/2010/main" Requires="a14">
           <p:sp>
             <p:nvSpPr>
               <p:cNvPr id="3" name="Content Placeholder 2"/>
@@ -9807,12 +11333,14 @@
                   <a:rPr lang="en-US" dirty="0"/>
                   <a:t>Unroll the network over time and accumulate gradients</a:t>
                 </a:r>
+                <a:endParaRPr lang="en-US" dirty="0"/>
               </a:p>
               <a:p>
                 <a:r>
                   <a:rPr lang="en-US" b="1" dirty="0"/>
                   <a:t>Gradient Computation</a:t>
                 </a:r>
+                <a:endParaRPr lang="en-US" b="1" dirty="0"/>
               </a:p>
               <a:p>
                 <a:pPr marL="0" indent="0">
@@ -9892,7 +11420,13 @@
                             <a:rPr lang="en-US" b="0" i="1" smtClean="0">
                               <a:latin typeface="Cambria Math" panose="02040503050406030204" pitchFamily="18" charset="0"/>
                             </a:rPr>
-                            <m:t>=1</m:t>
+                            <m:t>=</m:t>
+                          </m:r>
+                          <m:r>
+                            <a:rPr lang="en-US" b="0" i="1" smtClean="0">
+                              <a:latin typeface="Cambria Math" panose="02040503050406030204" pitchFamily="18" charset="0"/>
+                            </a:rPr>
+                            <m:t>1</m:t>
                           </m:r>
                         </m:sub>
                         <m:sup>
@@ -10210,7 +11744,14 @@
                                   <a:latin typeface="Cambria Math" panose="02040503050406030204" pitchFamily="18" charset="0"/>
                                   <a:ea typeface="Cambria Math" panose="02040503050406030204" pitchFamily="18" charset="0"/>
                                 </a:rPr>
-                                <m:t>−1</m:t>
+                                <m:t>−</m:t>
+                              </m:r>
+                              <m:r>
+                                <a:rPr lang="en-US" b="0" i="1" dirty="0" smtClean="0">
+                                  <a:latin typeface="Cambria Math" panose="02040503050406030204" pitchFamily="18" charset="0"/>
+                                  <a:ea typeface="Cambria Math" panose="02040503050406030204" pitchFamily="18" charset="0"/>
+                                </a:rPr>
+                                <m:t>1</m:t>
                               </m:r>
                             </m:e>
                           </m:d>
@@ -10263,7 +11804,14 @@
                                   <a:latin typeface="Cambria Math" panose="02040503050406030204" pitchFamily="18" charset="0"/>
                                   <a:ea typeface="Cambria Math" panose="02040503050406030204" pitchFamily="18" charset="0"/>
                                 </a:rPr>
-                                <m:t>−1</m:t>
+                                <m:t>−</m:t>
+                              </m:r>
+                              <m:r>
+                                <a:rPr lang="en-US" b="0" i="1" dirty="0" smtClean="0">
+                                  <a:latin typeface="Cambria Math" panose="02040503050406030204" pitchFamily="18" charset="0"/>
+                                  <a:ea typeface="Cambria Math" panose="02040503050406030204" pitchFamily="18" charset="0"/>
+                                </a:rPr>
+                                <m:t>1</m:t>
                               </m:r>
                             </m:e>
                           </m:d>
@@ -10304,12 +11852,14 @@
                   <a:rPr lang="en-US" dirty="0"/>
                   <a:t>Spatial Gradient</a:t>
                 </a:r>
+                <a:endParaRPr lang="en-US" dirty="0"/>
               </a:p>
               <a:p>
                 <a:r>
                   <a:rPr lang="en-US" dirty="0"/>
                   <a:t>Temporal Gradient</a:t>
                 </a:r>
+                <a:endParaRPr lang="en-US" dirty="0"/>
               </a:p>
               <a:p>
                 <a:r>
@@ -10332,26 +11882,27 @@
                   <a:rPr lang="en-US" dirty="0"/>
                   <a:t>-temporal dynamics</a:t>
                 </a:r>
+                <a:endParaRPr lang="en-US" dirty="0"/>
               </a:p>
             </p:txBody>
           </p:sp>
         </mc:Choice>
-        <mc:Fallback xmlns="">
+        <mc:Fallback>
           <p:sp>
             <p:nvSpPr>
               <p:cNvPr id="3" name="Content Placeholder 2"/>
               <p:cNvSpPr>
-                <a:spLocks noGrp="1" noRot="1" noChangeAspect="1" noMove="1" noResize="1" noEditPoints="1" noAdjustHandles="1" noChangeArrowheads="1" noChangeShapeType="1" noTextEdit="1"/>
+                <a:spLocks noRot="1" noChangeAspect="1" noMove="1" noResize="1" noEditPoints="1" noAdjustHandles="1" noChangeArrowheads="1" noChangeShapeType="1" noTextEdit="1"/>
               </p:cNvSpPr>
               <p:nvPr>
                 <p:ph idx="1"/>
               </p:nvPr>
             </p:nvSpPr>
             <p:spPr>
-              <a:blipFill>
-                <a:blip r:embed="rId2"/>
+              <a:blipFill rotWithShape="1">
+                <a:blip r:embed="rId1"/>
                 <a:stretch>
-                  <a:fillRect l="-930" t="-2202"/>
+                  <a:fillRect l="-4" t="-3" r="2" b="3"/>
                 </a:stretch>
               </a:blipFill>
             </p:spPr>
@@ -10360,7 +11911,7 @@
               <a:lstStyle/>
               <a:p>
                 <a:r>
-                  <a:rPr lang="en-US">
+                  <a:rPr lang="zh-CN" altLang="en-US">
                     <a:noFill/>
                   </a:rPr>
                   <a:t> </a:t>
@@ -10372,13 +11923,7 @@
       </mc:AlternateContent>
       <p:sp>
         <p:nvSpPr>
-          <p:cNvPr id="4" name="Footer Placeholder 3">
-            <a:extLst>
-              <a:ext uri="{FF2B5EF4-FFF2-40B4-BE49-F238E27FC236}">
-                <a16:creationId xmlns:a16="http://schemas.microsoft.com/office/drawing/2014/main" id="{D162520A-E6AA-40AE-8781-F78F7C02847B}"/>
-              </a:ext>
-            </a:extLst>
-          </p:cNvPr>
+          <p:cNvPr id="4" name="Footer Placeholder 3"/>
           <p:cNvSpPr>
             <a:spLocks noGrp="1"/>
           </p:cNvSpPr>
@@ -10401,13 +11946,7 @@
       </p:sp>
       <p:sp>
         <p:nvSpPr>
-          <p:cNvPr id="5" name="Slide Number Placeholder 4">
-            <a:extLst>
-              <a:ext uri="{FF2B5EF4-FFF2-40B4-BE49-F238E27FC236}">
-                <a16:creationId xmlns:a16="http://schemas.microsoft.com/office/drawing/2014/main" id="{55E470F8-F2E4-4607-9E1C-45D4EFE40D61}"/>
-              </a:ext>
-            </a:extLst>
-          </p:cNvPr>
+          <p:cNvPr id="5" name="Slide Number Placeholder 4"/>
           <p:cNvSpPr>
             <a:spLocks noGrp="1"/>
           </p:cNvSpPr>
@@ -10422,18 +11961,12 @@
           <a:p>
             <a:fld id="{48F63A3B-78C7-47BE-AE5E-E10140E04643}" type="slidenum">
               <a:rPr lang="en-US" smtClean="0"/>
-              <a:t>8</a:t>
             </a:fld>
             <a:endParaRPr lang="en-US" dirty="0"/>
           </a:p>
         </p:txBody>
       </p:sp>
     </p:spTree>
-    <p:extLst>
-      <p:ext uri="{BB962C8B-B14F-4D97-AF65-F5344CB8AC3E}">
-        <p14:creationId xmlns:p14="http://schemas.microsoft.com/office/powerpoint/2010/main" val="2899136302"/>
-      </p:ext>
-    </p:extLst>
   </p:cSld>
   <p:clrMapOvr>
     <a:masterClrMapping/>
@@ -10460,13 +11993,7 @@
       </p:grpSpPr>
       <p:sp>
         <p:nvSpPr>
-          <p:cNvPr id="2" name="Title 1">
-            <a:extLst>
-              <a:ext uri="{FF2B5EF4-FFF2-40B4-BE49-F238E27FC236}">
-                <a16:creationId xmlns:a16="http://schemas.microsoft.com/office/drawing/2014/main" id="{5D6869BD-26AB-436F-89E8-6B0A0B282E78}"/>
-              </a:ext>
-            </a:extLst>
-          </p:cNvPr>
+          <p:cNvPr id="2" name="Title 1"/>
           <p:cNvSpPr>
             <a:spLocks noGrp="1"/>
           </p:cNvSpPr>
@@ -10483,20 +12010,15 @@
               <a:rPr lang="en-US" dirty="0"/>
               <a:t>Limitations of BPTT</a:t>
             </a:r>
-          </a:p>
-        </p:txBody>
-      </p:sp>
-      <mc:AlternateContent xmlns:mc="http://schemas.openxmlformats.org/markup-compatibility/2006" xmlns:a14="http://schemas.microsoft.com/office/drawing/2010/main">
-        <mc:Choice Requires="a14">
+            <a:endParaRPr lang="en-US" dirty="0"/>
+          </a:p>
+        </p:txBody>
+      </p:sp>
+      <mc:AlternateContent xmlns:mc="http://schemas.openxmlformats.org/markup-compatibility/2006">
+        <mc:Choice xmlns:a14="http://schemas.microsoft.com/office/drawing/2010/main" Requires="a14">
           <p:sp>
             <p:nvSpPr>
-              <p:cNvPr id="3" name="Content Placeholder 2">
-                <a:extLst>
-                  <a:ext uri="{FF2B5EF4-FFF2-40B4-BE49-F238E27FC236}">
-                    <a16:creationId xmlns:a16="http://schemas.microsoft.com/office/drawing/2014/main" id="{B26CA19B-D1C3-49B7-8BBF-E8B31283BB55}"/>
-                  </a:ext>
-                </a:extLst>
-              </p:cNvPr>
+              <p:cNvPr id="3" name="Content Placeholder 2"/>
               <p:cNvSpPr>
                 <a:spLocks noGrp="1"/>
               </p:cNvSpPr>
@@ -10571,6 +12093,7 @@
                   <a:rPr lang="en-US" dirty="0"/>
                   <a:t>Long Dependency Problem</a:t>
                 </a:r>
+                <a:endParaRPr lang="en-US" dirty="0"/>
               </a:p>
               <a:p>
                 <a:pPr marL="0" indent="0">
@@ -10689,7 +12212,14 @@
                                       <a:latin typeface="Cambria Math" panose="02040503050406030204" pitchFamily="18" charset="0"/>
                                       <a:ea typeface="Cambria Math" panose="02040503050406030204" pitchFamily="18" charset="0"/>
                                     </a:rPr>
-                                    <m:t>−1</m:t>
+                                    <m:t>−</m:t>
+                                  </m:r>
+                                  <m:r>
+                                    <a:rPr lang="en-US" i="1" dirty="0">
+                                      <a:latin typeface="Cambria Math" panose="02040503050406030204" pitchFamily="18" charset="0"/>
+                                      <a:ea typeface="Cambria Math" panose="02040503050406030204" pitchFamily="18" charset="0"/>
+                                    </a:rPr>
+                                    <m:t>1</m:t>
                                   </m:r>
                                 </m:e>
                               </m:d>
@@ -10707,6 +12237,7 @@
                   <a:rPr lang="en-US" dirty="0"/>
                   <a:t>Hardware Challenge</a:t>
                 </a:r>
+                <a:endParaRPr lang="en-US" dirty="0"/>
               </a:p>
               <a:p>
                 <a:pPr lvl="1"/>
@@ -10714,6 +12245,7 @@
                   <a:rPr lang="en-US" dirty="0"/>
                   <a:t>Requires full sequence storage. </a:t>
                 </a:r>
+                <a:endParaRPr lang="en-US" dirty="0"/>
               </a:p>
               <a:p>
                 <a:pPr lvl="1"/>
@@ -10721,6 +12253,7 @@
                   <a:rPr lang="en-US" dirty="0"/>
                   <a:t>Not suitable for edge neuromorphic devices. </a:t>
                 </a:r>
+                <a:endParaRPr lang="en-US" dirty="0"/>
               </a:p>
               <a:p>
                 <a:pPr lvl="1"/>
@@ -10728,6 +12261,7 @@
                   <a:rPr lang="en-US" dirty="0"/>
                   <a:t>Violates biological real-time processing.</a:t>
                 </a:r>
+                <a:endParaRPr lang="en-US" dirty="0"/>
               </a:p>
               <a:p>
                 <a:pPr marL="0" indent="0">
@@ -10738,28 +12272,22 @@
             </p:txBody>
           </p:sp>
         </mc:Choice>
-        <mc:Fallback xmlns="">
+        <mc:Fallback>
           <p:sp>
             <p:nvSpPr>
-              <p:cNvPr id="3" name="Content Placeholder 2">
-                <a:extLst>
-                  <a:ext uri="{FF2B5EF4-FFF2-40B4-BE49-F238E27FC236}">
-                    <a16:creationId xmlns:a16="http://schemas.microsoft.com/office/drawing/2014/main" id="{B26CA19B-D1C3-49B7-8BBF-E8B31283BB55}"/>
-                  </a:ext>
-                </a:extLst>
-              </p:cNvPr>
+              <p:cNvPr id="3" name="Content Placeholder 2"/>
               <p:cNvSpPr>
-                <a:spLocks noGrp="1" noRot="1" noChangeAspect="1" noMove="1" noResize="1" noEditPoints="1" noAdjustHandles="1" noChangeArrowheads="1" noChangeShapeType="1" noTextEdit="1"/>
+                <a:spLocks noRot="1" noChangeAspect="1" noMove="1" noResize="1" noEditPoints="1" noAdjustHandles="1" noChangeArrowheads="1" noChangeShapeType="1" noTextEdit="1"/>
               </p:cNvSpPr>
               <p:nvPr>
                 <p:ph idx="1"/>
               </p:nvPr>
             </p:nvSpPr>
             <p:spPr>
-              <a:blipFill>
-                <a:blip r:embed="rId3"/>
+              <a:blipFill rotWithShape="1">
+                <a:blip r:embed="rId1"/>
                 <a:stretch>
-                  <a:fillRect l="-930" t="-2202"/>
+                  <a:fillRect l="-4" t="-3" r="2" b="3"/>
                 </a:stretch>
               </a:blipFill>
             </p:spPr>
@@ -10768,7 +12296,7 @@
               <a:lstStyle/>
               <a:p>
                 <a:r>
-                  <a:rPr lang="en-US">
+                  <a:rPr lang="zh-CN" altLang="en-US">
                     <a:noFill/>
                   </a:rPr>
                   <a:t> </a:t>
@@ -10780,13 +12308,7 @@
       </mc:AlternateContent>
       <p:sp>
         <p:nvSpPr>
-          <p:cNvPr id="4" name="Footer Placeholder 3">
-            <a:extLst>
-              <a:ext uri="{FF2B5EF4-FFF2-40B4-BE49-F238E27FC236}">
-                <a16:creationId xmlns:a16="http://schemas.microsoft.com/office/drawing/2014/main" id="{4E20D2B3-788A-4D53-802F-6D150CCDB39A}"/>
-              </a:ext>
-            </a:extLst>
-          </p:cNvPr>
+          <p:cNvPr id="4" name="Footer Placeholder 3"/>
           <p:cNvSpPr>
             <a:spLocks noGrp="1"/>
           </p:cNvSpPr>
@@ -10809,13 +12331,7 @@
       </p:sp>
       <p:sp>
         <p:nvSpPr>
-          <p:cNvPr id="5" name="Slide Number Placeholder 4">
-            <a:extLst>
-              <a:ext uri="{FF2B5EF4-FFF2-40B4-BE49-F238E27FC236}">
-                <a16:creationId xmlns:a16="http://schemas.microsoft.com/office/drawing/2014/main" id="{89CAC611-EE0B-41AA-9DD5-5D9662CD2460}"/>
-              </a:ext>
-            </a:extLst>
-          </p:cNvPr>
+          <p:cNvPr id="5" name="Slide Number Placeholder 4"/>
           <p:cNvSpPr>
             <a:spLocks noGrp="1"/>
           </p:cNvSpPr>
@@ -10830,18 +12346,12 @@
           <a:p>
             <a:fld id="{48F63A3B-78C7-47BE-AE5E-E10140E04643}" type="slidenum">
               <a:rPr lang="en-US" smtClean="0"/>
-              <a:t>9</a:t>
             </a:fld>
             <a:endParaRPr lang="en-US" dirty="0"/>
           </a:p>
         </p:txBody>
       </p:sp>
     </p:spTree>
-    <p:extLst>
-      <p:ext uri="{BB962C8B-B14F-4D97-AF65-F5344CB8AC3E}">
-        <p14:creationId xmlns:p14="http://schemas.microsoft.com/office/powerpoint/2010/main" val="2907971957"/>
-      </p:ext>
-    </p:extLst>
   </p:cSld>
   <p:clrMapOvr>
     <a:masterClrMapping/>
@@ -10892,7 +12402,7 @@
     </a:clrScheme>
     <a:fontScheme name="Office">
       <a:majorFont>
-        <a:latin typeface="等线 Light" panose="02110004020202020204"/>
+        <a:latin typeface="等线 Light"/>
         <a:ea typeface=""/>
         <a:cs typeface=""/>
         <a:font script="Jpan" typeface="游ゴシック Light"/>
@@ -10925,26 +12435,9 @@
         <a:font script="Viet" typeface="Times New Roman"/>
         <a:font script="Uigh" typeface="Microsoft Uighur"/>
         <a:font script="Geor" typeface="Sylfaen"/>
-        <a:font script="Armn" typeface="Arial"/>
-        <a:font script="Bugi" typeface="Leelawadee UI"/>
-        <a:font script="Bopo" typeface="Microsoft JhengHei"/>
-        <a:font script="Java" typeface="Javanese Text"/>
-        <a:font script="Lisu" typeface="Segoe UI"/>
-        <a:font script="Mymr" typeface="Myanmar Text"/>
-        <a:font script="Nkoo" typeface="Ebrima"/>
-        <a:font script="Olck" typeface="Nirmala UI"/>
-        <a:font script="Osma" typeface="Ebrima"/>
-        <a:font script="Phag" typeface="Phagspa"/>
-        <a:font script="Syrn" typeface="Estrangelo Edessa"/>
-        <a:font script="Syrj" typeface="Estrangelo Edessa"/>
-        <a:font script="Syre" typeface="Estrangelo Edessa"/>
-        <a:font script="Sora" typeface="Nirmala UI"/>
-        <a:font script="Tale" typeface="Microsoft Tai Le"/>
-        <a:font script="Talu" typeface="Microsoft New Tai Lue"/>
-        <a:font script="Tfng" typeface="Ebrima"/>
       </a:majorFont>
       <a:minorFont>
-        <a:latin typeface="等线" panose="02110004020202020204"/>
+        <a:latin typeface="等线"/>
         <a:ea typeface=""/>
         <a:cs typeface=""/>
         <a:font script="Jpan" typeface="游ゴシック"/>
@@ -10977,23 +12470,6 @@
         <a:font script="Viet" typeface="Arial"/>
         <a:font script="Uigh" typeface="Microsoft Uighur"/>
         <a:font script="Geor" typeface="Sylfaen"/>
-        <a:font script="Armn" typeface="Arial"/>
-        <a:font script="Bugi" typeface="Leelawadee UI"/>
-        <a:font script="Bopo" typeface="Microsoft JhengHei"/>
-        <a:font script="Java" typeface="Javanese Text"/>
-        <a:font script="Lisu" typeface="Segoe UI"/>
-        <a:font script="Mymr" typeface="Myanmar Text"/>
-        <a:font script="Nkoo" typeface="Ebrima"/>
-        <a:font script="Olck" typeface="Nirmala UI"/>
-        <a:font script="Osma" typeface="Ebrima"/>
-        <a:font script="Phag" typeface="Phagspa"/>
-        <a:font script="Syrn" typeface="Estrangelo Edessa"/>
-        <a:font script="Syrj" typeface="Estrangelo Edessa"/>
-        <a:font script="Syre" typeface="Estrangelo Edessa"/>
-        <a:font script="Sora" typeface="Nirmala UI"/>
-        <a:font script="Tale" typeface="Microsoft Tai Le"/>
-        <a:font script="Talu" typeface="Microsoft New Tai Lue"/>
-        <a:font script="Tfng" typeface="Ebrima"/>
       </a:minorFont>
     </a:fontScheme>
     <a:fmtScheme name="Office">
@@ -11155,17 +12631,16 @@
       </a:style>
     </a:lnDef>
   </a:objectDefaults>
-  <a:extraClrSchemeLst/>
   <a:extLst>
     <a:ext uri="{05A4C25C-085E-4340-85A3-A5531E510DB2}">
-      <thm15:themeFamily xmlns:thm15="http://schemas.microsoft.com/office/thememl/2012/main" name="Office Theme" id="{2E142A2C-CD16-42D6-873A-C26D2A0506FA}" vid="{1BDDFF52-6CD6-40A5-AB3C-68EB2F1E4D0A}"/>
+      <thm15:themeFamily xmlns:thm15="http://schemas.microsoft.com/office/thememl/2012/main" name="Office Theme" id="{62F939B6-93AF-4DB8-9C6B-D6C7DFDC589F}" vid="{4A3C46E8-61CC-4603-A589-7422A47A8E4A}"/>
     </a:ext>
   </a:extLst>
 </a:theme>
 </file>
 
 <file path=ppt/theme/theme2.xml><?xml version="1.0" encoding="utf-8"?>
-<a:theme xmlns:a="http://schemas.openxmlformats.org/drawingml/2006/main" name="Office 主题​​">
+<a:theme xmlns:a="http://schemas.openxmlformats.org/drawingml/2006/main" name="1_Office Theme">
   <a:themeElements>
     <a:clrScheme name="Office">
       <a:dk1>
@@ -11207,7 +12682,7 @@
     </a:clrScheme>
     <a:fontScheme name="Office">
       <a:majorFont>
-        <a:latin typeface="等线 Light" panose="02110004020202020204"/>
+        <a:latin typeface="等线 Light"/>
         <a:ea typeface=""/>
         <a:cs typeface=""/>
         <a:font script="Jpan" typeface="游ゴシック Light"/>
@@ -11240,26 +12715,9 @@
         <a:font script="Viet" typeface="Times New Roman"/>
         <a:font script="Uigh" typeface="Microsoft Uighur"/>
         <a:font script="Geor" typeface="Sylfaen"/>
-        <a:font script="Armn" typeface="Arial"/>
-        <a:font script="Bugi" typeface="Leelawadee UI"/>
-        <a:font script="Bopo" typeface="Microsoft JhengHei"/>
-        <a:font script="Java" typeface="Javanese Text"/>
-        <a:font script="Lisu" typeface="Segoe UI"/>
-        <a:font script="Mymr" typeface="Myanmar Text"/>
-        <a:font script="Nkoo" typeface="Ebrima"/>
-        <a:font script="Olck" typeface="Nirmala UI"/>
-        <a:font script="Osma" typeface="Ebrima"/>
-        <a:font script="Phag" typeface="Phagspa"/>
-        <a:font script="Syrn" typeface="Estrangelo Edessa"/>
-        <a:font script="Syrj" typeface="Estrangelo Edessa"/>
-        <a:font script="Syre" typeface="Estrangelo Edessa"/>
-        <a:font script="Sora" typeface="Nirmala UI"/>
-        <a:font script="Tale" typeface="Microsoft Tai Le"/>
-        <a:font script="Talu" typeface="Microsoft New Tai Lue"/>
-        <a:font script="Tfng" typeface="Ebrima"/>
       </a:majorFont>
       <a:minorFont>
-        <a:latin typeface="等线" panose="02110004020202020204"/>
+        <a:latin typeface="等线"/>
         <a:ea typeface=""/>
         <a:cs typeface=""/>
         <a:font script="Jpan" typeface="游ゴシック"/>
@@ -11292,23 +12750,6 @@
         <a:font script="Viet" typeface="Arial"/>
         <a:font script="Uigh" typeface="Microsoft Uighur"/>
         <a:font script="Geor" typeface="Sylfaen"/>
-        <a:font script="Armn" typeface="Arial"/>
-        <a:font script="Bugi" typeface="Leelawadee UI"/>
-        <a:font script="Bopo" typeface="Microsoft JhengHei"/>
-        <a:font script="Java" typeface="Javanese Text"/>
-        <a:font script="Lisu" typeface="Segoe UI"/>
-        <a:font script="Mymr" typeface="Myanmar Text"/>
-        <a:font script="Nkoo" typeface="Ebrima"/>
-        <a:font script="Olck" typeface="Nirmala UI"/>
-        <a:font script="Osma" typeface="Ebrima"/>
-        <a:font script="Phag" typeface="Phagspa"/>
-        <a:font script="Syrn" typeface="Estrangelo Edessa"/>
-        <a:font script="Syrj" typeface="Estrangelo Edessa"/>
-        <a:font script="Syre" typeface="Estrangelo Edessa"/>
-        <a:font script="Sora" typeface="Nirmala UI"/>
-        <a:font script="Tale" typeface="Microsoft Tai Le"/>
-        <a:font script="Talu" typeface="Microsoft New Tai Lue"/>
-        <a:font script="Tfng" typeface="Ebrima"/>
       </a:minorFont>
     </a:fontScheme>
     <a:fmtScheme name="Office">
@@ -11470,10 +12911,289 @@
       </a:style>
     </a:lnDef>
   </a:objectDefaults>
-  <a:extraClrSchemeLst/>
   <a:extLst>
     <a:ext uri="{05A4C25C-085E-4340-85A3-A5531E510DB2}">
-      <thm15:themeFamily xmlns:thm15="http://schemas.microsoft.com/office/thememl/2012/main" name="Office Theme" id="{2E142A2C-CD16-42D6-873A-C26D2A0506FA}" vid="{1BDDFF52-6CD6-40A5-AB3C-68EB2F1E4D0A}"/>
+      <thm15:themeFamily xmlns:thm15="http://schemas.microsoft.com/office/thememl/2012/main" name="Office Theme" id="{62F939B6-93AF-4DB8-9C6B-D6C7DFDC589F}" vid="{4A3C46E8-61CC-4603-A589-7422A47A8E4A}"/>
+    </a:ext>
+  </a:extLst>
+</a:theme>
+</file>
+
+<file path=ppt/theme/theme3.xml><?xml version="1.0" encoding="utf-8"?>
+<a:theme xmlns:a="http://schemas.openxmlformats.org/drawingml/2006/main" name="Office 主题​​">
+  <a:themeElements>
+    <a:clrScheme name="Office">
+      <a:dk1>
+        <a:sysClr val="windowText" lastClr="000000"/>
+      </a:dk1>
+      <a:lt1>
+        <a:sysClr val="window" lastClr="FFFFFF"/>
+      </a:lt1>
+      <a:dk2>
+        <a:srgbClr val="0E2841"/>
+      </a:dk2>
+      <a:lt2>
+        <a:srgbClr val="E8E8E8"/>
+      </a:lt2>
+      <a:accent1>
+        <a:srgbClr val="156082"/>
+      </a:accent1>
+      <a:accent2>
+        <a:srgbClr val="E97132"/>
+      </a:accent2>
+      <a:accent3>
+        <a:srgbClr val="196B24"/>
+      </a:accent3>
+      <a:accent4>
+        <a:srgbClr val="0F9ED5"/>
+      </a:accent4>
+      <a:accent5>
+        <a:srgbClr val="A02B93"/>
+      </a:accent5>
+      <a:accent6>
+        <a:srgbClr val="4EA72E"/>
+      </a:accent6>
+      <a:hlink>
+        <a:srgbClr val="467886"/>
+      </a:hlink>
+      <a:folHlink>
+        <a:srgbClr val="96607D"/>
+      </a:folHlink>
+    </a:clrScheme>
+    <a:fontScheme name="Office">
+      <a:majorFont>
+        <a:latin typeface="等线 Light"/>
+        <a:ea typeface=""/>
+        <a:cs typeface=""/>
+        <a:font script="Jpan" typeface="游ゴシック Light"/>
+        <a:font script="Hang" typeface="맑은 고딕"/>
+        <a:font script="Hans" typeface="等线 Light"/>
+        <a:font script="Hant" typeface="新細明體"/>
+        <a:font script="Arab" typeface="Times New Roman"/>
+        <a:font script="Hebr" typeface="Times New Roman"/>
+        <a:font script="Thai" typeface="Angsana New"/>
+        <a:font script="Ethi" typeface="Nyala"/>
+        <a:font script="Beng" typeface="Vrinda"/>
+        <a:font script="Gujr" typeface="Shruti"/>
+        <a:font script="Khmr" typeface="MoolBoran"/>
+        <a:font script="Knda" typeface="Tunga"/>
+        <a:font script="Guru" typeface="Raavi"/>
+        <a:font script="Cans" typeface="Euphemia"/>
+        <a:font script="Cher" typeface="Plantagenet Cherokee"/>
+        <a:font script="Yiii" typeface="Microsoft Yi Baiti"/>
+        <a:font script="Tibt" typeface="Microsoft Himalaya"/>
+        <a:font script="Thaa" typeface="MV Boli"/>
+        <a:font script="Deva" typeface="Mangal"/>
+        <a:font script="Telu" typeface="Gautami"/>
+        <a:font script="Taml" typeface="Latha"/>
+        <a:font script="Syrc" typeface="Estrangelo Edessa"/>
+        <a:font script="Orya" typeface="Kalinga"/>
+        <a:font script="Mlym" typeface="Kartika"/>
+        <a:font script="Laoo" typeface="DokChampa"/>
+        <a:font script="Sinh" typeface="Iskoola Pota"/>
+        <a:font script="Mong" typeface="Mongolian Baiti"/>
+        <a:font script="Viet" typeface="Times New Roman"/>
+        <a:font script="Uigh" typeface="Microsoft Uighur"/>
+        <a:font script="Geor" typeface="Sylfaen"/>
+      </a:majorFont>
+      <a:minorFont>
+        <a:latin typeface="等线"/>
+        <a:ea typeface=""/>
+        <a:cs typeface=""/>
+        <a:font script="Jpan" typeface="游ゴシック"/>
+        <a:font script="Hang" typeface="맑은 고딕"/>
+        <a:font script="Hans" typeface="等线"/>
+        <a:font script="Hant" typeface="新細明體"/>
+        <a:font script="Arab" typeface="Arial"/>
+        <a:font script="Hebr" typeface="Arial"/>
+        <a:font script="Thai" typeface="Cordia New"/>
+        <a:font script="Ethi" typeface="Nyala"/>
+        <a:font script="Beng" typeface="Vrinda"/>
+        <a:font script="Gujr" typeface="Shruti"/>
+        <a:font script="Khmr" typeface="DaunPenh"/>
+        <a:font script="Knda" typeface="Tunga"/>
+        <a:font script="Guru" typeface="Raavi"/>
+        <a:font script="Cans" typeface="Euphemia"/>
+        <a:font script="Cher" typeface="Plantagenet Cherokee"/>
+        <a:font script="Yiii" typeface="Microsoft Yi Baiti"/>
+        <a:font script="Tibt" typeface="Microsoft Himalaya"/>
+        <a:font script="Thaa" typeface="MV Boli"/>
+        <a:font script="Deva" typeface="Mangal"/>
+        <a:font script="Telu" typeface="Gautami"/>
+        <a:font script="Taml" typeface="Latha"/>
+        <a:font script="Syrc" typeface="Estrangelo Edessa"/>
+        <a:font script="Orya" typeface="Kalinga"/>
+        <a:font script="Mlym" typeface="Kartika"/>
+        <a:font script="Laoo" typeface="DokChampa"/>
+        <a:font script="Sinh" typeface="Iskoola Pota"/>
+        <a:font script="Mong" typeface="Mongolian Baiti"/>
+        <a:font script="Viet" typeface="Arial"/>
+        <a:font script="Uigh" typeface="Microsoft Uighur"/>
+        <a:font script="Geor" typeface="Sylfaen"/>
+      </a:minorFont>
+    </a:fontScheme>
+    <a:fmtScheme name="Office">
+      <a:fillStyleLst>
+        <a:solidFill>
+          <a:schemeClr val="phClr"/>
+        </a:solidFill>
+        <a:gradFill rotWithShape="1">
+          <a:gsLst>
+            <a:gs pos="0">
+              <a:schemeClr val="phClr">
+                <a:lumMod val="110000"/>
+                <a:satMod val="105000"/>
+                <a:tint val="67000"/>
+              </a:schemeClr>
+            </a:gs>
+            <a:gs pos="50000">
+              <a:schemeClr val="phClr">
+                <a:lumMod val="105000"/>
+                <a:satMod val="103000"/>
+                <a:tint val="73000"/>
+              </a:schemeClr>
+            </a:gs>
+            <a:gs pos="100000">
+              <a:schemeClr val="phClr">
+                <a:lumMod val="105000"/>
+                <a:satMod val="109000"/>
+                <a:tint val="81000"/>
+              </a:schemeClr>
+            </a:gs>
+          </a:gsLst>
+          <a:lin ang="5400000" scaled="0"/>
+        </a:gradFill>
+        <a:gradFill rotWithShape="1">
+          <a:gsLst>
+            <a:gs pos="0">
+              <a:schemeClr val="phClr">
+                <a:satMod val="103000"/>
+                <a:lumMod val="102000"/>
+                <a:tint val="94000"/>
+              </a:schemeClr>
+            </a:gs>
+            <a:gs pos="50000">
+              <a:schemeClr val="phClr">
+                <a:satMod val="110000"/>
+                <a:lumMod val="100000"/>
+                <a:shade val="100000"/>
+              </a:schemeClr>
+            </a:gs>
+            <a:gs pos="100000">
+              <a:schemeClr val="phClr">
+                <a:lumMod val="99000"/>
+                <a:satMod val="120000"/>
+                <a:shade val="78000"/>
+              </a:schemeClr>
+            </a:gs>
+          </a:gsLst>
+          <a:lin ang="5400000" scaled="0"/>
+        </a:gradFill>
+      </a:fillStyleLst>
+      <a:lnStyleLst>
+        <a:ln w="12700" cap="flat" cmpd="sng" algn="ctr">
+          <a:solidFill>
+            <a:schemeClr val="phClr"/>
+          </a:solidFill>
+          <a:prstDash val="solid"/>
+          <a:miter lim="800000"/>
+        </a:ln>
+        <a:ln w="19050" cap="flat" cmpd="sng" algn="ctr">
+          <a:solidFill>
+            <a:schemeClr val="phClr"/>
+          </a:solidFill>
+          <a:prstDash val="solid"/>
+          <a:miter lim="800000"/>
+        </a:ln>
+        <a:ln w="25400" cap="flat" cmpd="sng" algn="ctr">
+          <a:solidFill>
+            <a:schemeClr val="phClr"/>
+          </a:solidFill>
+          <a:prstDash val="solid"/>
+          <a:miter lim="800000"/>
+        </a:ln>
+      </a:lnStyleLst>
+      <a:effectStyleLst>
+        <a:effectStyle>
+          <a:effectLst/>
+        </a:effectStyle>
+        <a:effectStyle>
+          <a:effectLst/>
+        </a:effectStyle>
+        <a:effectStyle>
+          <a:effectLst>
+            <a:outerShdw blurRad="57150" dist="19050" dir="5400000" algn="ctr" rotWithShape="0">
+              <a:srgbClr val="000000">
+                <a:alpha val="63000"/>
+              </a:srgbClr>
+            </a:outerShdw>
+          </a:effectLst>
+        </a:effectStyle>
+      </a:effectStyleLst>
+      <a:bgFillStyleLst>
+        <a:solidFill>
+          <a:schemeClr val="phClr"/>
+        </a:solidFill>
+        <a:solidFill>
+          <a:schemeClr val="phClr">
+            <a:tint val="95000"/>
+            <a:satMod val="170000"/>
+          </a:schemeClr>
+        </a:solidFill>
+        <a:gradFill rotWithShape="1">
+          <a:gsLst>
+            <a:gs pos="0">
+              <a:schemeClr val="phClr">
+                <a:tint val="93000"/>
+                <a:satMod val="150000"/>
+                <a:shade val="98000"/>
+                <a:lumMod val="102000"/>
+              </a:schemeClr>
+            </a:gs>
+            <a:gs pos="50000">
+              <a:schemeClr val="phClr">
+                <a:tint val="98000"/>
+                <a:satMod val="130000"/>
+                <a:shade val="90000"/>
+                <a:lumMod val="103000"/>
+              </a:schemeClr>
+            </a:gs>
+            <a:gs pos="100000">
+              <a:schemeClr val="phClr">
+                <a:shade val="63000"/>
+                <a:satMod val="120000"/>
+              </a:schemeClr>
+            </a:gs>
+          </a:gsLst>
+          <a:lin ang="5400000" scaled="0"/>
+        </a:gradFill>
+      </a:bgFillStyleLst>
+    </a:fmtScheme>
+  </a:themeElements>
+  <a:objectDefaults>
+    <a:lnDef>
+      <a:spPr/>
+      <a:bodyPr/>
+      <a:lstStyle/>
+      <a:style>
+        <a:lnRef idx="2">
+          <a:schemeClr val="accent1"/>
+        </a:lnRef>
+        <a:fillRef idx="0">
+          <a:schemeClr val="accent1"/>
+        </a:fillRef>
+        <a:effectRef idx="1">
+          <a:schemeClr val="accent1"/>
+        </a:effectRef>
+        <a:fontRef idx="minor">
+          <a:schemeClr val="tx1"/>
+        </a:fontRef>
+      </a:style>
+    </a:lnDef>
+  </a:objectDefaults>
+  <a:extLst>
+    <a:ext uri="{05A4C25C-085E-4340-85A3-A5531E510DB2}">
+      <thm15:themeFamily xmlns:thm15="http://schemas.microsoft.com/office/thememl/2012/main" name="Office Theme" id="{62F939B6-93AF-4DB8-9C6B-D6C7DFDC589F}" vid="{4A3C46E8-61CC-4603-A589-7422A47A8E4A}"/>
     </a:ext>
   </a:extLst>
 </a:theme>

--- a/GroupMeeting&CourseSlide/Slide/Week4_SNN Training.pptx
+++ b/GroupMeeting&CourseSlide/Slide/Week4_SNN Training.pptx
@@ -11671,6 +11671,9 @@
                         <m:num>
                           <m:r>
                             <a:rPr lang="en-US" b="0" i="1" dirty="0">
+                              <a:solidFill>
+                                <a:schemeClr val="tx1"/>
+                              </a:solidFill>
                               <a:latin typeface="Cambria Math" panose="02040503050406030204" pitchFamily="18" charset="0"/>
                               <a:ea typeface="Cambria Math" panose="02040503050406030204" pitchFamily="18" charset="0"/>
                             </a:rPr>
@@ -11708,6 +11711,9 @@
                         <m:den>
                           <m:r>
                             <a:rPr lang="en-US" b="0" i="1" dirty="0">
+                              <a:solidFill>
+                                <a:schemeClr val="tx1"/>
+                              </a:solidFill>
                               <a:latin typeface="Cambria Math" panose="02040503050406030204" pitchFamily="18" charset="0"/>
                               <a:ea typeface="Cambria Math" panose="02040503050406030204" pitchFamily="18" charset="0"/>
                             </a:rPr>
@@ -11768,6 +11774,9 @@
                         <m:num>
                           <m:r>
                             <a:rPr lang="en-US" b="0" i="1" dirty="0">
+                              <a:solidFill>
+                                <a:srgbClr val="FF0000"/>
+                              </a:solidFill>
                               <a:latin typeface="Cambria Math" panose="02040503050406030204" pitchFamily="18" charset="0"/>
                               <a:ea typeface="Cambria Math" panose="02040503050406030204" pitchFamily="18" charset="0"/>
                             </a:rPr>
@@ -11819,6 +11828,9 @@
                         <m:den>
                           <m:r>
                             <a:rPr lang="en-US" b="0" i="1" dirty="0">
+                              <a:solidFill>
+                                <a:srgbClr val="FF0000"/>
+                              </a:solidFill>
                               <a:latin typeface="Cambria Math" panose="02040503050406030204" pitchFamily="18" charset="0"/>
                               <a:ea typeface="Cambria Math" panose="02040503050406030204" pitchFamily="18" charset="0"/>
                             </a:rPr>
